--- a/poster.pptx
+++ b/poster.pptx
@@ -17,10 +17,13 @@
     <p:embeddedFont>
       <p:font typeface="Titillium Web" panose="00000500000000000000" pitchFamily="2" charset="0"/>
       <p:regular r:id="rId4"/>
+      <p:bold r:id="rId5"/>
+      <p:italic r:id="rId6"/>
+      <p:boldItalic r:id="rId7"/>
     </p:embeddedFont>
   </p:embeddedFontLst>
   <p:custDataLst>
-    <p:tags r:id="rId5"/>
+    <p:tags r:id="rId8"/>
   </p:custDataLst>
   <p:defaultTextStyle>
     <a:defPPr>
@@ -3932,214 +3935,6 @@
       </p:sp>
       <p:sp>
         <p:nvSpPr>
-          <p:cNvPr id="2" name="Rectangle 5"/>
-          <p:cNvSpPr>
-            <a:spLocks noChangeArrowheads="1"/>
-          </p:cNvSpPr>
-          <p:nvPr/>
-        </p:nvSpPr>
-        <p:spPr bwMode="auto">
-          <a:xfrm>
-            <a:off x="731520" y="7125252"/>
-            <a:ext cx="10058400" cy="10831132"/>
-          </a:xfrm>
-          <a:prstGeom prst="roundRect">
-            <a:avLst>
-              <a:gd name="adj" fmla="val 1380"/>
-            </a:avLst>
-          </a:prstGeom>
-          <a:solidFill>
-            <a:srgbClr val="B4D3E2"/>
-          </a:solidFill>
-          <a:ln>
-            <a:noFill/>
-          </a:ln>
-          <a:effectLst/>
-        </p:spPr>
-        <p:txBody>
-          <a:bodyPr wrap="none" lIns="274320" tIns="68580" rIns="274320" bIns="68580" anchor="ctr"/>
-          <a:lstStyle>
-            <a:defPPr>
-              <a:defRPr kern="1200"/>
-            </a:defPPr>
-          </a:lstStyle>
-          <a:p>
-            <a:pPr defTabSz="4703763"/>
-            <a:endParaRPr lang="en-US" sz="3600" dirty="0">
-              <a:noFill/>
-              <a:latin typeface="Amaranth" panose="02000503050000020004" pitchFamily="2" charset="0"/>
-            </a:endParaRPr>
-          </a:p>
-        </p:txBody>
-      </p:sp>
-      <p:sp>
-        <p:nvSpPr>
-          <p:cNvPr id="2053" name="Text Box 6"/>
-          <p:cNvSpPr txBox="1">
-            <a:spLocks noChangeArrowheads="1"/>
-          </p:cNvSpPr>
-          <p:nvPr/>
-        </p:nvSpPr>
-        <p:spPr bwMode="auto">
-          <a:xfrm>
-            <a:off x="1062257" y="8265705"/>
-            <a:ext cx="9144000" cy="2723823"/>
-          </a:xfrm>
-          <a:prstGeom prst="rect">
-            <a:avLst/>
-          </a:prstGeom>
-          <a:noFill/>
-          <a:ln>
-            <a:noFill/>
-          </a:ln>
-          <a:extLst>
-            <a:ext uri="{909E8E84-426E-40DD-AFC4-6F175D3DCCD1}">
-              <a14:hiddenFill xmlns:a14="http://schemas.microsoft.com/office/drawing/2010/main">
-                <a:solidFill>
-                  <a:schemeClr val="accent1"/>
-                </a:solidFill>
-              </a14:hiddenFill>
-            </a:ext>
-            <a:ext uri="{91240B29-F687-4F45-9708-019B960494DF}">
-              <a14:hiddenLine xmlns:a14="http://schemas.microsoft.com/office/drawing/2010/main" w="9525">
-                <a:solidFill>
-                  <a:schemeClr val="tx1"/>
-                </a:solidFill>
-                <a:miter lim="800000"/>
-                <a:headEnd/>
-                <a:tailEnd/>
-              </a14:hiddenLine>
-            </a:ext>
-            <a:ext uri="{AF507438-7753-43E0-B8FC-AC1667EBCBE1}">
-              <a14:hiddenEffects xmlns:a14="http://schemas.microsoft.com/office/drawing/2010/main">
-                <a:effectLst>
-                  <a:outerShdw dist="35921" dir="2700000" algn="ctr" rotWithShape="0">
-                    <a:schemeClr val="bg2"/>
-                  </a:outerShdw>
-                </a:effectLst>
-              </a14:hiddenEffects>
-            </a:ext>
-          </a:extLst>
-        </p:spPr>
-        <p:txBody>
-          <a:bodyPr lIns="137160" tIns="68580" rIns="137160" bIns="68580">
-            <a:spAutoFit/>
-          </a:bodyPr>
-          <a:lstStyle>
-            <a:defPPr>
-              <a:defRPr kern="1200"/>
-            </a:defPPr>
-            <a:lvl1pPr defTabSz="4703763" eaLnBrk="0" hangingPunct="0">
-              <a:defRPr sz="9300">
-                <a:solidFill>
-                  <a:schemeClr val="tx1"/>
-                </a:solidFill>
-                <a:latin typeface="Arial"/>
-              </a:defRPr>
-            </a:lvl1pPr>
-            <a:lvl2pPr marL="742950" indent="-285750" defTabSz="4703763" eaLnBrk="0" hangingPunct="0">
-              <a:defRPr sz="9300">
-                <a:solidFill>
-                  <a:schemeClr val="tx1"/>
-                </a:solidFill>
-                <a:latin typeface="Arial"/>
-              </a:defRPr>
-            </a:lvl2pPr>
-            <a:lvl3pPr marL="1143000" indent="-228600" defTabSz="4703763" eaLnBrk="0" hangingPunct="0">
-              <a:defRPr sz="9300">
-                <a:solidFill>
-                  <a:schemeClr val="tx1"/>
-                </a:solidFill>
-                <a:latin typeface="Arial"/>
-              </a:defRPr>
-            </a:lvl3pPr>
-            <a:lvl4pPr marL="1600200" indent="-228600" defTabSz="4703763" eaLnBrk="0" hangingPunct="0">
-              <a:defRPr sz="9300">
-                <a:solidFill>
-                  <a:schemeClr val="tx1"/>
-                </a:solidFill>
-                <a:latin typeface="Arial"/>
-              </a:defRPr>
-            </a:lvl4pPr>
-            <a:lvl5pPr marL="2057400" indent="-228600" defTabSz="4703763" eaLnBrk="0" hangingPunct="0">
-              <a:defRPr sz="9300">
-                <a:solidFill>
-                  <a:schemeClr val="tx1"/>
-                </a:solidFill>
-                <a:latin typeface="Arial"/>
-              </a:defRPr>
-            </a:lvl5pPr>
-            <a:lvl6pPr marL="2514600" indent="-228600" defTabSz="4703763" eaLnBrk="0" fontAlgn="base" hangingPunct="0">
-              <a:spcBef>
-                <a:spcPct val="0"/>
-              </a:spcBef>
-              <a:spcAft>
-                <a:spcPct val="0"/>
-              </a:spcAft>
-              <a:defRPr sz="9300">
-                <a:solidFill>
-                  <a:schemeClr val="tx1"/>
-                </a:solidFill>
-                <a:latin typeface="Arial"/>
-              </a:defRPr>
-            </a:lvl6pPr>
-            <a:lvl7pPr marL="2971800" indent="-228600" defTabSz="4703763" eaLnBrk="0" fontAlgn="base" hangingPunct="0">
-              <a:spcBef>
-                <a:spcPct val="0"/>
-              </a:spcBef>
-              <a:spcAft>
-                <a:spcPct val="0"/>
-              </a:spcAft>
-              <a:defRPr sz="9300">
-                <a:solidFill>
-                  <a:schemeClr val="tx1"/>
-                </a:solidFill>
-                <a:latin typeface="Arial"/>
-              </a:defRPr>
-            </a:lvl7pPr>
-            <a:lvl8pPr marL="3429000" indent="-228600" defTabSz="4703763" eaLnBrk="0" fontAlgn="base" hangingPunct="0">
-              <a:spcBef>
-                <a:spcPct val="0"/>
-              </a:spcBef>
-              <a:spcAft>
-                <a:spcPct val="0"/>
-              </a:spcAft>
-              <a:defRPr sz="9300">
-                <a:solidFill>
-                  <a:schemeClr val="tx1"/>
-                </a:solidFill>
-                <a:latin typeface="Arial"/>
-              </a:defRPr>
-            </a:lvl8pPr>
-            <a:lvl9pPr marL="3886200" indent="-228600" defTabSz="4703763" eaLnBrk="0" fontAlgn="base" hangingPunct="0">
-              <a:spcBef>
-                <a:spcPct val="0"/>
-              </a:spcBef>
-              <a:spcAft>
-                <a:spcPct val="0"/>
-              </a:spcAft>
-              <a:defRPr sz="9300">
-                <a:solidFill>
-                  <a:schemeClr val="tx1"/>
-                </a:solidFill>
-                <a:latin typeface="Arial"/>
-              </a:defRPr>
-            </a:lvl9pPr>
-          </a:lstStyle>
-          <a:p>
-            <a:r>
-              <a:rPr lang="en-US" sz="2400" dirty="0">
-                <a:latin typeface="Titillium Web" panose="00000500000000000000" pitchFamily="2" charset="0"/>
-                <a:ea typeface="Open Sans" panose="020B0606030504020204" pitchFamily="34" charset="0"/>
-                <a:cs typeface="Open Sans" panose="020B0606030504020204" pitchFamily="34" charset="0"/>
-              </a:rPr>
-              <a:t>Knowledge graphs allow for relational information to be stored ____.  We build a dataset of news articles about solar energy from 38 major American publishers spanning 2000-2016, using a pre-existing set of article links from Cornell Newsroom. An LLM extraction pipeline is applied to this dataset to extract key entities and relations from these articles and build a network graph for analysis. This project highlights data extraction and cleaning methods to build </a:t>
-            </a:r>
-          </a:p>
-        </p:txBody>
-      </p:sp>
-      <p:sp>
-        <p:nvSpPr>
           <p:cNvPr id="33" name="Rectangle 29"/>
           <p:cNvSpPr>
             <a:spLocks noChangeArrowheads="1"/>
@@ -4472,7 +4267,7 @@
           <a:p>
             <a:pPr defTabSz="4703763"/>
             <a:r>
-              <a:rPr lang="en-US" sz="3600">
+              <a:rPr lang="en-US" sz="3600" dirty="0">
                 <a:solidFill>
                   <a:schemeClr val="bg1"/>
                 </a:solidFill>
@@ -4499,47 +4294,24 @@
         </p:nvSpPr>
         <p:spPr bwMode="auto">
           <a:xfrm>
-            <a:off x="11521440" y="8000232"/>
-            <a:ext cx="10058400" cy="507831"/>
+            <a:off x="731518" y="16513725"/>
+            <a:ext cx="10058400" cy="3508653"/>
           </a:xfrm>
           <a:prstGeom prst="rect">
             <a:avLst/>
           </a:prstGeom>
-          <a:noFill/>
+          <a:solidFill>
+            <a:srgbClr val="B4D3E2"/>
+          </a:solidFill>
           <a:ln>
             <a:noFill/>
           </a:ln>
-          <a:extLst>
-            <a:ext uri="{909E8E84-426E-40DD-AFC4-6F175D3DCCD1}">
-              <a14:hiddenFill xmlns:a14="http://schemas.microsoft.com/office/drawing/2010/main">
-                <a:solidFill>
-                  <a:schemeClr val="accent1"/>
-                </a:solidFill>
-              </a14:hiddenFill>
-            </a:ext>
-            <a:ext uri="{91240B29-F687-4F45-9708-019B960494DF}">
-              <a14:hiddenLine xmlns:a14="http://schemas.microsoft.com/office/drawing/2010/main" w="9525">
-                <a:solidFill>
-                  <a:schemeClr val="tx1"/>
-                </a:solidFill>
-                <a:miter lim="800000"/>
-                <a:headEnd/>
-                <a:tailEnd/>
-              </a14:hiddenLine>
-            </a:ext>
-            <a:ext uri="{AF507438-7753-43E0-B8FC-AC1667EBCBE1}">
-              <a14:hiddenEffects xmlns:a14="http://schemas.microsoft.com/office/drawing/2010/main">
-                <a:effectLst>
-                  <a:outerShdw dist="35921" dir="2700000" algn="ctr" rotWithShape="0">
-                    <a:schemeClr val="bg2"/>
-                  </a:outerShdw>
-                </a:effectLst>
-              </a14:hiddenEffects>
-            </a:ext>
-          </a:extLst>
+          <a:effectLst>
+            <a:softEdge rad="0"/>
+          </a:effectLst>
         </p:spPr>
         <p:txBody>
-          <a:bodyPr lIns="137160" tIns="68580" rIns="137160" bIns="68580">
+          <a:bodyPr lIns="274320" tIns="274320" rIns="274320" bIns="274320">
             <a:spAutoFit/>
           </a:bodyPr>
           <a:lstStyle>
@@ -4650,7 +4422,24 @@
                 <a:ea typeface="Open Sans" panose="020B0606030504020204" pitchFamily="34" charset="0"/>
                 <a:cs typeface="Open Sans" panose="020B0606030504020204" pitchFamily="34" charset="0"/>
               </a:rPr>
-              <a:t>Add your information, graphs, and images to this section.</a:t>
+              <a:t>Data Collection</a:t>
+            </a:r>
+          </a:p>
+          <a:p>
+            <a:endParaRPr lang="en-US" sz="2400" dirty="0">
+              <a:latin typeface="Titillium Web" panose="00000500000000000000" pitchFamily="2" charset="0"/>
+              <a:ea typeface="Open Sans" panose="020B0606030504020204" pitchFamily="34" charset="0"/>
+              <a:cs typeface="Open Sans" panose="020B0606030504020204" pitchFamily="34" charset="0"/>
+            </a:endParaRPr>
+          </a:p>
+          <a:p>
+            <a:r>
+              <a:rPr lang="en-US" sz="2400" dirty="0">
+                <a:latin typeface="Titillium Web" panose="00000500000000000000" pitchFamily="2" charset="0"/>
+                <a:ea typeface="Open Sans" panose="020B0606030504020204" pitchFamily="34" charset="0"/>
+                <a:cs typeface="Open Sans" panose="020B0606030504020204" pitchFamily="34" charset="0"/>
+              </a:rPr>
+              <a:t>Cornell Newsroom articles were screened for solar energy content using domain-specific keywords. Candidate keywords were identified by extracting frequent bigrams containing solar from article summaries and supplementing them with additional terms from the solar energy literature (e.g., “photovoltaic cell”). Articles containing at least one keyword were scraped for full-text analysis.</a:t>
             </a:r>
           </a:p>
         </p:txBody>
@@ -4722,93 +4511,41 @@
         </p:nvSpPr>
         <p:spPr bwMode="auto">
           <a:xfrm>
-            <a:off x="22311361" y="8000232"/>
-            <a:ext cx="10058400" cy="507831"/>
+            <a:off x="22311361" y="8196127"/>
+            <a:ext cx="10058400" cy="10525958"/>
           </a:xfrm>
           <a:prstGeom prst="rect">
             <a:avLst/>
           </a:prstGeom>
-          <a:noFill/>
+          <a:solidFill>
+            <a:srgbClr val="B4D3E2"/>
+          </a:solidFill>
           <a:ln>
             <a:noFill/>
           </a:ln>
-          <a:extLst>
-            <a:ext uri="{909E8E84-426E-40DD-AFC4-6F175D3DCCD1}">
-              <a14:hiddenFill xmlns:a14="http://schemas.microsoft.com/office/drawing/2010/main">
-                <a:solidFill>
-                  <a:schemeClr val="accent1"/>
-                </a:solidFill>
-              </a14:hiddenFill>
-            </a:ext>
-            <a:ext uri="{91240B29-F687-4F45-9708-019B960494DF}">
-              <a14:hiddenLine xmlns:a14="http://schemas.microsoft.com/office/drawing/2010/main" w="9525">
-                <a:solidFill>
-                  <a:schemeClr val="tx1"/>
-                </a:solidFill>
-                <a:miter lim="800000"/>
-                <a:headEnd/>
-                <a:tailEnd/>
-              </a14:hiddenLine>
-            </a:ext>
-            <a:ext uri="{AF507438-7753-43E0-B8FC-AC1667EBCBE1}">
-              <a14:hiddenEffects xmlns:a14="http://schemas.microsoft.com/office/drawing/2010/main">
-                <a:effectLst>
-                  <a:outerShdw dist="35921" dir="2700000" algn="ctr" rotWithShape="0">
-                    <a:schemeClr val="bg2"/>
-                  </a:outerShdw>
-                </a:effectLst>
-              </a14:hiddenEffects>
-            </a:ext>
-          </a:extLst>
+          <a:effectLst>
+            <a:softEdge rad="0"/>
+          </a:effectLst>
         </p:spPr>
         <p:txBody>
-          <a:bodyPr lIns="137160" tIns="68580" rIns="137160" bIns="68580">
+          <a:bodyPr lIns="274320" tIns="274320" rIns="274320" bIns="274320">
             <a:spAutoFit/>
           </a:bodyPr>
           <a:lstStyle>
             <a:defPPr>
-              <a:defRPr kern="1200"/>
+              <a:defRPr lang="en-US" kern="1200"/>
             </a:defPPr>
             <a:lvl1pPr defTabSz="4703763" eaLnBrk="0" hangingPunct="0">
-              <a:defRPr sz="9300">
-                <a:solidFill>
-                  <a:schemeClr val="tx1"/>
-                </a:solidFill>
-                <a:latin typeface="Arial"/>
+              <a:defRPr sz="2400">
+                <a:latin typeface="Titillium Web" panose="00000500000000000000" pitchFamily="2" charset="0"/>
+                <a:ea typeface="Open Sans" panose="020B0606030504020204" pitchFamily="34" charset="0"/>
+                <a:cs typeface="Open Sans" panose="020B0606030504020204" pitchFamily="34" charset="0"/>
               </a:defRPr>
             </a:lvl1pPr>
-            <a:lvl2pPr marL="742950" indent="-285750" defTabSz="4703763" eaLnBrk="0" hangingPunct="0">
-              <a:defRPr sz="9300">
-                <a:solidFill>
-                  <a:schemeClr val="tx1"/>
-                </a:solidFill>
-                <a:latin typeface="Arial"/>
-              </a:defRPr>
-            </a:lvl2pPr>
-            <a:lvl3pPr marL="1143000" indent="-228600" defTabSz="4703763" eaLnBrk="0" hangingPunct="0">
-              <a:defRPr sz="9300">
-                <a:solidFill>
-                  <a:schemeClr val="tx1"/>
-                </a:solidFill>
-                <a:latin typeface="Arial"/>
-              </a:defRPr>
-            </a:lvl3pPr>
-            <a:lvl4pPr marL="1600200" indent="-228600" defTabSz="4703763" eaLnBrk="0" hangingPunct="0">
-              <a:defRPr sz="9300">
-                <a:solidFill>
-                  <a:schemeClr val="tx1"/>
-                </a:solidFill>
-                <a:latin typeface="Arial"/>
-              </a:defRPr>
-            </a:lvl4pPr>
-            <a:lvl5pPr marL="2057400" indent="-228600" defTabSz="4703763" eaLnBrk="0" hangingPunct="0">
-              <a:defRPr sz="9300">
-                <a:solidFill>
-                  <a:schemeClr val="tx1"/>
-                </a:solidFill>
-                <a:latin typeface="Arial"/>
-              </a:defRPr>
-            </a:lvl5pPr>
+            <a:lvl2pPr marL="742950" indent="-285750" defTabSz="4703763" eaLnBrk="0" hangingPunct="0"/>
+            <a:lvl3pPr marL="1143000" indent="-228600" defTabSz="4703763" eaLnBrk="0" hangingPunct="0"/>
+            <a:lvl4pPr marL="1600200" indent="-228600" defTabSz="4703763" eaLnBrk="0" hangingPunct="0"/>
+            <a:lvl5pPr marL="2057400" indent="-228600" defTabSz="4703763" eaLnBrk="0" hangingPunct="0"/>
             <a:lvl6pPr marL="2514600" indent="-228600" defTabSz="4703763" eaLnBrk="0" fontAlgn="base" hangingPunct="0">
               <a:spcBef>
                 <a:spcPct val="0"/>
@@ -4816,12 +4553,6 @@
               <a:spcAft>
                 <a:spcPct val="0"/>
               </a:spcAft>
-              <a:defRPr sz="9300">
-                <a:solidFill>
-                  <a:schemeClr val="tx1"/>
-                </a:solidFill>
-                <a:latin typeface="Arial"/>
-              </a:defRPr>
             </a:lvl6pPr>
             <a:lvl7pPr marL="2971800" indent="-228600" defTabSz="4703763" eaLnBrk="0" fontAlgn="base" hangingPunct="0">
               <a:spcBef>
@@ -4830,12 +4561,6 @@
               <a:spcAft>
                 <a:spcPct val="0"/>
               </a:spcAft>
-              <a:defRPr sz="9300">
-                <a:solidFill>
-                  <a:schemeClr val="tx1"/>
-                </a:solidFill>
-                <a:latin typeface="Arial"/>
-              </a:defRPr>
             </a:lvl7pPr>
             <a:lvl8pPr marL="3429000" indent="-228600" defTabSz="4703763" eaLnBrk="0" fontAlgn="base" hangingPunct="0">
               <a:spcBef>
@@ -4844,12 +4569,6 @@
               <a:spcAft>
                 <a:spcPct val="0"/>
               </a:spcAft>
-              <a:defRPr sz="9300">
-                <a:solidFill>
-                  <a:schemeClr val="tx1"/>
-                </a:solidFill>
-                <a:latin typeface="Arial"/>
-              </a:defRPr>
             </a:lvl8pPr>
             <a:lvl9pPr marL="3886200" indent="-228600" defTabSz="4703763" eaLnBrk="0" fontAlgn="base" hangingPunct="0">
               <a:spcBef>
@@ -4858,22 +4577,146 @@
               <a:spcAft>
                 <a:spcPct val="0"/>
               </a:spcAft>
-              <a:defRPr sz="9300">
-                <a:solidFill>
-                  <a:schemeClr val="tx1"/>
-                </a:solidFill>
-                <a:latin typeface="Arial"/>
-              </a:defRPr>
             </a:lvl9pPr>
           </a:lstStyle>
           <a:p>
-            <a:r>
-              <a:rPr lang="en-US" sz="2400">
+            <a:pPr marL="342900" indent="-342900">
+              <a:buFont typeface="Arial" panose="020B0604020202020204" pitchFamily="34" charset="0"/>
+              <a:buChar char="•"/>
+            </a:pPr>
+            <a:r>
+              <a:rPr lang="en-US" dirty="0"/>
+              <a:t>The filtering pipeline reduced the original dataset from 5,374 to 1,985 highly relevant solar energy articles, improving extraction quality while reducing computational cost.</a:t>
+            </a:r>
+          </a:p>
+          <a:p>
+            <a:pPr marL="342900" indent="-342900">
+              <a:buFont typeface="Arial" panose="020B0604020202020204" pitchFamily="34" charset="0"/>
+              <a:buChar char="•"/>
+            </a:pPr>
+            <a:r>
+              <a:rPr lang="en-US" dirty="0"/>
+              <a:t>The LLM successfully transformed unstructured news articles into a structured knowledge graph containing entities and their relationships across technologies, organizations, policies, countries, and research initiatives.</a:t>
+            </a:r>
+          </a:p>
+          <a:p>
+            <a:pPr marL="342900" indent="-342900">
+              <a:buFont typeface="Arial" panose="020B0604020202020204" pitchFamily="34" charset="0"/>
+              <a:buChar char="•"/>
+            </a:pPr>
+            <a:r>
+              <a:rPr lang="en-US" dirty="0"/>
+              <a:t>Initial graphs were highly connected and noisy. Graph cleaning and entity deduplication produced a more interpretable network that highlighted the most influential entities and relationships.</a:t>
+            </a:r>
+          </a:p>
+          <a:p>
+            <a:pPr marL="342900" indent="-342900">
+              <a:buFont typeface="Arial" panose="020B0604020202020204" pitchFamily="34" charset="0"/>
+              <a:buChar char="•"/>
+            </a:pPr>
+            <a:r>
+              <a:rPr lang="en-US" dirty="0"/>
+              <a:t>Community detection revealed that clusters formed primarily around geographic regions and areas of focus, including technology development, policy, manufacturing, and international collaborations.</a:t>
+            </a:r>
+          </a:p>
+          <a:p>
+            <a:pPr marL="342900" indent="-342900">
+              <a:buFont typeface="Arial" panose="020B0604020202020204" pitchFamily="34" charset="0"/>
+              <a:buChar char="•"/>
+            </a:pPr>
+            <a:r>
+              <a:rPr lang="en-US" dirty="0"/>
+              <a:t>The community graph showed that most communities were not directly connected. Instead, information flowed through a small number of highly central communities that linked otherwise separate regions of the network.</a:t>
+            </a:r>
+          </a:p>
+          <a:p>
+            <a:pPr marL="342900" indent="-342900">
+              <a:buFont typeface="Arial" panose="020B0604020202020204" pitchFamily="34" charset="0"/>
+              <a:buChar char="•"/>
+            </a:pPr>
+            <a:r>
+              <a:rPr lang="en-US" dirty="0"/>
+              <a:t>Prominent communities represented:</a:t>
+            </a:r>
+          </a:p>
+          <a:p>
+            <a:pPr marL="1085850" lvl="1" indent="-342900">
+              <a:buFont typeface="Arial" panose="020B0604020202020204" pitchFamily="34" charset="0"/>
+              <a:buChar char="•"/>
+            </a:pPr>
+            <a:r>
+              <a:rPr lang="en-US" sz="2400" dirty="0">
                 <a:latin typeface="Titillium Web" panose="00000500000000000000" pitchFamily="2" charset="0"/>
                 <a:ea typeface="Open Sans" panose="020B0606030504020204" pitchFamily="34" charset="0"/>
                 <a:cs typeface="Open Sans" panose="020B0606030504020204" pitchFamily="34" charset="0"/>
               </a:rPr>
-              <a:t>Add your information, graphs, and images to this section.</a:t>
+              <a:t>American residential solar markets</a:t>
+            </a:r>
+          </a:p>
+          <a:p>
+            <a:pPr marL="1085850" lvl="1" indent="-342900">
+              <a:buFont typeface="Arial" panose="020B0604020202020204" pitchFamily="34" charset="0"/>
+              <a:buChar char="•"/>
+            </a:pPr>
+            <a:r>
+              <a:rPr lang="en-US" sz="2400" dirty="0">
+                <a:latin typeface="Titillium Web" panose="00000500000000000000" pitchFamily="2" charset="0"/>
+                <a:ea typeface="Open Sans" panose="020B0606030504020204" pitchFamily="34" charset="0"/>
+                <a:cs typeface="Open Sans" panose="020B0606030504020204" pitchFamily="34" charset="0"/>
+              </a:rPr>
+              <a:t>U.S.–China manufacturing and trade</a:t>
+            </a:r>
+          </a:p>
+          <a:p>
+            <a:pPr marL="1085850" lvl="1" indent="-342900">
+              <a:buFont typeface="Arial" panose="020B0604020202020204" pitchFamily="34" charset="0"/>
+              <a:buChar char="•"/>
+            </a:pPr>
+            <a:r>
+              <a:rPr lang="en-US" sz="2400" dirty="0">
+                <a:latin typeface="Titillium Web" panose="00000500000000000000" pitchFamily="2" charset="0"/>
+                <a:ea typeface="Open Sans" panose="020B0606030504020204" pitchFamily="34" charset="0"/>
+                <a:cs typeface="Open Sans" panose="020B0606030504020204" pitchFamily="34" charset="0"/>
+              </a:rPr>
+              <a:t>U.S. solar policy</a:t>
+            </a:r>
+          </a:p>
+          <a:p>
+            <a:pPr marL="1085850" lvl="1" indent="-342900">
+              <a:buFont typeface="Arial" panose="020B0604020202020204" pitchFamily="34" charset="0"/>
+              <a:buChar char="•"/>
+            </a:pPr>
+            <a:r>
+              <a:rPr lang="en-US" sz="2400" dirty="0">
+                <a:latin typeface="Titillium Web" panose="00000500000000000000" pitchFamily="2" charset="0"/>
+                <a:ea typeface="Open Sans" panose="020B0606030504020204" pitchFamily="34" charset="0"/>
+                <a:cs typeface="Open Sans" panose="020B0606030504020204" pitchFamily="34" charset="0"/>
+              </a:rPr>
+              <a:t>International solar technologies and cross-border projects</a:t>
+            </a:r>
+          </a:p>
+          <a:p>
+            <a:pPr marL="1085850" lvl="1" indent="-342900">
+              <a:buFont typeface="Arial" panose="020B0604020202020204" pitchFamily="34" charset="0"/>
+              <a:buChar char="•"/>
+            </a:pPr>
+            <a:r>
+              <a:rPr lang="en-US" sz="2400" dirty="0">
+                <a:latin typeface="Titillium Web" panose="00000500000000000000" pitchFamily="2" charset="0"/>
+                <a:ea typeface="Open Sans" panose="020B0606030504020204" pitchFamily="34" charset="0"/>
+                <a:cs typeface="Open Sans" panose="020B0606030504020204" pitchFamily="34" charset="0"/>
+              </a:rPr>
+              <a:t>International organizations promoting solar energy</a:t>
+            </a:r>
+          </a:p>
+          <a:p>
+            <a:pPr marL="342900" indent="-342900">
+              <a:buFont typeface="Arial" panose="020B0604020202020204" pitchFamily="34" charset="0"/>
+              <a:buChar char="•"/>
+            </a:pPr>
+            <a:r>
+              <a:rPr lang="en-US" dirty="0"/>
+              <a:t>These results demonstrate that LLM-based information extraction combined with network analysis can efficiently convert large collections of news articles into interpretable knowledge graphs for studying global solar energy ecosystems.</a:t>
             </a:r>
           </a:p>
         </p:txBody>
@@ -4918,13 +4761,13 @@
           <a:p>
             <a:pPr defTabSz="4703763"/>
             <a:r>
-              <a:rPr lang="en-US" sz="3600">
+              <a:rPr lang="en-US" sz="3600" dirty="0">
                 <a:solidFill>
                   <a:schemeClr val="bg1"/>
                 </a:solidFill>
                 <a:latin typeface="Amaranth" panose="02000503050000020004" pitchFamily="2" charset="0"/>
               </a:rPr>
-              <a:t>Conclusion</a:t>
+              <a:t>Future Work</a:t>
             </a:r>
           </a:p>
         </p:txBody>
@@ -4945,7 +4788,7 @@
         </p:nvSpPr>
         <p:spPr bwMode="auto">
           <a:xfrm>
-            <a:off x="33101279" y="25056336"/>
+            <a:off x="33097620" y="27077111"/>
             <a:ext cx="10058400" cy="784225"/>
           </a:xfrm>
           <a:prstGeom prst="rect">
@@ -4996,7 +4839,7 @@
         </p:nvSpPr>
         <p:spPr bwMode="auto">
           <a:xfrm>
-            <a:off x="731520" y="18666575"/>
+            <a:off x="731521" y="7125059"/>
             <a:ext cx="10058400" cy="784225"/>
           </a:xfrm>
           <a:prstGeom prst="rect">
@@ -5020,7 +4863,7 @@
           <a:p>
             <a:pPr defTabSz="4703763"/>
             <a:r>
-              <a:rPr lang="en-US" sz="3600">
+              <a:rPr lang="en-US" sz="3600" dirty="0">
                 <a:solidFill>
                   <a:schemeClr val="bg1"/>
                 </a:solidFill>
@@ -5047,8 +4890,8 @@
         </p:nvSpPr>
         <p:spPr bwMode="auto">
           <a:xfrm>
-            <a:off x="731520" y="19541556"/>
-            <a:ext cx="10058400" cy="507831"/>
+            <a:off x="731521" y="8000040"/>
+            <a:ext cx="10058400" cy="923330"/>
           </a:xfrm>
           <a:prstGeom prst="rect">
             <a:avLst/>
@@ -5087,7 +4930,7 @@
           </a:extLst>
         </p:spPr>
         <p:txBody>
-          <a:bodyPr lIns="137160" tIns="68580" rIns="137160" bIns="68580">
+          <a:bodyPr lIns="274320" tIns="274320" rIns="274320" bIns="274320">
             <a:spAutoFit/>
           </a:bodyPr>
           <a:lstStyle>
@@ -5194,98 +5037,6 @@
           <a:p>
             <a:r>
               <a:rPr lang="en-US" sz="2400" dirty="0">
-                <a:latin typeface="Titillium Web" panose="00000500000000000000" pitchFamily="2" charset="0"/>
-                <a:ea typeface="Open Sans" panose="020B0606030504020204" pitchFamily="34" charset="0"/>
-                <a:cs typeface="Open Sans" panose="020B0606030504020204" pitchFamily="34" charset="0"/>
-              </a:rPr>
-              <a:t>Add your information, graphs, and images to this section.</a:t>
-            </a:r>
-          </a:p>
-        </p:txBody>
-      </p:sp>
-      <p:sp>
-        <p:nvSpPr>
-          <p:cNvPr id="18" name="Rectangle 5">
-            <a:extLst>
-              <a:ext uri="{FF2B5EF4-FFF2-40B4-BE49-F238E27FC236}">
-                <a16:creationId xmlns:a16="http://schemas.microsoft.com/office/drawing/2014/main" id="{88133C58-052D-4585-823B-31740DB45AF4}"/>
-              </a:ext>
-            </a:extLst>
-          </p:cNvPr>
-          <p:cNvSpPr>
-            <a:spLocks noChangeArrowheads="1"/>
-          </p:cNvSpPr>
-          <p:nvPr/>
-        </p:nvSpPr>
-        <p:spPr bwMode="auto">
-          <a:xfrm>
-            <a:off x="1062257" y="7479216"/>
-            <a:ext cx="9144000" cy="784225"/>
-          </a:xfrm>
-          <a:prstGeom prst="rect">
-            <a:avLst/>
-          </a:prstGeom>
-          <a:noFill/>
-          <a:ln>
-            <a:noFill/>
-          </a:ln>
-          <a:effectLst/>
-        </p:spPr>
-        <p:txBody>
-          <a:bodyPr wrap="none" lIns="137160" tIns="68580" rIns="137160" bIns="68580" anchor="ctr"/>
-          <a:lstStyle>
-            <a:defPPr>
-              <a:defRPr kern="1200"/>
-            </a:defPPr>
-          </a:lstStyle>
-          <a:p>
-            <a:pPr defTabSz="4703763"/>
-            <a:r>
-              <a:rPr lang="en-US" sz="3600">
-                <a:solidFill>
-                  <a:srgbClr val="235078"/>
-                </a:solidFill>
-                <a:latin typeface="Amaranth" panose="02000503050000020004" pitchFamily="2" charset="0"/>
-              </a:rPr>
-              <a:t>Abstract</a:t>
-            </a:r>
-          </a:p>
-        </p:txBody>
-      </p:sp>
-      <p:sp>
-        <p:nvSpPr>
-          <p:cNvPr id="230" name="TextBox 229">
-            <a:extLst>
-              <a:ext uri="{FF2B5EF4-FFF2-40B4-BE49-F238E27FC236}">
-                <a16:creationId xmlns:a16="http://schemas.microsoft.com/office/drawing/2014/main" id="{AD2E301E-E7B3-4BB5-B48D-F76D6F65BBE3}"/>
-              </a:ext>
-            </a:extLst>
-          </p:cNvPr>
-          <p:cNvSpPr txBox="1"/>
-          <p:nvPr/>
-        </p:nvSpPr>
-        <p:spPr>
-          <a:xfrm>
-            <a:off x="33157855" y="8073317"/>
-            <a:ext cx="9857035" cy="461665"/>
-          </a:xfrm>
-          <a:prstGeom prst="rect">
-            <a:avLst/>
-          </a:prstGeom>
-          <a:noFill/>
-        </p:spPr>
-        <p:txBody>
-          <a:bodyPr wrap="square" rtlCol="0">
-            <a:spAutoFit/>
-          </a:bodyPr>
-          <a:lstStyle>
-            <a:defPPr>
-              <a:defRPr kern="1200"/>
-            </a:defPPr>
-          </a:lstStyle>
-          <a:p>
-            <a:r>
-              <a:rPr lang="en-US" sz="2400">
                 <a:latin typeface="Titillium Web" panose="00000500000000000000" pitchFamily="2" charset="0"/>
                 <a:ea typeface="Open Sans" panose="020B0606030504020204" pitchFamily="34" charset="0"/>
                 <a:cs typeface="Open Sans" panose="020B0606030504020204" pitchFamily="34" charset="0"/>
@@ -5309,8 +5060,8 @@
         </p:nvSpPr>
         <p:spPr>
           <a:xfrm>
-            <a:off x="33101279" y="26096643"/>
-            <a:ext cx="9857035" cy="461665"/>
+            <a:off x="33097620" y="28117418"/>
+            <a:ext cx="9857035" cy="1661993"/>
           </a:xfrm>
           <a:prstGeom prst="rect">
             <a:avLst/>
@@ -5318,7 +5069,7 @@
           <a:noFill/>
         </p:spPr>
         <p:txBody>
-          <a:bodyPr wrap="square" rtlCol="0">
+          <a:bodyPr wrap="square" lIns="274320" tIns="274320" rIns="274320" bIns="274320" rtlCol="0">
             <a:spAutoFit/>
           </a:bodyPr>
           <a:lstStyle>
@@ -5328,16 +5079,2650 @@
           </a:lstStyle>
           <a:p>
             <a:r>
-              <a:rPr lang="en-US" sz="2400">
+              <a:rPr lang="en-US" sz="2400" dirty="0">
                 <a:latin typeface="Titillium Web" panose="00000500000000000000" pitchFamily="2" charset="0"/>
                 <a:ea typeface="Open Sans" panose="020B0606030504020204" pitchFamily="34" charset="0"/>
                 <a:cs typeface="Open Sans" panose="020B0606030504020204" pitchFamily="34" charset="0"/>
               </a:rPr>
-              <a:t>Add your information, graphs, and images to this section.</a:t>
+              <a:t>Special thanks to Prof. Chris Dunham for his support throughout the project. Additional credit to the Cornell Newsroom project for providing access to the underlying dataset.</a:t>
             </a:r>
           </a:p>
         </p:txBody>
       </p:sp>
+      <p:pic>
+        <p:nvPicPr>
+          <p:cNvPr id="4" name="Picture 3">
+            <a:extLst>
+              <a:ext uri="{FF2B5EF4-FFF2-40B4-BE49-F238E27FC236}">
+                <a16:creationId xmlns:a16="http://schemas.microsoft.com/office/drawing/2014/main" id="{68CF27D8-B844-AC83-86F1-AF9AA231413E}"/>
+              </a:ext>
+            </a:extLst>
+          </p:cNvPr>
+          <p:cNvPicPr>
+            <a:picLocks noChangeAspect="1"/>
+          </p:cNvPicPr>
+          <p:nvPr/>
+        </p:nvPicPr>
+        <p:blipFill>
+          <a:blip r:embed="rId2"/>
+          <a:srcRect l="6513" t="8096" r="5492" b="6232"/>
+          <a:stretch>
+            <a:fillRect/>
+          </a:stretch>
+        </p:blipFill>
+        <p:spPr>
+          <a:xfrm>
+            <a:off x="12454312" y="11846448"/>
+            <a:ext cx="8192656" cy="7976335"/>
+          </a:xfrm>
+          <a:prstGeom prst="rect">
+            <a:avLst/>
+          </a:prstGeom>
+        </p:spPr>
+      </p:pic>
+      <p:sp>
+        <p:nvSpPr>
+          <p:cNvPr id="12" name="Rectangle 5">
+            <a:extLst>
+              <a:ext uri="{FF2B5EF4-FFF2-40B4-BE49-F238E27FC236}">
+                <a16:creationId xmlns:a16="http://schemas.microsoft.com/office/drawing/2014/main" id="{114A7476-6864-8128-A04C-407D201C8BD4}"/>
+              </a:ext>
+            </a:extLst>
+          </p:cNvPr>
+          <p:cNvSpPr>
+            <a:spLocks noChangeArrowheads="1"/>
+          </p:cNvSpPr>
+          <p:nvPr/>
+        </p:nvSpPr>
+        <p:spPr bwMode="auto">
+          <a:xfrm>
+            <a:off x="33097620" y="21396168"/>
+            <a:ext cx="10058400" cy="784225"/>
+          </a:xfrm>
+          <a:prstGeom prst="rect">
+            <a:avLst/>
+          </a:prstGeom>
+          <a:solidFill>
+            <a:srgbClr val="1482A5"/>
+          </a:solidFill>
+          <a:ln>
+            <a:noFill/>
+          </a:ln>
+          <a:effectLst/>
+        </p:spPr>
+        <p:txBody>
+          <a:bodyPr wrap="none" lIns="274320" tIns="68580" rIns="274320" bIns="68580" anchor="ctr"/>
+          <a:lstStyle>
+            <a:defPPr>
+              <a:defRPr kern="1200"/>
+            </a:defPPr>
+          </a:lstStyle>
+          <a:p>
+            <a:pPr defTabSz="4703763"/>
+            <a:r>
+              <a:rPr lang="en-US" sz="3600" dirty="0">
+                <a:solidFill>
+                  <a:schemeClr val="bg1"/>
+                </a:solidFill>
+                <a:latin typeface="Amaranth" panose="02000503050000020004" pitchFamily="2" charset="0"/>
+              </a:rPr>
+              <a:t>Resources and Contact Information</a:t>
+            </a:r>
+          </a:p>
+        </p:txBody>
+      </p:sp>
+      <p:sp>
+        <p:nvSpPr>
+          <p:cNvPr id="13" name="Rectangle 12">
+            <a:extLst>
+              <a:ext uri="{FF2B5EF4-FFF2-40B4-BE49-F238E27FC236}">
+                <a16:creationId xmlns:a16="http://schemas.microsoft.com/office/drawing/2014/main" id="{E9835FDE-A306-B85D-791B-8C956ADB42BB}"/>
+              </a:ext>
+            </a:extLst>
+          </p:cNvPr>
+          <p:cNvSpPr/>
+          <p:nvPr/>
+        </p:nvSpPr>
+        <p:spPr bwMode="auto">
+          <a:xfrm>
+            <a:off x="34751732" y="22665244"/>
+            <a:ext cx="6750176" cy="1977180"/>
+          </a:xfrm>
+          <a:prstGeom prst="rect">
+            <a:avLst/>
+          </a:prstGeom>
+          <a:solidFill>
+            <a:schemeClr val="accent1"/>
+          </a:solidFill>
+          <a:ln w="9525" cap="flat" cmpd="sng" algn="ctr">
+            <a:solidFill>
+              <a:schemeClr val="tx1"/>
+            </a:solidFill>
+            <a:prstDash val="solid"/>
+            <a:round/>
+            <a:headEnd type="none" w="med" len="med"/>
+            <a:tailEnd type="none" w="med" len="med"/>
+          </a:ln>
+          <a:effectLst/>
+          <a:extLst>
+            <a:ext uri="{AF507438-7753-43E0-B8FC-AC1667EBCBE1}">
+              <a14:hiddenEffects xmlns:a14="http://schemas.microsoft.com/office/drawing/2010/main">
+                <a:effectLst>
+                  <a:outerShdw dist="35921" dir="2700000" algn="ctr" rotWithShape="0">
+                    <a:schemeClr val="bg2"/>
+                  </a:outerShdw>
+                </a:effectLst>
+              </a14:hiddenEffects>
+            </a:ext>
+          </a:extLst>
+        </p:spPr>
+        <p:txBody>
+          <a:bodyPr vert="horz" wrap="square" lIns="91440" tIns="45720" rIns="91440" bIns="45720" numCol="1" rtlCol="0" anchor="t" anchorCtr="0" compatLnSpc="1">
+            <a:prstTxWarp prst="textNoShape">
+              <a:avLst/>
+            </a:prstTxWarp>
+          </a:bodyPr>
+          <a:lstStyle/>
+          <a:p>
+            <a:pPr marL="0" marR="0" indent="0" algn="l" defTabSz="4702175" rtl="0" eaLnBrk="1" fontAlgn="base" latinLnBrk="0" hangingPunct="1">
+              <a:lnSpc>
+                <a:spcPct val="100000"/>
+              </a:lnSpc>
+              <a:spcBef>
+                <a:spcPct val="0"/>
+              </a:spcBef>
+              <a:spcAft>
+                <a:spcPct val="0"/>
+              </a:spcAft>
+              <a:buClrTx/>
+              <a:buSzTx/>
+              <a:buFontTx/>
+              <a:buNone/>
+              <a:tabLst/>
+            </a:pPr>
+            <a:r>
+              <a:rPr kumimoji="0" lang="en-US" sz="9300" b="0" i="0" u="none" strike="noStrike" cap="none" normalizeH="0" baseline="0" dirty="0">
+                <a:ln>
+                  <a:noFill/>
+                </a:ln>
+                <a:solidFill>
+                  <a:schemeClr val="tx1"/>
+                </a:solidFill>
+                <a:effectLst/>
+                <a:latin typeface="Arial" pitchFamily="34" charset="0"/>
+              </a:rPr>
+              <a:t>QR CODES</a:t>
+            </a:r>
+          </a:p>
+        </p:txBody>
+      </p:sp>
+      <p:pic>
+        <p:nvPicPr>
+          <p:cNvPr id="15" name="Picture 14">
+            <a:extLst>
+              <a:ext uri="{FF2B5EF4-FFF2-40B4-BE49-F238E27FC236}">
+                <a16:creationId xmlns:a16="http://schemas.microsoft.com/office/drawing/2014/main" id="{57FFC0EE-7EF3-426C-241E-F3889769AA8C}"/>
+              </a:ext>
+            </a:extLst>
+          </p:cNvPr>
+          <p:cNvPicPr>
+            <a:picLocks noChangeAspect="1"/>
+          </p:cNvPicPr>
+          <p:nvPr/>
+        </p:nvPicPr>
+        <p:blipFill>
+          <a:blip r:embed="rId3" cstate="print">
+            <a:biLevel thresh="25000"/>
+            <a:extLst>
+              <a:ext uri="{28A0092B-C50C-407E-A947-70E740481C1C}">
+                <a14:useLocalDpi xmlns:a14="http://schemas.microsoft.com/office/drawing/2010/main" val="0"/>
+              </a:ext>
+            </a:extLst>
+          </a:blip>
+          <a:stretch>
+            <a:fillRect/>
+          </a:stretch>
+        </p:blipFill>
+        <p:spPr>
+          <a:xfrm>
+            <a:off x="38537188" y="864109"/>
+            <a:ext cx="4114808" cy="4133096"/>
+          </a:xfrm>
+          <a:prstGeom prst="rect">
+            <a:avLst/>
+          </a:prstGeom>
+        </p:spPr>
+      </p:pic>
+      <p:pic>
+        <p:nvPicPr>
+          <p:cNvPr id="231" name="Picture 230">
+            <a:extLst>
+              <a:ext uri="{FF2B5EF4-FFF2-40B4-BE49-F238E27FC236}">
+                <a16:creationId xmlns:a16="http://schemas.microsoft.com/office/drawing/2014/main" id="{8BAE6E6E-6724-4726-D4E8-7B1051042D0D}"/>
+              </a:ext>
+            </a:extLst>
+          </p:cNvPr>
+          <p:cNvPicPr>
+            <a:picLocks noChangeAspect="1"/>
+          </p:cNvPicPr>
+          <p:nvPr/>
+        </p:nvPicPr>
+        <p:blipFill>
+          <a:blip r:embed="rId4" cstate="print">
+            <a:clrChange>
+              <a:clrFrom>
+                <a:srgbClr val="FFFFFF"/>
+              </a:clrFrom>
+              <a:clrTo>
+                <a:srgbClr val="FFFFFF">
+                  <a:alpha val="0"/>
+                </a:srgbClr>
+              </a:clrTo>
+            </a:clrChange>
+            <a:biLevel thresh="25000"/>
+            <a:extLst>
+              <a:ext uri="{BEBA8EAE-BF5A-486C-A8C5-ECC9F3942E4B}">
+                <a14:imgProps xmlns:a14="http://schemas.microsoft.com/office/drawing/2010/main">
+                  <a14:imgLayer r:embed="rId5">
+                    <a14:imgEffect>
+                      <a14:saturation sat="0"/>
+                    </a14:imgEffect>
+                  </a14:imgLayer>
+                </a14:imgProps>
+              </a:ext>
+              <a:ext uri="{28A0092B-C50C-407E-A947-70E740481C1C}">
+                <a14:useLocalDpi xmlns:a14="http://schemas.microsoft.com/office/drawing/2010/main" val="0"/>
+              </a:ext>
+            </a:extLst>
+          </a:blip>
+          <a:stretch>
+            <a:fillRect/>
+          </a:stretch>
+        </p:blipFill>
+        <p:spPr>
+          <a:xfrm>
+            <a:off x="33164889" y="864109"/>
+            <a:ext cx="4133096" cy="4133096"/>
+          </a:xfrm>
+          <a:prstGeom prst="rect">
+            <a:avLst/>
+          </a:prstGeom>
+        </p:spPr>
+      </p:pic>
+      <p:pic>
+        <p:nvPicPr>
+          <p:cNvPr id="233" name="Picture 232">
+            <a:extLst>
+              <a:ext uri="{FF2B5EF4-FFF2-40B4-BE49-F238E27FC236}">
+                <a16:creationId xmlns:a16="http://schemas.microsoft.com/office/drawing/2014/main" id="{2E42E5C4-B25A-A56D-3C0D-80882415788D}"/>
+              </a:ext>
+            </a:extLst>
+          </p:cNvPr>
+          <p:cNvPicPr>
+            <a:picLocks noChangeAspect="1"/>
+          </p:cNvPicPr>
+          <p:nvPr/>
+        </p:nvPicPr>
+        <p:blipFill>
+          <a:blip r:embed="rId6" cstate="print">
+            <a:extLst>
+              <a:ext uri="{28A0092B-C50C-407E-A947-70E740481C1C}">
+                <a14:useLocalDpi xmlns:a14="http://schemas.microsoft.com/office/drawing/2010/main" val="0"/>
+              </a:ext>
+            </a:extLst>
+          </a:blip>
+          <a:stretch>
+            <a:fillRect/>
+          </a:stretch>
+        </p:blipFill>
+        <p:spPr>
+          <a:xfrm>
+            <a:off x="33157855" y="29910450"/>
+            <a:ext cx="4760986" cy="771146"/>
+          </a:xfrm>
+          <a:prstGeom prst="rect">
+            <a:avLst/>
+          </a:prstGeom>
+        </p:spPr>
+      </p:pic>
+      <p:sp>
+        <p:nvSpPr>
+          <p:cNvPr id="235" name="Text Box 6">
+            <a:extLst>
+              <a:ext uri="{FF2B5EF4-FFF2-40B4-BE49-F238E27FC236}">
+                <a16:creationId xmlns:a16="http://schemas.microsoft.com/office/drawing/2014/main" id="{DC771754-0602-7C35-AAA2-C4CF5FF723D5}"/>
+              </a:ext>
+            </a:extLst>
+          </p:cNvPr>
+          <p:cNvSpPr txBox="1">
+            <a:spLocks noChangeArrowheads="1"/>
+          </p:cNvSpPr>
+          <p:nvPr/>
+        </p:nvSpPr>
+        <p:spPr bwMode="auto">
+          <a:xfrm>
+            <a:off x="731518" y="20308689"/>
+            <a:ext cx="10058400" cy="3508653"/>
+          </a:xfrm>
+          <a:prstGeom prst="rect">
+            <a:avLst/>
+          </a:prstGeom>
+          <a:solidFill>
+            <a:srgbClr val="B4D3E2"/>
+          </a:solidFill>
+          <a:ln>
+            <a:noFill/>
+          </a:ln>
+          <a:effectLst>
+            <a:softEdge rad="0"/>
+          </a:effectLst>
+        </p:spPr>
+        <p:txBody>
+          <a:bodyPr lIns="274320" tIns="274320" rIns="274320" bIns="274320">
+            <a:spAutoFit/>
+          </a:bodyPr>
+          <a:lstStyle>
+            <a:defPPr>
+              <a:defRPr kern="1200"/>
+            </a:defPPr>
+            <a:lvl1pPr defTabSz="4703763" eaLnBrk="0" hangingPunct="0">
+              <a:defRPr sz="9300">
+                <a:solidFill>
+                  <a:schemeClr val="tx1"/>
+                </a:solidFill>
+                <a:latin typeface="Arial"/>
+              </a:defRPr>
+            </a:lvl1pPr>
+            <a:lvl2pPr marL="742950" indent="-285750" defTabSz="4703763" eaLnBrk="0" hangingPunct="0">
+              <a:defRPr sz="9300">
+                <a:solidFill>
+                  <a:schemeClr val="tx1"/>
+                </a:solidFill>
+                <a:latin typeface="Arial"/>
+              </a:defRPr>
+            </a:lvl2pPr>
+            <a:lvl3pPr marL="1143000" indent="-228600" defTabSz="4703763" eaLnBrk="0" hangingPunct="0">
+              <a:defRPr sz="9300">
+                <a:solidFill>
+                  <a:schemeClr val="tx1"/>
+                </a:solidFill>
+                <a:latin typeface="Arial"/>
+              </a:defRPr>
+            </a:lvl3pPr>
+            <a:lvl4pPr marL="1600200" indent="-228600" defTabSz="4703763" eaLnBrk="0" hangingPunct="0">
+              <a:defRPr sz="9300">
+                <a:solidFill>
+                  <a:schemeClr val="tx1"/>
+                </a:solidFill>
+                <a:latin typeface="Arial"/>
+              </a:defRPr>
+            </a:lvl4pPr>
+            <a:lvl5pPr marL="2057400" indent="-228600" defTabSz="4703763" eaLnBrk="0" hangingPunct="0">
+              <a:defRPr sz="9300">
+                <a:solidFill>
+                  <a:schemeClr val="tx1"/>
+                </a:solidFill>
+                <a:latin typeface="Arial"/>
+              </a:defRPr>
+            </a:lvl5pPr>
+            <a:lvl6pPr marL="2514600" indent="-228600" defTabSz="4703763" eaLnBrk="0" fontAlgn="base" hangingPunct="0">
+              <a:spcBef>
+                <a:spcPct val="0"/>
+              </a:spcBef>
+              <a:spcAft>
+                <a:spcPct val="0"/>
+              </a:spcAft>
+              <a:defRPr sz="9300">
+                <a:solidFill>
+                  <a:schemeClr val="tx1"/>
+                </a:solidFill>
+                <a:latin typeface="Arial"/>
+              </a:defRPr>
+            </a:lvl6pPr>
+            <a:lvl7pPr marL="2971800" indent="-228600" defTabSz="4703763" eaLnBrk="0" fontAlgn="base" hangingPunct="0">
+              <a:spcBef>
+                <a:spcPct val="0"/>
+              </a:spcBef>
+              <a:spcAft>
+                <a:spcPct val="0"/>
+              </a:spcAft>
+              <a:defRPr sz="9300">
+                <a:solidFill>
+                  <a:schemeClr val="tx1"/>
+                </a:solidFill>
+                <a:latin typeface="Arial"/>
+              </a:defRPr>
+            </a:lvl7pPr>
+            <a:lvl8pPr marL="3429000" indent="-228600" defTabSz="4703763" eaLnBrk="0" fontAlgn="base" hangingPunct="0">
+              <a:spcBef>
+                <a:spcPct val="0"/>
+              </a:spcBef>
+              <a:spcAft>
+                <a:spcPct val="0"/>
+              </a:spcAft>
+              <a:defRPr sz="9300">
+                <a:solidFill>
+                  <a:schemeClr val="tx1"/>
+                </a:solidFill>
+                <a:latin typeface="Arial"/>
+              </a:defRPr>
+            </a:lvl8pPr>
+            <a:lvl9pPr marL="3886200" indent="-228600" defTabSz="4703763" eaLnBrk="0" fontAlgn="base" hangingPunct="0">
+              <a:spcBef>
+                <a:spcPct val="0"/>
+              </a:spcBef>
+              <a:spcAft>
+                <a:spcPct val="0"/>
+              </a:spcAft>
+              <a:defRPr sz="9300">
+                <a:solidFill>
+                  <a:schemeClr val="tx1"/>
+                </a:solidFill>
+                <a:latin typeface="Arial"/>
+              </a:defRPr>
+            </a:lvl9pPr>
+          </a:lstStyle>
+          <a:p>
+            <a:r>
+              <a:rPr lang="en-US" sz="2400" dirty="0">
+                <a:latin typeface="Titillium Web" panose="00000500000000000000" pitchFamily="2" charset="0"/>
+                <a:ea typeface="Open Sans" panose="020B0606030504020204" pitchFamily="34" charset="0"/>
+                <a:cs typeface="Open Sans" panose="020B0606030504020204" pitchFamily="34" charset="0"/>
+              </a:rPr>
+              <a:t>Dataset Filtering</a:t>
+            </a:r>
+          </a:p>
+          <a:p>
+            <a:endParaRPr lang="en-US" sz="2400" dirty="0">
+              <a:latin typeface="Titillium Web" panose="00000500000000000000" pitchFamily="2" charset="0"/>
+              <a:ea typeface="Open Sans" panose="020B0606030504020204" pitchFamily="34" charset="0"/>
+              <a:cs typeface="Open Sans" panose="020B0606030504020204" pitchFamily="34" charset="0"/>
+            </a:endParaRPr>
+          </a:p>
+          <a:p>
+            <a:r>
+              <a:rPr lang="en-US" sz="2400" dirty="0">
+                <a:latin typeface="Titillium Web" panose="00000500000000000000" pitchFamily="2" charset="0"/>
+                <a:ea typeface="Open Sans" panose="020B0606030504020204" pitchFamily="34" charset="0"/>
+                <a:cs typeface="Open Sans" panose="020B0606030504020204" pitchFamily="34" charset="0"/>
+              </a:rPr>
+              <a:t>Each article was tokenized using </a:t>
+            </a:r>
+            <a:r>
+              <a:rPr lang="en-US" sz="2400" dirty="0" err="1">
+                <a:latin typeface="Titillium Web" panose="00000500000000000000" pitchFamily="2" charset="0"/>
+                <a:ea typeface="Open Sans" panose="020B0606030504020204" pitchFamily="34" charset="0"/>
+                <a:cs typeface="Open Sans" panose="020B0606030504020204" pitchFamily="34" charset="0"/>
+              </a:rPr>
+              <a:t>tiktoken</a:t>
+            </a:r>
+            <a:r>
+              <a:rPr lang="en-US" sz="2400" dirty="0">
+                <a:latin typeface="Titillium Web" panose="00000500000000000000" pitchFamily="2" charset="0"/>
+                <a:ea typeface="Open Sans" panose="020B0606030504020204" pitchFamily="34" charset="0"/>
+                <a:cs typeface="Open Sans" panose="020B0606030504020204" pitchFamily="34" charset="0"/>
+              </a:rPr>
+              <a:t> and processed with an LLM. During development, the extraction pipeline was tested on a subset of articles before applying additional filtering criteria. Articles containing fewer than two solar-related keyword mentions or only brief references to solar energy were excluded, reducing the dataset from 5,374 to 1,985 articles while substantially lowering inference cost.</a:t>
+            </a:r>
+          </a:p>
+        </p:txBody>
+      </p:sp>
+      <p:sp>
+        <p:nvSpPr>
+          <p:cNvPr id="237" name="Text Box 6">
+            <a:extLst>
+              <a:ext uri="{FF2B5EF4-FFF2-40B4-BE49-F238E27FC236}">
+                <a16:creationId xmlns:a16="http://schemas.microsoft.com/office/drawing/2014/main" id="{F8EAF608-3616-200D-13DA-E3D715DE2FCA}"/>
+              </a:ext>
+            </a:extLst>
+          </p:cNvPr>
+          <p:cNvSpPr txBox="1">
+            <a:spLocks noChangeArrowheads="1"/>
+          </p:cNvSpPr>
+          <p:nvPr/>
+        </p:nvSpPr>
+        <p:spPr bwMode="auto">
+          <a:xfrm>
+            <a:off x="11521439" y="8196127"/>
+            <a:ext cx="10058400" cy="3139321"/>
+          </a:xfrm>
+          <a:prstGeom prst="rect">
+            <a:avLst/>
+          </a:prstGeom>
+          <a:solidFill>
+            <a:srgbClr val="B4D3E2"/>
+          </a:solidFill>
+          <a:ln>
+            <a:noFill/>
+          </a:ln>
+          <a:effectLst>
+            <a:softEdge rad="0"/>
+          </a:effectLst>
+        </p:spPr>
+        <p:txBody>
+          <a:bodyPr lIns="274320" tIns="274320" rIns="274320" bIns="274320">
+            <a:spAutoFit/>
+          </a:bodyPr>
+          <a:lstStyle>
+            <a:defPPr>
+              <a:defRPr kern="1200"/>
+            </a:defPPr>
+            <a:lvl1pPr defTabSz="4703763" eaLnBrk="0" hangingPunct="0">
+              <a:defRPr sz="9300">
+                <a:solidFill>
+                  <a:schemeClr val="tx1"/>
+                </a:solidFill>
+                <a:latin typeface="Arial"/>
+              </a:defRPr>
+            </a:lvl1pPr>
+            <a:lvl2pPr marL="742950" indent="-285750" defTabSz="4703763" eaLnBrk="0" hangingPunct="0">
+              <a:defRPr sz="9300">
+                <a:solidFill>
+                  <a:schemeClr val="tx1"/>
+                </a:solidFill>
+                <a:latin typeface="Arial"/>
+              </a:defRPr>
+            </a:lvl2pPr>
+            <a:lvl3pPr marL="1143000" indent="-228600" defTabSz="4703763" eaLnBrk="0" hangingPunct="0">
+              <a:defRPr sz="9300">
+                <a:solidFill>
+                  <a:schemeClr val="tx1"/>
+                </a:solidFill>
+                <a:latin typeface="Arial"/>
+              </a:defRPr>
+            </a:lvl3pPr>
+            <a:lvl4pPr marL="1600200" indent="-228600" defTabSz="4703763" eaLnBrk="0" hangingPunct="0">
+              <a:defRPr sz="9300">
+                <a:solidFill>
+                  <a:schemeClr val="tx1"/>
+                </a:solidFill>
+                <a:latin typeface="Arial"/>
+              </a:defRPr>
+            </a:lvl4pPr>
+            <a:lvl5pPr marL="2057400" indent="-228600" defTabSz="4703763" eaLnBrk="0" hangingPunct="0">
+              <a:defRPr sz="9300">
+                <a:solidFill>
+                  <a:schemeClr val="tx1"/>
+                </a:solidFill>
+                <a:latin typeface="Arial"/>
+              </a:defRPr>
+            </a:lvl5pPr>
+            <a:lvl6pPr marL="2514600" indent="-228600" defTabSz="4703763" eaLnBrk="0" fontAlgn="base" hangingPunct="0">
+              <a:spcBef>
+                <a:spcPct val="0"/>
+              </a:spcBef>
+              <a:spcAft>
+                <a:spcPct val="0"/>
+              </a:spcAft>
+              <a:defRPr sz="9300">
+                <a:solidFill>
+                  <a:schemeClr val="tx1"/>
+                </a:solidFill>
+                <a:latin typeface="Arial"/>
+              </a:defRPr>
+            </a:lvl6pPr>
+            <a:lvl7pPr marL="2971800" indent="-228600" defTabSz="4703763" eaLnBrk="0" fontAlgn="base" hangingPunct="0">
+              <a:spcBef>
+                <a:spcPct val="0"/>
+              </a:spcBef>
+              <a:spcAft>
+                <a:spcPct val="0"/>
+              </a:spcAft>
+              <a:defRPr sz="9300">
+                <a:solidFill>
+                  <a:schemeClr val="tx1"/>
+                </a:solidFill>
+                <a:latin typeface="Arial"/>
+              </a:defRPr>
+            </a:lvl7pPr>
+            <a:lvl8pPr marL="3429000" indent="-228600" defTabSz="4703763" eaLnBrk="0" fontAlgn="base" hangingPunct="0">
+              <a:spcBef>
+                <a:spcPct val="0"/>
+              </a:spcBef>
+              <a:spcAft>
+                <a:spcPct val="0"/>
+              </a:spcAft>
+              <a:defRPr sz="9300">
+                <a:solidFill>
+                  <a:schemeClr val="tx1"/>
+                </a:solidFill>
+                <a:latin typeface="Arial"/>
+              </a:defRPr>
+            </a:lvl8pPr>
+            <a:lvl9pPr marL="3886200" indent="-228600" defTabSz="4703763" eaLnBrk="0" fontAlgn="base" hangingPunct="0">
+              <a:spcBef>
+                <a:spcPct val="0"/>
+              </a:spcBef>
+              <a:spcAft>
+                <a:spcPct val="0"/>
+              </a:spcAft>
+              <a:defRPr sz="9300">
+                <a:solidFill>
+                  <a:schemeClr val="tx1"/>
+                </a:solidFill>
+                <a:latin typeface="Arial"/>
+              </a:defRPr>
+            </a:lvl9pPr>
+          </a:lstStyle>
+          <a:p>
+            <a:r>
+              <a:rPr lang="en-US" sz="2400" dirty="0">
+                <a:latin typeface="Titillium Web" panose="00000500000000000000" pitchFamily="2" charset="0"/>
+                <a:ea typeface="Open Sans" panose="020B0606030504020204" pitchFamily="34" charset="0"/>
+                <a:cs typeface="Open Sans" panose="020B0606030504020204" pitchFamily="34" charset="0"/>
+              </a:rPr>
+              <a:t>Knowledge Graph Construction</a:t>
+            </a:r>
+          </a:p>
+          <a:p>
+            <a:endParaRPr lang="en-US" sz="2400" dirty="0">
+              <a:latin typeface="Titillium Web" panose="00000500000000000000" pitchFamily="2" charset="0"/>
+              <a:ea typeface="Open Sans" panose="020B0606030504020204" pitchFamily="34" charset="0"/>
+              <a:cs typeface="Open Sans" panose="020B0606030504020204" pitchFamily="34" charset="0"/>
+            </a:endParaRPr>
+          </a:p>
+          <a:p>
+            <a:r>
+              <a:rPr lang="en-US" sz="2400" dirty="0">
+                <a:latin typeface="Titillium Web" panose="00000500000000000000" pitchFamily="2" charset="0"/>
+                <a:ea typeface="Open Sans" panose="020B0606030504020204" pitchFamily="34" charset="0"/>
+                <a:cs typeface="Open Sans" panose="020B0606030504020204" pitchFamily="34" charset="0"/>
+              </a:rPr>
+              <a:t>The extracted JSON outputs were converted into node and edge tables to construct a knowledge graph. To improve graph quality, nodes with fewer than two connections were removed, semantically similar entities were merged using fuzzy matching and transformer-based similarity, node size was scaled by degree, and colors were assigned by entity type.</a:t>
+            </a:r>
+          </a:p>
+        </p:txBody>
+      </p:sp>
+      <p:sp>
+        <p:nvSpPr>
+          <p:cNvPr id="239" name="Text Box 6">
+            <a:extLst>
+              <a:ext uri="{FF2B5EF4-FFF2-40B4-BE49-F238E27FC236}">
+                <a16:creationId xmlns:a16="http://schemas.microsoft.com/office/drawing/2014/main" id="{5DAD8F8A-EF61-4280-03BC-FDEB19449874}"/>
+              </a:ext>
+            </a:extLst>
+          </p:cNvPr>
+          <p:cNvSpPr txBox="1">
+            <a:spLocks noChangeArrowheads="1"/>
+          </p:cNvSpPr>
+          <p:nvPr/>
+        </p:nvSpPr>
+        <p:spPr bwMode="auto">
+          <a:xfrm>
+            <a:off x="731520" y="27125314"/>
+            <a:ext cx="10058400" cy="3508653"/>
+          </a:xfrm>
+          <a:prstGeom prst="rect">
+            <a:avLst/>
+          </a:prstGeom>
+          <a:solidFill>
+            <a:srgbClr val="B4D3E2"/>
+          </a:solidFill>
+          <a:ln>
+            <a:noFill/>
+          </a:ln>
+          <a:effectLst>
+            <a:softEdge rad="0"/>
+          </a:effectLst>
+        </p:spPr>
+        <p:txBody>
+          <a:bodyPr lIns="274320" tIns="274320" rIns="274320" bIns="274320">
+            <a:spAutoFit/>
+          </a:bodyPr>
+          <a:lstStyle>
+            <a:defPPr>
+              <a:defRPr kern="1200"/>
+            </a:defPPr>
+            <a:lvl1pPr defTabSz="4703763" eaLnBrk="0" hangingPunct="0">
+              <a:defRPr sz="9300">
+                <a:solidFill>
+                  <a:schemeClr val="tx1"/>
+                </a:solidFill>
+                <a:latin typeface="Arial"/>
+              </a:defRPr>
+            </a:lvl1pPr>
+            <a:lvl2pPr marL="742950" indent="-285750" defTabSz="4703763" eaLnBrk="0" hangingPunct="0">
+              <a:defRPr sz="9300">
+                <a:solidFill>
+                  <a:schemeClr val="tx1"/>
+                </a:solidFill>
+                <a:latin typeface="Arial"/>
+              </a:defRPr>
+            </a:lvl2pPr>
+            <a:lvl3pPr marL="1143000" indent="-228600" defTabSz="4703763" eaLnBrk="0" hangingPunct="0">
+              <a:defRPr sz="9300">
+                <a:solidFill>
+                  <a:schemeClr val="tx1"/>
+                </a:solidFill>
+                <a:latin typeface="Arial"/>
+              </a:defRPr>
+            </a:lvl3pPr>
+            <a:lvl4pPr marL="1600200" indent="-228600" defTabSz="4703763" eaLnBrk="0" hangingPunct="0">
+              <a:defRPr sz="9300">
+                <a:solidFill>
+                  <a:schemeClr val="tx1"/>
+                </a:solidFill>
+                <a:latin typeface="Arial"/>
+              </a:defRPr>
+            </a:lvl4pPr>
+            <a:lvl5pPr marL="2057400" indent="-228600" defTabSz="4703763" eaLnBrk="0" hangingPunct="0">
+              <a:defRPr sz="9300">
+                <a:solidFill>
+                  <a:schemeClr val="tx1"/>
+                </a:solidFill>
+                <a:latin typeface="Arial"/>
+              </a:defRPr>
+            </a:lvl5pPr>
+            <a:lvl6pPr marL="2514600" indent="-228600" defTabSz="4703763" eaLnBrk="0" fontAlgn="base" hangingPunct="0">
+              <a:spcBef>
+                <a:spcPct val="0"/>
+              </a:spcBef>
+              <a:spcAft>
+                <a:spcPct val="0"/>
+              </a:spcAft>
+              <a:defRPr sz="9300">
+                <a:solidFill>
+                  <a:schemeClr val="tx1"/>
+                </a:solidFill>
+                <a:latin typeface="Arial"/>
+              </a:defRPr>
+            </a:lvl6pPr>
+            <a:lvl7pPr marL="2971800" indent="-228600" defTabSz="4703763" eaLnBrk="0" fontAlgn="base" hangingPunct="0">
+              <a:spcBef>
+                <a:spcPct val="0"/>
+              </a:spcBef>
+              <a:spcAft>
+                <a:spcPct val="0"/>
+              </a:spcAft>
+              <a:defRPr sz="9300">
+                <a:solidFill>
+                  <a:schemeClr val="tx1"/>
+                </a:solidFill>
+                <a:latin typeface="Arial"/>
+              </a:defRPr>
+            </a:lvl7pPr>
+            <a:lvl8pPr marL="3429000" indent="-228600" defTabSz="4703763" eaLnBrk="0" fontAlgn="base" hangingPunct="0">
+              <a:spcBef>
+                <a:spcPct val="0"/>
+              </a:spcBef>
+              <a:spcAft>
+                <a:spcPct val="0"/>
+              </a:spcAft>
+              <a:defRPr sz="9300">
+                <a:solidFill>
+                  <a:schemeClr val="tx1"/>
+                </a:solidFill>
+                <a:latin typeface="Arial"/>
+              </a:defRPr>
+            </a:lvl8pPr>
+            <a:lvl9pPr marL="3886200" indent="-228600" defTabSz="4703763" eaLnBrk="0" fontAlgn="base" hangingPunct="0">
+              <a:spcBef>
+                <a:spcPct val="0"/>
+              </a:spcBef>
+              <a:spcAft>
+                <a:spcPct val="0"/>
+              </a:spcAft>
+              <a:defRPr sz="9300">
+                <a:solidFill>
+                  <a:schemeClr val="tx1"/>
+                </a:solidFill>
+                <a:latin typeface="Arial"/>
+              </a:defRPr>
+            </a:lvl9pPr>
+          </a:lstStyle>
+          <a:p>
+            <a:r>
+              <a:rPr lang="en-US" sz="2400" dirty="0">
+                <a:latin typeface="Titillium Web" panose="00000500000000000000" pitchFamily="2" charset="0"/>
+                <a:ea typeface="Open Sans" panose="020B0606030504020204" pitchFamily="34" charset="0"/>
+                <a:cs typeface="Open Sans" panose="020B0606030504020204" pitchFamily="34" charset="0"/>
+              </a:rPr>
+              <a:t>LLM-Based Information Extraction</a:t>
+            </a:r>
+          </a:p>
+          <a:p>
+            <a:endParaRPr lang="en-US" sz="2400" dirty="0">
+              <a:latin typeface="Titillium Web" panose="00000500000000000000" pitchFamily="2" charset="0"/>
+              <a:ea typeface="Open Sans" panose="020B0606030504020204" pitchFamily="34" charset="0"/>
+              <a:cs typeface="Open Sans" panose="020B0606030504020204" pitchFamily="34" charset="0"/>
+            </a:endParaRPr>
+          </a:p>
+          <a:p>
+            <a:r>
+              <a:rPr lang="en-US" sz="2400" dirty="0">
+                <a:latin typeface="Titillium Web" panose="00000500000000000000" pitchFamily="2" charset="0"/>
+                <a:ea typeface="Open Sans" panose="020B0606030504020204" pitchFamily="34" charset="0"/>
+                <a:cs typeface="Open Sans" panose="020B0606030504020204" pitchFamily="34" charset="0"/>
+              </a:rPr>
+              <a:t>A structured prompting framework consisting of a system prompt, user prompt, and JSON output schema was developed and iteratively optimized to reduce token usage. The LLM extracted entities (e.g., organizations, technologies, policies, countries) and semantic relationships while also determining whether each article was meaningfully related to solar energy.</a:t>
+            </a:r>
+          </a:p>
+        </p:txBody>
+      </p:sp>
+      <p:sp>
+        <p:nvSpPr>
+          <p:cNvPr id="241" name="Text Box 6">
+            <a:extLst>
+              <a:ext uri="{FF2B5EF4-FFF2-40B4-BE49-F238E27FC236}">
+                <a16:creationId xmlns:a16="http://schemas.microsoft.com/office/drawing/2014/main" id="{7FFDF291-C30B-7440-51D0-7CB74BA6F891}"/>
+              </a:ext>
+            </a:extLst>
+          </p:cNvPr>
+          <p:cNvSpPr txBox="1">
+            <a:spLocks noChangeArrowheads="1"/>
+          </p:cNvSpPr>
+          <p:nvPr/>
+        </p:nvSpPr>
+        <p:spPr bwMode="auto">
+          <a:xfrm>
+            <a:off x="11521440" y="20752140"/>
+            <a:ext cx="10058400" cy="2769989"/>
+          </a:xfrm>
+          <a:prstGeom prst="rect">
+            <a:avLst/>
+          </a:prstGeom>
+          <a:solidFill>
+            <a:srgbClr val="B4D3E2"/>
+          </a:solidFill>
+          <a:ln>
+            <a:noFill/>
+          </a:ln>
+          <a:effectLst>
+            <a:softEdge rad="0"/>
+          </a:effectLst>
+        </p:spPr>
+        <p:txBody>
+          <a:bodyPr lIns="274320" tIns="274320" rIns="274320" bIns="274320">
+            <a:spAutoFit/>
+          </a:bodyPr>
+          <a:lstStyle>
+            <a:defPPr>
+              <a:defRPr kern="1200"/>
+            </a:defPPr>
+            <a:lvl1pPr defTabSz="4703763" eaLnBrk="0" hangingPunct="0">
+              <a:defRPr sz="9300">
+                <a:solidFill>
+                  <a:schemeClr val="tx1"/>
+                </a:solidFill>
+                <a:latin typeface="Arial"/>
+              </a:defRPr>
+            </a:lvl1pPr>
+            <a:lvl2pPr marL="742950" indent="-285750" defTabSz="4703763" eaLnBrk="0" hangingPunct="0">
+              <a:defRPr sz="9300">
+                <a:solidFill>
+                  <a:schemeClr val="tx1"/>
+                </a:solidFill>
+                <a:latin typeface="Arial"/>
+              </a:defRPr>
+            </a:lvl2pPr>
+            <a:lvl3pPr marL="1143000" indent="-228600" defTabSz="4703763" eaLnBrk="0" hangingPunct="0">
+              <a:defRPr sz="9300">
+                <a:solidFill>
+                  <a:schemeClr val="tx1"/>
+                </a:solidFill>
+                <a:latin typeface="Arial"/>
+              </a:defRPr>
+            </a:lvl3pPr>
+            <a:lvl4pPr marL="1600200" indent="-228600" defTabSz="4703763" eaLnBrk="0" hangingPunct="0">
+              <a:defRPr sz="9300">
+                <a:solidFill>
+                  <a:schemeClr val="tx1"/>
+                </a:solidFill>
+                <a:latin typeface="Arial"/>
+              </a:defRPr>
+            </a:lvl4pPr>
+            <a:lvl5pPr marL="2057400" indent="-228600" defTabSz="4703763" eaLnBrk="0" hangingPunct="0">
+              <a:defRPr sz="9300">
+                <a:solidFill>
+                  <a:schemeClr val="tx1"/>
+                </a:solidFill>
+                <a:latin typeface="Arial"/>
+              </a:defRPr>
+            </a:lvl5pPr>
+            <a:lvl6pPr marL="2514600" indent="-228600" defTabSz="4703763" eaLnBrk="0" fontAlgn="base" hangingPunct="0">
+              <a:spcBef>
+                <a:spcPct val="0"/>
+              </a:spcBef>
+              <a:spcAft>
+                <a:spcPct val="0"/>
+              </a:spcAft>
+              <a:defRPr sz="9300">
+                <a:solidFill>
+                  <a:schemeClr val="tx1"/>
+                </a:solidFill>
+                <a:latin typeface="Arial"/>
+              </a:defRPr>
+            </a:lvl6pPr>
+            <a:lvl7pPr marL="2971800" indent="-228600" defTabSz="4703763" eaLnBrk="0" fontAlgn="base" hangingPunct="0">
+              <a:spcBef>
+                <a:spcPct val="0"/>
+              </a:spcBef>
+              <a:spcAft>
+                <a:spcPct val="0"/>
+              </a:spcAft>
+              <a:defRPr sz="9300">
+                <a:solidFill>
+                  <a:schemeClr val="tx1"/>
+                </a:solidFill>
+                <a:latin typeface="Arial"/>
+              </a:defRPr>
+            </a:lvl7pPr>
+            <a:lvl8pPr marL="3429000" indent="-228600" defTabSz="4703763" eaLnBrk="0" fontAlgn="base" hangingPunct="0">
+              <a:spcBef>
+                <a:spcPct val="0"/>
+              </a:spcBef>
+              <a:spcAft>
+                <a:spcPct val="0"/>
+              </a:spcAft>
+              <a:defRPr sz="9300">
+                <a:solidFill>
+                  <a:schemeClr val="tx1"/>
+                </a:solidFill>
+                <a:latin typeface="Arial"/>
+              </a:defRPr>
+            </a:lvl8pPr>
+            <a:lvl9pPr marL="3886200" indent="-228600" defTabSz="4703763" eaLnBrk="0" fontAlgn="base" hangingPunct="0">
+              <a:spcBef>
+                <a:spcPct val="0"/>
+              </a:spcBef>
+              <a:spcAft>
+                <a:spcPct val="0"/>
+              </a:spcAft>
+              <a:defRPr sz="9300">
+                <a:solidFill>
+                  <a:schemeClr val="tx1"/>
+                </a:solidFill>
+                <a:latin typeface="Arial"/>
+              </a:defRPr>
+            </a:lvl9pPr>
+          </a:lstStyle>
+          <a:p>
+            <a:r>
+              <a:rPr lang="en-US" sz="2400" dirty="0">
+                <a:latin typeface="Titillium Web" panose="00000500000000000000" pitchFamily="2" charset="0"/>
+                <a:ea typeface="Open Sans" panose="020B0606030504020204" pitchFamily="34" charset="0"/>
+                <a:cs typeface="Open Sans" panose="020B0606030504020204" pitchFamily="34" charset="0"/>
+              </a:rPr>
+              <a:t>Network Analysis</a:t>
+            </a:r>
+          </a:p>
+          <a:p>
+            <a:endParaRPr lang="en-US" sz="2400" dirty="0">
+              <a:latin typeface="Titillium Web" panose="00000500000000000000" pitchFamily="2" charset="0"/>
+              <a:ea typeface="Open Sans" panose="020B0606030504020204" pitchFamily="34" charset="0"/>
+              <a:cs typeface="Open Sans" panose="020B0606030504020204" pitchFamily="34" charset="0"/>
+            </a:endParaRPr>
+          </a:p>
+          <a:p>
+            <a:r>
+              <a:rPr lang="en-US" sz="2400" dirty="0">
+                <a:latin typeface="Titillium Web" panose="00000500000000000000" pitchFamily="2" charset="0"/>
+                <a:ea typeface="Open Sans" panose="020B0606030504020204" pitchFamily="34" charset="0"/>
+                <a:cs typeface="Open Sans" panose="020B0606030504020204" pitchFamily="34" charset="0"/>
+              </a:rPr>
+              <a:t>Community detection was applied to identify groups of closely connected entities. Additional analysis examined interactions between communities and the relationship types that most strongly connected different sectors of the international solar energy ecosystem.</a:t>
+            </a:r>
+          </a:p>
+        </p:txBody>
+      </p:sp>
+      <p:sp>
+        <p:nvSpPr>
+          <p:cNvPr id="244" name="Rectangle 5">
+            <a:extLst>
+              <a:ext uri="{FF2B5EF4-FFF2-40B4-BE49-F238E27FC236}">
+                <a16:creationId xmlns:a16="http://schemas.microsoft.com/office/drawing/2014/main" id="{3287EB6F-AA5C-E342-30B0-E54767021E00}"/>
+              </a:ext>
+            </a:extLst>
+          </p:cNvPr>
+          <p:cNvSpPr>
+            <a:spLocks noChangeArrowheads="1"/>
+          </p:cNvSpPr>
+          <p:nvPr/>
+        </p:nvSpPr>
+        <p:spPr bwMode="auto">
+          <a:xfrm>
+            <a:off x="731519" y="15480278"/>
+            <a:ext cx="10058400" cy="784225"/>
+          </a:xfrm>
+          <a:prstGeom prst="rect">
+            <a:avLst/>
+          </a:prstGeom>
+          <a:solidFill>
+            <a:srgbClr val="1482A5"/>
+          </a:solidFill>
+          <a:ln>
+            <a:noFill/>
+          </a:ln>
+          <a:effectLst/>
+        </p:spPr>
+        <p:txBody>
+          <a:bodyPr wrap="none" lIns="274320" tIns="68580" rIns="274320" bIns="68580" anchor="ctr"/>
+          <a:lstStyle>
+            <a:defPPr>
+              <a:defRPr kern="1200"/>
+            </a:defPPr>
+          </a:lstStyle>
+          <a:p>
+            <a:pPr defTabSz="4703763"/>
+            <a:r>
+              <a:rPr lang="en-US" sz="3600" dirty="0">
+                <a:solidFill>
+                  <a:schemeClr val="bg1"/>
+                </a:solidFill>
+                <a:latin typeface="Amaranth" panose="02000503050000020004" pitchFamily="2" charset="0"/>
+              </a:rPr>
+              <a:t>Methodology</a:t>
+            </a:r>
+          </a:p>
+        </p:txBody>
+      </p:sp>
+      <p:sp>
+        <p:nvSpPr>
+          <p:cNvPr id="246" name="Text Box 6">
+            <a:extLst>
+              <a:ext uri="{FF2B5EF4-FFF2-40B4-BE49-F238E27FC236}">
+                <a16:creationId xmlns:a16="http://schemas.microsoft.com/office/drawing/2014/main" id="{2576A97F-56DB-4BBD-B2A5-6AF36265324E}"/>
+              </a:ext>
+            </a:extLst>
+          </p:cNvPr>
+          <p:cNvSpPr txBox="1">
+            <a:spLocks noChangeArrowheads="1"/>
+          </p:cNvSpPr>
+          <p:nvPr/>
+        </p:nvSpPr>
+        <p:spPr bwMode="auto">
+          <a:xfrm>
+            <a:off x="33097620" y="8196126"/>
+            <a:ext cx="10058400" cy="5355312"/>
+          </a:xfrm>
+          <a:prstGeom prst="rect">
+            <a:avLst/>
+          </a:prstGeom>
+          <a:solidFill>
+            <a:srgbClr val="B4D3E2"/>
+          </a:solidFill>
+          <a:ln>
+            <a:noFill/>
+          </a:ln>
+          <a:effectLst>
+            <a:softEdge rad="0"/>
+          </a:effectLst>
+        </p:spPr>
+        <p:txBody>
+          <a:bodyPr lIns="274320" tIns="274320" rIns="274320" bIns="274320">
+            <a:spAutoFit/>
+          </a:bodyPr>
+          <a:lstStyle>
+            <a:defPPr>
+              <a:defRPr kern="1200"/>
+            </a:defPPr>
+            <a:lvl1pPr defTabSz="4703763" eaLnBrk="0" hangingPunct="0">
+              <a:defRPr sz="9300">
+                <a:solidFill>
+                  <a:schemeClr val="tx1"/>
+                </a:solidFill>
+                <a:latin typeface="Arial"/>
+              </a:defRPr>
+            </a:lvl1pPr>
+            <a:lvl2pPr marL="742950" indent="-285750" defTabSz="4703763" eaLnBrk="0" hangingPunct="0">
+              <a:defRPr sz="9300">
+                <a:solidFill>
+                  <a:schemeClr val="tx1"/>
+                </a:solidFill>
+                <a:latin typeface="Arial"/>
+              </a:defRPr>
+            </a:lvl2pPr>
+            <a:lvl3pPr marL="1143000" indent="-228600" defTabSz="4703763" eaLnBrk="0" hangingPunct="0">
+              <a:defRPr sz="9300">
+                <a:solidFill>
+                  <a:schemeClr val="tx1"/>
+                </a:solidFill>
+                <a:latin typeface="Arial"/>
+              </a:defRPr>
+            </a:lvl3pPr>
+            <a:lvl4pPr marL="1600200" indent="-228600" defTabSz="4703763" eaLnBrk="0" hangingPunct="0">
+              <a:defRPr sz="9300">
+                <a:solidFill>
+                  <a:schemeClr val="tx1"/>
+                </a:solidFill>
+                <a:latin typeface="Arial"/>
+              </a:defRPr>
+            </a:lvl4pPr>
+            <a:lvl5pPr marL="2057400" indent="-228600" defTabSz="4703763" eaLnBrk="0" hangingPunct="0">
+              <a:defRPr sz="9300">
+                <a:solidFill>
+                  <a:schemeClr val="tx1"/>
+                </a:solidFill>
+                <a:latin typeface="Arial"/>
+              </a:defRPr>
+            </a:lvl5pPr>
+            <a:lvl6pPr marL="2514600" indent="-228600" defTabSz="4703763" eaLnBrk="0" fontAlgn="base" hangingPunct="0">
+              <a:spcBef>
+                <a:spcPct val="0"/>
+              </a:spcBef>
+              <a:spcAft>
+                <a:spcPct val="0"/>
+              </a:spcAft>
+              <a:defRPr sz="9300">
+                <a:solidFill>
+                  <a:schemeClr val="tx1"/>
+                </a:solidFill>
+                <a:latin typeface="Arial"/>
+              </a:defRPr>
+            </a:lvl6pPr>
+            <a:lvl7pPr marL="2971800" indent="-228600" defTabSz="4703763" eaLnBrk="0" fontAlgn="base" hangingPunct="0">
+              <a:spcBef>
+                <a:spcPct val="0"/>
+              </a:spcBef>
+              <a:spcAft>
+                <a:spcPct val="0"/>
+              </a:spcAft>
+              <a:defRPr sz="9300">
+                <a:solidFill>
+                  <a:schemeClr val="tx1"/>
+                </a:solidFill>
+                <a:latin typeface="Arial"/>
+              </a:defRPr>
+            </a:lvl7pPr>
+            <a:lvl8pPr marL="3429000" indent="-228600" defTabSz="4703763" eaLnBrk="0" fontAlgn="base" hangingPunct="0">
+              <a:spcBef>
+                <a:spcPct val="0"/>
+              </a:spcBef>
+              <a:spcAft>
+                <a:spcPct val="0"/>
+              </a:spcAft>
+              <a:defRPr sz="9300">
+                <a:solidFill>
+                  <a:schemeClr val="tx1"/>
+                </a:solidFill>
+                <a:latin typeface="Arial"/>
+              </a:defRPr>
+            </a:lvl8pPr>
+            <a:lvl9pPr marL="3886200" indent="-228600" defTabSz="4703763" eaLnBrk="0" fontAlgn="base" hangingPunct="0">
+              <a:spcBef>
+                <a:spcPct val="0"/>
+              </a:spcBef>
+              <a:spcAft>
+                <a:spcPct val="0"/>
+              </a:spcAft>
+              <a:defRPr sz="9300">
+                <a:solidFill>
+                  <a:schemeClr val="tx1"/>
+                </a:solidFill>
+                <a:latin typeface="Arial"/>
+              </a:defRPr>
+            </a:lvl9pPr>
+          </a:lstStyle>
+          <a:p>
+            <a:r>
+              <a:rPr lang="en-US" sz="2400" dirty="0">
+                <a:latin typeface="Titillium Web" panose="00000500000000000000" pitchFamily="2" charset="0"/>
+                <a:ea typeface="Open Sans" panose="020B0606030504020204" pitchFamily="34" charset="0"/>
+                <a:cs typeface="Open Sans" panose="020B0606030504020204" pitchFamily="34" charset="0"/>
+              </a:rPr>
+              <a:t>News Company Analysis</a:t>
+            </a:r>
+          </a:p>
+          <a:p>
+            <a:endParaRPr lang="en-US" sz="2400" dirty="0">
+              <a:latin typeface="Titillium Web" panose="00000500000000000000" pitchFamily="2" charset="0"/>
+              <a:ea typeface="Open Sans" panose="020B0606030504020204" pitchFamily="34" charset="0"/>
+              <a:cs typeface="Open Sans" panose="020B0606030504020204" pitchFamily="34" charset="0"/>
+            </a:endParaRPr>
+          </a:p>
+          <a:p>
+            <a:r>
+              <a:rPr lang="en-US" sz="2400" dirty="0">
+                <a:latin typeface="Titillium Web" panose="00000500000000000000" pitchFamily="2" charset="0"/>
+                <a:ea typeface="Open Sans" panose="020B0606030504020204" pitchFamily="34" charset="0"/>
+                <a:cs typeface="Open Sans" panose="020B0606030504020204" pitchFamily="34" charset="0"/>
+              </a:rPr>
+              <a:t>Further analysis can be done with the dataset on the companies reporting on solar energy. Metrics such as common topics, geographical focus, and coverage percentage can provide an understanding of how news corporations in the dataset report on solar energy.</a:t>
+            </a:r>
+          </a:p>
+          <a:p>
+            <a:endParaRPr lang="en-US" sz="2400" dirty="0">
+              <a:latin typeface="Titillium Web" panose="00000500000000000000" pitchFamily="2" charset="0"/>
+              <a:ea typeface="Open Sans" panose="020B0606030504020204" pitchFamily="34" charset="0"/>
+              <a:cs typeface="Open Sans" panose="020B0606030504020204" pitchFamily="34" charset="0"/>
+            </a:endParaRPr>
+          </a:p>
+          <a:p>
+            <a:r>
+              <a:rPr lang="en-US" sz="2400" dirty="0">
+                <a:latin typeface="Titillium Web" panose="00000500000000000000" pitchFamily="2" charset="0"/>
+                <a:ea typeface="Open Sans" panose="020B0606030504020204" pitchFamily="34" charset="0"/>
+                <a:cs typeface="Open Sans" panose="020B0606030504020204" pitchFamily="34" charset="0"/>
+              </a:rPr>
+              <a:t>Expansion to Other Topics</a:t>
+            </a:r>
+          </a:p>
+          <a:p>
+            <a:endParaRPr lang="en-US" sz="2400" dirty="0">
+              <a:latin typeface="Titillium Web" panose="00000500000000000000" pitchFamily="2" charset="0"/>
+              <a:ea typeface="Open Sans" panose="020B0606030504020204" pitchFamily="34" charset="0"/>
+              <a:cs typeface="Open Sans" panose="020B0606030504020204" pitchFamily="34" charset="0"/>
+            </a:endParaRPr>
+          </a:p>
+          <a:p>
+            <a:r>
+              <a:rPr lang="en-US" sz="2400" dirty="0">
+                <a:latin typeface="Titillium Web" panose="00000500000000000000" pitchFamily="2" charset="0"/>
+                <a:ea typeface="Open Sans" panose="020B0606030504020204" pitchFamily="34" charset="0"/>
+                <a:cs typeface="Open Sans" panose="020B0606030504020204" pitchFamily="34" charset="0"/>
+              </a:rPr>
+              <a:t>A similar pipeline can be applied to other topics beyond solar energy. As the Cornell Newsroom dataset is not limited to solar energy, data filtering strategies with different topic-specific keywords can be applied to construct similar datasets for other topics and network analyses.</a:t>
+            </a:r>
+          </a:p>
+        </p:txBody>
+      </p:sp>
+      <p:sp>
+        <p:nvSpPr>
+          <p:cNvPr id="248" name="Rectangle 5">
+            <a:extLst>
+              <a:ext uri="{FF2B5EF4-FFF2-40B4-BE49-F238E27FC236}">
+                <a16:creationId xmlns:a16="http://schemas.microsoft.com/office/drawing/2014/main" id="{8EB9A9AE-9CE2-CF79-0BF2-28093D349CFA}"/>
+              </a:ext>
+            </a:extLst>
+          </p:cNvPr>
+          <p:cNvSpPr>
+            <a:spLocks noChangeArrowheads="1"/>
+          </p:cNvSpPr>
+          <p:nvPr/>
+        </p:nvSpPr>
+        <p:spPr bwMode="auto">
+          <a:xfrm>
+            <a:off x="33097620" y="14112140"/>
+            <a:ext cx="10058400" cy="784225"/>
+          </a:xfrm>
+          <a:prstGeom prst="rect">
+            <a:avLst/>
+          </a:prstGeom>
+          <a:solidFill>
+            <a:srgbClr val="1482A5"/>
+          </a:solidFill>
+          <a:ln>
+            <a:noFill/>
+          </a:ln>
+          <a:effectLst/>
+        </p:spPr>
+        <p:txBody>
+          <a:bodyPr wrap="none" lIns="274320" tIns="68580" rIns="274320" bIns="68580" anchor="ctr"/>
+          <a:lstStyle>
+            <a:defPPr>
+              <a:defRPr kern="1200"/>
+            </a:defPPr>
+          </a:lstStyle>
+          <a:p>
+            <a:pPr defTabSz="4703763"/>
+            <a:r>
+              <a:rPr lang="en-US" sz="3600" dirty="0">
+                <a:solidFill>
+                  <a:schemeClr val="bg1"/>
+                </a:solidFill>
+                <a:latin typeface="Amaranth" panose="02000503050000020004" pitchFamily="2" charset="0"/>
+              </a:rPr>
+              <a:t>Limitations</a:t>
+            </a:r>
+          </a:p>
+        </p:txBody>
+      </p:sp>
+      <p:sp>
+        <p:nvSpPr>
+          <p:cNvPr id="250" name="Text Box 6">
+            <a:extLst>
+              <a:ext uri="{FF2B5EF4-FFF2-40B4-BE49-F238E27FC236}">
+                <a16:creationId xmlns:a16="http://schemas.microsoft.com/office/drawing/2014/main" id="{B54F5422-44CD-FE3F-1DF0-906EFB78BC57}"/>
+              </a:ext>
+            </a:extLst>
+          </p:cNvPr>
+          <p:cNvSpPr txBox="1">
+            <a:spLocks noChangeArrowheads="1"/>
+          </p:cNvSpPr>
+          <p:nvPr/>
+        </p:nvSpPr>
+        <p:spPr bwMode="auto">
+          <a:xfrm>
+            <a:off x="33093961" y="15183014"/>
+            <a:ext cx="10058400" cy="3508653"/>
+          </a:xfrm>
+          <a:prstGeom prst="rect">
+            <a:avLst/>
+          </a:prstGeom>
+          <a:solidFill>
+            <a:srgbClr val="B4D3E2"/>
+          </a:solidFill>
+          <a:ln>
+            <a:noFill/>
+          </a:ln>
+          <a:effectLst>
+            <a:softEdge rad="0"/>
+          </a:effectLst>
+        </p:spPr>
+        <p:txBody>
+          <a:bodyPr lIns="274320" tIns="274320" rIns="274320" bIns="274320">
+            <a:spAutoFit/>
+          </a:bodyPr>
+          <a:lstStyle>
+            <a:defPPr>
+              <a:defRPr kern="1200"/>
+            </a:defPPr>
+            <a:lvl1pPr defTabSz="4703763" eaLnBrk="0" hangingPunct="0">
+              <a:defRPr sz="9300">
+                <a:solidFill>
+                  <a:schemeClr val="tx1"/>
+                </a:solidFill>
+                <a:latin typeface="Arial"/>
+              </a:defRPr>
+            </a:lvl1pPr>
+            <a:lvl2pPr marL="742950" indent="-285750" defTabSz="4703763" eaLnBrk="0" hangingPunct="0">
+              <a:defRPr sz="9300">
+                <a:solidFill>
+                  <a:schemeClr val="tx1"/>
+                </a:solidFill>
+                <a:latin typeface="Arial"/>
+              </a:defRPr>
+            </a:lvl2pPr>
+            <a:lvl3pPr marL="1143000" indent="-228600" defTabSz="4703763" eaLnBrk="0" hangingPunct="0">
+              <a:defRPr sz="9300">
+                <a:solidFill>
+                  <a:schemeClr val="tx1"/>
+                </a:solidFill>
+                <a:latin typeface="Arial"/>
+              </a:defRPr>
+            </a:lvl3pPr>
+            <a:lvl4pPr marL="1600200" indent="-228600" defTabSz="4703763" eaLnBrk="0" hangingPunct="0">
+              <a:defRPr sz="9300">
+                <a:solidFill>
+                  <a:schemeClr val="tx1"/>
+                </a:solidFill>
+                <a:latin typeface="Arial"/>
+              </a:defRPr>
+            </a:lvl4pPr>
+            <a:lvl5pPr marL="2057400" indent="-228600" defTabSz="4703763" eaLnBrk="0" hangingPunct="0">
+              <a:defRPr sz="9300">
+                <a:solidFill>
+                  <a:schemeClr val="tx1"/>
+                </a:solidFill>
+                <a:latin typeface="Arial"/>
+              </a:defRPr>
+            </a:lvl5pPr>
+            <a:lvl6pPr marL="2514600" indent="-228600" defTabSz="4703763" eaLnBrk="0" fontAlgn="base" hangingPunct="0">
+              <a:spcBef>
+                <a:spcPct val="0"/>
+              </a:spcBef>
+              <a:spcAft>
+                <a:spcPct val="0"/>
+              </a:spcAft>
+              <a:defRPr sz="9300">
+                <a:solidFill>
+                  <a:schemeClr val="tx1"/>
+                </a:solidFill>
+                <a:latin typeface="Arial"/>
+              </a:defRPr>
+            </a:lvl6pPr>
+            <a:lvl7pPr marL="2971800" indent="-228600" defTabSz="4703763" eaLnBrk="0" fontAlgn="base" hangingPunct="0">
+              <a:spcBef>
+                <a:spcPct val="0"/>
+              </a:spcBef>
+              <a:spcAft>
+                <a:spcPct val="0"/>
+              </a:spcAft>
+              <a:defRPr sz="9300">
+                <a:solidFill>
+                  <a:schemeClr val="tx1"/>
+                </a:solidFill>
+                <a:latin typeface="Arial"/>
+              </a:defRPr>
+            </a:lvl7pPr>
+            <a:lvl8pPr marL="3429000" indent="-228600" defTabSz="4703763" eaLnBrk="0" fontAlgn="base" hangingPunct="0">
+              <a:spcBef>
+                <a:spcPct val="0"/>
+              </a:spcBef>
+              <a:spcAft>
+                <a:spcPct val="0"/>
+              </a:spcAft>
+              <a:defRPr sz="9300">
+                <a:solidFill>
+                  <a:schemeClr val="tx1"/>
+                </a:solidFill>
+                <a:latin typeface="Arial"/>
+              </a:defRPr>
+            </a:lvl8pPr>
+            <a:lvl9pPr marL="3886200" indent="-228600" defTabSz="4703763" eaLnBrk="0" fontAlgn="base" hangingPunct="0">
+              <a:spcBef>
+                <a:spcPct val="0"/>
+              </a:spcBef>
+              <a:spcAft>
+                <a:spcPct val="0"/>
+              </a:spcAft>
+              <a:defRPr sz="9300">
+                <a:solidFill>
+                  <a:schemeClr val="tx1"/>
+                </a:solidFill>
+                <a:latin typeface="Arial"/>
+              </a:defRPr>
+            </a:lvl9pPr>
+          </a:lstStyle>
+          <a:p>
+            <a:pPr marL="342900" indent="-342900">
+              <a:buFont typeface="Arial" panose="020B0604020202020204" pitchFamily="34" charset="0"/>
+              <a:buChar char="•"/>
+            </a:pPr>
+            <a:r>
+              <a:rPr lang="en-US" sz="2400" dirty="0">
+                <a:latin typeface="Titillium Web" panose="00000500000000000000" pitchFamily="2" charset="0"/>
+                <a:ea typeface="Open Sans" panose="020B0606030504020204" pitchFamily="34" charset="0"/>
+                <a:cs typeface="Open Sans" panose="020B0606030504020204" pitchFamily="34" charset="0"/>
+              </a:rPr>
+              <a:t>Articles are limited to 1998-2017, limiting analysis for current trends such as Artificial Intelligence. This creates a restricted analysis of solar energy, only allowing for a look into the past.</a:t>
+            </a:r>
+          </a:p>
+          <a:p>
+            <a:pPr marL="342900" indent="-342900">
+              <a:buFont typeface="Arial" panose="020B0604020202020204" pitchFamily="34" charset="0"/>
+              <a:buChar char="•"/>
+            </a:pPr>
+            <a:r>
+              <a:rPr lang="en-US" sz="2400" dirty="0">
+                <a:latin typeface="Titillium Web" panose="00000500000000000000" pitchFamily="2" charset="0"/>
+                <a:ea typeface="Open Sans" panose="020B0606030504020204" pitchFamily="34" charset="0"/>
+                <a:cs typeface="Open Sans" panose="020B0606030504020204" pitchFamily="34" charset="0"/>
+              </a:rPr>
+              <a:t>Sources are limited to the 38 major publications originally found in the Cornell Newsroom dataset, limiting the diversity of information available. News publications outside the United States are likely to be missing, in particular those in other languages. Therefore, this project is likely to reveal highly Americanized views of solar energy.</a:t>
+            </a:r>
+          </a:p>
+        </p:txBody>
+      </p:sp>
+      <p:pic>
+        <p:nvPicPr>
+          <p:cNvPr id="253" name="Picture 252">
+            <a:extLst>
+              <a:ext uri="{FF2B5EF4-FFF2-40B4-BE49-F238E27FC236}">
+                <a16:creationId xmlns:a16="http://schemas.microsoft.com/office/drawing/2014/main" id="{562B6D9C-DDD3-4929-5FDE-80BDB426CF81}"/>
+              </a:ext>
+            </a:extLst>
+          </p:cNvPr>
+          <p:cNvPicPr>
+            <a:picLocks noChangeAspect="1"/>
+          </p:cNvPicPr>
+          <p:nvPr/>
+        </p:nvPicPr>
+        <p:blipFill>
+          <a:blip r:embed="rId7"/>
+          <a:stretch>
+            <a:fillRect/>
+          </a:stretch>
+        </p:blipFill>
+        <p:spPr>
+          <a:xfrm>
+            <a:off x="11980905" y="23934819"/>
+            <a:ext cx="9139468" cy="7068807"/>
+          </a:xfrm>
+          <a:prstGeom prst="rect">
+            <a:avLst/>
+          </a:prstGeom>
+        </p:spPr>
+      </p:pic>
+      <p:graphicFrame>
+        <p:nvGraphicFramePr>
+          <p:cNvPr id="254" name="Table 253">
+            <a:extLst>
+              <a:ext uri="{FF2B5EF4-FFF2-40B4-BE49-F238E27FC236}">
+                <a16:creationId xmlns:a16="http://schemas.microsoft.com/office/drawing/2014/main" id="{4948646E-1634-82C2-40D9-444CDAF07FF7}"/>
+              </a:ext>
+            </a:extLst>
+          </p:cNvPr>
+          <p:cNvGraphicFramePr>
+            <a:graphicFrameLocks noGrp="1"/>
+          </p:cNvGraphicFramePr>
+          <p:nvPr>
+            <p:extLst>
+              <p:ext uri="{D42A27DB-BD31-4B8C-83A1-F6EECF244321}">
+                <p14:modId xmlns:p14="http://schemas.microsoft.com/office/powerpoint/2010/main" val="1806892141"/>
+              </p:ext>
+            </p:extLst>
+          </p:nvPr>
+        </p:nvGraphicFramePr>
+        <p:xfrm>
+          <a:off x="2261956" y="24081591"/>
+          <a:ext cx="7001189" cy="2743200"/>
+        </p:xfrm>
+        <a:graphic>
+          <a:graphicData uri="http://schemas.openxmlformats.org/drawingml/2006/table">
+            <a:tbl>
+              <a:tblPr firstRow="1" firstCol="1">
+                <a:tableStyleId>{2D5ABB26-0587-4C30-8999-92F81FD0307C}</a:tableStyleId>
+              </a:tblPr>
+              <a:tblGrid>
+                <a:gridCol w="3411188">
+                  <a:extLst>
+                    <a:ext uri="{9D8B030D-6E8A-4147-A177-3AD203B41FA5}">
+                      <a16:colId xmlns:a16="http://schemas.microsoft.com/office/drawing/2014/main" val="3833514160"/>
+                    </a:ext>
+                  </a:extLst>
+                </a:gridCol>
+                <a:gridCol w="1880968">
+                  <a:extLst>
+                    <a:ext uri="{9D8B030D-6E8A-4147-A177-3AD203B41FA5}">
+                      <a16:colId xmlns:a16="http://schemas.microsoft.com/office/drawing/2014/main" val="1902017129"/>
+                    </a:ext>
+                  </a:extLst>
+                </a:gridCol>
+                <a:gridCol w="1709033">
+                  <a:extLst>
+                    <a:ext uri="{9D8B030D-6E8A-4147-A177-3AD203B41FA5}">
+                      <a16:colId xmlns:a16="http://schemas.microsoft.com/office/drawing/2014/main" val="2938504809"/>
+                    </a:ext>
+                  </a:extLst>
+                </a:gridCol>
+              </a:tblGrid>
+              <a:tr h="0">
+                <a:tc>
+                  <a:txBody>
+                    <a:bodyPr/>
+                    <a:lstStyle/>
+                    <a:p>
+                      <a:pPr>
+                        <a:buNone/>
+                      </a:pPr>
+                      <a:r>
+                        <a:rPr lang="en-US" sz="2400" b="1" dirty="0">
+                          <a:latin typeface="Titillium Web" panose="00000500000000000000" pitchFamily="2" charset="0"/>
+                        </a:rPr>
+                        <a:t>Item</a:t>
+                      </a:r>
+                    </a:p>
+                  </a:txBody>
+                  <a:tcPr anchor="ctr">
+                    <a:lnL w="12700" cap="flat" cmpd="sng" algn="ctr">
+                      <a:solidFill>
+                        <a:schemeClr val="tx1"/>
+                      </a:solidFill>
+                      <a:prstDash val="solid"/>
+                      <a:round/>
+                      <a:headEnd type="none" w="med" len="med"/>
+                      <a:tailEnd type="none" w="med" len="med"/>
+                    </a:lnL>
+                    <a:lnR w="12700" cap="flat" cmpd="sng" algn="ctr">
+                      <a:noFill/>
+                      <a:prstDash val="solid"/>
+                      <a:round/>
+                      <a:headEnd type="none" w="med" len="med"/>
+                      <a:tailEnd type="none" w="med" len="med"/>
+                    </a:lnR>
+                    <a:lnT w="12700" cap="flat" cmpd="sng" algn="ctr">
+                      <a:solidFill>
+                        <a:schemeClr val="tx1"/>
+                      </a:solidFill>
+                      <a:prstDash val="solid"/>
+                      <a:round/>
+                      <a:headEnd type="none" w="med" len="med"/>
+                      <a:tailEnd type="none" w="med" len="med"/>
+                    </a:lnT>
+                    <a:lnB w="12700" cap="flat" cmpd="sng" algn="ctr">
+                      <a:solidFill>
+                        <a:schemeClr val="tx1"/>
+                      </a:solidFill>
+                      <a:prstDash val="solid"/>
+                      <a:round/>
+                      <a:headEnd type="none" w="med" len="med"/>
+                      <a:tailEnd type="none" w="med" len="med"/>
+                    </a:lnB>
+                    <a:lnTlToBr w="12700" cmpd="sng">
+                      <a:noFill/>
+                      <a:prstDash val="solid"/>
+                    </a:lnTlToBr>
+                    <a:lnBlToTr w="12700" cmpd="sng">
+                      <a:noFill/>
+                      <a:prstDash val="solid"/>
+                    </a:lnBlToTr>
+                    <a:solidFill>
+                      <a:srgbClr val="569BBE"/>
+                    </a:solidFill>
+                  </a:tcPr>
+                </a:tc>
+                <a:tc>
+                  <a:txBody>
+                    <a:bodyPr/>
+                    <a:lstStyle/>
+                    <a:p>
+                      <a:pPr algn="r">
+                        <a:buNone/>
+                      </a:pPr>
+                      <a:r>
+                        <a:rPr lang="en-US" sz="2400" b="1" dirty="0">
+                          <a:latin typeface="Titillium Web" panose="00000500000000000000" pitchFamily="2" charset="0"/>
+                        </a:rPr>
+                        <a:t>Before</a:t>
+                      </a:r>
+                    </a:p>
+                  </a:txBody>
+                  <a:tcPr anchor="ctr">
+                    <a:lnL w="12700" cap="flat" cmpd="sng" algn="ctr">
+                      <a:noFill/>
+                      <a:prstDash val="solid"/>
+                      <a:round/>
+                      <a:headEnd type="none" w="med" len="med"/>
+                      <a:tailEnd type="none" w="med" len="med"/>
+                    </a:lnL>
+                    <a:lnR w="12700" cap="flat" cmpd="sng" algn="ctr">
+                      <a:noFill/>
+                      <a:prstDash val="solid"/>
+                      <a:round/>
+                      <a:headEnd type="none" w="med" len="med"/>
+                      <a:tailEnd type="none" w="med" len="med"/>
+                    </a:lnR>
+                    <a:lnT w="12700" cap="flat" cmpd="sng" algn="ctr">
+                      <a:solidFill>
+                        <a:schemeClr val="tx1"/>
+                      </a:solidFill>
+                      <a:prstDash val="solid"/>
+                      <a:round/>
+                      <a:headEnd type="none" w="med" len="med"/>
+                      <a:tailEnd type="none" w="med" len="med"/>
+                    </a:lnT>
+                    <a:lnB w="12700" cap="flat" cmpd="sng" algn="ctr">
+                      <a:solidFill>
+                        <a:schemeClr val="tx1"/>
+                      </a:solidFill>
+                      <a:prstDash val="solid"/>
+                      <a:round/>
+                      <a:headEnd type="none" w="med" len="med"/>
+                      <a:tailEnd type="none" w="med" len="med"/>
+                    </a:lnB>
+                    <a:lnTlToBr w="12700" cmpd="sng">
+                      <a:noFill/>
+                      <a:prstDash val="solid"/>
+                    </a:lnTlToBr>
+                    <a:lnBlToTr w="12700" cmpd="sng">
+                      <a:noFill/>
+                      <a:prstDash val="solid"/>
+                    </a:lnBlToTr>
+                    <a:solidFill>
+                      <a:srgbClr val="569BBE"/>
+                    </a:solidFill>
+                  </a:tcPr>
+                </a:tc>
+                <a:tc>
+                  <a:txBody>
+                    <a:bodyPr/>
+                    <a:lstStyle/>
+                    <a:p>
+                      <a:pPr algn="r">
+                        <a:buNone/>
+                      </a:pPr>
+                      <a:r>
+                        <a:rPr lang="en-US" sz="2400" b="1" dirty="0">
+                          <a:latin typeface="Titillium Web" panose="00000500000000000000" pitchFamily="2" charset="0"/>
+                        </a:rPr>
+                        <a:t>After</a:t>
+                      </a:r>
+                    </a:p>
+                  </a:txBody>
+                  <a:tcPr anchor="ctr">
+                    <a:lnL w="12700" cap="flat" cmpd="sng" algn="ctr">
+                      <a:noFill/>
+                      <a:prstDash val="solid"/>
+                      <a:round/>
+                      <a:headEnd type="none" w="med" len="med"/>
+                      <a:tailEnd type="none" w="med" len="med"/>
+                    </a:lnL>
+                    <a:lnR w="12700" cap="flat" cmpd="sng" algn="ctr">
+                      <a:solidFill>
+                        <a:schemeClr val="tx1"/>
+                      </a:solidFill>
+                      <a:prstDash val="solid"/>
+                      <a:round/>
+                      <a:headEnd type="none" w="med" len="med"/>
+                      <a:tailEnd type="none" w="med" len="med"/>
+                    </a:lnR>
+                    <a:lnT w="12700" cap="flat" cmpd="sng" algn="ctr">
+                      <a:solidFill>
+                        <a:schemeClr val="tx1"/>
+                      </a:solidFill>
+                      <a:prstDash val="solid"/>
+                      <a:round/>
+                      <a:headEnd type="none" w="med" len="med"/>
+                      <a:tailEnd type="none" w="med" len="med"/>
+                    </a:lnT>
+                    <a:lnB w="12700" cap="flat" cmpd="sng" algn="ctr">
+                      <a:solidFill>
+                        <a:schemeClr val="tx1"/>
+                      </a:solidFill>
+                      <a:prstDash val="solid"/>
+                      <a:round/>
+                      <a:headEnd type="none" w="med" len="med"/>
+                      <a:tailEnd type="none" w="med" len="med"/>
+                    </a:lnB>
+                    <a:lnTlToBr w="12700" cmpd="sng">
+                      <a:noFill/>
+                      <a:prstDash val="solid"/>
+                    </a:lnTlToBr>
+                    <a:lnBlToTr w="12700" cmpd="sng">
+                      <a:noFill/>
+                      <a:prstDash val="solid"/>
+                    </a:lnBlToTr>
+                    <a:solidFill>
+                      <a:srgbClr val="569BBE"/>
+                    </a:solidFill>
+                  </a:tcPr>
+                </a:tc>
+                <a:extLst>
+                  <a:ext uri="{0D108BD9-81ED-4DB2-BD59-A6C34878D82A}">
+                    <a16:rowId xmlns:a16="http://schemas.microsoft.com/office/drawing/2014/main" val="1046880155"/>
+                  </a:ext>
+                </a:extLst>
+              </a:tr>
+              <a:tr h="0">
+                <a:tc>
+                  <a:txBody>
+                    <a:bodyPr/>
+                    <a:lstStyle/>
+                    <a:p>
+                      <a:pPr>
+                        <a:buNone/>
+                      </a:pPr>
+                      <a:r>
+                        <a:rPr lang="en-US" sz="2400" b="1" dirty="0">
+                          <a:latin typeface="Titillium Web" panose="00000500000000000000" pitchFamily="2" charset="0"/>
+                        </a:rPr>
+                        <a:t>Number of articles</a:t>
+                      </a:r>
+                    </a:p>
+                  </a:txBody>
+                  <a:tcPr anchor="ctr">
+                    <a:lnL w="12700" cap="flat" cmpd="sng" algn="ctr">
+                      <a:solidFill>
+                        <a:schemeClr val="tx1"/>
+                      </a:solidFill>
+                      <a:prstDash val="solid"/>
+                      <a:round/>
+                      <a:headEnd type="none" w="med" len="med"/>
+                      <a:tailEnd type="none" w="med" len="med"/>
+                    </a:lnL>
+                    <a:lnR w="12700" cap="flat" cmpd="sng" algn="ctr">
+                      <a:solidFill>
+                        <a:schemeClr val="tx1"/>
+                      </a:solidFill>
+                      <a:prstDash val="solid"/>
+                      <a:round/>
+                      <a:headEnd type="none" w="med" len="med"/>
+                      <a:tailEnd type="none" w="med" len="med"/>
+                    </a:lnR>
+                    <a:lnT w="12700" cap="flat" cmpd="sng" algn="ctr">
+                      <a:solidFill>
+                        <a:schemeClr val="tx1"/>
+                      </a:solidFill>
+                      <a:prstDash val="solid"/>
+                      <a:round/>
+                      <a:headEnd type="none" w="med" len="med"/>
+                      <a:tailEnd type="none" w="med" len="med"/>
+                    </a:lnT>
+                    <a:lnB w="12700" cap="flat" cmpd="sng" algn="ctr">
+                      <a:solidFill>
+                        <a:schemeClr val="tx1"/>
+                      </a:solidFill>
+                      <a:prstDash val="solid"/>
+                      <a:round/>
+                      <a:headEnd type="none" w="med" len="med"/>
+                      <a:tailEnd type="none" w="med" len="med"/>
+                    </a:lnB>
+                    <a:solidFill>
+                      <a:srgbClr val="B4D3E2"/>
+                    </a:solidFill>
+                  </a:tcPr>
+                </a:tc>
+                <a:tc>
+                  <a:txBody>
+                    <a:bodyPr/>
+                    <a:lstStyle/>
+                    <a:p>
+                      <a:pPr algn="r">
+                        <a:buNone/>
+                      </a:pPr>
+                      <a:r>
+                        <a:rPr lang="en-US" sz="2400" dirty="0">
+                          <a:latin typeface="Titillium Web" panose="00000500000000000000" pitchFamily="2" charset="0"/>
+                        </a:rPr>
+                        <a:t>5,374</a:t>
+                      </a:r>
+                    </a:p>
+                  </a:txBody>
+                  <a:tcPr anchor="ctr">
+                    <a:lnL w="12700" cap="flat" cmpd="sng" algn="ctr">
+                      <a:solidFill>
+                        <a:schemeClr val="tx1"/>
+                      </a:solidFill>
+                      <a:prstDash val="solid"/>
+                      <a:round/>
+                      <a:headEnd type="none" w="med" len="med"/>
+                      <a:tailEnd type="none" w="med" len="med"/>
+                    </a:lnL>
+                    <a:lnR w="12700" cap="flat" cmpd="sng" algn="ctr">
+                      <a:solidFill>
+                        <a:schemeClr val="tx1"/>
+                      </a:solidFill>
+                      <a:prstDash val="solid"/>
+                      <a:round/>
+                      <a:headEnd type="none" w="med" len="med"/>
+                      <a:tailEnd type="none" w="med" len="med"/>
+                    </a:lnR>
+                    <a:lnT w="12700" cap="flat" cmpd="sng" algn="ctr">
+                      <a:solidFill>
+                        <a:schemeClr val="tx1"/>
+                      </a:solidFill>
+                      <a:prstDash val="solid"/>
+                      <a:round/>
+                      <a:headEnd type="none" w="med" len="med"/>
+                      <a:tailEnd type="none" w="med" len="med"/>
+                    </a:lnT>
+                    <a:lnB w="12700" cap="flat" cmpd="sng" algn="ctr">
+                      <a:solidFill>
+                        <a:schemeClr val="tx1"/>
+                      </a:solidFill>
+                      <a:prstDash val="solid"/>
+                      <a:round/>
+                      <a:headEnd type="none" w="med" len="med"/>
+                      <a:tailEnd type="none" w="med" len="med"/>
+                    </a:lnB>
+                    <a:solidFill>
+                      <a:srgbClr val="B4D3E2"/>
+                    </a:solidFill>
+                  </a:tcPr>
+                </a:tc>
+                <a:tc>
+                  <a:txBody>
+                    <a:bodyPr/>
+                    <a:lstStyle/>
+                    <a:p>
+                      <a:pPr algn="r">
+                        <a:buNone/>
+                      </a:pPr>
+                      <a:r>
+                        <a:rPr lang="en-US" sz="2400" dirty="0">
+                          <a:latin typeface="Titillium Web" panose="00000500000000000000" pitchFamily="2" charset="0"/>
+                        </a:rPr>
+                        <a:t>1,985</a:t>
+                      </a:r>
+                    </a:p>
+                  </a:txBody>
+                  <a:tcPr anchor="ctr">
+                    <a:lnL w="12700" cap="flat" cmpd="sng" algn="ctr">
+                      <a:solidFill>
+                        <a:schemeClr val="tx1"/>
+                      </a:solidFill>
+                      <a:prstDash val="solid"/>
+                      <a:round/>
+                      <a:headEnd type="none" w="med" len="med"/>
+                      <a:tailEnd type="none" w="med" len="med"/>
+                    </a:lnL>
+                    <a:lnR w="12700" cap="flat" cmpd="sng" algn="ctr">
+                      <a:solidFill>
+                        <a:schemeClr val="tx1"/>
+                      </a:solidFill>
+                      <a:prstDash val="solid"/>
+                      <a:round/>
+                      <a:headEnd type="none" w="med" len="med"/>
+                      <a:tailEnd type="none" w="med" len="med"/>
+                    </a:lnR>
+                    <a:lnT w="12700" cap="flat" cmpd="sng" algn="ctr">
+                      <a:solidFill>
+                        <a:schemeClr val="tx1"/>
+                      </a:solidFill>
+                      <a:prstDash val="solid"/>
+                      <a:round/>
+                      <a:headEnd type="none" w="med" len="med"/>
+                      <a:tailEnd type="none" w="med" len="med"/>
+                    </a:lnT>
+                    <a:lnB w="12700" cap="flat" cmpd="sng" algn="ctr">
+                      <a:solidFill>
+                        <a:schemeClr val="tx1"/>
+                      </a:solidFill>
+                      <a:prstDash val="solid"/>
+                      <a:round/>
+                      <a:headEnd type="none" w="med" len="med"/>
+                      <a:tailEnd type="none" w="med" len="med"/>
+                    </a:lnB>
+                    <a:solidFill>
+                      <a:srgbClr val="B4D3E2"/>
+                    </a:solidFill>
+                  </a:tcPr>
+                </a:tc>
+                <a:extLst>
+                  <a:ext uri="{0D108BD9-81ED-4DB2-BD59-A6C34878D82A}">
+                    <a16:rowId xmlns:a16="http://schemas.microsoft.com/office/drawing/2014/main" val="385092680"/>
+                  </a:ext>
+                </a:extLst>
+              </a:tr>
+              <a:tr h="0">
+                <a:tc>
+                  <a:txBody>
+                    <a:bodyPr/>
+                    <a:lstStyle/>
+                    <a:p>
+                      <a:pPr>
+                        <a:buNone/>
+                      </a:pPr>
+                      <a:r>
+                        <a:rPr lang="en-US" sz="2400" b="1" dirty="0">
+                          <a:latin typeface="Titillium Web" panose="00000500000000000000" pitchFamily="2" charset="0"/>
+                        </a:rPr>
+                        <a:t>System prompt tokens</a:t>
+                      </a:r>
+                    </a:p>
+                  </a:txBody>
+                  <a:tcPr anchor="ctr">
+                    <a:lnL w="12700" cap="flat" cmpd="sng" algn="ctr">
+                      <a:solidFill>
+                        <a:schemeClr val="tx1"/>
+                      </a:solidFill>
+                      <a:prstDash val="solid"/>
+                      <a:round/>
+                      <a:headEnd type="none" w="med" len="med"/>
+                      <a:tailEnd type="none" w="med" len="med"/>
+                    </a:lnL>
+                    <a:lnR w="12700" cap="flat" cmpd="sng" algn="ctr">
+                      <a:solidFill>
+                        <a:schemeClr val="tx1"/>
+                      </a:solidFill>
+                      <a:prstDash val="solid"/>
+                      <a:round/>
+                      <a:headEnd type="none" w="med" len="med"/>
+                      <a:tailEnd type="none" w="med" len="med"/>
+                    </a:lnR>
+                    <a:lnT w="12700" cap="flat" cmpd="sng" algn="ctr">
+                      <a:solidFill>
+                        <a:schemeClr val="tx1"/>
+                      </a:solidFill>
+                      <a:prstDash val="solid"/>
+                      <a:round/>
+                      <a:headEnd type="none" w="med" len="med"/>
+                      <a:tailEnd type="none" w="med" len="med"/>
+                    </a:lnT>
+                    <a:lnB w="12700" cap="flat" cmpd="sng" algn="ctr">
+                      <a:solidFill>
+                        <a:schemeClr val="tx1"/>
+                      </a:solidFill>
+                      <a:prstDash val="solid"/>
+                      <a:round/>
+                      <a:headEnd type="none" w="med" len="med"/>
+                      <a:tailEnd type="none" w="med" len="med"/>
+                    </a:lnB>
+                    <a:solidFill>
+                      <a:srgbClr val="B4D3E2"/>
+                    </a:solidFill>
+                  </a:tcPr>
+                </a:tc>
+                <a:tc>
+                  <a:txBody>
+                    <a:bodyPr/>
+                    <a:lstStyle/>
+                    <a:p>
+                      <a:pPr algn="r">
+                        <a:buNone/>
+                      </a:pPr>
+                      <a:r>
+                        <a:rPr lang="en-US" sz="2400" dirty="0">
+                          <a:latin typeface="Titillium Web" panose="00000500000000000000" pitchFamily="2" charset="0"/>
+                        </a:rPr>
+                        <a:t>1,773</a:t>
+                      </a:r>
+                    </a:p>
+                  </a:txBody>
+                  <a:tcPr anchor="ctr">
+                    <a:lnL w="12700" cap="flat" cmpd="sng" algn="ctr">
+                      <a:solidFill>
+                        <a:schemeClr val="tx1"/>
+                      </a:solidFill>
+                      <a:prstDash val="solid"/>
+                      <a:round/>
+                      <a:headEnd type="none" w="med" len="med"/>
+                      <a:tailEnd type="none" w="med" len="med"/>
+                    </a:lnL>
+                    <a:lnR w="12700" cap="flat" cmpd="sng" algn="ctr">
+                      <a:solidFill>
+                        <a:schemeClr val="tx1"/>
+                      </a:solidFill>
+                      <a:prstDash val="solid"/>
+                      <a:round/>
+                      <a:headEnd type="none" w="med" len="med"/>
+                      <a:tailEnd type="none" w="med" len="med"/>
+                    </a:lnR>
+                    <a:lnT w="12700" cap="flat" cmpd="sng" algn="ctr">
+                      <a:solidFill>
+                        <a:schemeClr val="tx1"/>
+                      </a:solidFill>
+                      <a:prstDash val="solid"/>
+                      <a:round/>
+                      <a:headEnd type="none" w="med" len="med"/>
+                      <a:tailEnd type="none" w="med" len="med"/>
+                    </a:lnT>
+                    <a:lnB w="12700" cap="flat" cmpd="sng" algn="ctr">
+                      <a:solidFill>
+                        <a:schemeClr val="tx1"/>
+                      </a:solidFill>
+                      <a:prstDash val="solid"/>
+                      <a:round/>
+                      <a:headEnd type="none" w="med" len="med"/>
+                      <a:tailEnd type="none" w="med" len="med"/>
+                    </a:lnB>
+                    <a:solidFill>
+                      <a:srgbClr val="B4D3E2"/>
+                    </a:solidFill>
+                  </a:tcPr>
+                </a:tc>
+                <a:tc>
+                  <a:txBody>
+                    <a:bodyPr/>
+                    <a:lstStyle/>
+                    <a:p>
+                      <a:pPr algn="r">
+                        <a:buNone/>
+                      </a:pPr>
+                      <a:r>
+                        <a:rPr lang="en-US" sz="2400">
+                          <a:latin typeface="Titillium Web" panose="00000500000000000000" pitchFamily="2" charset="0"/>
+                        </a:rPr>
+                        <a:t>775</a:t>
+                      </a:r>
+                    </a:p>
+                  </a:txBody>
+                  <a:tcPr anchor="ctr">
+                    <a:lnL w="12700" cap="flat" cmpd="sng" algn="ctr">
+                      <a:solidFill>
+                        <a:schemeClr val="tx1"/>
+                      </a:solidFill>
+                      <a:prstDash val="solid"/>
+                      <a:round/>
+                      <a:headEnd type="none" w="med" len="med"/>
+                      <a:tailEnd type="none" w="med" len="med"/>
+                    </a:lnL>
+                    <a:lnR w="12700" cap="flat" cmpd="sng" algn="ctr">
+                      <a:solidFill>
+                        <a:schemeClr val="tx1"/>
+                      </a:solidFill>
+                      <a:prstDash val="solid"/>
+                      <a:round/>
+                      <a:headEnd type="none" w="med" len="med"/>
+                      <a:tailEnd type="none" w="med" len="med"/>
+                    </a:lnR>
+                    <a:lnT w="12700" cap="flat" cmpd="sng" algn="ctr">
+                      <a:solidFill>
+                        <a:schemeClr val="tx1"/>
+                      </a:solidFill>
+                      <a:prstDash val="solid"/>
+                      <a:round/>
+                      <a:headEnd type="none" w="med" len="med"/>
+                      <a:tailEnd type="none" w="med" len="med"/>
+                    </a:lnT>
+                    <a:lnB w="12700" cap="flat" cmpd="sng" algn="ctr">
+                      <a:solidFill>
+                        <a:schemeClr val="tx1"/>
+                      </a:solidFill>
+                      <a:prstDash val="solid"/>
+                      <a:round/>
+                      <a:headEnd type="none" w="med" len="med"/>
+                      <a:tailEnd type="none" w="med" len="med"/>
+                    </a:lnB>
+                    <a:solidFill>
+                      <a:srgbClr val="B4D3E2"/>
+                    </a:solidFill>
+                  </a:tcPr>
+                </a:tc>
+                <a:extLst>
+                  <a:ext uri="{0D108BD9-81ED-4DB2-BD59-A6C34878D82A}">
+                    <a16:rowId xmlns:a16="http://schemas.microsoft.com/office/drawing/2014/main" val="3255593464"/>
+                  </a:ext>
+                </a:extLst>
+              </a:tr>
+              <a:tr h="0">
+                <a:tc>
+                  <a:txBody>
+                    <a:bodyPr/>
+                    <a:lstStyle/>
+                    <a:p>
+                      <a:pPr>
+                        <a:buNone/>
+                      </a:pPr>
+                      <a:r>
+                        <a:rPr lang="en-US" sz="2400" b="1" dirty="0">
+                          <a:latin typeface="Titillium Web" panose="00000500000000000000" pitchFamily="2" charset="0"/>
+                        </a:rPr>
+                        <a:t>Article corpus tokens</a:t>
+                      </a:r>
+                    </a:p>
+                  </a:txBody>
+                  <a:tcPr anchor="ctr">
+                    <a:lnL w="12700" cap="flat" cmpd="sng" algn="ctr">
+                      <a:solidFill>
+                        <a:schemeClr val="tx1"/>
+                      </a:solidFill>
+                      <a:prstDash val="solid"/>
+                      <a:round/>
+                      <a:headEnd type="none" w="med" len="med"/>
+                      <a:tailEnd type="none" w="med" len="med"/>
+                    </a:lnL>
+                    <a:lnR w="12700" cap="flat" cmpd="sng" algn="ctr">
+                      <a:solidFill>
+                        <a:schemeClr val="tx1"/>
+                      </a:solidFill>
+                      <a:prstDash val="solid"/>
+                      <a:round/>
+                      <a:headEnd type="none" w="med" len="med"/>
+                      <a:tailEnd type="none" w="med" len="med"/>
+                    </a:lnR>
+                    <a:lnT w="12700" cap="flat" cmpd="sng" algn="ctr">
+                      <a:solidFill>
+                        <a:schemeClr val="tx1"/>
+                      </a:solidFill>
+                      <a:prstDash val="solid"/>
+                      <a:round/>
+                      <a:headEnd type="none" w="med" len="med"/>
+                      <a:tailEnd type="none" w="med" len="med"/>
+                    </a:lnT>
+                    <a:lnB w="12700" cap="flat" cmpd="sng" algn="ctr">
+                      <a:solidFill>
+                        <a:schemeClr val="tx1"/>
+                      </a:solidFill>
+                      <a:prstDash val="solid"/>
+                      <a:round/>
+                      <a:headEnd type="none" w="med" len="med"/>
+                      <a:tailEnd type="none" w="med" len="med"/>
+                    </a:lnB>
+                    <a:solidFill>
+                      <a:srgbClr val="B4D3E2"/>
+                    </a:solidFill>
+                  </a:tcPr>
+                </a:tc>
+                <a:tc>
+                  <a:txBody>
+                    <a:bodyPr/>
+                    <a:lstStyle/>
+                    <a:p>
+                      <a:pPr algn="r">
+                        <a:buNone/>
+                      </a:pPr>
+                      <a:r>
+                        <a:rPr lang="en-US" sz="2400">
+                          <a:latin typeface="Titillium Web" panose="00000500000000000000" pitchFamily="2" charset="0"/>
+                        </a:rPr>
+                        <a:t>6,673,300</a:t>
+                      </a:r>
+                    </a:p>
+                  </a:txBody>
+                  <a:tcPr anchor="ctr">
+                    <a:lnL w="12700" cap="flat" cmpd="sng" algn="ctr">
+                      <a:solidFill>
+                        <a:schemeClr val="tx1"/>
+                      </a:solidFill>
+                      <a:prstDash val="solid"/>
+                      <a:round/>
+                      <a:headEnd type="none" w="med" len="med"/>
+                      <a:tailEnd type="none" w="med" len="med"/>
+                    </a:lnL>
+                    <a:lnR w="12700" cap="flat" cmpd="sng" algn="ctr">
+                      <a:solidFill>
+                        <a:schemeClr val="tx1"/>
+                      </a:solidFill>
+                      <a:prstDash val="solid"/>
+                      <a:round/>
+                      <a:headEnd type="none" w="med" len="med"/>
+                      <a:tailEnd type="none" w="med" len="med"/>
+                    </a:lnR>
+                    <a:lnT w="12700" cap="flat" cmpd="sng" algn="ctr">
+                      <a:solidFill>
+                        <a:schemeClr val="tx1"/>
+                      </a:solidFill>
+                      <a:prstDash val="solid"/>
+                      <a:round/>
+                      <a:headEnd type="none" w="med" len="med"/>
+                      <a:tailEnd type="none" w="med" len="med"/>
+                    </a:lnT>
+                    <a:lnB w="12700" cap="flat" cmpd="sng" algn="ctr">
+                      <a:solidFill>
+                        <a:schemeClr val="tx1"/>
+                      </a:solidFill>
+                      <a:prstDash val="solid"/>
+                      <a:round/>
+                      <a:headEnd type="none" w="med" len="med"/>
+                      <a:tailEnd type="none" w="med" len="med"/>
+                    </a:lnB>
+                    <a:solidFill>
+                      <a:srgbClr val="B4D3E2"/>
+                    </a:solidFill>
+                  </a:tcPr>
+                </a:tc>
+                <a:tc>
+                  <a:txBody>
+                    <a:bodyPr/>
+                    <a:lstStyle/>
+                    <a:p>
+                      <a:pPr algn="r">
+                        <a:buNone/>
+                      </a:pPr>
+                      <a:r>
+                        <a:rPr lang="en-US" sz="2400" dirty="0">
+                          <a:latin typeface="Titillium Web" panose="00000500000000000000" pitchFamily="2" charset="0"/>
+                        </a:rPr>
+                        <a:t>2,534,844</a:t>
+                      </a:r>
+                    </a:p>
+                  </a:txBody>
+                  <a:tcPr anchor="ctr">
+                    <a:lnL w="12700" cap="flat" cmpd="sng" algn="ctr">
+                      <a:solidFill>
+                        <a:schemeClr val="tx1"/>
+                      </a:solidFill>
+                      <a:prstDash val="solid"/>
+                      <a:round/>
+                      <a:headEnd type="none" w="med" len="med"/>
+                      <a:tailEnd type="none" w="med" len="med"/>
+                    </a:lnL>
+                    <a:lnR w="12700" cap="flat" cmpd="sng" algn="ctr">
+                      <a:solidFill>
+                        <a:schemeClr val="tx1"/>
+                      </a:solidFill>
+                      <a:prstDash val="solid"/>
+                      <a:round/>
+                      <a:headEnd type="none" w="med" len="med"/>
+                      <a:tailEnd type="none" w="med" len="med"/>
+                    </a:lnR>
+                    <a:lnT w="12700" cap="flat" cmpd="sng" algn="ctr">
+                      <a:solidFill>
+                        <a:schemeClr val="tx1"/>
+                      </a:solidFill>
+                      <a:prstDash val="solid"/>
+                      <a:round/>
+                      <a:headEnd type="none" w="med" len="med"/>
+                      <a:tailEnd type="none" w="med" len="med"/>
+                    </a:lnT>
+                    <a:lnB w="12700" cap="flat" cmpd="sng" algn="ctr">
+                      <a:solidFill>
+                        <a:schemeClr val="tx1"/>
+                      </a:solidFill>
+                      <a:prstDash val="solid"/>
+                      <a:round/>
+                      <a:headEnd type="none" w="med" len="med"/>
+                      <a:tailEnd type="none" w="med" len="med"/>
+                    </a:lnB>
+                    <a:solidFill>
+                      <a:srgbClr val="B4D3E2"/>
+                    </a:solidFill>
+                  </a:tcPr>
+                </a:tc>
+                <a:extLst>
+                  <a:ext uri="{0D108BD9-81ED-4DB2-BD59-A6C34878D82A}">
+                    <a16:rowId xmlns:a16="http://schemas.microsoft.com/office/drawing/2014/main" val="2177487150"/>
+                  </a:ext>
+                </a:extLst>
+              </a:tr>
+              <a:tr h="0">
+                <a:tc>
+                  <a:txBody>
+                    <a:bodyPr/>
+                    <a:lstStyle/>
+                    <a:p>
+                      <a:pPr>
+                        <a:buNone/>
+                      </a:pPr>
+                      <a:r>
+                        <a:rPr lang="en-US" sz="2400" b="1" dirty="0">
+                          <a:latin typeface="Titillium Web" panose="00000500000000000000" pitchFamily="2" charset="0"/>
+                        </a:rPr>
+                        <a:t>Total input tokens</a:t>
+                      </a:r>
+                    </a:p>
+                  </a:txBody>
+                  <a:tcPr anchor="ctr">
+                    <a:lnL w="12700" cap="flat" cmpd="sng" algn="ctr">
+                      <a:solidFill>
+                        <a:schemeClr val="tx1"/>
+                      </a:solidFill>
+                      <a:prstDash val="solid"/>
+                      <a:round/>
+                      <a:headEnd type="none" w="med" len="med"/>
+                      <a:tailEnd type="none" w="med" len="med"/>
+                    </a:lnL>
+                    <a:lnR w="12700" cap="flat" cmpd="sng" algn="ctr">
+                      <a:solidFill>
+                        <a:schemeClr val="tx1"/>
+                      </a:solidFill>
+                      <a:prstDash val="solid"/>
+                      <a:round/>
+                      <a:headEnd type="none" w="med" len="med"/>
+                      <a:tailEnd type="none" w="med" len="med"/>
+                    </a:lnR>
+                    <a:lnT w="12700" cap="flat" cmpd="sng" algn="ctr">
+                      <a:solidFill>
+                        <a:schemeClr val="tx1"/>
+                      </a:solidFill>
+                      <a:prstDash val="solid"/>
+                      <a:round/>
+                      <a:headEnd type="none" w="med" len="med"/>
+                      <a:tailEnd type="none" w="med" len="med"/>
+                    </a:lnT>
+                    <a:lnB w="12700" cap="flat" cmpd="sng" algn="ctr">
+                      <a:solidFill>
+                        <a:schemeClr val="tx1"/>
+                      </a:solidFill>
+                      <a:prstDash val="solid"/>
+                      <a:round/>
+                      <a:headEnd type="none" w="med" len="med"/>
+                      <a:tailEnd type="none" w="med" len="med"/>
+                    </a:lnB>
+                    <a:solidFill>
+                      <a:srgbClr val="B4D3E2"/>
+                    </a:solidFill>
+                  </a:tcPr>
+                </a:tc>
+                <a:tc>
+                  <a:txBody>
+                    <a:bodyPr/>
+                    <a:lstStyle/>
+                    <a:p>
+                      <a:pPr algn="r">
+                        <a:buNone/>
+                      </a:pPr>
+                      <a:r>
+                        <a:rPr lang="en-US" sz="2400" dirty="0">
+                          <a:latin typeface="Titillium Web" panose="00000500000000000000" pitchFamily="2" charset="0"/>
+                        </a:rPr>
+                        <a:t>16,201,402</a:t>
+                      </a:r>
+                    </a:p>
+                  </a:txBody>
+                  <a:tcPr anchor="ctr">
+                    <a:lnL w="12700" cap="flat" cmpd="sng" algn="ctr">
+                      <a:solidFill>
+                        <a:schemeClr val="tx1"/>
+                      </a:solidFill>
+                      <a:prstDash val="solid"/>
+                      <a:round/>
+                      <a:headEnd type="none" w="med" len="med"/>
+                      <a:tailEnd type="none" w="med" len="med"/>
+                    </a:lnL>
+                    <a:lnR w="12700" cap="flat" cmpd="sng" algn="ctr">
+                      <a:solidFill>
+                        <a:schemeClr val="tx1"/>
+                      </a:solidFill>
+                      <a:prstDash val="solid"/>
+                      <a:round/>
+                      <a:headEnd type="none" w="med" len="med"/>
+                      <a:tailEnd type="none" w="med" len="med"/>
+                    </a:lnR>
+                    <a:lnT w="12700" cap="flat" cmpd="sng" algn="ctr">
+                      <a:solidFill>
+                        <a:schemeClr val="tx1"/>
+                      </a:solidFill>
+                      <a:prstDash val="solid"/>
+                      <a:round/>
+                      <a:headEnd type="none" w="med" len="med"/>
+                      <a:tailEnd type="none" w="med" len="med"/>
+                    </a:lnT>
+                    <a:lnB w="12700" cap="flat" cmpd="sng" algn="ctr">
+                      <a:solidFill>
+                        <a:schemeClr val="tx1"/>
+                      </a:solidFill>
+                      <a:prstDash val="solid"/>
+                      <a:round/>
+                      <a:headEnd type="none" w="med" len="med"/>
+                      <a:tailEnd type="none" w="med" len="med"/>
+                    </a:lnB>
+                    <a:solidFill>
+                      <a:srgbClr val="B4D3E2"/>
+                    </a:solidFill>
+                  </a:tcPr>
+                </a:tc>
+                <a:tc>
+                  <a:txBody>
+                    <a:bodyPr/>
+                    <a:lstStyle/>
+                    <a:p>
+                      <a:pPr algn="r">
+                        <a:buNone/>
+                      </a:pPr>
+                      <a:r>
+                        <a:rPr lang="en-US" sz="2400" dirty="0">
+                          <a:latin typeface="Titillium Web" panose="00000500000000000000" pitchFamily="2" charset="0"/>
+                        </a:rPr>
+                        <a:t>4,073,219</a:t>
+                      </a:r>
+                    </a:p>
+                  </a:txBody>
+                  <a:tcPr anchor="ctr">
+                    <a:lnL w="12700" cap="flat" cmpd="sng" algn="ctr">
+                      <a:solidFill>
+                        <a:schemeClr val="tx1"/>
+                      </a:solidFill>
+                      <a:prstDash val="solid"/>
+                      <a:round/>
+                      <a:headEnd type="none" w="med" len="med"/>
+                      <a:tailEnd type="none" w="med" len="med"/>
+                    </a:lnL>
+                    <a:lnR w="12700" cap="flat" cmpd="sng" algn="ctr">
+                      <a:solidFill>
+                        <a:schemeClr val="tx1"/>
+                      </a:solidFill>
+                      <a:prstDash val="solid"/>
+                      <a:round/>
+                      <a:headEnd type="none" w="med" len="med"/>
+                      <a:tailEnd type="none" w="med" len="med"/>
+                    </a:lnR>
+                    <a:lnT w="12700" cap="flat" cmpd="sng" algn="ctr">
+                      <a:solidFill>
+                        <a:schemeClr val="tx1"/>
+                      </a:solidFill>
+                      <a:prstDash val="solid"/>
+                      <a:round/>
+                      <a:headEnd type="none" w="med" len="med"/>
+                      <a:tailEnd type="none" w="med" len="med"/>
+                    </a:lnT>
+                    <a:lnB w="12700" cap="flat" cmpd="sng" algn="ctr">
+                      <a:solidFill>
+                        <a:schemeClr val="tx1"/>
+                      </a:solidFill>
+                      <a:prstDash val="solid"/>
+                      <a:round/>
+                      <a:headEnd type="none" w="med" len="med"/>
+                      <a:tailEnd type="none" w="med" len="med"/>
+                    </a:lnB>
+                    <a:solidFill>
+                      <a:srgbClr val="B4D3E2"/>
+                    </a:solidFill>
+                  </a:tcPr>
+                </a:tc>
+                <a:extLst>
+                  <a:ext uri="{0D108BD9-81ED-4DB2-BD59-A6C34878D82A}">
+                    <a16:rowId xmlns:a16="http://schemas.microsoft.com/office/drawing/2014/main" val="731956399"/>
+                  </a:ext>
+                </a:extLst>
+              </a:tr>
+              <a:tr h="0">
+                <a:tc>
+                  <a:txBody>
+                    <a:bodyPr/>
+                    <a:lstStyle/>
+                    <a:p>
+                      <a:pPr>
+                        <a:buNone/>
+                      </a:pPr>
+                      <a:r>
+                        <a:rPr lang="en-US" sz="2400" b="1" dirty="0">
+                          <a:latin typeface="Titillium Web" panose="00000500000000000000" pitchFamily="2" charset="0"/>
+                        </a:rPr>
+                        <a:t>Estimated cost</a:t>
+                      </a:r>
+                    </a:p>
+                  </a:txBody>
+                  <a:tcPr anchor="ctr">
+                    <a:lnL w="12700" cap="flat" cmpd="sng" algn="ctr">
+                      <a:solidFill>
+                        <a:schemeClr val="tx1"/>
+                      </a:solidFill>
+                      <a:prstDash val="solid"/>
+                      <a:round/>
+                      <a:headEnd type="none" w="med" len="med"/>
+                      <a:tailEnd type="none" w="med" len="med"/>
+                    </a:lnL>
+                    <a:lnR w="12700" cap="flat" cmpd="sng" algn="ctr">
+                      <a:solidFill>
+                        <a:schemeClr val="tx1"/>
+                      </a:solidFill>
+                      <a:prstDash val="solid"/>
+                      <a:round/>
+                      <a:headEnd type="none" w="med" len="med"/>
+                      <a:tailEnd type="none" w="med" len="med"/>
+                    </a:lnR>
+                    <a:lnT w="12700" cap="flat" cmpd="sng" algn="ctr">
+                      <a:solidFill>
+                        <a:schemeClr val="tx1"/>
+                      </a:solidFill>
+                      <a:prstDash val="solid"/>
+                      <a:round/>
+                      <a:headEnd type="none" w="med" len="med"/>
+                      <a:tailEnd type="none" w="med" len="med"/>
+                    </a:lnT>
+                    <a:lnB w="12700" cap="flat" cmpd="sng" algn="ctr">
+                      <a:solidFill>
+                        <a:schemeClr val="tx1"/>
+                      </a:solidFill>
+                      <a:prstDash val="solid"/>
+                      <a:round/>
+                      <a:headEnd type="none" w="med" len="med"/>
+                      <a:tailEnd type="none" w="med" len="med"/>
+                    </a:lnB>
+                    <a:solidFill>
+                      <a:srgbClr val="B4D3E2"/>
+                    </a:solidFill>
+                  </a:tcPr>
+                </a:tc>
+                <a:tc>
+                  <a:txBody>
+                    <a:bodyPr/>
+                    <a:lstStyle/>
+                    <a:p>
+                      <a:pPr algn="r">
+                        <a:buNone/>
+                      </a:pPr>
+                      <a:r>
+                        <a:rPr lang="en-US" sz="2400" dirty="0">
+                          <a:latin typeface="Titillium Web" panose="00000500000000000000" pitchFamily="2" charset="0"/>
+                        </a:rPr>
+                        <a:t>$40.51</a:t>
+                      </a:r>
+                    </a:p>
+                  </a:txBody>
+                  <a:tcPr anchor="ctr">
+                    <a:lnL w="12700" cap="flat" cmpd="sng" algn="ctr">
+                      <a:solidFill>
+                        <a:schemeClr val="tx1"/>
+                      </a:solidFill>
+                      <a:prstDash val="solid"/>
+                      <a:round/>
+                      <a:headEnd type="none" w="med" len="med"/>
+                      <a:tailEnd type="none" w="med" len="med"/>
+                    </a:lnL>
+                    <a:lnR w="12700" cap="flat" cmpd="sng" algn="ctr">
+                      <a:solidFill>
+                        <a:schemeClr val="tx1"/>
+                      </a:solidFill>
+                      <a:prstDash val="solid"/>
+                      <a:round/>
+                      <a:headEnd type="none" w="med" len="med"/>
+                      <a:tailEnd type="none" w="med" len="med"/>
+                    </a:lnR>
+                    <a:lnT w="12700" cap="flat" cmpd="sng" algn="ctr">
+                      <a:solidFill>
+                        <a:schemeClr val="tx1"/>
+                      </a:solidFill>
+                      <a:prstDash val="solid"/>
+                      <a:round/>
+                      <a:headEnd type="none" w="med" len="med"/>
+                      <a:tailEnd type="none" w="med" len="med"/>
+                    </a:lnT>
+                    <a:lnB w="12700" cap="flat" cmpd="sng" algn="ctr">
+                      <a:solidFill>
+                        <a:schemeClr val="tx1"/>
+                      </a:solidFill>
+                      <a:prstDash val="solid"/>
+                      <a:round/>
+                      <a:headEnd type="none" w="med" len="med"/>
+                      <a:tailEnd type="none" w="med" len="med"/>
+                    </a:lnB>
+                    <a:solidFill>
+                      <a:srgbClr val="B4D3E2"/>
+                    </a:solidFill>
+                  </a:tcPr>
+                </a:tc>
+                <a:tc>
+                  <a:txBody>
+                    <a:bodyPr/>
+                    <a:lstStyle/>
+                    <a:p>
+                      <a:pPr algn="r">
+                        <a:buNone/>
+                      </a:pPr>
+                      <a:r>
+                        <a:rPr lang="en-US" sz="2400" dirty="0">
+                          <a:latin typeface="Titillium Web" panose="00000500000000000000" pitchFamily="2" charset="0"/>
+                        </a:rPr>
+                        <a:t>$10.19</a:t>
+                      </a:r>
+                    </a:p>
+                  </a:txBody>
+                  <a:tcPr anchor="ctr">
+                    <a:lnL w="12700" cap="flat" cmpd="sng" algn="ctr">
+                      <a:solidFill>
+                        <a:schemeClr val="tx1"/>
+                      </a:solidFill>
+                      <a:prstDash val="solid"/>
+                      <a:round/>
+                      <a:headEnd type="none" w="med" len="med"/>
+                      <a:tailEnd type="none" w="med" len="med"/>
+                    </a:lnL>
+                    <a:lnR w="12700" cap="flat" cmpd="sng" algn="ctr">
+                      <a:solidFill>
+                        <a:schemeClr val="tx1"/>
+                      </a:solidFill>
+                      <a:prstDash val="solid"/>
+                      <a:round/>
+                      <a:headEnd type="none" w="med" len="med"/>
+                      <a:tailEnd type="none" w="med" len="med"/>
+                    </a:lnR>
+                    <a:lnT w="12700" cap="flat" cmpd="sng" algn="ctr">
+                      <a:solidFill>
+                        <a:schemeClr val="tx1"/>
+                      </a:solidFill>
+                      <a:prstDash val="solid"/>
+                      <a:round/>
+                      <a:headEnd type="none" w="med" len="med"/>
+                      <a:tailEnd type="none" w="med" len="med"/>
+                    </a:lnT>
+                    <a:lnB w="12700" cap="flat" cmpd="sng" algn="ctr">
+                      <a:solidFill>
+                        <a:schemeClr val="tx1"/>
+                      </a:solidFill>
+                      <a:prstDash val="solid"/>
+                      <a:round/>
+                      <a:headEnd type="none" w="med" len="med"/>
+                      <a:tailEnd type="none" w="med" len="med"/>
+                    </a:lnB>
+                    <a:solidFill>
+                      <a:srgbClr val="B4D3E2"/>
+                    </a:solidFill>
+                  </a:tcPr>
+                </a:tc>
+                <a:extLst>
+                  <a:ext uri="{0D108BD9-81ED-4DB2-BD59-A6C34878D82A}">
+                    <a16:rowId xmlns:a16="http://schemas.microsoft.com/office/drawing/2014/main" val="3325067963"/>
+                  </a:ext>
+                </a:extLst>
+              </a:tr>
+            </a:tbl>
+          </a:graphicData>
+        </a:graphic>
+      </p:graphicFrame>
     </p:spTree>
   </p:cSld>
   <p:clrMapOvr>

--- a/poster.pptx
+++ b/poster.pptx
@@ -4294,8 +4294,8 @@
         </p:nvSpPr>
         <p:spPr bwMode="auto">
           <a:xfrm>
-            <a:off x="731518" y="16513725"/>
-            <a:ext cx="10058400" cy="3508653"/>
+            <a:off x="738840" y="18500584"/>
+            <a:ext cx="10058400" cy="4001095"/>
           </a:xfrm>
           <a:prstGeom prst="rect">
             <a:avLst/>
@@ -4416,8 +4416,9 @@
             </a:lvl9pPr>
           </a:lstStyle>
           <a:p>
-            <a:r>
-              <a:rPr lang="en-US" sz="2400" dirty="0">
+            <a:pPr algn="ctr"/>
+            <a:r>
+              <a:rPr lang="en-US" sz="2800" dirty="0">
                 <a:latin typeface="Titillium Web" panose="00000500000000000000" pitchFamily="2" charset="0"/>
                 <a:ea typeface="Open Sans" panose="020B0606030504020204" pitchFamily="34" charset="0"/>
                 <a:cs typeface="Open Sans" panose="020B0606030504020204" pitchFamily="34" charset="0"/>
@@ -4426,15 +4427,9 @@
             </a:r>
           </a:p>
           <a:p>
-            <a:endParaRPr lang="en-US" sz="2400" dirty="0">
-              <a:latin typeface="Titillium Web" panose="00000500000000000000" pitchFamily="2" charset="0"/>
-              <a:ea typeface="Open Sans" panose="020B0606030504020204" pitchFamily="34" charset="0"/>
-              <a:cs typeface="Open Sans" panose="020B0606030504020204" pitchFamily="34" charset="0"/>
-            </a:endParaRPr>
-          </a:p>
-          <a:p>
-            <a:r>
-              <a:rPr lang="en-US" sz="2400" dirty="0">
+            <a:pPr algn="just"/>
+            <a:r>
+              <a:rPr lang="en-US" sz="2800" dirty="0">
                 <a:latin typeface="Titillium Web" panose="00000500000000000000" pitchFamily="2" charset="0"/>
                 <a:ea typeface="Open Sans" panose="020B0606030504020204" pitchFamily="34" charset="0"/>
                 <a:cs typeface="Open Sans" panose="020B0606030504020204" pitchFamily="34" charset="0"/>
@@ -4511,8 +4506,8 @@
         </p:nvSpPr>
         <p:spPr bwMode="auto">
           <a:xfrm>
-            <a:off x="22311361" y="8196127"/>
-            <a:ext cx="10058400" cy="10525958"/>
+            <a:off x="22318683" y="8154671"/>
+            <a:ext cx="10058400" cy="13911501"/>
           </a:xfrm>
           <a:prstGeom prst="rect">
             <a:avLst/>
@@ -4580,72 +4575,72 @@
             </a:lvl9pPr>
           </a:lstStyle>
           <a:p>
-            <a:pPr marL="342900" indent="-342900">
+            <a:pPr marL="342900" indent="-342900" algn="just">
               <a:buFont typeface="Arial" panose="020B0604020202020204" pitchFamily="34" charset="0"/>
               <a:buChar char="•"/>
             </a:pPr>
             <a:r>
-              <a:rPr lang="en-US" dirty="0"/>
+              <a:rPr lang="en-US" sz="2800" dirty="0"/>
               <a:t>The filtering pipeline reduced the original dataset from 5,374 to 1,985 highly relevant solar energy articles, improving extraction quality while reducing computational cost.</a:t>
             </a:r>
           </a:p>
           <a:p>
-            <a:pPr marL="342900" indent="-342900">
+            <a:pPr marL="342900" indent="-342900" algn="just">
               <a:buFont typeface="Arial" panose="020B0604020202020204" pitchFamily="34" charset="0"/>
               <a:buChar char="•"/>
             </a:pPr>
             <a:r>
-              <a:rPr lang="en-US" dirty="0"/>
+              <a:rPr lang="en-US" sz="2800" dirty="0"/>
               <a:t>The LLM successfully transformed unstructured news articles into a structured knowledge graph containing entities and their relationships across technologies, organizations, policies, countries, and research initiatives.</a:t>
             </a:r>
           </a:p>
           <a:p>
-            <a:pPr marL="342900" indent="-342900">
+            <a:pPr marL="342900" indent="-342900" algn="just">
               <a:buFont typeface="Arial" panose="020B0604020202020204" pitchFamily="34" charset="0"/>
               <a:buChar char="•"/>
             </a:pPr>
             <a:r>
-              <a:rPr lang="en-US" dirty="0"/>
+              <a:rPr lang="en-US" sz="2800" dirty="0"/>
               <a:t>Initial graphs were highly connected and noisy. Graph cleaning and entity deduplication produced a more interpretable network that highlighted the most influential entities and relationships.</a:t>
             </a:r>
           </a:p>
           <a:p>
-            <a:pPr marL="342900" indent="-342900">
+            <a:pPr marL="342900" indent="-342900" algn="just">
               <a:buFont typeface="Arial" panose="020B0604020202020204" pitchFamily="34" charset="0"/>
               <a:buChar char="•"/>
             </a:pPr>
             <a:r>
-              <a:rPr lang="en-US" dirty="0"/>
+              <a:rPr lang="en-US" sz="2800" dirty="0"/>
               <a:t>Community detection revealed that clusters formed primarily around geographic regions and areas of focus, including technology development, policy, manufacturing, and international collaborations.</a:t>
             </a:r>
           </a:p>
           <a:p>
-            <a:pPr marL="342900" indent="-342900">
+            <a:pPr marL="342900" indent="-342900" algn="just">
               <a:buFont typeface="Arial" panose="020B0604020202020204" pitchFamily="34" charset="0"/>
               <a:buChar char="•"/>
             </a:pPr>
             <a:r>
-              <a:rPr lang="en-US" dirty="0"/>
+              <a:rPr lang="en-US" sz="2800" dirty="0"/>
               <a:t>The community graph showed that most communities were not directly connected. Instead, information flowed through a small number of highly central communities that linked otherwise separate regions of the network.</a:t>
             </a:r>
           </a:p>
           <a:p>
-            <a:pPr marL="342900" indent="-342900">
+            <a:pPr marL="342900" indent="-342900" algn="just">
               <a:buFont typeface="Arial" panose="020B0604020202020204" pitchFamily="34" charset="0"/>
               <a:buChar char="•"/>
             </a:pPr>
             <a:r>
-              <a:rPr lang="en-US" dirty="0"/>
+              <a:rPr lang="en-US" sz="2800" dirty="0"/>
               <a:t>Prominent communities represented:</a:t>
             </a:r>
           </a:p>
           <a:p>
-            <a:pPr marL="1085850" lvl="1" indent="-342900">
+            <a:pPr marL="1085850" lvl="1" indent="-342900" algn="just">
               <a:buFont typeface="Arial" panose="020B0604020202020204" pitchFamily="34" charset="0"/>
               <a:buChar char="•"/>
             </a:pPr>
             <a:r>
-              <a:rPr lang="en-US" sz="2400" dirty="0">
+              <a:rPr lang="en-US" sz="2800" dirty="0">
                 <a:latin typeface="Titillium Web" panose="00000500000000000000" pitchFamily="2" charset="0"/>
                 <a:ea typeface="Open Sans" panose="020B0606030504020204" pitchFamily="34" charset="0"/>
                 <a:cs typeface="Open Sans" panose="020B0606030504020204" pitchFamily="34" charset="0"/>
@@ -4654,12 +4649,12 @@
             </a:r>
           </a:p>
           <a:p>
-            <a:pPr marL="1085850" lvl="1" indent="-342900">
+            <a:pPr marL="1085850" lvl="1" indent="-342900" algn="just">
               <a:buFont typeface="Arial" panose="020B0604020202020204" pitchFamily="34" charset="0"/>
               <a:buChar char="•"/>
             </a:pPr>
             <a:r>
-              <a:rPr lang="en-US" sz="2400" dirty="0">
+              <a:rPr lang="en-US" sz="2800" dirty="0">
                 <a:latin typeface="Titillium Web" panose="00000500000000000000" pitchFamily="2" charset="0"/>
                 <a:ea typeface="Open Sans" panose="020B0606030504020204" pitchFamily="34" charset="0"/>
                 <a:cs typeface="Open Sans" panose="020B0606030504020204" pitchFamily="34" charset="0"/>
@@ -4668,12 +4663,12 @@
             </a:r>
           </a:p>
           <a:p>
-            <a:pPr marL="1085850" lvl="1" indent="-342900">
+            <a:pPr marL="1085850" lvl="1" indent="-342900" algn="just">
               <a:buFont typeface="Arial" panose="020B0604020202020204" pitchFamily="34" charset="0"/>
               <a:buChar char="•"/>
             </a:pPr>
             <a:r>
-              <a:rPr lang="en-US" sz="2400" dirty="0">
+              <a:rPr lang="en-US" sz="2800" dirty="0">
                 <a:latin typeface="Titillium Web" panose="00000500000000000000" pitchFamily="2" charset="0"/>
                 <a:ea typeface="Open Sans" panose="020B0606030504020204" pitchFamily="34" charset="0"/>
                 <a:cs typeface="Open Sans" panose="020B0606030504020204" pitchFamily="34" charset="0"/>
@@ -4682,12 +4677,12 @@
             </a:r>
           </a:p>
           <a:p>
-            <a:pPr marL="1085850" lvl="1" indent="-342900">
+            <a:pPr marL="1085850" lvl="1" indent="-342900" algn="just">
               <a:buFont typeface="Arial" panose="020B0604020202020204" pitchFamily="34" charset="0"/>
               <a:buChar char="•"/>
             </a:pPr>
             <a:r>
-              <a:rPr lang="en-US" sz="2400" dirty="0">
+              <a:rPr lang="en-US" sz="2800" dirty="0">
                 <a:latin typeface="Titillium Web" panose="00000500000000000000" pitchFamily="2" charset="0"/>
                 <a:ea typeface="Open Sans" panose="020B0606030504020204" pitchFamily="34" charset="0"/>
                 <a:cs typeface="Open Sans" panose="020B0606030504020204" pitchFamily="34" charset="0"/>
@@ -4696,12 +4691,12 @@
             </a:r>
           </a:p>
           <a:p>
-            <a:pPr marL="1085850" lvl="1" indent="-342900">
+            <a:pPr marL="1085850" lvl="1" indent="-342900" algn="just">
               <a:buFont typeface="Arial" panose="020B0604020202020204" pitchFamily="34" charset="0"/>
               <a:buChar char="•"/>
             </a:pPr>
             <a:r>
-              <a:rPr lang="en-US" sz="2400" dirty="0">
+              <a:rPr lang="en-US" sz="2800" dirty="0">
                 <a:latin typeface="Titillium Web" panose="00000500000000000000" pitchFamily="2" charset="0"/>
                 <a:ea typeface="Open Sans" panose="020B0606030504020204" pitchFamily="34" charset="0"/>
                 <a:cs typeface="Open Sans" panose="020B0606030504020204" pitchFamily="34" charset="0"/>
@@ -4710,12 +4705,12 @@
             </a:r>
           </a:p>
           <a:p>
-            <a:pPr marL="342900" indent="-342900">
+            <a:pPr marL="342900" indent="-342900" algn="just">
               <a:buFont typeface="Arial" panose="020B0604020202020204" pitchFamily="34" charset="0"/>
               <a:buChar char="•"/>
             </a:pPr>
             <a:r>
-              <a:rPr lang="en-US" dirty="0"/>
+              <a:rPr lang="en-US" sz="2800" dirty="0"/>
               <a:t>These results demonstrate that LLM-based information extraction combined with network analysis can efficiently convert large collections of news articles into interpretable knowledge graphs for studying global solar energy ecosystems.</a:t>
             </a:r>
           </a:p>
@@ -4788,7 +4783,7 @@
         </p:nvSpPr>
         <p:spPr bwMode="auto">
           <a:xfrm>
-            <a:off x="33097620" y="27077111"/>
+            <a:off x="33101279" y="26858912"/>
             <a:ext cx="10058400" cy="784225"/>
           </a:xfrm>
           <a:prstGeom prst="rect">
@@ -4876,178 +4871,6 @@
       </p:sp>
       <p:sp>
         <p:nvSpPr>
-          <p:cNvPr id="17" name="Text Box 6">
-            <a:extLst>
-              <a:ext uri="{FF2B5EF4-FFF2-40B4-BE49-F238E27FC236}">
-                <a16:creationId xmlns:a16="http://schemas.microsoft.com/office/drawing/2014/main" id="{8AE8A03B-3762-4AF2-A9FC-B088E0736F3A}"/>
-              </a:ext>
-            </a:extLst>
-          </p:cNvPr>
-          <p:cNvSpPr txBox="1">
-            <a:spLocks noChangeArrowheads="1"/>
-          </p:cNvSpPr>
-          <p:nvPr/>
-        </p:nvSpPr>
-        <p:spPr bwMode="auto">
-          <a:xfrm>
-            <a:off x="731521" y="8000040"/>
-            <a:ext cx="10058400" cy="923330"/>
-          </a:xfrm>
-          <a:prstGeom prst="rect">
-            <a:avLst/>
-          </a:prstGeom>
-          <a:noFill/>
-          <a:ln>
-            <a:noFill/>
-          </a:ln>
-          <a:extLst>
-            <a:ext uri="{909E8E84-426E-40DD-AFC4-6F175D3DCCD1}">
-              <a14:hiddenFill xmlns:a14="http://schemas.microsoft.com/office/drawing/2010/main">
-                <a:solidFill>
-                  <a:schemeClr val="accent1"/>
-                </a:solidFill>
-              </a14:hiddenFill>
-            </a:ext>
-            <a:ext uri="{91240B29-F687-4F45-9708-019B960494DF}">
-              <a14:hiddenLine xmlns:a14="http://schemas.microsoft.com/office/drawing/2010/main" w="9525">
-                <a:solidFill>
-                  <a:schemeClr val="tx1"/>
-                </a:solidFill>
-                <a:miter lim="800000"/>
-                <a:headEnd/>
-                <a:tailEnd/>
-              </a14:hiddenLine>
-            </a:ext>
-            <a:ext uri="{AF507438-7753-43E0-B8FC-AC1667EBCBE1}">
-              <a14:hiddenEffects xmlns:a14="http://schemas.microsoft.com/office/drawing/2010/main">
-                <a:effectLst>
-                  <a:outerShdw dist="35921" dir="2700000" algn="ctr" rotWithShape="0">
-                    <a:schemeClr val="bg2"/>
-                  </a:outerShdw>
-                </a:effectLst>
-              </a14:hiddenEffects>
-            </a:ext>
-          </a:extLst>
-        </p:spPr>
-        <p:txBody>
-          <a:bodyPr lIns="274320" tIns="274320" rIns="274320" bIns="274320">
-            <a:spAutoFit/>
-          </a:bodyPr>
-          <a:lstStyle>
-            <a:defPPr>
-              <a:defRPr kern="1200"/>
-            </a:defPPr>
-            <a:lvl1pPr defTabSz="4703763" eaLnBrk="0" hangingPunct="0">
-              <a:defRPr sz="9300">
-                <a:solidFill>
-                  <a:schemeClr val="tx1"/>
-                </a:solidFill>
-                <a:latin typeface="Arial"/>
-              </a:defRPr>
-            </a:lvl1pPr>
-            <a:lvl2pPr marL="742950" indent="-285750" defTabSz="4703763" eaLnBrk="0" hangingPunct="0">
-              <a:defRPr sz="9300">
-                <a:solidFill>
-                  <a:schemeClr val="tx1"/>
-                </a:solidFill>
-                <a:latin typeface="Arial"/>
-              </a:defRPr>
-            </a:lvl2pPr>
-            <a:lvl3pPr marL="1143000" indent="-228600" defTabSz="4703763" eaLnBrk="0" hangingPunct="0">
-              <a:defRPr sz="9300">
-                <a:solidFill>
-                  <a:schemeClr val="tx1"/>
-                </a:solidFill>
-                <a:latin typeface="Arial"/>
-              </a:defRPr>
-            </a:lvl3pPr>
-            <a:lvl4pPr marL="1600200" indent="-228600" defTabSz="4703763" eaLnBrk="0" hangingPunct="0">
-              <a:defRPr sz="9300">
-                <a:solidFill>
-                  <a:schemeClr val="tx1"/>
-                </a:solidFill>
-                <a:latin typeface="Arial"/>
-              </a:defRPr>
-            </a:lvl4pPr>
-            <a:lvl5pPr marL="2057400" indent="-228600" defTabSz="4703763" eaLnBrk="0" hangingPunct="0">
-              <a:defRPr sz="9300">
-                <a:solidFill>
-                  <a:schemeClr val="tx1"/>
-                </a:solidFill>
-                <a:latin typeface="Arial"/>
-              </a:defRPr>
-            </a:lvl5pPr>
-            <a:lvl6pPr marL="2514600" indent="-228600" defTabSz="4703763" eaLnBrk="0" fontAlgn="base" hangingPunct="0">
-              <a:spcBef>
-                <a:spcPct val="0"/>
-              </a:spcBef>
-              <a:spcAft>
-                <a:spcPct val="0"/>
-              </a:spcAft>
-              <a:defRPr sz="9300">
-                <a:solidFill>
-                  <a:schemeClr val="tx1"/>
-                </a:solidFill>
-                <a:latin typeface="Arial"/>
-              </a:defRPr>
-            </a:lvl6pPr>
-            <a:lvl7pPr marL="2971800" indent="-228600" defTabSz="4703763" eaLnBrk="0" fontAlgn="base" hangingPunct="0">
-              <a:spcBef>
-                <a:spcPct val="0"/>
-              </a:spcBef>
-              <a:spcAft>
-                <a:spcPct val="0"/>
-              </a:spcAft>
-              <a:defRPr sz="9300">
-                <a:solidFill>
-                  <a:schemeClr val="tx1"/>
-                </a:solidFill>
-                <a:latin typeface="Arial"/>
-              </a:defRPr>
-            </a:lvl7pPr>
-            <a:lvl8pPr marL="3429000" indent="-228600" defTabSz="4703763" eaLnBrk="0" fontAlgn="base" hangingPunct="0">
-              <a:spcBef>
-                <a:spcPct val="0"/>
-              </a:spcBef>
-              <a:spcAft>
-                <a:spcPct val="0"/>
-              </a:spcAft>
-              <a:defRPr sz="9300">
-                <a:solidFill>
-                  <a:schemeClr val="tx1"/>
-                </a:solidFill>
-                <a:latin typeface="Arial"/>
-              </a:defRPr>
-            </a:lvl8pPr>
-            <a:lvl9pPr marL="3886200" indent="-228600" defTabSz="4703763" eaLnBrk="0" fontAlgn="base" hangingPunct="0">
-              <a:spcBef>
-                <a:spcPct val="0"/>
-              </a:spcBef>
-              <a:spcAft>
-                <a:spcPct val="0"/>
-              </a:spcAft>
-              <a:defRPr sz="9300">
-                <a:solidFill>
-                  <a:schemeClr val="tx1"/>
-                </a:solidFill>
-                <a:latin typeface="Arial"/>
-              </a:defRPr>
-            </a:lvl9pPr>
-          </a:lstStyle>
-          <a:p>
-            <a:r>
-              <a:rPr lang="en-US" sz="2400" dirty="0">
-                <a:latin typeface="Titillium Web" panose="00000500000000000000" pitchFamily="2" charset="0"/>
-                <a:ea typeface="Open Sans" panose="020B0606030504020204" pitchFamily="34" charset="0"/>
-                <a:cs typeface="Open Sans" panose="020B0606030504020204" pitchFamily="34" charset="0"/>
-              </a:rPr>
-              <a:t>Add your information, graphs, and images to this section.</a:t>
-            </a:r>
-          </a:p>
-        </p:txBody>
-      </p:sp>
-      <p:sp>
-        <p:nvSpPr>
           <p:cNvPr id="287" name="TextBox 286">
             <a:extLst>
               <a:ext uri="{FF2B5EF4-FFF2-40B4-BE49-F238E27FC236}">
@@ -5060,8 +4883,8 @@
         </p:nvSpPr>
         <p:spPr>
           <a:xfrm>
-            <a:off x="33097620" y="28117418"/>
-            <a:ext cx="9857035" cy="1661993"/>
+            <a:off x="33093960" y="27854362"/>
+            <a:ext cx="9857035" cy="2277547"/>
           </a:xfrm>
           <a:prstGeom prst="rect">
             <a:avLst/>
@@ -5078,8 +4901,9 @@
             </a:defPPr>
           </a:lstStyle>
           <a:p>
-            <a:r>
-              <a:rPr lang="en-US" sz="2400" dirty="0">
+            <a:pPr algn="just"/>
+            <a:r>
+              <a:rPr lang="en-US" sz="2800" dirty="0">
                 <a:latin typeface="Titillium Web" panose="00000500000000000000" pitchFamily="2" charset="0"/>
                 <a:ea typeface="Open Sans" panose="020B0606030504020204" pitchFamily="34" charset="0"/>
                 <a:cs typeface="Open Sans" panose="020B0606030504020204" pitchFamily="34" charset="0"/>
@@ -5112,7 +4936,7 @@
         </p:blipFill>
         <p:spPr>
           <a:xfrm>
-            <a:off x="12454312" y="11846448"/>
+            <a:off x="12457972" y="18419797"/>
             <a:ext cx="8192656" cy="7976335"/>
           </a:xfrm>
           <a:prstGeom prst="rect">
@@ -5136,7 +4960,7 @@
         </p:nvSpPr>
         <p:spPr bwMode="auto">
           <a:xfrm>
-            <a:off x="33097620" y="21396168"/>
+            <a:off x="33101279" y="22148342"/>
             <a:ext cx="10058400" cy="784225"/>
           </a:xfrm>
           <a:prstGeom prst="rect">
@@ -5185,7 +5009,7 @@
         </p:nvSpPr>
         <p:spPr bwMode="auto">
           <a:xfrm>
-            <a:off x="34751732" y="22665244"/>
+            <a:off x="34755391" y="24255132"/>
             <a:ext cx="6750176" cy="1977180"/>
           </a:xfrm>
           <a:prstGeom prst="rect">
@@ -5377,7 +5201,7 @@
         </p:blipFill>
         <p:spPr>
           <a:xfrm>
-            <a:off x="33157855" y="29910450"/>
+            <a:off x="33093960" y="30264150"/>
             <a:ext cx="4760986" cy="771146"/>
           </a:xfrm>
           <a:prstGeom prst="rect">
@@ -5401,8 +5225,8 @@
         </p:nvSpPr>
         <p:spPr bwMode="auto">
           <a:xfrm>
-            <a:off x="731518" y="20308689"/>
-            <a:ext cx="10058400" cy="3508653"/>
+            <a:off x="731517" y="23177954"/>
+            <a:ext cx="10058400" cy="4001095"/>
           </a:xfrm>
           <a:prstGeom prst="rect">
             <a:avLst/>
@@ -5523,8 +5347,9 @@
             </a:lvl9pPr>
           </a:lstStyle>
           <a:p>
-            <a:r>
-              <a:rPr lang="en-US" sz="2400" dirty="0">
+            <a:pPr algn="ctr"/>
+            <a:r>
+              <a:rPr lang="en-US" sz="2800" dirty="0">
                 <a:latin typeface="Titillium Web" panose="00000500000000000000" pitchFamily="2" charset="0"/>
                 <a:ea typeface="Open Sans" panose="020B0606030504020204" pitchFamily="34" charset="0"/>
                 <a:cs typeface="Open Sans" panose="020B0606030504020204" pitchFamily="34" charset="0"/>
@@ -5533,15 +5358,9 @@
             </a:r>
           </a:p>
           <a:p>
-            <a:endParaRPr lang="en-US" sz="2400" dirty="0">
-              <a:latin typeface="Titillium Web" panose="00000500000000000000" pitchFamily="2" charset="0"/>
-              <a:ea typeface="Open Sans" panose="020B0606030504020204" pitchFamily="34" charset="0"/>
-              <a:cs typeface="Open Sans" panose="020B0606030504020204" pitchFamily="34" charset="0"/>
-            </a:endParaRPr>
-          </a:p>
-          <a:p>
-            <a:r>
-              <a:rPr lang="en-US" sz="2400" dirty="0">
+            <a:pPr algn="just"/>
+            <a:r>
+              <a:rPr lang="en-US" sz="2800" dirty="0">
                 <a:latin typeface="Titillium Web" panose="00000500000000000000" pitchFamily="2" charset="0"/>
                 <a:ea typeface="Open Sans" panose="020B0606030504020204" pitchFamily="34" charset="0"/>
                 <a:cs typeface="Open Sans" panose="020B0606030504020204" pitchFamily="34" charset="0"/>
@@ -5549,7 +5368,7 @@
               <a:t>Each article was tokenized using </a:t>
             </a:r>
             <a:r>
-              <a:rPr lang="en-US" sz="2400" dirty="0" err="1">
+              <a:rPr lang="en-US" sz="2800" dirty="0" err="1">
                 <a:latin typeface="Titillium Web" panose="00000500000000000000" pitchFamily="2" charset="0"/>
                 <a:ea typeface="Open Sans" panose="020B0606030504020204" pitchFamily="34" charset="0"/>
                 <a:cs typeface="Open Sans" panose="020B0606030504020204" pitchFamily="34" charset="0"/>
@@ -5557,7 +5376,7 @@
               <a:t>tiktoken</a:t>
             </a:r>
             <a:r>
-              <a:rPr lang="en-US" sz="2400" dirty="0">
+              <a:rPr lang="en-US" sz="2800" dirty="0">
                 <a:latin typeface="Titillium Web" panose="00000500000000000000" pitchFamily="2" charset="0"/>
                 <a:ea typeface="Open Sans" panose="020B0606030504020204" pitchFamily="34" charset="0"/>
                 <a:cs typeface="Open Sans" panose="020B0606030504020204" pitchFamily="34" charset="0"/>
@@ -5583,7 +5402,329 @@
         </p:nvSpPr>
         <p:spPr bwMode="auto">
           <a:xfrm>
-            <a:off x="11521439" y="8196127"/>
+            <a:off x="11521439" y="14040880"/>
+            <a:ext cx="10058400" cy="3570208"/>
+          </a:xfrm>
+          <a:prstGeom prst="rect">
+            <a:avLst/>
+          </a:prstGeom>
+          <a:solidFill>
+            <a:srgbClr val="B4D3E2"/>
+          </a:solidFill>
+          <a:ln>
+            <a:noFill/>
+          </a:ln>
+          <a:effectLst>
+            <a:softEdge rad="0"/>
+          </a:effectLst>
+        </p:spPr>
+        <p:txBody>
+          <a:bodyPr lIns="274320" tIns="274320" rIns="274320" bIns="274320">
+            <a:spAutoFit/>
+          </a:bodyPr>
+          <a:lstStyle>
+            <a:defPPr>
+              <a:defRPr kern="1200"/>
+            </a:defPPr>
+            <a:lvl1pPr defTabSz="4703763" eaLnBrk="0" hangingPunct="0">
+              <a:defRPr sz="9300">
+                <a:solidFill>
+                  <a:schemeClr val="tx1"/>
+                </a:solidFill>
+                <a:latin typeface="Arial"/>
+              </a:defRPr>
+            </a:lvl1pPr>
+            <a:lvl2pPr marL="742950" indent="-285750" defTabSz="4703763" eaLnBrk="0" hangingPunct="0">
+              <a:defRPr sz="9300">
+                <a:solidFill>
+                  <a:schemeClr val="tx1"/>
+                </a:solidFill>
+                <a:latin typeface="Arial"/>
+              </a:defRPr>
+            </a:lvl2pPr>
+            <a:lvl3pPr marL="1143000" indent="-228600" defTabSz="4703763" eaLnBrk="0" hangingPunct="0">
+              <a:defRPr sz="9300">
+                <a:solidFill>
+                  <a:schemeClr val="tx1"/>
+                </a:solidFill>
+                <a:latin typeface="Arial"/>
+              </a:defRPr>
+            </a:lvl3pPr>
+            <a:lvl4pPr marL="1600200" indent="-228600" defTabSz="4703763" eaLnBrk="0" hangingPunct="0">
+              <a:defRPr sz="9300">
+                <a:solidFill>
+                  <a:schemeClr val="tx1"/>
+                </a:solidFill>
+                <a:latin typeface="Arial"/>
+              </a:defRPr>
+            </a:lvl4pPr>
+            <a:lvl5pPr marL="2057400" indent="-228600" defTabSz="4703763" eaLnBrk="0" hangingPunct="0">
+              <a:defRPr sz="9300">
+                <a:solidFill>
+                  <a:schemeClr val="tx1"/>
+                </a:solidFill>
+                <a:latin typeface="Arial"/>
+              </a:defRPr>
+            </a:lvl5pPr>
+            <a:lvl6pPr marL="2514600" indent="-228600" defTabSz="4703763" eaLnBrk="0" fontAlgn="base" hangingPunct="0">
+              <a:spcBef>
+                <a:spcPct val="0"/>
+              </a:spcBef>
+              <a:spcAft>
+                <a:spcPct val="0"/>
+              </a:spcAft>
+              <a:defRPr sz="9300">
+                <a:solidFill>
+                  <a:schemeClr val="tx1"/>
+                </a:solidFill>
+                <a:latin typeface="Arial"/>
+              </a:defRPr>
+            </a:lvl6pPr>
+            <a:lvl7pPr marL="2971800" indent="-228600" defTabSz="4703763" eaLnBrk="0" fontAlgn="base" hangingPunct="0">
+              <a:spcBef>
+                <a:spcPct val="0"/>
+              </a:spcBef>
+              <a:spcAft>
+                <a:spcPct val="0"/>
+              </a:spcAft>
+              <a:defRPr sz="9300">
+                <a:solidFill>
+                  <a:schemeClr val="tx1"/>
+                </a:solidFill>
+                <a:latin typeface="Arial"/>
+              </a:defRPr>
+            </a:lvl7pPr>
+            <a:lvl8pPr marL="3429000" indent="-228600" defTabSz="4703763" eaLnBrk="0" fontAlgn="base" hangingPunct="0">
+              <a:spcBef>
+                <a:spcPct val="0"/>
+              </a:spcBef>
+              <a:spcAft>
+                <a:spcPct val="0"/>
+              </a:spcAft>
+              <a:defRPr sz="9300">
+                <a:solidFill>
+                  <a:schemeClr val="tx1"/>
+                </a:solidFill>
+                <a:latin typeface="Arial"/>
+              </a:defRPr>
+            </a:lvl8pPr>
+            <a:lvl9pPr marL="3886200" indent="-228600" defTabSz="4703763" eaLnBrk="0" fontAlgn="base" hangingPunct="0">
+              <a:spcBef>
+                <a:spcPct val="0"/>
+              </a:spcBef>
+              <a:spcAft>
+                <a:spcPct val="0"/>
+              </a:spcAft>
+              <a:defRPr sz="9300">
+                <a:solidFill>
+                  <a:schemeClr val="tx1"/>
+                </a:solidFill>
+                <a:latin typeface="Arial"/>
+              </a:defRPr>
+            </a:lvl9pPr>
+          </a:lstStyle>
+          <a:p>
+            <a:pPr algn="ctr"/>
+            <a:r>
+              <a:rPr lang="en-US" sz="2800" dirty="0">
+                <a:latin typeface="Titillium Web" panose="00000500000000000000" pitchFamily="2" charset="0"/>
+                <a:ea typeface="Open Sans" panose="020B0606030504020204" pitchFamily="34" charset="0"/>
+                <a:cs typeface="Open Sans" panose="020B0606030504020204" pitchFamily="34" charset="0"/>
+              </a:rPr>
+              <a:t>Knowledge Graph Construction</a:t>
+            </a:r>
+          </a:p>
+          <a:p>
+            <a:pPr algn="just"/>
+            <a:r>
+              <a:rPr lang="en-US" sz="2800" dirty="0">
+                <a:latin typeface="Titillium Web" panose="00000500000000000000" pitchFamily="2" charset="0"/>
+                <a:ea typeface="Open Sans" panose="020B0606030504020204" pitchFamily="34" charset="0"/>
+                <a:cs typeface="Open Sans" panose="020B0606030504020204" pitchFamily="34" charset="0"/>
+              </a:rPr>
+              <a:t>The extracted JSON outputs were converted into node and edge tables to construct a knowledge graph. To improve graph quality, nodes with fewer than two connections were removed, semantically similar entities were merged using fuzzy matching and transformer-based similarity, node size was scaled by degree, and colors were assigned by entity type.</a:t>
+            </a:r>
+          </a:p>
+        </p:txBody>
+      </p:sp>
+      <p:sp>
+        <p:nvSpPr>
+          <p:cNvPr id="239" name="Text Box 6">
+            <a:extLst>
+              <a:ext uri="{FF2B5EF4-FFF2-40B4-BE49-F238E27FC236}">
+                <a16:creationId xmlns:a16="http://schemas.microsoft.com/office/drawing/2014/main" id="{5DAD8F8A-EF61-4280-03BC-FDEB19449874}"/>
+              </a:ext>
+            </a:extLst>
+          </p:cNvPr>
+          <p:cNvSpPr txBox="1">
+            <a:spLocks noChangeArrowheads="1"/>
+          </p:cNvSpPr>
+          <p:nvPr/>
+        </p:nvSpPr>
+        <p:spPr bwMode="auto">
+          <a:xfrm>
+            <a:off x="11539746" y="8154671"/>
+            <a:ext cx="10058400" cy="3570208"/>
+          </a:xfrm>
+          <a:prstGeom prst="rect">
+            <a:avLst/>
+          </a:prstGeom>
+          <a:solidFill>
+            <a:srgbClr val="B4D3E2"/>
+          </a:solidFill>
+          <a:ln>
+            <a:noFill/>
+          </a:ln>
+          <a:effectLst>
+            <a:softEdge rad="0"/>
+          </a:effectLst>
+        </p:spPr>
+        <p:txBody>
+          <a:bodyPr lIns="274320" tIns="274320" rIns="274320" bIns="274320">
+            <a:spAutoFit/>
+          </a:bodyPr>
+          <a:lstStyle>
+            <a:defPPr>
+              <a:defRPr kern="1200"/>
+            </a:defPPr>
+            <a:lvl1pPr defTabSz="4703763" eaLnBrk="0" hangingPunct="0">
+              <a:defRPr sz="9300">
+                <a:solidFill>
+                  <a:schemeClr val="tx1"/>
+                </a:solidFill>
+                <a:latin typeface="Arial"/>
+              </a:defRPr>
+            </a:lvl1pPr>
+            <a:lvl2pPr marL="742950" indent="-285750" defTabSz="4703763" eaLnBrk="0" hangingPunct="0">
+              <a:defRPr sz="9300">
+                <a:solidFill>
+                  <a:schemeClr val="tx1"/>
+                </a:solidFill>
+                <a:latin typeface="Arial"/>
+              </a:defRPr>
+            </a:lvl2pPr>
+            <a:lvl3pPr marL="1143000" indent="-228600" defTabSz="4703763" eaLnBrk="0" hangingPunct="0">
+              <a:defRPr sz="9300">
+                <a:solidFill>
+                  <a:schemeClr val="tx1"/>
+                </a:solidFill>
+                <a:latin typeface="Arial"/>
+              </a:defRPr>
+            </a:lvl3pPr>
+            <a:lvl4pPr marL="1600200" indent="-228600" defTabSz="4703763" eaLnBrk="0" hangingPunct="0">
+              <a:defRPr sz="9300">
+                <a:solidFill>
+                  <a:schemeClr val="tx1"/>
+                </a:solidFill>
+                <a:latin typeface="Arial"/>
+              </a:defRPr>
+            </a:lvl4pPr>
+            <a:lvl5pPr marL="2057400" indent="-228600" defTabSz="4703763" eaLnBrk="0" hangingPunct="0">
+              <a:defRPr sz="9300">
+                <a:solidFill>
+                  <a:schemeClr val="tx1"/>
+                </a:solidFill>
+                <a:latin typeface="Arial"/>
+              </a:defRPr>
+            </a:lvl5pPr>
+            <a:lvl6pPr marL="2514600" indent="-228600" defTabSz="4703763" eaLnBrk="0" fontAlgn="base" hangingPunct="0">
+              <a:spcBef>
+                <a:spcPct val="0"/>
+              </a:spcBef>
+              <a:spcAft>
+                <a:spcPct val="0"/>
+              </a:spcAft>
+              <a:defRPr sz="9300">
+                <a:solidFill>
+                  <a:schemeClr val="tx1"/>
+                </a:solidFill>
+                <a:latin typeface="Arial"/>
+              </a:defRPr>
+            </a:lvl6pPr>
+            <a:lvl7pPr marL="2971800" indent="-228600" defTabSz="4703763" eaLnBrk="0" fontAlgn="base" hangingPunct="0">
+              <a:spcBef>
+                <a:spcPct val="0"/>
+              </a:spcBef>
+              <a:spcAft>
+                <a:spcPct val="0"/>
+              </a:spcAft>
+              <a:defRPr sz="9300">
+                <a:solidFill>
+                  <a:schemeClr val="tx1"/>
+                </a:solidFill>
+                <a:latin typeface="Arial"/>
+              </a:defRPr>
+            </a:lvl7pPr>
+            <a:lvl8pPr marL="3429000" indent="-228600" defTabSz="4703763" eaLnBrk="0" fontAlgn="base" hangingPunct="0">
+              <a:spcBef>
+                <a:spcPct val="0"/>
+              </a:spcBef>
+              <a:spcAft>
+                <a:spcPct val="0"/>
+              </a:spcAft>
+              <a:defRPr sz="9300">
+                <a:solidFill>
+                  <a:schemeClr val="tx1"/>
+                </a:solidFill>
+                <a:latin typeface="Arial"/>
+              </a:defRPr>
+            </a:lvl8pPr>
+            <a:lvl9pPr marL="3886200" indent="-228600" defTabSz="4703763" eaLnBrk="0" fontAlgn="base" hangingPunct="0">
+              <a:spcBef>
+                <a:spcPct val="0"/>
+              </a:spcBef>
+              <a:spcAft>
+                <a:spcPct val="0"/>
+              </a:spcAft>
+              <a:defRPr sz="9300">
+                <a:solidFill>
+                  <a:schemeClr val="tx1"/>
+                </a:solidFill>
+                <a:latin typeface="Arial"/>
+              </a:defRPr>
+            </a:lvl9pPr>
+          </a:lstStyle>
+          <a:p>
+            <a:pPr algn="ctr"/>
+            <a:r>
+              <a:rPr lang="en-US" sz="2800" dirty="0">
+                <a:latin typeface="Titillium Web" panose="00000500000000000000" pitchFamily="2" charset="0"/>
+                <a:ea typeface="Open Sans" panose="020B0606030504020204" pitchFamily="34" charset="0"/>
+                <a:cs typeface="Open Sans" panose="020B0606030504020204" pitchFamily="34" charset="0"/>
+              </a:rPr>
+              <a:t>LLM-Based Information Extraction</a:t>
+            </a:r>
+          </a:p>
+          <a:p>
+            <a:pPr algn="just"/>
+            <a:r>
+              <a:rPr lang="en-US" sz="2800" dirty="0">
+                <a:latin typeface="Titillium Web" panose="00000500000000000000" pitchFamily="2" charset="0"/>
+                <a:ea typeface="Open Sans" panose="020B0606030504020204" pitchFamily="34" charset="0"/>
+                <a:cs typeface="Open Sans" panose="020B0606030504020204" pitchFamily="34" charset="0"/>
+              </a:rPr>
+              <a:t>A structured prompting framework consisting of a system prompt, user prompt, and JSON output schema was developed and iteratively optimized to reduce token usage. The LLM extracted entities (e.g., organizations, technologies, policies, countries) and semantic relationships while also determining whether each article was meaningfully related to solar energy.</a:t>
+            </a:r>
+          </a:p>
+        </p:txBody>
+      </p:sp>
+      <p:sp>
+        <p:nvSpPr>
+          <p:cNvPr id="241" name="Text Box 6">
+            <a:extLst>
+              <a:ext uri="{FF2B5EF4-FFF2-40B4-BE49-F238E27FC236}">
+                <a16:creationId xmlns:a16="http://schemas.microsoft.com/office/drawing/2014/main" id="{7FFDF291-C30B-7440-51D0-7CB74BA6F891}"/>
+              </a:ext>
+            </a:extLst>
+          </p:cNvPr>
+          <p:cNvSpPr txBox="1">
+            <a:spLocks noChangeArrowheads="1"/>
+          </p:cNvSpPr>
+          <p:nvPr/>
+        </p:nvSpPr>
+        <p:spPr bwMode="auto">
+          <a:xfrm>
+            <a:off x="11521439" y="26773954"/>
             <a:ext cx="10058400" cy="3139321"/>
           </a:xfrm>
           <a:prstGeom prst="rect">
@@ -5705,40 +5846,86 @@
             </a:lvl9pPr>
           </a:lstStyle>
           <a:p>
-            <a:r>
-              <a:rPr lang="en-US" sz="2400" dirty="0">
+            <a:pPr algn="ctr"/>
+            <a:r>
+              <a:rPr lang="en-US" sz="2800" dirty="0">
                 <a:latin typeface="Titillium Web" panose="00000500000000000000" pitchFamily="2" charset="0"/>
                 <a:ea typeface="Open Sans" panose="020B0606030504020204" pitchFamily="34" charset="0"/>
                 <a:cs typeface="Open Sans" panose="020B0606030504020204" pitchFamily="34" charset="0"/>
               </a:rPr>
-              <a:t>Knowledge Graph Construction</a:t>
-            </a:r>
-          </a:p>
-          <a:p>
-            <a:endParaRPr lang="en-US" sz="2400" dirty="0">
-              <a:latin typeface="Titillium Web" panose="00000500000000000000" pitchFamily="2" charset="0"/>
-              <a:ea typeface="Open Sans" panose="020B0606030504020204" pitchFamily="34" charset="0"/>
-              <a:cs typeface="Open Sans" panose="020B0606030504020204" pitchFamily="34" charset="0"/>
-            </a:endParaRPr>
-          </a:p>
-          <a:p>
-            <a:r>
-              <a:rPr lang="en-US" sz="2400" dirty="0">
+              <a:t>Network Analysis</a:t>
+            </a:r>
+          </a:p>
+          <a:p>
+            <a:pPr algn="just"/>
+            <a:r>
+              <a:rPr lang="en-US" sz="2800" dirty="0">
                 <a:latin typeface="Titillium Web" panose="00000500000000000000" pitchFamily="2" charset="0"/>
                 <a:ea typeface="Open Sans" panose="020B0606030504020204" pitchFamily="34" charset="0"/>
                 <a:cs typeface="Open Sans" panose="020B0606030504020204" pitchFamily="34" charset="0"/>
               </a:rPr>
-              <a:t>The extracted JSON outputs were converted into node and edge tables to construct a knowledge graph. To improve graph quality, nodes with fewer than two connections were removed, semantically similar entities were merged using fuzzy matching and transformer-based similarity, node size was scaled by degree, and colors were assigned by entity type.</a:t>
+              <a:t>Community detection was applied to identify groups of closely connected entities. Additional analysis examined interactions between communities and the relationship types that most strongly connected different sectors of the international solar energy ecosystem.</a:t>
             </a:r>
           </a:p>
         </p:txBody>
       </p:sp>
       <p:sp>
         <p:nvSpPr>
-          <p:cNvPr id="239" name="Text Box 6">
+          <p:cNvPr id="244" name="Rectangle 5">
             <a:extLst>
               <a:ext uri="{FF2B5EF4-FFF2-40B4-BE49-F238E27FC236}">
-                <a16:creationId xmlns:a16="http://schemas.microsoft.com/office/drawing/2014/main" id="{5DAD8F8A-EF61-4280-03BC-FDEB19449874}"/>
+                <a16:creationId xmlns:a16="http://schemas.microsoft.com/office/drawing/2014/main" id="{3287EB6F-AA5C-E342-30B0-E54767021E00}"/>
+              </a:ext>
+            </a:extLst>
+          </p:cNvPr>
+          <p:cNvSpPr>
+            <a:spLocks noChangeArrowheads="1"/>
+          </p:cNvSpPr>
+          <p:nvPr/>
+        </p:nvSpPr>
+        <p:spPr bwMode="auto">
+          <a:xfrm>
+            <a:off x="738840" y="12903539"/>
+            <a:ext cx="10058400" cy="784225"/>
+          </a:xfrm>
+          <a:prstGeom prst="rect">
+            <a:avLst/>
+          </a:prstGeom>
+          <a:solidFill>
+            <a:srgbClr val="1482A5"/>
+          </a:solidFill>
+          <a:ln>
+            <a:noFill/>
+          </a:ln>
+          <a:effectLst/>
+        </p:spPr>
+        <p:txBody>
+          <a:bodyPr wrap="none" lIns="274320" tIns="68580" rIns="274320" bIns="68580" anchor="ctr"/>
+          <a:lstStyle>
+            <a:defPPr>
+              <a:defRPr kern="1200"/>
+            </a:defPPr>
+          </a:lstStyle>
+          <a:p>
+            <a:pPr defTabSz="4703763"/>
+            <a:r>
+              <a:rPr lang="en-US" sz="3600" dirty="0">
+                <a:solidFill>
+                  <a:schemeClr val="bg1"/>
+                </a:solidFill>
+                <a:latin typeface="Amaranth" panose="02000503050000020004" pitchFamily="2" charset="0"/>
+              </a:rPr>
+              <a:t>Methodology</a:t>
+            </a:r>
+          </a:p>
+        </p:txBody>
+      </p:sp>
+      <p:sp>
+        <p:nvSpPr>
+          <p:cNvPr id="246" name="Text Box 6">
+            <a:extLst>
+              <a:ext uri="{FF2B5EF4-FFF2-40B4-BE49-F238E27FC236}">
+                <a16:creationId xmlns:a16="http://schemas.microsoft.com/office/drawing/2014/main" id="{2576A97F-56DB-4BBD-B2A5-6AF36265324E}"/>
               </a:ext>
             </a:extLst>
           </p:cNvPr>
@@ -5749,8 +5936,8 @@
         </p:nvSpPr>
         <p:spPr bwMode="auto">
           <a:xfrm>
-            <a:off x="731520" y="27125314"/>
-            <a:ext cx="10058400" cy="3508653"/>
+            <a:off x="33115927" y="8154671"/>
+            <a:ext cx="10058400" cy="4862870"/>
           </a:xfrm>
           <a:prstGeom prst="rect">
             <a:avLst/>
@@ -5871,40 +6058,92 @@
             </a:lvl9pPr>
           </a:lstStyle>
           <a:p>
-            <a:r>
-              <a:rPr lang="en-US" sz="2400" dirty="0">
+            <a:pPr marL="457200" indent="-457200" algn="just">
+              <a:buFont typeface="Arial" panose="020B0604020202020204" pitchFamily="34" charset="0"/>
+              <a:buChar char="•"/>
+            </a:pPr>
+            <a:r>
+              <a:rPr lang="en-US" sz="2800" dirty="0">
                 <a:latin typeface="Titillium Web" panose="00000500000000000000" pitchFamily="2" charset="0"/>
                 <a:ea typeface="Open Sans" panose="020B0606030504020204" pitchFamily="34" charset="0"/>
                 <a:cs typeface="Open Sans" panose="020B0606030504020204" pitchFamily="34" charset="0"/>
               </a:rPr>
-              <a:t>LLM-Based Information Extraction</a:t>
-            </a:r>
-          </a:p>
-          <a:p>
-            <a:endParaRPr lang="en-US" sz="2400" dirty="0">
-              <a:latin typeface="Titillium Web" panose="00000500000000000000" pitchFamily="2" charset="0"/>
-              <a:ea typeface="Open Sans" panose="020B0606030504020204" pitchFamily="34" charset="0"/>
-              <a:cs typeface="Open Sans" panose="020B0606030504020204" pitchFamily="34" charset="0"/>
-            </a:endParaRPr>
-          </a:p>
-          <a:p>
-            <a:r>
-              <a:rPr lang="en-US" sz="2400" dirty="0">
+              <a:t>Further analysis can be done with the dataset on the companies reporting on solar energy. Metrics such as common topics, geographical focus, and coverage percentage can provide an understanding of how news corporations in the dataset report on solar energy.</a:t>
+            </a:r>
+          </a:p>
+          <a:p>
+            <a:pPr marL="457200" indent="-457200" algn="just">
+              <a:buFont typeface="Arial" panose="020B0604020202020204" pitchFamily="34" charset="0"/>
+              <a:buChar char="•"/>
+            </a:pPr>
+            <a:r>
+              <a:rPr lang="en-US" sz="2800" dirty="0">
                 <a:latin typeface="Titillium Web" panose="00000500000000000000" pitchFamily="2" charset="0"/>
                 <a:ea typeface="Open Sans" panose="020B0606030504020204" pitchFamily="34" charset="0"/>
                 <a:cs typeface="Open Sans" panose="020B0606030504020204" pitchFamily="34" charset="0"/>
               </a:rPr>
-              <a:t>A structured prompting framework consisting of a system prompt, user prompt, and JSON output schema was developed and iteratively optimized to reduce token usage. The LLM extracted entities (e.g., organizations, technologies, policies, countries) and semantic relationships while also determining whether each article was meaningfully related to solar energy.</a:t>
+              <a:t>A similar pipeline can be applied to other topics beyond solar energy. As the Cornell Newsroom dataset is not limited to solar energy, data filtering strategies with different topic-specific keywords can be applied to construct similar datasets for other topics and network analyses.</a:t>
             </a:r>
           </a:p>
         </p:txBody>
       </p:sp>
       <p:sp>
         <p:nvSpPr>
-          <p:cNvPr id="241" name="Text Box 6">
+          <p:cNvPr id="248" name="Rectangle 5">
             <a:extLst>
               <a:ext uri="{FF2B5EF4-FFF2-40B4-BE49-F238E27FC236}">
-                <a16:creationId xmlns:a16="http://schemas.microsoft.com/office/drawing/2014/main" id="{7FFDF291-C30B-7440-51D0-7CB74BA6F891}"/>
+                <a16:creationId xmlns:a16="http://schemas.microsoft.com/office/drawing/2014/main" id="{8EB9A9AE-9CE2-CF79-0BF2-28093D349CFA}"/>
+              </a:ext>
+            </a:extLst>
+          </p:cNvPr>
+          <p:cNvSpPr>
+            <a:spLocks noChangeArrowheads="1"/>
+          </p:cNvSpPr>
+          <p:nvPr/>
+        </p:nvSpPr>
+        <p:spPr bwMode="auto">
+          <a:xfrm>
+            <a:off x="33097620" y="15606589"/>
+            <a:ext cx="10058400" cy="784225"/>
+          </a:xfrm>
+          <a:prstGeom prst="rect">
+            <a:avLst/>
+          </a:prstGeom>
+          <a:solidFill>
+            <a:srgbClr val="1482A5"/>
+          </a:solidFill>
+          <a:ln>
+            <a:noFill/>
+          </a:ln>
+          <a:effectLst/>
+        </p:spPr>
+        <p:txBody>
+          <a:bodyPr wrap="none" lIns="274320" tIns="68580" rIns="274320" bIns="68580" anchor="ctr"/>
+          <a:lstStyle>
+            <a:defPPr>
+              <a:defRPr kern="1200"/>
+            </a:defPPr>
+          </a:lstStyle>
+          <a:p>
+            <a:pPr defTabSz="4703763"/>
+            <a:r>
+              <a:rPr lang="en-US" sz="3600" dirty="0">
+                <a:solidFill>
+                  <a:schemeClr val="bg1"/>
+                </a:solidFill>
+                <a:latin typeface="Amaranth" panose="02000503050000020004" pitchFamily="2" charset="0"/>
+              </a:rPr>
+              <a:t>Limitations</a:t>
+            </a:r>
+          </a:p>
+        </p:txBody>
+      </p:sp>
+      <p:sp>
+        <p:nvSpPr>
+          <p:cNvPr id="250" name="Text Box 6">
+            <a:extLst>
+              <a:ext uri="{FF2B5EF4-FFF2-40B4-BE49-F238E27FC236}">
+                <a16:creationId xmlns:a16="http://schemas.microsoft.com/office/drawing/2014/main" id="{B54F5422-44CD-FE3F-1DF0-906EFB78BC57}"/>
               </a:ext>
             </a:extLst>
           </p:cNvPr>
@@ -5915,8 +6154,8 @@
         </p:nvSpPr>
         <p:spPr bwMode="auto">
           <a:xfrm>
-            <a:off x="11521440" y="20752140"/>
-            <a:ext cx="10058400" cy="2769989"/>
+            <a:off x="33093960" y="16832786"/>
+            <a:ext cx="10058400" cy="4862870"/>
           </a:xfrm>
           <a:prstGeom prst="rect">
             <a:avLst/>
@@ -6037,480 +6276,12 @@
             </a:lvl9pPr>
           </a:lstStyle>
           <a:p>
-            <a:r>
-              <a:rPr lang="en-US" sz="2400" dirty="0">
-                <a:latin typeface="Titillium Web" panose="00000500000000000000" pitchFamily="2" charset="0"/>
-                <a:ea typeface="Open Sans" panose="020B0606030504020204" pitchFamily="34" charset="0"/>
-                <a:cs typeface="Open Sans" panose="020B0606030504020204" pitchFamily="34" charset="0"/>
-              </a:rPr>
-              <a:t>Network Analysis</a:t>
-            </a:r>
-          </a:p>
-          <a:p>
-            <a:endParaRPr lang="en-US" sz="2400" dirty="0">
-              <a:latin typeface="Titillium Web" panose="00000500000000000000" pitchFamily="2" charset="0"/>
-              <a:ea typeface="Open Sans" panose="020B0606030504020204" pitchFamily="34" charset="0"/>
-              <a:cs typeface="Open Sans" panose="020B0606030504020204" pitchFamily="34" charset="0"/>
-            </a:endParaRPr>
-          </a:p>
-          <a:p>
-            <a:r>
-              <a:rPr lang="en-US" sz="2400" dirty="0">
-                <a:latin typeface="Titillium Web" panose="00000500000000000000" pitchFamily="2" charset="0"/>
-                <a:ea typeface="Open Sans" panose="020B0606030504020204" pitchFamily="34" charset="0"/>
-                <a:cs typeface="Open Sans" panose="020B0606030504020204" pitchFamily="34" charset="0"/>
-              </a:rPr>
-              <a:t>Community detection was applied to identify groups of closely connected entities. Additional analysis examined interactions between communities and the relationship types that most strongly connected different sectors of the international solar energy ecosystem.</a:t>
-            </a:r>
-          </a:p>
-        </p:txBody>
-      </p:sp>
-      <p:sp>
-        <p:nvSpPr>
-          <p:cNvPr id="244" name="Rectangle 5">
-            <a:extLst>
-              <a:ext uri="{FF2B5EF4-FFF2-40B4-BE49-F238E27FC236}">
-                <a16:creationId xmlns:a16="http://schemas.microsoft.com/office/drawing/2014/main" id="{3287EB6F-AA5C-E342-30B0-E54767021E00}"/>
-              </a:ext>
-            </a:extLst>
-          </p:cNvPr>
-          <p:cNvSpPr>
-            <a:spLocks noChangeArrowheads="1"/>
-          </p:cNvSpPr>
-          <p:nvPr/>
-        </p:nvSpPr>
-        <p:spPr bwMode="auto">
-          <a:xfrm>
-            <a:off x="731519" y="15480278"/>
-            <a:ext cx="10058400" cy="784225"/>
-          </a:xfrm>
-          <a:prstGeom prst="rect">
-            <a:avLst/>
-          </a:prstGeom>
-          <a:solidFill>
-            <a:srgbClr val="1482A5"/>
-          </a:solidFill>
-          <a:ln>
-            <a:noFill/>
-          </a:ln>
-          <a:effectLst/>
-        </p:spPr>
-        <p:txBody>
-          <a:bodyPr wrap="none" lIns="274320" tIns="68580" rIns="274320" bIns="68580" anchor="ctr"/>
-          <a:lstStyle>
-            <a:defPPr>
-              <a:defRPr kern="1200"/>
-            </a:defPPr>
-          </a:lstStyle>
-          <a:p>
-            <a:pPr defTabSz="4703763"/>
-            <a:r>
-              <a:rPr lang="en-US" sz="3600" dirty="0">
-                <a:solidFill>
-                  <a:schemeClr val="bg1"/>
-                </a:solidFill>
-                <a:latin typeface="Amaranth" panose="02000503050000020004" pitchFamily="2" charset="0"/>
-              </a:rPr>
-              <a:t>Methodology</a:t>
-            </a:r>
-          </a:p>
-        </p:txBody>
-      </p:sp>
-      <p:sp>
-        <p:nvSpPr>
-          <p:cNvPr id="246" name="Text Box 6">
-            <a:extLst>
-              <a:ext uri="{FF2B5EF4-FFF2-40B4-BE49-F238E27FC236}">
-                <a16:creationId xmlns:a16="http://schemas.microsoft.com/office/drawing/2014/main" id="{2576A97F-56DB-4BBD-B2A5-6AF36265324E}"/>
-              </a:ext>
-            </a:extLst>
-          </p:cNvPr>
-          <p:cNvSpPr txBox="1">
-            <a:spLocks noChangeArrowheads="1"/>
-          </p:cNvSpPr>
-          <p:nvPr/>
-        </p:nvSpPr>
-        <p:spPr bwMode="auto">
-          <a:xfrm>
-            <a:off x="33097620" y="8196126"/>
-            <a:ext cx="10058400" cy="5355312"/>
-          </a:xfrm>
-          <a:prstGeom prst="rect">
-            <a:avLst/>
-          </a:prstGeom>
-          <a:solidFill>
-            <a:srgbClr val="B4D3E2"/>
-          </a:solidFill>
-          <a:ln>
-            <a:noFill/>
-          </a:ln>
-          <a:effectLst>
-            <a:softEdge rad="0"/>
-          </a:effectLst>
-        </p:spPr>
-        <p:txBody>
-          <a:bodyPr lIns="274320" tIns="274320" rIns="274320" bIns="274320">
-            <a:spAutoFit/>
-          </a:bodyPr>
-          <a:lstStyle>
-            <a:defPPr>
-              <a:defRPr kern="1200"/>
-            </a:defPPr>
-            <a:lvl1pPr defTabSz="4703763" eaLnBrk="0" hangingPunct="0">
-              <a:defRPr sz="9300">
-                <a:solidFill>
-                  <a:schemeClr val="tx1"/>
-                </a:solidFill>
-                <a:latin typeface="Arial"/>
-              </a:defRPr>
-            </a:lvl1pPr>
-            <a:lvl2pPr marL="742950" indent="-285750" defTabSz="4703763" eaLnBrk="0" hangingPunct="0">
-              <a:defRPr sz="9300">
-                <a:solidFill>
-                  <a:schemeClr val="tx1"/>
-                </a:solidFill>
-                <a:latin typeface="Arial"/>
-              </a:defRPr>
-            </a:lvl2pPr>
-            <a:lvl3pPr marL="1143000" indent="-228600" defTabSz="4703763" eaLnBrk="0" hangingPunct="0">
-              <a:defRPr sz="9300">
-                <a:solidFill>
-                  <a:schemeClr val="tx1"/>
-                </a:solidFill>
-                <a:latin typeface="Arial"/>
-              </a:defRPr>
-            </a:lvl3pPr>
-            <a:lvl4pPr marL="1600200" indent="-228600" defTabSz="4703763" eaLnBrk="0" hangingPunct="0">
-              <a:defRPr sz="9300">
-                <a:solidFill>
-                  <a:schemeClr val="tx1"/>
-                </a:solidFill>
-                <a:latin typeface="Arial"/>
-              </a:defRPr>
-            </a:lvl4pPr>
-            <a:lvl5pPr marL="2057400" indent="-228600" defTabSz="4703763" eaLnBrk="0" hangingPunct="0">
-              <a:defRPr sz="9300">
-                <a:solidFill>
-                  <a:schemeClr val="tx1"/>
-                </a:solidFill>
-                <a:latin typeface="Arial"/>
-              </a:defRPr>
-            </a:lvl5pPr>
-            <a:lvl6pPr marL="2514600" indent="-228600" defTabSz="4703763" eaLnBrk="0" fontAlgn="base" hangingPunct="0">
-              <a:spcBef>
-                <a:spcPct val="0"/>
-              </a:spcBef>
-              <a:spcAft>
-                <a:spcPct val="0"/>
-              </a:spcAft>
-              <a:defRPr sz="9300">
-                <a:solidFill>
-                  <a:schemeClr val="tx1"/>
-                </a:solidFill>
-                <a:latin typeface="Arial"/>
-              </a:defRPr>
-            </a:lvl6pPr>
-            <a:lvl7pPr marL="2971800" indent="-228600" defTabSz="4703763" eaLnBrk="0" fontAlgn="base" hangingPunct="0">
-              <a:spcBef>
-                <a:spcPct val="0"/>
-              </a:spcBef>
-              <a:spcAft>
-                <a:spcPct val="0"/>
-              </a:spcAft>
-              <a:defRPr sz="9300">
-                <a:solidFill>
-                  <a:schemeClr val="tx1"/>
-                </a:solidFill>
-                <a:latin typeface="Arial"/>
-              </a:defRPr>
-            </a:lvl7pPr>
-            <a:lvl8pPr marL="3429000" indent="-228600" defTabSz="4703763" eaLnBrk="0" fontAlgn="base" hangingPunct="0">
-              <a:spcBef>
-                <a:spcPct val="0"/>
-              </a:spcBef>
-              <a:spcAft>
-                <a:spcPct val="0"/>
-              </a:spcAft>
-              <a:defRPr sz="9300">
-                <a:solidFill>
-                  <a:schemeClr val="tx1"/>
-                </a:solidFill>
-                <a:latin typeface="Arial"/>
-              </a:defRPr>
-            </a:lvl8pPr>
-            <a:lvl9pPr marL="3886200" indent="-228600" defTabSz="4703763" eaLnBrk="0" fontAlgn="base" hangingPunct="0">
-              <a:spcBef>
-                <a:spcPct val="0"/>
-              </a:spcBef>
-              <a:spcAft>
-                <a:spcPct val="0"/>
-              </a:spcAft>
-              <a:defRPr sz="9300">
-                <a:solidFill>
-                  <a:schemeClr val="tx1"/>
-                </a:solidFill>
-                <a:latin typeface="Arial"/>
-              </a:defRPr>
-            </a:lvl9pPr>
-          </a:lstStyle>
-          <a:p>
-            <a:r>
-              <a:rPr lang="en-US" sz="2400" dirty="0">
-                <a:latin typeface="Titillium Web" panose="00000500000000000000" pitchFamily="2" charset="0"/>
-                <a:ea typeface="Open Sans" panose="020B0606030504020204" pitchFamily="34" charset="0"/>
-                <a:cs typeface="Open Sans" panose="020B0606030504020204" pitchFamily="34" charset="0"/>
-              </a:rPr>
-              <a:t>News Company Analysis</a:t>
-            </a:r>
-          </a:p>
-          <a:p>
-            <a:endParaRPr lang="en-US" sz="2400" dirty="0">
-              <a:latin typeface="Titillium Web" panose="00000500000000000000" pitchFamily="2" charset="0"/>
-              <a:ea typeface="Open Sans" panose="020B0606030504020204" pitchFamily="34" charset="0"/>
-              <a:cs typeface="Open Sans" panose="020B0606030504020204" pitchFamily="34" charset="0"/>
-            </a:endParaRPr>
-          </a:p>
-          <a:p>
-            <a:r>
-              <a:rPr lang="en-US" sz="2400" dirty="0">
-                <a:latin typeface="Titillium Web" panose="00000500000000000000" pitchFamily="2" charset="0"/>
-                <a:ea typeface="Open Sans" panose="020B0606030504020204" pitchFamily="34" charset="0"/>
-                <a:cs typeface="Open Sans" panose="020B0606030504020204" pitchFamily="34" charset="0"/>
-              </a:rPr>
-              <a:t>Further analysis can be done with the dataset on the companies reporting on solar energy. Metrics such as common topics, geographical focus, and coverage percentage can provide an understanding of how news corporations in the dataset report on solar energy.</a:t>
-            </a:r>
-          </a:p>
-          <a:p>
-            <a:endParaRPr lang="en-US" sz="2400" dirty="0">
-              <a:latin typeface="Titillium Web" panose="00000500000000000000" pitchFamily="2" charset="0"/>
-              <a:ea typeface="Open Sans" panose="020B0606030504020204" pitchFamily="34" charset="0"/>
-              <a:cs typeface="Open Sans" panose="020B0606030504020204" pitchFamily="34" charset="0"/>
-            </a:endParaRPr>
-          </a:p>
-          <a:p>
-            <a:r>
-              <a:rPr lang="en-US" sz="2400" dirty="0">
-                <a:latin typeface="Titillium Web" panose="00000500000000000000" pitchFamily="2" charset="0"/>
-                <a:ea typeface="Open Sans" panose="020B0606030504020204" pitchFamily="34" charset="0"/>
-                <a:cs typeface="Open Sans" panose="020B0606030504020204" pitchFamily="34" charset="0"/>
-              </a:rPr>
-              <a:t>Expansion to Other Topics</a:t>
-            </a:r>
-          </a:p>
-          <a:p>
-            <a:endParaRPr lang="en-US" sz="2400" dirty="0">
-              <a:latin typeface="Titillium Web" panose="00000500000000000000" pitchFamily="2" charset="0"/>
-              <a:ea typeface="Open Sans" panose="020B0606030504020204" pitchFamily="34" charset="0"/>
-              <a:cs typeface="Open Sans" panose="020B0606030504020204" pitchFamily="34" charset="0"/>
-            </a:endParaRPr>
-          </a:p>
-          <a:p>
-            <a:r>
-              <a:rPr lang="en-US" sz="2400" dirty="0">
-                <a:latin typeface="Titillium Web" panose="00000500000000000000" pitchFamily="2" charset="0"/>
-                <a:ea typeface="Open Sans" panose="020B0606030504020204" pitchFamily="34" charset="0"/>
-                <a:cs typeface="Open Sans" panose="020B0606030504020204" pitchFamily="34" charset="0"/>
-              </a:rPr>
-              <a:t>A similar pipeline can be applied to other topics beyond solar energy. As the Cornell Newsroom dataset is not limited to solar energy, data filtering strategies with different topic-specific keywords can be applied to construct similar datasets for other topics and network analyses.</a:t>
-            </a:r>
-          </a:p>
-        </p:txBody>
-      </p:sp>
-      <p:sp>
-        <p:nvSpPr>
-          <p:cNvPr id="248" name="Rectangle 5">
-            <a:extLst>
-              <a:ext uri="{FF2B5EF4-FFF2-40B4-BE49-F238E27FC236}">
-                <a16:creationId xmlns:a16="http://schemas.microsoft.com/office/drawing/2014/main" id="{8EB9A9AE-9CE2-CF79-0BF2-28093D349CFA}"/>
-              </a:ext>
-            </a:extLst>
-          </p:cNvPr>
-          <p:cNvSpPr>
-            <a:spLocks noChangeArrowheads="1"/>
-          </p:cNvSpPr>
-          <p:nvPr/>
-        </p:nvSpPr>
-        <p:spPr bwMode="auto">
-          <a:xfrm>
-            <a:off x="33097620" y="14112140"/>
-            <a:ext cx="10058400" cy="784225"/>
-          </a:xfrm>
-          <a:prstGeom prst="rect">
-            <a:avLst/>
-          </a:prstGeom>
-          <a:solidFill>
-            <a:srgbClr val="1482A5"/>
-          </a:solidFill>
-          <a:ln>
-            <a:noFill/>
-          </a:ln>
-          <a:effectLst/>
-        </p:spPr>
-        <p:txBody>
-          <a:bodyPr wrap="none" lIns="274320" tIns="68580" rIns="274320" bIns="68580" anchor="ctr"/>
-          <a:lstStyle>
-            <a:defPPr>
-              <a:defRPr kern="1200"/>
-            </a:defPPr>
-          </a:lstStyle>
-          <a:p>
-            <a:pPr defTabSz="4703763"/>
-            <a:r>
-              <a:rPr lang="en-US" sz="3600" dirty="0">
-                <a:solidFill>
-                  <a:schemeClr val="bg1"/>
-                </a:solidFill>
-                <a:latin typeface="Amaranth" panose="02000503050000020004" pitchFamily="2" charset="0"/>
-              </a:rPr>
-              <a:t>Limitations</a:t>
-            </a:r>
-          </a:p>
-        </p:txBody>
-      </p:sp>
-      <p:sp>
-        <p:nvSpPr>
-          <p:cNvPr id="250" name="Text Box 6">
-            <a:extLst>
-              <a:ext uri="{FF2B5EF4-FFF2-40B4-BE49-F238E27FC236}">
-                <a16:creationId xmlns:a16="http://schemas.microsoft.com/office/drawing/2014/main" id="{B54F5422-44CD-FE3F-1DF0-906EFB78BC57}"/>
-              </a:ext>
-            </a:extLst>
-          </p:cNvPr>
-          <p:cNvSpPr txBox="1">
-            <a:spLocks noChangeArrowheads="1"/>
-          </p:cNvSpPr>
-          <p:nvPr/>
-        </p:nvSpPr>
-        <p:spPr bwMode="auto">
-          <a:xfrm>
-            <a:off x="33093961" y="15183014"/>
-            <a:ext cx="10058400" cy="3508653"/>
-          </a:xfrm>
-          <a:prstGeom prst="rect">
-            <a:avLst/>
-          </a:prstGeom>
-          <a:solidFill>
-            <a:srgbClr val="B4D3E2"/>
-          </a:solidFill>
-          <a:ln>
-            <a:noFill/>
-          </a:ln>
-          <a:effectLst>
-            <a:softEdge rad="0"/>
-          </a:effectLst>
-        </p:spPr>
-        <p:txBody>
-          <a:bodyPr lIns="274320" tIns="274320" rIns="274320" bIns="274320">
-            <a:spAutoFit/>
-          </a:bodyPr>
-          <a:lstStyle>
-            <a:defPPr>
-              <a:defRPr kern="1200"/>
-            </a:defPPr>
-            <a:lvl1pPr defTabSz="4703763" eaLnBrk="0" hangingPunct="0">
-              <a:defRPr sz="9300">
-                <a:solidFill>
-                  <a:schemeClr val="tx1"/>
-                </a:solidFill>
-                <a:latin typeface="Arial"/>
-              </a:defRPr>
-            </a:lvl1pPr>
-            <a:lvl2pPr marL="742950" indent="-285750" defTabSz="4703763" eaLnBrk="0" hangingPunct="0">
-              <a:defRPr sz="9300">
-                <a:solidFill>
-                  <a:schemeClr val="tx1"/>
-                </a:solidFill>
-                <a:latin typeface="Arial"/>
-              </a:defRPr>
-            </a:lvl2pPr>
-            <a:lvl3pPr marL="1143000" indent="-228600" defTabSz="4703763" eaLnBrk="0" hangingPunct="0">
-              <a:defRPr sz="9300">
-                <a:solidFill>
-                  <a:schemeClr val="tx1"/>
-                </a:solidFill>
-                <a:latin typeface="Arial"/>
-              </a:defRPr>
-            </a:lvl3pPr>
-            <a:lvl4pPr marL="1600200" indent="-228600" defTabSz="4703763" eaLnBrk="0" hangingPunct="0">
-              <a:defRPr sz="9300">
-                <a:solidFill>
-                  <a:schemeClr val="tx1"/>
-                </a:solidFill>
-                <a:latin typeface="Arial"/>
-              </a:defRPr>
-            </a:lvl4pPr>
-            <a:lvl5pPr marL="2057400" indent="-228600" defTabSz="4703763" eaLnBrk="0" hangingPunct="0">
-              <a:defRPr sz="9300">
-                <a:solidFill>
-                  <a:schemeClr val="tx1"/>
-                </a:solidFill>
-                <a:latin typeface="Arial"/>
-              </a:defRPr>
-            </a:lvl5pPr>
-            <a:lvl6pPr marL="2514600" indent="-228600" defTabSz="4703763" eaLnBrk="0" fontAlgn="base" hangingPunct="0">
-              <a:spcBef>
-                <a:spcPct val="0"/>
-              </a:spcBef>
-              <a:spcAft>
-                <a:spcPct val="0"/>
-              </a:spcAft>
-              <a:defRPr sz="9300">
-                <a:solidFill>
-                  <a:schemeClr val="tx1"/>
-                </a:solidFill>
-                <a:latin typeface="Arial"/>
-              </a:defRPr>
-            </a:lvl6pPr>
-            <a:lvl7pPr marL="2971800" indent="-228600" defTabSz="4703763" eaLnBrk="0" fontAlgn="base" hangingPunct="0">
-              <a:spcBef>
-                <a:spcPct val="0"/>
-              </a:spcBef>
-              <a:spcAft>
-                <a:spcPct val="0"/>
-              </a:spcAft>
-              <a:defRPr sz="9300">
-                <a:solidFill>
-                  <a:schemeClr val="tx1"/>
-                </a:solidFill>
-                <a:latin typeface="Arial"/>
-              </a:defRPr>
-            </a:lvl7pPr>
-            <a:lvl8pPr marL="3429000" indent="-228600" defTabSz="4703763" eaLnBrk="0" fontAlgn="base" hangingPunct="0">
-              <a:spcBef>
-                <a:spcPct val="0"/>
-              </a:spcBef>
-              <a:spcAft>
-                <a:spcPct val="0"/>
-              </a:spcAft>
-              <a:defRPr sz="9300">
-                <a:solidFill>
-                  <a:schemeClr val="tx1"/>
-                </a:solidFill>
-                <a:latin typeface="Arial"/>
-              </a:defRPr>
-            </a:lvl8pPr>
-            <a:lvl9pPr marL="3886200" indent="-228600" defTabSz="4703763" eaLnBrk="0" fontAlgn="base" hangingPunct="0">
-              <a:spcBef>
-                <a:spcPct val="0"/>
-              </a:spcBef>
-              <a:spcAft>
-                <a:spcPct val="0"/>
-              </a:spcAft>
-              <a:defRPr sz="9300">
-                <a:solidFill>
-                  <a:schemeClr val="tx1"/>
-                </a:solidFill>
-                <a:latin typeface="Arial"/>
-              </a:defRPr>
-            </a:lvl9pPr>
-          </a:lstStyle>
-          <a:p>
-            <a:pPr marL="342900" indent="-342900">
+            <a:pPr marL="342900" indent="-342900" algn="just">
               <a:buFont typeface="Arial" panose="020B0604020202020204" pitchFamily="34" charset="0"/>
               <a:buChar char="•"/>
             </a:pPr>
             <a:r>
-              <a:rPr lang="en-US" sz="2400" dirty="0">
+              <a:rPr lang="en-US" sz="2800" dirty="0">
                 <a:latin typeface="Titillium Web" panose="00000500000000000000" pitchFamily="2" charset="0"/>
                 <a:ea typeface="Open Sans" panose="020B0606030504020204" pitchFamily="34" charset="0"/>
                 <a:cs typeface="Open Sans" panose="020B0606030504020204" pitchFamily="34" charset="0"/>
@@ -6519,12 +6290,12 @@
             </a:r>
           </a:p>
           <a:p>
-            <a:pPr marL="342900" indent="-342900">
+            <a:pPr marL="342900" indent="-342900" algn="just">
               <a:buFont typeface="Arial" panose="020B0604020202020204" pitchFamily="34" charset="0"/>
               <a:buChar char="•"/>
             </a:pPr>
             <a:r>
-              <a:rPr lang="en-US" sz="2400" dirty="0">
+              <a:rPr lang="en-US" sz="2800" dirty="0">
                 <a:latin typeface="Titillium Web" panose="00000500000000000000" pitchFamily="2" charset="0"/>
                 <a:ea typeface="Open Sans" panose="020B0606030504020204" pitchFamily="34" charset="0"/>
                 <a:cs typeface="Open Sans" panose="020B0606030504020204" pitchFamily="34" charset="0"/>
@@ -6556,7 +6327,7 @@
         </p:blipFill>
         <p:spPr>
           <a:xfrm>
-            <a:off x="11980905" y="23934819"/>
+            <a:off x="22770827" y="23172532"/>
             <a:ext cx="9139468" cy="7068807"/>
           </a:xfrm>
           <a:prstGeom prst="rect">
@@ -6579,14 +6350,14 @@
           <p:nvPr>
             <p:extLst>
               <p:ext uri="{D42A27DB-BD31-4B8C-83A1-F6EECF244321}">
-                <p14:modId xmlns:p14="http://schemas.microsoft.com/office/powerpoint/2010/main" val="1806892141"/>
+                <p14:modId xmlns:p14="http://schemas.microsoft.com/office/powerpoint/2010/main" val="1110561292"/>
               </p:ext>
             </p:extLst>
           </p:nvPr>
         </p:nvGraphicFramePr>
         <p:xfrm>
-          <a:off x="2261956" y="24081591"/>
-          <a:ext cx="7001189" cy="2743200"/>
+          <a:off x="1493075" y="27855324"/>
+          <a:ext cx="8535284" cy="3108960"/>
         </p:xfrm>
         <a:graphic>
           <a:graphicData uri="http://schemas.openxmlformats.org/drawingml/2006/table">
@@ -6595,21 +6366,21 @@
                 <a:tableStyleId>{2D5ABB26-0587-4C30-8999-92F81FD0307C}</a:tableStyleId>
               </a:tblPr>
               <a:tblGrid>
-                <a:gridCol w="3411188">
+                <a:gridCol w="4158645">
                   <a:extLst>
                     <a:ext uri="{9D8B030D-6E8A-4147-A177-3AD203B41FA5}">
                       <a16:colId xmlns:a16="http://schemas.microsoft.com/office/drawing/2014/main" val="3833514160"/>
                     </a:ext>
                   </a:extLst>
                 </a:gridCol>
-                <a:gridCol w="1880968">
+                <a:gridCol w="2293124">
                   <a:extLst>
                     <a:ext uri="{9D8B030D-6E8A-4147-A177-3AD203B41FA5}">
                       <a16:colId xmlns:a16="http://schemas.microsoft.com/office/drawing/2014/main" val="1902017129"/>
                     </a:ext>
                   </a:extLst>
                 </a:gridCol>
-                <a:gridCol w="1709033">
+                <a:gridCol w="2083515">
                   <a:extLst>
                     <a:ext uri="{9D8B030D-6E8A-4147-A177-3AD203B41FA5}">
                       <a16:colId xmlns:a16="http://schemas.microsoft.com/office/drawing/2014/main" val="2938504809"/>
@@ -6627,7 +6398,7 @@
                         <a:buNone/>
                       </a:pPr>
                       <a:r>
-                        <a:rPr lang="en-US" sz="2400" b="1" dirty="0">
+                        <a:rPr lang="en-US" sz="2800" b="1" dirty="0">
                           <a:latin typeface="Titillium Web" panose="00000500000000000000" pitchFamily="2" charset="0"/>
                         </a:rPr>
                         <a:t>Item</a:t>
@@ -6691,7 +6462,7 @@
                         <a:buNone/>
                       </a:pPr>
                       <a:r>
-                        <a:rPr lang="en-US" sz="2400" b="1" dirty="0">
+                        <a:rPr lang="en-US" sz="2800" b="1" dirty="0">
                           <a:latin typeface="Titillium Web" panose="00000500000000000000" pitchFamily="2" charset="0"/>
                         </a:rPr>
                         <a:t>Before</a:t>
@@ -6753,7 +6524,7 @@
                         <a:buNone/>
                       </a:pPr>
                       <a:r>
-                        <a:rPr lang="en-US" sz="2400" b="1" dirty="0">
+                        <a:rPr lang="en-US" sz="2800" b="1" dirty="0">
                           <a:latin typeface="Titillium Web" panose="00000500000000000000" pitchFamily="2" charset="0"/>
                         </a:rPr>
                         <a:t>After</a:t>
@@ -6824,7 +6595,7 @@
                         <a:buNone/>
                       </a:pPr>
                       <a:r>
-                        <a:rPr lang="en-US" sz="2400" b="1" dirty="0">
+                        <a:rPr lang="en-US" sz="2800" b="1" dirty="0">
                           <a:latin typeface="Titillium Web" panose="00000500000000000000" pitchFamily="2" charset="0"/>
                         </a:rPr>
                         <a:t>Number of articles</a:t>
@@ -6882,7 +6653,7 @@
                         <a:buNone/>
                       </a:pPr>
                       <a:r>
-                        <a:rPr lang="en-US" sz="2400" dirty="0">
+                        <a:rPr lang="en-US" sz="2800" dirty="0">
                           <a:latin typeface="Titillium Web" panose="00000500000000000000" pitchFamily="2" charset="0"/>
                         </a:rPr>
                         <a:t>5,374</a:t>
@@ -6940,7 +6711,7 @@
                         <a:buNone/>
                       </a:pPr>
                       <a:r>
-                        <a:rPr lang="en-US" sz="2400" dirty="0">
+                        <a:rPr lang="en-US" sz="2800" dirty="0">
                           <a:latin typeface="Titillium Web" panose="00000500000000000000" pitchFamily="2" charset="0"/>
                         </a:rPr>
                         <a:t>1,985</a:t>
@@ -7005,7 +6776,7 @@
                         <a:buNone/>
                       </a:pPr>
                       <a:r>
-                        <a:rPr lang="en-US" sz="2400" b="1" dirty="0">
+                        <a:rPr lang="en-US" sz="2800" b="1" dirty="0">
                           <a:latin typeface="Titillium Web" panose="00000500000000000000" pitchFamily="2" charset="0"/>
                         </a:rPr>
                         <a:t>System prompt tokens</a:t>
@@ -7063,7 +6834,7 @@
                         <a:buNone/>
                       </a:pPr>
                       <a:r>
-                        <a:rPr lang="en-US" sz="2400" dirty="0">
+                        <a:rPr lang="en-US" sz="2800" dirty="0">
                           <a:latin typeface="Titillium Web" panose="00000500000000000000" pitchFamily="2" charset="0"/>
                         </a:rPr>
                         <a:t>1,773</a:t>
@@ -7121,7 +6892,7 @@
                         <a:buNone/>
                       </a:pPr>
                       <a:r>
-                        <a:rPr lang="en-US" sz="2400">
+                        <a:rPr lang="en-US" sz="2800">
                           <a:latin typeface="Titillium Web" panose="00000500000000000000" pitchFamily="2" charset="0"/>
                         </a:rPr>
                         <a:t>775</a:t>
@@ -7186,7 +6957,7 @@
                         <a:buNone/>
                       </a:pPr>
                       <a:r>
-                        <a:rPr lang="en-US" sz="2400" b="1" dirty="0">
+                        <a:rPr lang="en-US" sz="2800" b="1" dirty="0">
                           <a:latin typeface="Titillium Web" panose="00000500000000000000" pitchFamily="2" charset="0"/>
                         </a:rPr>
                         <a:t>Article corpus tokens</a:t>
@@ -7244,7 +7015,7 @@
                         <a:buNone/>
                       </a:pPr>
                       <a:r>
-                        <a:rPr lang="en-US" sz="2400">
+                        <a:rPr lang="en-US" sz="2800">
                           <a:latin typeface="Titillium Web" panose="00000500000000000000" pitchFamily="2" charset="0"/>
                         </a:rPr>
                         <a:t>6,673,300</a:t>
@@ -7302,7 +7073,7 @@
                         <a:buNone/>
                       </a:pPr>
                       <a:r>
-                        <a:rPr lang="en-US" sz="2400" dirty="0">
+                        <a:rPr lang="en-US" sz="2800" dirty="0">
                           <a:latin typeface="Titillium Web" panose="00000500000000000000" pitchFamily="2" charset="0"/>
                         </a:rPr>
                         <a:t>2,534,844</a:t>
@@ -7367,7 +7138,7 @@
                         <a:buNone/>
                       </a:pPr>
                       <a:r>
-                        <a:rPr lang="en-US" sz="2400" b="1" dirty="0">
+                        <a:rPr lang="en-US" sz="2800" b="1" dirty="0">
                           <a:latin typeface="Titillium Web" panose="00000500000000000000" pitchFamily="2" charset="0"/>
                         </a:rPr>
                         <a:t>Total input tokens</a:t>
@@ -7425,7 +7196,7 @@
                         <a:buNone/>
                       </a:pPr>
                       <a:r>
-                        <a:rPr lang="en-US" sz="2400" dirty="0">
+                        <a:rPr lang="en-US" sz="2800" dirty="0">
                           <a:latin typeface="Titillium Web" panose="00000500000000000000" pitchFamily="2" charset="0"/>
                         </a:rPr>
                         <a:t>16,201,402</a:t>
@@ -7483,7 +7254,7 @@
                         <a:buNone/>
                       </a:pPr>
                       <a:r>
-                        <a:rPr lang="en-US" sz="2400" dirty="0">
+                        <a:rPr lang="en-US" sz="2800" dirty="0">
                           <a:latin typeface="Titillium Web" panose="00000500000000000000" pitchFamily="2" charset="0"/>
                         </a:rPr>
                         <a:t>4,073,219</a:t>
@@ -7548,7 +7319,7 @@
                         <a:buNone/>
                       </a:pPr>
                       <a:r>
-                        <a:rPr lang="en-US" sz="2400" b="1" dirty="0">
+                        <a:rPr lang="en-US" sz="2800" b="1" dirty="0">
                           <a:latin typeface="Titillium Web" panose="00000500000000000000" pitchFamily="2" charset="0"/>
                         </a:rPr>
                         <a:t>Estimated cost</a:t>
@@ -7606,7 +7377,7 @@
                         <a:buNone/>
                       </a:pPr>
                       <a:r>
-                        <a:rPr lang="en-US" sz="2400" dirty="0">
+                        <a:rPr lang="en-US" sz="2800" dirty="0">
                           <a:latin typeface="Titillium Web" panose="00000500000000000000" pitchFamily="2" charset="0"/>
                         </a:rPr>
                         <a:t>$40.51</a:t>
@@ -7664,7 +7435,7 @@
                         <a:buNone/>
                       </a:pPr>
                       <a:r>
-                        <a:rPr lang="en-US" sz="2400" dirty="0">
+                        <a:rPr lang="en-US" sz="2800" dirty="0">
                           <a:latin typeface="Titillium Web" panose="00000500000000000000" pitchFamily="2" charset="0"/>
                         </a:rPr>
                         <a:t>$10.19</a:t>
@@ -7723,6 +7494,741 @@
           </a:graphicData>
         </a:graphic>
       </p:graphicFrame>
+      <p:sp>
+        <p:nvSpPr>
+          <p:cNvPr id="2050" name="Text Box 6">
+            <a:extLst>
+              <a:ext uri="{FF2B5EF4-FFF2-40B4-BE49-F238E27FC236}">
+                <a16:creationId xmlns:a16="http://schemas.microsoft.com/office/drawing/2014/main" id="{158581E5-9480-CD9F-29FE-7A61A2EDFD34}"/>
+              </a:ext>
+            </a:extLst>
+          </p:cNvPr>
+          <p:cNvSpPr txBox="1">
+            <a:spLocks noChangeArrowheads="1"/>
+          </p:cNvSpPr>
+          <p:nvPr/>
+        </p:nvSpPr>
+        <p:spPr bwMode="auto">
+          <a:xfrm>
+            <a:off x="731517" y="8154671"/>
+            <a:ext cx="10058400" cy="4431983"/>
+          </a:xfrm>
+          <a:prstGeom prst="rect">
+            <a:avLst/>
+          </a:prstGeom>
+          <a:solidFill>
+            <a:srgbClr val="B4D3E2"/>
+          </a:solidFill>
+          <a:ln>
+            <a:noFill/>
+          </a:ln>
+          <a:effectLst>
+            <a:softEdge rad="0"/>
+          </a:effectLst>
+        </p:spPr>
+        <p:txBody>
+          <a:bodyPr lIns="274320" tIns="274320" rIns="274320" bIns="274320">
+            <a:spAutoFit/>
+          </a:bodyPr>
+          <a:lstStyle>
+            <a:defPPr>
+              <a:defRPr kern="1200"/>
+            </a:defPPr>
+            <a:lvl1pPr defTabSz="4703763" eaLnBrk="0" hangingPunct="0">
+              <a:defRPr sz="9300">
+                <a:solidFill>
+                  <a:schemeClr val="tx1"/>
+                </a:solidFill>
+                <a:latin typeface="Arial"/>
+              </a:defRPr>
+            </a:lvl1pPr>
+            <a:lvl2pPr marL="742950" indent="-285750" defTabSz="4703763" eaLnBrk="0" hangingPunct="0">
+              <a:defRPr sz="9300">
+                <a:solidFill>
+                  <a:schemeClr val="tx1"/>
+                </a:solidFill>
+                <a:latin typeface="Arial"/>
+              </a:defRPr>
+            </a:lvl2pPr>
+            <a:lvl3pPr marL="1143000" indent="-228600" defTabSz="4703763" eaLnBrk="0" hangingPunct="0">
+              <a:defRPr sz="9300">
+                <a:solidFill>
+                  <a:schemeClr val="tx1"/>
+                </a:solidFill>
+                <a:latin typeface="Arial"/>
+              </a:defRPr>
+            </a:lvl3pPr>
+            <a:lvl4pPr marL="1600200" indent="-228600" defTabSz="4703763" eaLnBrk="0" hangingPunct="0">
+              <a:defRPr sz="9300">
+                <a:solidFill>
+                  <a:schemeClr val="tx1"/>
+                </a:solidFill>
+                <a:latin typeface="Arial"/>
+              </a:defRPr>
+            </a:lvl4pPr>
+            <a:lvl5pPr marL="2057400" indent="-228600" defTabSz="4703763" eaLnBrk="0" hangingPunct="0">
+              <a:defRPr sz="9300">
+                <a:solidFill>
+                  <a:schemeClr val="tx1"/>
+                </a:solidFill>
+                <a:latin typeface="Arial"/>
+              </a:defRPr>
+            </a:lvl5pPr>
+            <a:lvl6pPr marL="2514600" indent="-228600" defTabSz="4703763" eaLnBrk="0" fontAlgn="base" hangingPunct="0">
+              <a:spcBef>
+                <a:spcPct val="0"/>
+              </a:spcBef>
+              <a:spcAft>
+                <a:spcPct val="0"/>
+              </a:spcAft>
+              <a:defRPr sz="9300">
+                <a:solidFill>
+                  <a:schemeClr val="tx1"/>
+                </a:solidFill>
+                <a:latin typeface="Arial"/>
+              </a:defRPr>
+            </a:lvl6pPr>
+            <a:lvl7pPr marL="2971800" indent="-228600" defTabSz="4703763" eaLnBrk="0" fontAlgn="base" hangingPunct="0">
+              <a:spcBef>
+                <a:spcPct val="0"/>
+              </a:spcBef>
+              <a:spcAft>
+                <a:spcPct val="0"/>
+              </a:spcAft>
+              <a:defRPr sz="9300">
+                <a:solidFill>
+                  <a:schemeClr val="tx1"/>
+                </a:solidFill>
+                <a:latin typeface="Arial"/>
+              </a:defRPr>
+            </a:lvl7pPr>
+            <a:lvl8pPr marL="3429000" indent="-228600" defTabSz="4703763" eaLnBrk="0" fontAlgn="base" hangingPunct="0">
+              <a:spcBef>
+                <a:spcPct val="0"/>
+              </a:spcBef>
+              <a:spcAft>
+                <a:spcPct val="0"/>
+              </a:spcAft>
+              <a:defRPr sz="9300">
+                <a:solidFill>
+                  <a:schemeClr val="tx1"/>
+                </a:solidFill>
+                <a:latin typeface="Arial"/>
+              </a:defRPr>
+            </a:lvl8pPr>
+            <a:lvl9pPr marL="3886200" indent="-228600" defTabSz="4703763" eaLnBrk="0" fontAlgn="base" hangingPunct="0">
+              <a:spcBef>
+                <a:spcPct val="0"/>
+              </a:spcBef>
+              <a:spcAft>
+                <a:spcPct val="0"/>
+              </a:spcAft>
+              <a:defRPr sz="9300">
+                <a:solidFill>
+                  <a:schemeClr val="tx1"/>
+                </a:solidFill>
+                <a:latin typeface="Arial"/>
+              </a:defRPr>
+            </a:lvl9pPr>
+          </a:lstStyle>
+          <a:p>
+            <a:pPr algn="just"/>
+            <a:r>
+              <a:rPr lang="en-US" sz="2800" dirty="0">
+                <a:latin typeface="Titillium Web" panose="00000500000000000000" pitchFamily="2" charset="0"/>
+                <a:ea typeface="Open Sans" panose="020B0606030504020204" pitchFamily="34" charset="0"/>
+                <a:cs typeface="Open Sans" panose="020B0606030504020204" pitchFamily="34" charset="0"/>
+              </a:rPr>
+              <a:t>The global solar energy industry consists of interconnected organizations, technologies, policies, and markets that are difficult to analyze from unstructured information sources. This project uses large language models (LLMs) to extract entities and relationships from Cornell Newsroom articles and construct a solar energy knowledge graph. Graph analysis and community detection are then applied to identify major themes, influential entities, and connections within the international solar energy ecosystem.</a:t>
+            </a:r>
+          </a:p>
+        </p:txBody>
+      </p:sp>
+      <p:sp>
+        <p:nvSpPr>
+          <p:cNvPr id="2051" name="Rectangle: Rounded Corners 2050">
+            <a:extLst>
+              <a:ext uri="{FF2B5EF4-FFF2-40B4-BE49-F238E27FC236}">
+                <a16:creationId xmlns:a16="http://schemas.microsoft.com/office/drawing/2014/main" id="{4814BC19-28E3-6671-1C45-FEC7FB747A27}"/>
+              </a:ext>
+            </a:extLst>
+          </p:cNvPr>
+          <p:cNvSpPr/>
+          <p:nvPr/>
+        </p:nvSpPr>
+        <p:spPr bwMode="auto">
+          <a:xfrm>
+            <a:off x="1579833" y="14186552"/>
+            <a:ext cx="1712067" cy="1390020"/>
+          </a:xfrm>
+          <a:prstGeom prst="roundRect">
+            <a:avLst/>
+          </a:prstGeom>
+          <a:solidFill>
+            <a:srgbClr val="B4D3E2"/>
+          </a:solidFill>
+          <a:ln w="9525" cap="flat" cmpd="sng" algn="ctr">
+            <a:solidFill>
+              <a:schemeClr val="tx1"/>
+            </a:solidFill>
+            <a:prstDash val="solid"/>
+            <a:round/>
+            <a:headEnd type="none" w="med" len="med"/>
+            <a:tailEnd type="none" w="med" len="med"/>
+          </a:ln>
+          <a:effectLst/>
+        </p:spPr>
+        <p:txBody>
+          <a:bodyPr vert="horz" wrap="square" lIns="91440" tIns="45720" rIns="91440" bIns="45720" numCol="1" rtlCol="0" anchor="ctr" anchorCtr="1" compatLnSpc="1">
+            <a:prstTxWarp prst="textNoShape">
+              <a:avLst/>
+            </a:prstTxWarp>
+          </a:bodyPr>
+          <a:lstStyle/>
+          <a:p>
+            <a:pPr marL="0" marR="0" indent="0" algn="ctr" defTabSz="4702175" rtl="0" eaLnBrk="1" fontAlgn="base" latinLnBrk="0" hangingPunct="1">
+              <a:lnSpc>
+                <a:spcPct val="100000"/>
+              </a:lnSpc>
+              <a:spcBef>
+                <a:spcPct val="0"/>
+              </a:spcBef>
+              <a:spcAft>
+                <a:spcPct val="0"/>
+              </a:spcAft>
+              <a:buClrTx/>
+              <a:buSzTx/>
+              <a:buFontTx/>
+              <a:buNone/>
+              <a:tabLst/>
+            </a:pPr>
+            <a:r>
+              <a:rPr lang="en-US" sz="2400" dirty="0">
+                <a:latin typeface="Arial" pitchFamily="34" charset="0"/>
+              </a:rPr>
+              <a:t>Data Collection</a:t>
+            </a:r>
+            <a:endParaRPr kumimoji="0" lang="en-US" sz="2400" b="0" i="0" u="none" strike="noStrike" cap="none" normalizeH="0" baseline="0" dirty="0">
+              <a:ln>
+                <a:noFill/>
+              </a:ln>
+              <a:solidFill>
+                <a:schemeClr val="tx1"/>
+              </a:solidFill>
+              <a:effectLst/>
+              <a:latin typeface="Arial" pitchFamily="34" charset="0"/>
+            </a:endParaRPr>
+          </a:p>
+        </p:txBody>
+      </p:sp>
+      <p:sp>
+        <p:nvSpPr>
+          <p:cNvPr id="2054" name="Rectangle: Rounded Corners 2053">
+            <a:extLst>
+              <a:ext uri="{FF2B5EF4-FFF2-40B4-BE49-F238E27FC236}">
+                <a16:creationId xmlns:a16="http://schemas.microsoft.com/office/drawing/2014/main" id="{84AEB166-E2F1-1950-7A73-4BC05C034947}"/>
+              </a:ext>
+            </a:extLst>
+          </p:cNvPr>
+          <p:cNvSpPr/>
+          <p:nvPr/>
+        </p:nvSpPr>
+        <p:spPr bwMode="auto">
+          <a:xfrm>
+            <a:off x="4362929" y="14186552"/>
+            <a:ext cx="1712067" cy="1390020"/>
+          </a:xfrm>
+          <a:prstGeom prst="roundRect">
+            <a:avLst/>
+          </a:prstGeom>
+          <a:solidFill>
+            <a:srgbClr val="B4D3E2"/>
+          </a:solidFill>
+          <a:ln w="9525" cap="flat" cmpd="sng" algn="ctr">
+            <a:solidFill>
+              <a:schemeClr val="tx1"/>
+            </a:solidFill>
+            <a:prstDash val="solid"/>
+            <a:round/>
+            <a:headEnd type="none" w="med" len="med"/>
+            <a:tailEnd type="none" w="med" len="med"/>
+          </a:ln>
+          <a:effectLst/>
+        </p:spPr>
+        <p:txBody>
+          <a:bodyPr vert="horz" wrap="square" lIns="91440" tIns="45720" rIns="91440" bIns="45720" numCol="1" rtlCol="0" anchor="ctr" anchorCtr="1" compatLnSpc="1">
+            <a:prstTxWarp prst="textNoShape">
+              <a:avLst/>
+            </a:prstTxWarp>
+          </a:bodyPr>
+          <a:lstStyle/>
+          <a:p>
+            <a:pPr marL="0" marR="0" indent="0" algn="ctr" defTabSz="4702175" rtl="0" eaLnBrk="1" fontAlgn="base" latinLnBrk="0" hangingPunct="1">
+              <a:lnSpc>
+                <a:spcPct val="100000"/>
+              </a:lnSpc>
+              <a:spcBef>
+                <a:spcPct val="0"/>
+              </a:spcBef>
+              <a:spcAft>
+                <a:spcPct val="0"/>
+              </a:spcAft>
+              <a:buClrTx/>
+              <a:buSzTx/>
+              <a:buFontTx/>
+              <a:buNone/>
+              <a:tabLst/>
+            </a:pPr>
+            <a:r>
+              <a:rPr lang="en-US" sz="2400" dirty="0">
+                <a:latin typeface="Arial" pitchFamily="34" charset="0"/>
+              </a:rPr>
+              <a:t>Data Filtering</a:t>
+            </a:r>
+            <a:endParaRPr kumimoji="0" lang="en-US" sz="2400" b="0" i="0" u="none" strike="noStrike" cap="none" normalizeH="0" baseline="0" dirty="0">
+              <a:ln>
+                <a:noFill/>
+              </a:ln>
+              <a:solidFill>
+                <a:schemeClr val="tx1"/>
+              </a:solidFill>
+              <a:effectLst/>
+              <a:latin typeface="Arial" pitchFamily="34" charset="0"/>
+            </a:endParaRPr>
+          </a:p>
+        </p:txBody>
+      </p:sp>
+      <p:sp>
+        <p:nvSpPr>
+          <p:cNvPr id="2056" name="Rectangle: Rounded Corners 2055">
+            <a:extLst>
+              <a:ext uri="{FF2B5EF4-FFF2-40B4-BE49-F238E27FC236}">
+                <a16:creationId xmlns:a16="http://schemas.microsoft.com/office/drawing/2014/main" id="{F22D4792-2BA9-465A-A834-C3E507D03407}"/>
+              </a:ext>
+            </a:extLst>
+          </p:cNvPr>
+          <p:cNvSpPr/>
+          <p:nvPr/>
+        </p:nvSpPr>
+        <p:spPr bwMode="auto">
+          <a:xfrm>
+            <a:off x="7146025" y="14182971"/>
+            <a:ext cx="3075322" cy="1390020"/>
+          </a:xfrm>
+          <a:prstGeom prst="roundRect">
+            <a:avLst/>
+          </a:prstGeom>
+          <a:solidFill>
+            <a:srgbClr val="B4D3E2"/>
+          </a:solidFill>
+          <a:ln w="9525" cap="flat" cmpd="sng" algn="ctr">
+            <a:solidFill>
+              <a:schemeClr val="tx1"/>
+            </a:solidFill>
+            <a:prstDash val="solid"/>
+            <a:round/>
+            <a:headEnd type="none" w="med" len="med"/>
+            <a:tailEnd type="none" w="med" len="med"/>
+          </a:ln>
+          <a:effectLst/>
+        </p:spPr>
+        <p:txBody>
+          <a:bodyPr vert="horz" wrap="square" lIns="91440" tIns="45720" rIns="91440" bIns="45720" numCol="1" rtlCol="0" anchor="ctr" anchorCtr="1" compatLnSpc="1">
+            <a:prstTxWarp prst="textNoShape">
+              <a:avLst/>
+            </a:prstTxWarp>
+          </a:bodyPr>
+          <a:lstStyle/>
+          <a:p>
+            <a:pPr marL="0" marR="0" indent="0" algn="ctr" defTabSz="4702175" rtl="0" eaLnBrk="1" fontAlgn="base" latinLnBrk="0" hangingPunct="1">
+              <a:lnSpc>
+                <a:spcPct val="100000"/>
+              </a:lnSpc>
+              <a:spcBef>
+                <a:spcPct val="0"/>
+              </a:spcBef>
+              <a:spcAft>
+                <a:spcPct val="0"/>
+              </a:spcAft>
+              <a:buClrTx/>
+              <a:buSzTx/>
+              <a:buFontTx/>
+              <a:buNone/>
+              <a:tabLst/>
+            </a:pPr>
+            <a:r>
+              <a:rPr lang="en-US" sz="2400" dirty="0">
+                <a:latin typeface="Arial" pitchFamily="34" charset="0"/>
+              </a:rPr>
+              <a:t>LLM-Based Information Extraction</a:t>
+            </a:r>
+            <a:endParaRPr kumimoji="0" lang="en-US" sz="2400" b="0" i="0" u="none" strike="noStrike" cap="none" normalizeH="0" baseline="0" dirty="0">
+              <a:ln>
+                <a:noFill/>
+              </a:ln>
+              <a:solidFill>
+                <a:schemeClr val="tx1"/>
+              </a:solidFill>
+              <a:effectLst/>
+              <a:latin typeface="Arial" pitchFamily="34" charset="0"/>
+            </a:endParaRPr>
+          </a:p>
+        </p:txBody>
+      </p:sp>
+      <p:sp>
+        <p:nvSpPr>
+          <p:cNvPr id="2058" name="Rectangle: Rounded Corners 2057">
+            <a:extLst>
+              <a:ext uri="{FF2B5EF4-FFF2-40B4-BE49-F238E27FC236}">
+                <a16:creationId xmlns:a16="http://schemas.microsoft.com/office/drawing/2014/main" id="{FDA0C9EE-51C0-66D1-1994-293D6C012A87}"/>
+              </a:ext>
+            </a:extLst>
+          </p:cNvPr>
+          <p:cNvSpPr/>
+          <p:nvPr/>
+        </p:nvSpPr>
+        <p:spPr bwMode="auto">
+          <a:xfrm>
+            <a:off x="2889188" y="16339987"/>
+            <a:ext cx="2947481" cy="1390020"/>
+          </a:xfrm>
+          <a:prstGeom prst="roundRect">
+            <a:avLst/>
+          </a:prstGeom>
+          <a:solidFill>
+            <a:srgbClr val="B4D3E2"/>
+          </a:solidFill>
+          <a:ln w="9525" cap="flat" cmpd="sng" algn="ctr">
+            <a:solidFill>
+              <a:schemeClr val="tx1"/>
+            </a:solidFill>
+            <a:prstDash val="solid"/>
+            <a:round/>
+            <a:headEnd type="none" w="med" len="med"/>
+            <a:tailEnd type="none" w="med" len="med"/>
+          </a:ln>
+          <a:effectLst/>
+        </p:spPr>
+        <p:txBody>
+          <a:bodyPr vert="horz" wrap="square" lIns="91440" tIns="45720" rIns="91440" bIns="45720" numCol="1" rtlCol="0" anchor="ctr" anchorCtr="1" compatLnSpc="1">
+            <a:prstTxWarp prst="textNoShape">
+              <a:avLst/>
+            </a:prstTxWarp>
+          </a:bodyPr>
+          <a:lstStyle/>
+          <a:p>
+            <a:pPr marL="0" marR="0" indent="0" algn="ctr" defTabSz="4702175" rtl="0" eaLnBrk="1" fontAlgn="base" latinLnBrk="0" hangingPunct="1">
+              <a:lnSpc>
+                <a:spcPct val="100000"/>
+              </a:lnSpc>
+              <a:spcBef>
+                <a:spcPct val="0"/>
+              </a:spcBef>
+              <a:spcAft>
+                <a:spcPct val="0"/>
+              </a:spcAft>
+              <a:buClrTx/>
+              <a:buSzTx/>
+              <a:buFontTx/>
+              <a:buNone/>
+              <a:tabLst/>
+            </a:pPr>
+            <a:r>
+              <a:rPr lang="en-US" sz="2400" dirty="0">
+                <a:latin typeface="Arial" pitchFamily="34" charset="0"/>
+              </a:rPr>
+              <a:t>Knowledge Graph Construction</a:t>
+            </a:r>
+            <a:endParaRPr kumimoji="0" lang="en-US" sz="2400" b="0" i="0" u="none" strike="noStrike" cap="none" normalizeH="0" baseline="0" dirty="0">
+              <a:ln>
+                <a:noFill/>
+              </a:ln>
+              <a:solidFill>
+                <a:schemeClr val="tx1"/>
+              </a:solidFill>
+              <a:effectLst/>
+              <a:latin typeface="Arial" pitchFamily="34" charset="0"/>
+            </a:endParaRPr>
+          </a:p>
+        </p:txBody>
+      </p:sp>
+      <p:sp>
+        <p:nvSpPr>
+          <p:cNvPr id="2060" name="Rectangle: Rounded Corners 2059">
+            <a:extLst>
+              <a:ext uri="{FF2B5EF4-FFF2-40B4-BE49-F238E27FC236}">
+                <a16:creationId xmlns:a16="http://schemas.microsoft.com/office/drawing/2014/main" id="{6E848268-A6FD-662F-01C4-0C52CCA4BE82}"/>
+              </a:ext>
+            </a:extLst>
+          </p:cNvPr>
+          <p:cNvSpPr/>
+          <p:nvPr/>
+        </p:nvSpPr>
+        <p:spPr bwMode="auto">
+          <a:xfrm>
+            <a:off x="6648690" y="16339987"/>
+            <a:ext cx="1712067" cy="1390020"/>
+          </a:xfrm>
+          <a:prstGeom prst="roundRect">
+            <a:avLst/>
+          </a:prstGeom>
+          <a:solidFill>
+            <a:srgbClr val="B4D3E2"/>
+          </a:solidFill>
+          <a:ln w="9525" cap="flat" cmpd="sng" algn="ctr">
+            <a:solidFill>
+              <a:schemeClr val="tx1"/>
+            </a:solidFill>
+            <a:prstDash val="solid"/>
+            <a:round/>
+            <a:headEnd type="none" w="med" len="med"/>
+            <a:tailEnd type="none" w="med" len="med"/>
+          </a:ln>
+          <a:effectLst/>
+        </p:spPr>
+        <p:txBody>
+          <a:bodyPr vert="horz" wrap="square" lIns="91440" tIns="45720" rIns="91440" bIns="45720" numCol="1" rtlCol="0" anchor="ctr" anchorCtr="1" compatLnSpc="1">
+            <a:prstTxWarp prst="textNoShape">
+              <a:avLst/>
+            </a:prstTxWarp>
+          </a:bodyPr>
+          <a:lstStyle/>
+          <a:p>
+            <a:pPr marL="0" marR="0" indent="0" algn="ctr" defTabSz="4702175" rtl="0" eaLnBrk="1" fontAlgn="base" latinLnBrk="0" hangingPunct="1">
+              <a:lnSpc>
+                <a:spcPct val="100000"/>
+              </a:lnSpc>
+              <a:spcBef>
+                <a:spcPct val="0"/>
+              </a:spcBef>
+              <a:spcAft>
+                <a:spcPct val="0"/>
+              </a:spcAft>
+              <a:buClrTx/>
+              <a:buSzTx/>
+              <a:buFontTx/>
+              <a:buNone/>
+              <a:tabLst/>
+            </a:pPr>
+            <a:r>
+              <a:rPr lang="en-US" sz="2400" dirty="0">
+                <a:latin typeface="Arial" pitchFamily="34" charset="0"/>
+              </a:rPr>
+              <a:t>Network Analysis</a:t>
+            </a:r>
+            <a:endParaRPr kumimoji="0" lang="en-US" sz="2400" b="0" i="0" u="none" strike="noStrike" cap="none" normalizeH="0" baseline="0" dirty="0">
+              <a:ln>
+                <a:noFill/>
+              </a:ln>
+              <a:solidFill>
+                <a:schemeClr val="tx1"/>
+              </a:solidFill>
+              <a:effectLst/>
+              <a:latin typeface="Arial" pitchFamily="34" charset="0"/>
+            </a:endParaRPr>
+          </a:p>
+        </p:txBody>
+      </p:sp>
+      <p:cxnSp>
+        <p:nvCxnSpPr>
+          <p:cNvPr id="2062" name="Straight Arrow Connector 2061">
+            <a:extLst>
+              <a:ext uri="{FF2B5EF4-FFF2-40B4-BE49-F238E27FC236}">
+                <a16:creationId xmlns:a16="http://schemas.microsoft.com/office/drawing/2014/main" id="{AFBCFF72-AAFD-3EC2-D05C-2884D4AE3516}"/>
+              </a:ext>
+            </a:extLst>
+          </p:cNvPr>
+          <p:cNvCxnSpPr>
+            <a:stCxn id="2051" idx="3"/>
+            <a:endCxn id="2054" idx="1"/>
+          </p:cNvCxnSpPr>
+          <p:nvPr/>
+        </p:nvCxnSpPr>
+        <p:spPr bwMode="auto">
+          <a:xfrm>
+            <a:off x="3291900" y="14881562"/>
+            <a:ext cx="1071029" cy="0"/>
+          </a:xfrm>
+          <a:prstGeom prst="straightConnector1">
+            <a:avLst/>
+          </a:prstGeom>
+          <a:solidFill>
+            <a:schemeClr val="accent1"/>
+          </a:solidFill>
+          <a:ln w="9525" cap="flat" cmpd="sng" algn="ctr">
+            <a:solidFill>
+              <a:schemeClr val="tx1"/>
+            </a:solidFill>
+            <a:prstDash val="solid"/>
+            <a:round/>
+            <a:headEnd type="none" w="med" len="med"/>
+            <a:tailEnd type="triangle" w="lg" len="lg"/>
+          </a:ln>
+          <a:effectLst/>
+          <a:extLst>
+            <a:ext uri="{AF507438-7753-43E0-B8FC-AC1667EBCBE1}">
+              <a14:hiddenEffects xmlns:a14="http://schemas.microsoft.com/office/drawing/2010/main">
+                <a:effectLst>
+                  <a:outerShdw dist="35921" dir="2700000" algn="ctr" rotWithShape="0">
+                    <a:schemeClr val="bg2"/>
+                  </a:outerShdw>
+                </a:effectLst>
+              </a14:hiddenEffects>
+            </a:ext>
+          </a:extLst>
+        </p:spPr>
+      </p:cxnSp>
+      <p:cxnSp>
+        <p:nvCxnSpPr>
+          <p:cNvPr id="2063" name="Straight Arrow Connector 2062">
+            <a:extLst>
+              <a:ext uri="{FF2B5EF4-FFF2-40B4-BE49-F238E27FC236}">
+                <a16:creationId xmlns:a16="http://schemas.microsoft.com/office/drawing/2014/main" id="{92468783-B67E-B10D-2C2F-1533D3CB2A59}"/>
+              </a:ext>
+            </a:extLst>
+          </p:cNvPr>
+          <p:cNvCxnSpPr>
+            <a:stCxn id="2054" idx="3"/>
+            <a:endCxn id="2056" idx="1"/>
+          </p:cNvCxnSpPr>
+          <p:nvPr/>
+        </p:nvCxnSpPr>
+        <p:spPr bwMode="auto">
+          <a:xfrm flipV="1">
+            <a:off x="6074996" y="14877981"/>
+            <a:ext cx="1071029" cy="3581"/>
+          </a:xfrm>
+          <a:prstGeom prst="straightConnector1">
+            <a:avLst/>
+          </a:prstGeom>
+          <a:solidFill>
+            <a:schemeClr val="accent1"/>
+          </a:solidFill>
+          <a:ln w="9525" cap="flat" cmpd="sng" algn="ctr">
+            <a:solidFill>
+              <a:schemeClr val="tx1"/>
+            </a:solidFill>
+            <a:prstDash val="solid"/>
+            <a:round/>
+            <a:headEnd type="none" w="med" len="med"/>
+            <a:tailEnd type="triangle" w="lg" len="lg"/>
+          </a:ln>
+          <a:effectLst/>
+          <a:extLst>
+            <a:ext uri="{AF507438-7753-43E0-B8FC-AC1667EBCBE1}">
+              <a14:hiddenEffects xmlns:a14="http://schemas.microsoft.com/office/drawing/2010/main">
+                <a:effectLst>
+                  <a:outerShdw dist="35921" dir="2700000" algn="ctr" rotWithShape="0">
+                    <a:schemeClr val="bg2"/>
+                  </a:outerShdw>
+                </a:effectLst>
+              </a14:hiddenEffects>
+            </a:ext>
+          </a:extLst>
+        </p:spPr>
+      </p:cxnSp>
+      <p:cxnSp>
+        <p:nvCxnSpPr>
+          <p:cNvPr id="2067" name="Straight Arrow Connector 2066">
+            <a:extLst>
+              <a:ext uri="{FF2B5EF4-FFF2-40B4-BE49-F238E27FC236}">
+                <a16:creationId xmlns:a16="http://schemas.microsoft.com/office/drawing/2014/main" id="{29324F28-B740-8CCE-37B7-783481D15E06}"/>
+              </a:ext>
+            </a:extLst>
+          </p:cNvPr>
+          <p:cNvCxnSpPr>
+            <a:stCxn id="2058" idx="3"/>
+            <a:endCxn id="2060" idx="1"/>
+          </p:cNvCxnSpPr>
+          <p:nvPr/>
+        </p:nvCxnSpPr>
+        <p:spPr bwMode="auto">
+          <a:xfrm>
+            <a:off x="5836669" y="17034997"/>
+            <a:ext cx="812021" cy="0"/>
+          </a:xfrm>
+          <a:prstGeom prst="straightConnector1">
+            <a:avLst/>
+          </a:prstGeom>
+          <a:solidFill>
+            <a:schemeClr val="accent1"/>
+          </a:solidFill>
+          <a:ln w="9525" cap="flat" cmpd="sng" algn="ctr">
+            <a:solidFill>
+              <a:schemeClr val="tx1"/>
+            </a:solidFill>
+            <a:prstDash val="solid"/>
+            <a:round/>
+            <a:headEnd type="none" w="med" len="med"/>
+            <a:tailEnd type="triangle" w="lg" len="lg"/>
+          </a:ln>
+          <a:effectLst/>
+          <a:extLst>
+            <a:ext uri="{AF507438-7753-43E0-B8FC-AC1667EBCBE1}">
+              <a14:hiddenEffects xmlns:a14="http://schemas.microsoft.com/office/drawing/2010/main">
+                <a:effectLst>
+                  <a:outerShdw dist="35921" dir="2700000" algn="ctr" rotWithShape="0">
+                    <a:schemeClr val="bg2"/>
+                  </a:outerShdw>
+                </a:effectLst>
+              </a14:hiddenEffects>
+            </a:ext>
+          </a:extLst>
+        </p:spPr>
+      </p:cxnSp>
+      <p:cxnSp>
+        <p:nvCxnSpPr>
+          <p:cNvPr id="2074" name="Connector: Elbow 2073">
+            <a:extLst>
+              <a:ext uri="{FF2B5EF4-FFF2-40B4-BE49-F238E27FC236}">
+                <a16:creationId xmlns:a16="http://schemas.microsoft.com/office/drawing/2014/main" id="{D53C8133-2288-D327-CCB3-446B89C6410E}"/>
+              </a:ext>
+            </a:extLst>
+          </p:cNvPr>
+          <p:cNvCxnSpPr>
+            <a:stCxn id="2056" idx="3"/>
+            <a:endCxn id="2058" idx="1"/>
+          </p:cNvCxnSpPr>
+          <p:nvPr/>
+        </p:nvCxnSpPr>
+        <p:spPr bwMode="auto">
+          <a:xfrm flipH="1">
+            <a:off x="2889188" y="14877981"/>
+            <a:ext cx="7332159" cy="2157016"/>
+          </a:xfrm>
+          <a:prstGeom prst="bentConnector5">
+            <a:avLst>
+              <a:gd name="adj1" fmla="val -3118"/>
+              <a:gd name="adj2" fmla="val 50000"/>
+              <a:gd name="adj3" fmla="val 103118"/>
+            </a:avLst>
+          </a:prstGeom>
+          <a:solidFill>
+            <a:schemeClr val="accent1"/>
+          </a:solidFill>
+          <a:ln w="9525" cap="flat" cmpd="sng" algn="ctr">
+            <a:solidFill>
+              <a:schemeClr val="tx1"/>
+            </a:solidFill>
+            <a:prstDash val="solid"/>
+            <a:round/>
+            <a:headEnd type="none" w="med" len="med"/>
+            <a:tailEnd type="triangle" w="lg" len="lg"/>
+          </a:ln>
+          <a:effectLst/>
+          <a:extLst>
+            <a:ext uri="{AF507438-7753-43E0-B8FC-AC1667EBCBE1}">
+              <a14:hiddenEffects xmlns:a14="http://schemas.microsoft.com/office/drawing/2010/main">
+                <a:effectLst>
+                  <a:outerShdw dist="35921" dir="2700000" algn="ctr" rotWithShape="0">
+                    <a:schemeClr val="bg2"/>
+                  </a:outerShdw>
+                </a:effectLst>
+              </a14:hiddenEffects>
+            </a:ext>
+          </a:extLst>
+        </p:spPr>
+      </p:cxnSp>
     </p:spTree>
   </p:cSld>
   <p:clrMapOvr>

--- a/poster.pptx
+++ b/poster.pptx
@@ -4027,7 +4027,7 @@
           <a:p>
             <a:pPr algn="l"/>
             <a:r>
-              <a:rPr lang="en-US" sz="8500" dirty="0">
+              <a:rPr lang="en-US" sz="8800" dirty="0">
                 <a:solidFill>
                   <a:schemeClr val="bg1"/>
                 </a:solidFill>
@@ -4294,7 +4294,7 @@
         </p:nvSpPr>
         <p:spPr bwMode="auto">
           <a:xfrm>
-            <a:off x="738840" y="18500584"/>
+            <a:off x="709550" y="22599664"/>
             <a:ext cx="10058400" cy="4001095"/>
           </a:xfrm>
           <a:prstGeom prst="rect">
@@ -4507,7 +4507,7 @@
         <p:spPr bwMode="auto">
           <a:xfrm>
             <a:off x="22318683" y="8154671"/>
-            <a:ext cx="10058400" cy="13911501"/>
+            <a:ext cx="10058400" cy="10033516"/>
           </a:xfrm>
           <a:prstGeom prst="rect">
             <a:avLst/>
@@ -4591,7 +4591,7 @@
             </a:pPr>
             <a:r>
               <a:rPr lang="en-US" sz="2800" dirty="0"/>
-              <a:t>The LLM successfully transformed unstructured news articles into a structured knowledge graph containing entities and their relationships across technologies, organizations, policies, countries, and research initiatives.</a:t>
+              <a:t>GPT-4o successfully transformed unstructured news articles into a structured knowledge graph containing entities and their relationships across technologies, organizations, policies, countries, and research initiatives.</a:t>
             </a:r>
           </a:p>
           <a:p>
@@ -4601,17 +4601,7 @@
             </a:pPr>
             <a:r>
               <a:rPr lang="en-US" sz="2800" dirty="0"/>
-              <a:t>Initial graphs were highly connected and noisy. Graph cleaning and entity deduplication produced a more interpretable network that highlighted the most influential entities and relationships.</a:t>
-            </a:r>
-          </a:p>
-          <a:p>
-            <a:pPr marL="342900" indent="-342900" algn="just">
-              <a:buFont typeface="Arial" panose="020B0604020202020204" pitchFamily="34" charset="0"/>
-              <a:buChar char="•"/>
-            </a:pPr>
-            <a:r>
-              <a:rPr lang="en-US" sz="2800" dirty="0"/>
-              <a:t>Community detection revealed that clusters formed primarily around geographic regions and areas of focus, including technology development, policy, manufacturing, and international collaborations.</a:t>
+              <a:t>CNM revealed that clusters formed primarily around geographic regions and areas of focus, including technology development, policy, manufacturing, and international collaborations.</a:t>
             </a:r>
           </a:p>
           <a:p>
@@ -4702,16 +4692,6 @@
                 <a:cs typeface="Open Sans" panose="020B0606030504020204" pitchFamily="34" charset="0"/>
               </a:rPr>
               <a:t>International organizations promoting solar energy</a:t>
-            </a:r>
-          </a:p>
-          <a:p>
-            <a:pPr marL="342900" indent="-342900" algn="just">
-              <a:buFont typeface="Arial" panose="020B0604020202020204" pitchFamily="34" charset="0"/>
-              <a:buChar char="•"/>
-            </a:pPr>
-            <a:r>
-              <a:rPr lang="en-US" sz="2800" dirty="0"/>
-              <a:t>These results demonstrate that LLM-based information extraction combined with network analysis can efficiently convert large collections of news articles into interpretable knowledge graphs for studying global solar energy ecosystems.</a:t>
             </a:r>
           </a:p>
         </p:txBody>
@@ -4783,7 +4763,7 @@
         </p:nvSpPr>
         <p:spPr bwMode="auto">
           <a:xfrm>
-            <a:off x="33101279" y="26858912"/>
+            <a:off x="33093960" y="25329663"/>
             <a:ext cx="10058400" cy="784225"/>
           </a:xfrm>
           <a:prstGeom prst="rect">
@@ -4883,67 +4863,87 @@
         </p:nvSpPr>
         <p:spPr>
           <a:xfrm>
-            <a:off x="33093960" y="27854362"/>
-            <a:ext cx="9857035" cy="2277547"/>
+            <a:off x="33086641" y="26325113"/>
+            <a:ext cx="9857035" cy="3139321"/>
           </a:xfrm>
           <a:prstGeom prst="rect">
             <a:avLst/>
           </a:prstGeom>
-          <a:noFill/>
+          <a:solidFill>
+            <a:srgbClr val="B4D3E2"/>
+          </a:solidFill>
+          <a:ln>
+            <a:noFill/>
+          </a:ln>
+          <a:effectLst>
+            <a:softEdge rad="0"/>
+          </a:effectLst>
         </p:spPr>
         <p:txBody>
-          <a:bodyPr wrap="square" lIns="274320" tIns="274320" rIns="274320" bIns="274320" rtlCol="0">
+          <a:bodyPr lIns="274320" tIns="274320" rIns="274320" bIns="274320">
             <a:spAutoFit/>
           </a:bodyPr>
           <a:lstStyle>
             <a:defPPr>
-              <a:defRPr kern="1200"/>
+              <a:defRPr lang="en-US" kern="1200"/>
             </a:defPPr>
-          </a:lstStyle>
-          <a:p>
-            <a:pPr algn="just"/>
-            <a:r>
-              <a:rPr lang="en-US" sz="2800" dirty="0">
+            <a:lvl1pPr marL="342900" indent="-342900" algn="just" defTabSz="4703763" eaLnBrk="0" hangingPunct="0">
+              <a:buFont typeface="Arial" panose="020B0604020202020204" pitchFamily="34" charset="0"/>
+              <a:buChar char="•"/>
+              <a:defRPr sz="2800">
                 <a:latin typeface="Titillium Web" panose="00000500000000000000" pitchFamily="2" charset="0"/>
                 <a:ea typeface="Open Sans" panose="020B0606030504020204" pitchFamily="34" charset="0"/>
                 <a:cs typeface="Open Sans" panose="020B0606030504020204" pitchFamily="34" charset="0"/>
-              </a:rPr>
-              <a:t>Special thanks to Prof. Chris Dunham for his support throughout the project. Additional credit to the Cornell Newsroom project for providing access to the underlying dataset.</a:t>
+              </a:defRPr>
+            </a:lvl1pPr>
+            <a:lvl2pPr marL="742950" indent="-285750" defTabSz="4703763" eaLnBrk="0" hangingPunct="0"/>
+            <a:lvl3pPr marL="1143000" indent="-228600" defTabSz="4703763" eaLnBrk="0" hangingPunct="0"/>
+            <a:lvl4pPr marL="1600200" indent="-228600" defTabSz="4703763" eaLnBrk="0" hangingPunct="0"/>
+            <a:lvl5pPr marL="2057400" indent="-228600" defTabSz="4703763" eaLnBrk="0" hangingPunct="0"/>
+            <a:lvl6pPr marL="2514600" indent="-228600" defTabSz="4703763" eaLnBrk="0" fontAlgn="base" hangingPunct="0">
+              <a:spcBef>
+                <a:spcPct val="0"/>
+              </a:spcBef>
+              <a:spcAft>
+                <a:spcPct val="0"/>
+              </a:spcAft>
+            </a:lvl6pPr>
+            <a:lvl7pPr marL="2971800" indent="-228600" defTabSz="4703763" eaLnBrk="0" fontAlgn="base" hangingPunct="0">
+              <a:spcBef>
+                <a:spcPct val="0"/>
+              </a:spcBef>
+              <a:spcAft>
+                <a:spcPct val="0"/>
+              </a:spcAft>
+            </a:lvl7pPr>
+            <a:lvl8pPr marL="3429000" indent="-228600" defTabSz="4703763" eaLnBrk="0" fontAlgn="base" hangingPunct="0">
+              <a:spcBef>
+                <a:spcPct val="0"/>
+              </a:spcBef>
+              <a:spcAft>
+                <a:spcPct val="0"/>
+              </a:spcAft>
+            </a:lvl8pPr>
+            <a:lvl9pPr marL="3886200" indent="-228600" defTabSz="4703763" eaLnBrk="0" fontAlgn="base" hangingPunct="0">
+              <a:spcBef>
+                <a:spcPct val="0"/>
+              </a:spcBef>
+              <a:spcAft>
+                <a:spcPct val="0"/>
+              </a:spcAft>
+            </a:lvl9pPr>
+          </a:lstStyle>
+          <a:p>
+            <a:pPr marL="0" indent="0">
+              <a:buNone/>
+            </a:pPr>
+            <a:r>
+              <a:rPr lang="en-US" dirty="0"/>
+              <a:t>Special thanks to Prof. Chris Dunham for his guidance and support throughout this project. We also thank the Cornell Newsroom project for providing access to the underlying dataset. This work was conducted as part of the Syracuse University REU in Text Analytics for Social Scientists, funded by the NSF ASSURE program.</a:t>
             </a:r>
           </a:p>
         </p:txBody>
       </p:sp>
-      <p:pic>
-        <p:nvPicPr>
-          <p:cNvPr id="4" name="Picture 3">
-            <a:extLst>
-              <a:ext uri="{FF2B5EF4-FFF2-40B4-BE49-F238E27FC236}">
-                <a16:creationId xmlns:a16="http://schemas.microsoft.com/office/drawing/2014/main" id="{68CF27D8-B844-AC83-86F1-AF9AA231413E}"/>
-              </a:ext>
-            </a:extLst>
-          </p:cNvPr>
-          <p:cNvPicPr>
-            <a:picLocks noChangeAspect="1"/>
-          </p:cNvPicPr>
-          <p:nvPr/>
-        </p:nvPicPr>
-        <p:blipFill>
-          <a:blip r:embed="rId2"/>
-          <a:srcRect l="6513" t="8096" r="5492" b="6232"/>
-          <a:stretch>
-            <a:fillRect/>
-          </a:stretch>
-        </p:blipFill>
-        <p:spPr>
-          <a:xfrm>
-            <a:off x="12457972" y="18419797"/>
-            <a:ext cx="8192656" cy="7976335"/>
-          </a:xfrm>
-          <a:prstGeom prst="rect">
-            <a:avLst/>
-          </a:prstGeom>
-        </p:spPr>
-      </p:pic>
       <p:sp>
         <p:nvSpPr>
           <p:cNvPr id="12" name="Rectangle 5">
@@ -4960,7 +4960,7 @@
         </p:nvSpPr>
         <p:spPr bwMode="auto">
           <a:xfrm>
-            <a:off x="33101279" y="22148342"/>
+            <a:off x="33165657" y="19698929"/>
             <a:ext cx="10058400" cy="784225"/>
           </a:xfrm>
           <a:prstGeom prst="rect">
@@ -5009,7 +5009,7 @@
         </p:nvSpPr>
         <p:spPr bwMode="auto">
           <a:xfrm>
-            <a:off x="34755391" y="24255132"/>
+            <a:off x="34819769" y="21805719"/>
             <a:ext cx="6750176" cy="1977180"/>
           </a:xfrm>
           <a:prstGeom prst="rect">
@@ -5095,7 +5095,7 @@
           <p:nvPr/>
         </p:nvPicPr>
         <p:blipFill>
-          <a:blip r:embed="rId3" cstate="print">
+          <a:blip r:embed="rId2" cstate="print">
             <a:biLevel thresh="25000"/>
             <a:extLst>
               <a:ext uri="{28A0092B-C50C-407E-A947-70E740481C1C}">
@@ -5132,7 +5132,7 @@
           <p:nvPr/>
         </p:nvPicPr>
         <p:blipFill>
-          <a:blip r:embed="rId4" cstate="print">
+          <a:blip r:embed="rId3" cstate="print">
             <a:clrChange>
               <a:clrFrom>
                 <a:srgbClr val="FFFFFF"/>
@@ -5147,7 +5147,7 @@
             <a:extLst>
               <a:ext uri="{BEBA8EAE-BF5A-486C-A8C5-ECC9F3942E4B}">
                 <a14:imgProps xmlns:a14="http://schemas.microsoft.com/office/drawing/2010/main">
-                  <a14:imgLayer r:embed="rId5">
+                  <a14:imgLayer r:embed="rId4">
                     <a14:imgEffect>
                       <a14:saturation sat="0"/>
                     </a14:imgEffect>
@@ -5173,42 +5173,6 @@
           </a:prstGeom>
         </p:spPr>
       </p:pic>
-      <p:pic>
-        <p:nvPicPr>
-          <p:cNvPr id="233" name="Picture 232">
-            <a:extLst>
-              <a:ext uri="{FF2B5EF4-FFF2-40B4-BE49-F238E27FC236}">
-                <a16:creationId xmlns:a16="http://schemas.microsoft.com/office/drawing/2014/main" id="{2E42E5C4-B25A-A56D-3C0D-80882415788D}"/>
-              </a:ext>
-            </a:extLst>
-          </p:cNvPr>
-          <p:cNvPicPr>
-            <a:picLocks noChangeAspect="1"/>
-          </p:cNvPicPr>
-          <p:nvPr/>
-        </p:nvPicPr>
-        <p:blipFill>
-          <a:blip r:embed="rId6" cstate="print">
-            <a:extLst>
-              <a:ext uri="{28A0092B-C50C-407E-A947-70E740481C1C}">
-                <a14:useLocalDpi xmlns:a14="http://schemas.microsoft.com/office/drawing/2010/main" val="0"/>
-              </a:ext>
-            </a:extLst>
-          </a:blip>
-          <a:stretch>
-            <a:fillRect/>
-          </a:stretch>
-        </p:blipFill>
-        <p:spPr>
-          <a:xfrm>
-            <a:off x="33093960" y="30264150"/>
-            <a:ext cx="4760986" cy="771146"/>
-          </a:xfrm>
-          <a:prstGeom prst="rect">
-            <a:avLst/>
-          </a:prstGeom>
-        </p:spPr>
-      </p:pic>
       <p:sp>
         <p:nvSpPr>
           <p:cNvPr id="235" name="Text Box 6">
@@ -5225,7 +5189,7 @@
         </p:nvSpPr>
         <p:spPr bwMode="auto">
           <a:xfrm>
-            <a:off x="731517" y="23177954"/>
+            <a:off x="702227" y="27084261"/>
             <a:ext cx="10058400" cy="4001095"/>
           </a:xfrm>
           <a:prstGeom prst="rect">
@@ -5381,7 +5345,7 @@
                 <a:ea typeface="Open Sans" panose="020B0606030504020204" pitchFamily="34" charset="0"/>
                 <a:cs typeface="Open Sans" panose="020B0606030504020204" pitchFamily="34" charset="0"/>
               </a:rPr>
-              <a:t> and processed with an LLM. During development, the extraction pipeline was tested on a subset of articles before applying additional filtering criteria. Articles containing fewer than two solar-related keyword mentions or only brief references to solar energy were excluded, reducing the dataset from 5,374 to 1,985 articles while substantially lowering inference cost.</a:t>
+              <a:t> and processed with GPT-4o. During development, the extraction pipeline was tested on a subset of articles before applying additional filtering criteria. Articles containing fewer than two solar-related keyword mentions or only brief references to solar energy were excluded, reducing the dataset from 5,374 to 1,985 articles while substantially lowering inference cost.</a:t>
             </a:r>
           </a:p>
         </p:txBody>
@@ -5402,7 +5366,7 @@
         </p:nvSpPr>
         <p:spPr bwMode="auto">
           <a:xfrm>
-            <a:off x="11521439" y="14040880"/>
+            <a:off x="11506794" y="12026173"/>
             <a:ext cx="10058400" cy="3570208"/>
           </a:xfrm>
           <a:prstGeom prst="rect">
@@ -5563,7 +5527,7 @@
         </p:nvSpPr>
         <p:spPr bwMode="auto">
           <a:xfrm>
-            <a:off x="11539746" y="8154671"/>
+            <a:off x="11525101" y="8154671"/>
             <a:ext cx="10058400" cy="3570208"/>
           </a:xfrm>
           <a:prstGeom prst="rect">
@@ -5703,7 +5667,7 @@
                 <a:ea typeface="Open Sans" panose="020B0606030504020204" pitchFamily="34" charset="0"/>
                 <a:cs typeface="Open Sans" panose="020B0606030504020204" pitchFamily="34" charset="0"/>
               </a:rPr>
-              <a:t>A structured prompting framework consisting of a system prompt, user prompt, and JSON output schema was developed and iteratively optimized to reduce token usage. The LLM extracted entities (e.g., organizations, technologies, policies, countries) and semantic relationships while also determining whether each article was meaningfully related to solar energy.</a:t>
+              <a:t>A structured prompting framework consisting of a system prompt, user prompt, and JSON output schema was developed and iteratively optimized to reduce token usage. GPT-4o extracted entities (e.g., organizations, technologies, policies, countries) and semantic relationships while also determining whether each article was meaningfully related to solar energy.</a:t>
             </a:r>
           </a:p>
         </p:txBody>
@@ -5724,8 +5688,8 @@
         </p:nvSpPr>
         <p:spPr bwMode="auto">
           <a:xfrm>
-            <a:off x="11521439" y="26773954"/>
-            <a:ext cx="10058400" cy="3139321"/>
+            <a:off x="11506794" y="24107540"/>
+            <a:ext cx="10058400" cy="3570208"/>
           </a:xfrm>
           <a:prstGeom prst="rect">
             <a:avLst/>
@@ -5864,7 +5828,23 @@
                 <a:ea typeface="Open Sans" panose="020B0606030504020204" pitchFamily="34" charset="0"/>
                 <a:cs typeface="Open Sans" panose="020B0606030504020204" pitchFamily="34" charset="0"/>
               </a:rPr>
-              <a:t>Community detection was applied to identify groups of closely connected entities. Additional analysis examined interactions between communities and the relationship types that most strongly connected different sectors of the international solar energy ecosystem.</a:t>
+              <a:t>The greedy modularity maximization/</a:t>
+            </a:r>
+            <a:r>
+              <a:rPr lang="en-US" sz="2800" dirty="0" err="1">
+                <a:latin typeface="Titillium Web" panose="00000500000000000000" pitchFamily="2" charset="0"/>
+                <a:ea typeface="Open Sans" panose="020B0606030504020204" pitchFamily="34" charset="0"/>
+                <a:cs typeface="Open Sans" panose="020B0606030504020204" pitchFamily="34" charset="0"/>
+              </a:rPr>
+              <a:t>Clauset</a:t>
+            </a:r>
+            <a:r>
+              <a:rPr lang="en-US" sz="2800" dirty="0">
+                <a:latin typeface="Titillium Web" panose="00000500000000000000" pitchFamily="2" charset="0"/>
+                <a:ea typeface="Open Sans" panose="020B0606030504020204" pitchFamily="34" charset="0"/>
+                <a:cs typeface="Open Sans" panose="020B0606030504020204" pitchFamily="34" charset="0"/>
+              </a:rPr>
+              <a:t>-Newman-Moore (CNM) community detection algorithm was applied to identify groups of closely connected entities. Additional analysis examined interactions between communities and the relationship types that most strongly connected different sectors of the international solar energy ecosystem.</a:t>
             </a:r>
           </a:p>
         </p:txBody>
@@ -5885,7 +5865,7 @@
         </p:nvSpPr>
         <p:spPr bwMode="auto">
           <a:xfrm>
-            <a:off x="738840" y="12903539"/>
+            <a:off x="709550" y="17507311"/>
             <a:ext cx="10058400" cy="784225"/>
           </a:xfrm>
           <a:prstGeom prst="rect">
@@ -6103,7 +6083,7 @@
         </p:nvSpPr>
         <p:spPr bwMode="auto">
           <a:xfrm>
-            <a:off x="33097620" y="15606589"/>
+            <a:off x="33093960" y="13390988"/>
             <a:ext cx="10058400" cy="784225"/>
           </a:xfrm>
           <a:prstGeom prst="rect">
@@ -6154,7 +6134,7 @@
         </p:nvSpPr>
         <p:spPr bwMode="auto">
           <a:xfrm>
-            <a:off x="33093960" y="16832786"/>
+            <a:off x="33165657" y="14423653"/>
             <a:ext cx="10058400" cy="4862870"/>
           </a:xfrm>
           <a:prstGeom prst="rect">
@@ -6320,14 +6300,14 @@
           <p:nvPr/>
         </p:nvPicPr>
         <p:blipFill>
-          <a:blip r:embed="rId7"/>
+          <a:blip r:embed="rId5"/>
           <a:stretch>
             <a:fillRect/>
           </a:stretch>
         </p:blipFill>
         <p:spPr>
           <a:xfrm>
-            <a:off x="22770827" y="23172532"/>
+            <a:off x="22763502" y="18591513"/>
             <a:ext cx="9139468" cy="7068807"/>
           </a:xfrm>
           <a:prstGeom prst="rect">
@@ -6350,13 +6330,13 @@
           <p:nvPr>
             <p:extLst>
               <p:ext uri="{D42A27DB-BD31-4B8C-83A1-F6EECF244321}">
-                <p14:modId xmlns:p14="http://schemas.microsoft.com/office/powerpoint/2010/main" val="1110561292"/>
+                <p14:modId xmlns:p14="http://schemas.microsoft.com/office/powerpoint/2010/main" val="1187851998"/>
               </p:ext>
             </p:extLst>
           </p:nvPr>
         </p:nvGraphicFramePr>
         <p:xfrm>
-          <a:off x="1493075" y="27855324"/>
+          <a:off x="12282998" y="27976396"/>
           <a:ext cx="8535284" cy="3108960"/>
         </p:xfrm>
         <a:graphic>
@@ -7639,7 +7619,7 @@
                 <a:ea typeface="Open Sans" panose="020B0606030504020204" pitchFamily="34" charset="0"/>
                 <a:cs typeface="Open Sans" panose="020B0606030504020204" pitchFamily="34" charset="0"/>
               </a:rPr>
-              <a:t>The global solar energy industry consists of interconnected organizations, technologies, policies, and markets that are difficult to analyze from unstructured information sources. This project uses large language models (LLMs) to extract entities and relationships from Cornell Newsroom articles and construct a solar energy knowledge graph. Graph analysis and community detection are then applied to identify major themes, influential entities, and connections within the international solar energy ecosystem.</a:t>
+              <a:t>The global solar energy industry consists of interconnected organizations, technologies, policies, and markets that are difficult to analyze from unstructured information sources. This project uses OpenAI’s GPT-4o to extract entities and relationships from Cornell Newsroom articles and construct a solar energy knowledge graph. Graph analysis and community detection are then applied to identify major themes, influential entities, and connections within the international solar energy ecosystem.</a:t>
             </a:r>
           </a:p>
         </p:txBody>
@@ -7658,7 +7638,7 @@
         </p:nvSpPr>
         <p:spPr bwMode="auto">
           <a:xfrm>
-            <a:off x="1579833" y="14186552"/>
+            <a:off x="1666969" y="18595094"/>
             <a:ext cx="1712067" cy="1390020"/>
           </a:xfrm>
           <a:prstGeom prst="roundRect">
@@ -7735,7 +7715,7 @@
         </p:nvSpPr>
         <p:spPr bwMode="auto">
           <a:xfrm>
-            <a:off x="4362929" y="14186552"/>
+            <a:off x="4450065" y="18595094"/>
             <a:ext cx="1712067" cy="1390020"/>
           </a:xfrm>
           <a:prstGeom prst="roundRect">
@@ -7812,7 +7792,7 @@
         </p:nvSpPr>
         <p:spPr bwMode="auto">
           <a:xfrm>
-            <a:off x="7146025" y="14182971"/>
+            <a:off x="7233161" y="18591513"/>
             <a:ext cx="3075322" cy="1390020"/>
           </a:xfrm>
           <a:prstGeom prst="roundRect">
@@ -7889,7 +7869,7 @@
         </p:nvSpPr>
         <p:spPr bwMode="auto">
           <a:xfrm>
-            <a:off x="2889188" y="16339987"/>
+            <a:off x="2976324" y="20748529"/>
             <a:ext cx="2947481" cy="1390020"/>
           </a:xfrm>
           <a:prstGeom prst="roundRect">
@@ -7966,7 +7946,7 @@
         </p:nvSpPr>
         <p:spPr bwMode="auto">
           <a:xfrm>
-            <a:off x="6648690" y="16339987"/>
+            <a:off x="6735826" y="20748529"/>
             <a:ext cx="1712067" cy="1390020"/>
           </a:xfrm>
           <a:prstGeom prst="roundRect">
@@ -8046,7 +8026,7 @@
         </p:nvCxnSpPr>
         <p:spPr bwMode="auto">
           <a:xfrm>
-            <a:off x="3291900" y="14881562"/>
+            <a:off x="3379036" y="19290104"/>
             <a:ext cx="1071029" cy="0"/>
           </a:xfrm>
           <a:prstGeom prst="straightConnector1">
@@ -8095,7 +8075,7 @@
         </p:nvCxnSpPr>
         <p:spPr bwMode="auto">
           <a:xfrm flipV="1">
-            <a:off x="6074996" y="14877981"/>
+            <a:off x="6162132" y="19286523"/>
             <a:ext cx="1071029" cy="3581"/>
           </a:xfrm>
           <a:prstGeom prst="straightConnector1">
@@ -8144,7 +8124,7 @@
         </p:nvCxnSpPr>
         <p:spPr bwMode="auto">
           <a:xfrm>
-            <a:off x="5836669" y="17034997"/>
+            <a:off x="5923805" y="21443539"/>
             <a:ext cx="812021" cy="0"/>
           </a:xfrm>
           <a:prstGeom prst="straightConnector1">
@@ -8193,7 +8173,7 @@
         </p:nvCxnSpPr>
         <p:spPr bwMode="auto">
           <a:xfrm flipH="1">
-            <a:off x="2889188" y="14877981"/>
+            <a:off x="2976324" y="19286523"/>
             <a:ext cx="7332159" cy="2157016"/>
           </a:xfrm>
           <a:prstGeom prst="bentConnector5">
@@ -8229,6 +8209,224 @@
           </a:extLst>
         </p:spPr>
       </p:cxnSp>
+      <p:sp>
+        <p:nvSpPr>
+          <p:cNvPr id="2082" name="Rectangle 5">
+            <a:extLst>
+              <a:ext uri="{FF2B5EF4-FFF2-40B4-BE49-F238E27FC236}">
+                <a16:creationId xmlns:a16="http://schemas.microsoft.com/office/drawing/2014/main" id="{8CB48CCE-3CAE-DC20-2BFF-ECDCC2D300F0}"/>
+              </a:ext>
+            </a:extLst>
+          </p:cNvPr>
+          <p:cNvSpPr>
+            <a:spLocks noChangeArrowheads="1"/>
+          </p:cNvSpPr>
+          <p:nvPr/>
+        </p:nvSpPr>
+        <p:spPr bwMode="auto">
+          <a:xfrm>
+            <a:off x="727857" y="12948566"/>
+            <a:ext cx="10058400" cy="784225"/>
+          </a:xfrm>
+          <a:prstGeom prst="rect">
+            <a:avLst/>
+          </a:prstGeom>
+          <a:solidFill>
+            <a:srgbClr val="1482A5"/>
+          </a:solidFill>
+          <a:ln>
+            <a:noFill/>
+          </a:ln>
+          <a:effectLst/>
+        </p:spPr>
+        <p:txBody>
+          <a:bodyPr wrap="none" lIns="274320" tIns="68580" rIns="274320" bIns="68580" anchor="ctr"/>
+          <a:lstStyle>
+            <a:defPPr>
+              <a:defRPr kern="1200"/>
+            </a:defPPr>
+          </a:lstStyle>
+          <a:p>
+            <a:pPr defTabSz="4703763"/>
+            <a:r>
+              <a:rPr lang="en-US" sz="3600" dirty="0">
+                <a:solidFill>
+                  <a:schemeClr val="bg1"/>
+                </a:solidFill>
+                <a:latin typeface="Amaranth" panose="02000503050000020004" pitchFamily="2" charset="0"/>
+              </a:rPr>
+              <a:t>Questions</a:t>
+            </a:r>
+          </a:p>
+        </p:txBody>
+      </p:sp>
+      <p:sp>
+        <p:nvSpPr>
+          <p:cNvPr id="2084" name="Text Box 6">
+            <a:extLst>
+              <a:ext uri="{FF2B5EF4-FFF2-40B4-BE49-F238E27FC236}">
+                <a16:creationId xmlns:a16="http://schemas.microsoft.com/office/drawing/2014/main" id="{108CF4A8-4083-B251-ACBD-59B05429E293}"/>
+              </a:ext>
+            </a:extLst>
+          </p:cNvPr>
+          <p:cNvSpPr txBox="1">
+            <a:spLocks noChangeArrowheads="1"/>
+          </p:cNvSpPr>
+          <p:nvPr/>
+        </p:nvSpPr>
+        <p:spPr bwMode="auto">
+          <a:xfrm>
+            <a:off x="727853" y="13978178"/>
+            <a:ext cx="10058400" cy="3139321"/>
+          </a:xfrm>
+          <a:prstGeom prst="rect">
+            <a:avLst/>
+          </a:prstGeom>
+          <a:solidFill>
+            <a:srgbClr val="B4D3E2"/>
+          </a:solidFill>
+          <a:ln>
+            <a:noFill/>
+          </a:ln>
+          <a:effectLst>
+            <a:softEdge rad="0"/>
+          </a:effectLst>
+        </p:spPr>
+        <p:txBody>
+          <a:bodyPr lIns="274320" tIns="274320" rIns="274320" bIns="274320">
+            <a:spAutoFit/>
+          </a:bodyPr>
+          <a:lstStyle>
+            <a:defPPr>
+              <a:defRPr kern="1200"/>
+            </a:defPPr>
+            <a:lvl1pPr defTabSz="4703763" eaLnBrk="0" hangingPunct="0">
+              <a:defRPr sz="9300">
+                <a:solidFill>
+                  <a:schemeClr val="tx1"/>
+                </a:solidFill>
+                <a:latin typeface="Arial"/>
+              </a:defRPr>
+            </a:lvl1pPr>
+            <a:lvl2pPr marL="742950" indent="-285750" defTabSz="4703763" eaLnBrk="0" hangingPunct="0">
+              <a:defRPr sz="9300">
+                <a:solidFill>
+                  <a:schemeClr val="tx1"/>
+                </a:solidFill>
+                <a:latin typeface="Arial"/>
+              </a:defRPr>
+            </a:lvl2pPr>
+            <a:lvl3pPr marL="1143000" indent="-228600" defTabSz="4703763" eaLnBrk="0" hangingPunct="0">
+              <a:defRPr sz="9300">
+                <a:solidFill>
+                  <a:schemeClr val="tx1"/>
+                </a:solidFill>
+                <a:latin typeface="Arial"/>
+              </a:defRPr>
+            </a:lvl3pPr>
+            <a:lvl4pPr marL="1600200" indent="-228600" defTabSz="4703763" eaLnBrk="0" hangingPunct="0">
+              <a:defRPr sz="9300">
+                <a:solidFill>
+                  <a:schemeClr val="tx1"/>
+                </a:solidFill>
+                <a:latin typeface="Arial"/>
+              </a:defRPr>
+            </a:lvl4pPr>
+            <a:lvl5pPr marL="2057400" indent="-228600" defTabSz="4703763" eaLnBrk="0" hangingPunct="0">
+              <a:defRPr sz="9300">
+                <a:solidFill>
+                  <a:schemeClr val="tx1"/>
+                </a:solidFill>
+                <a:latin typeface="Arial"/>
+              </a:defRPr>
+            </a:lvl5pPr>
+            <a:lvl6pPr marL="2514600" indent="-228600" defTabSz="4703763" eaLnBrk="0" fontAlgn="base" hangingPunct="0">
+              <a:spcBef>
+                <a:spcPct val="0"/>
+              </a:spcBef>
+              <a:spcAft>
+                <a:spcPct val="0"/>
+              </a:spcAft>
+              <a:defRPr sz="9300">
+                <a:solidFill>
+                  <a:schemeClr val="tx1"/>
+                </a:solidFill>
+                <a:latin typeface="Arial"/>
+              </a:defRPr>
+            </a:lvl6pPr>
+            <a:lvl7pPr marL="2971800" indent="-228600" defTabSz="4703763" eaLnBrk="0" fontAlgn="base" hangingPunct="0">
+              <a:spcBef>
+                <a:spcPct val="0"/>
+              </a:spcBef>
+              <a:spcAft>
+                <a:spcPct val="0"/>
+              </a:spcAft>
+              <a:defRPr sz="9300">
+                <a:solidFill>
+                  <a:schemeClr val="tx1"/>
+                </a:solidFill>
+                <a:latin typeface="Arial"/>
+              </a:defRPr>
+            </a:lvl7pPr>
+            <a:lvl8pPr marL="3429000" indent="-228600" defTabSz="4703763" eaLnBrk="0" fontAlgn="base" hangingPunct="0">
+              <a:spcBef>
+                <a:spcPct val="0"/>
+              </a:spcBef>
+              <a:spcAft>
+                <a:spcPct val="0"/>
+              </a:spcAft>
+              <a:defRPr sz="9300">
+                <a:solidFill>
+                  <a:schemeClr val="tx1"/>
+                </a:solidFill>
+                <a:latin typeface="Arial"/>
+              </a:defRPr>
+            </a:lvl8pPr>
+            <a:lvl9pPr marL="3886200" indent="-228600" defTabSz="4703763" eaLnBrk="0" fontAlgn="base" hangingPunct="0">
+              <a:spcBef>
+                <a:spcPct val="0"/>
+              </a:spcBef>
+              <a:spcAft>
+                <a:spcPct val="0"/>
+              </a:spcAft>
+              <a:defRPr sz="9300">
+                <a:solidFill>
+                  <a:schemeClr val="tx1"/>
+                </a:solidFill>
+                <a:latin typeface="Arial"/>
+              </a:defRPr>
+            </a:lvl9pPr>
+          </a:lstStyle>
+          <a:p>
+            <a:pPr marL="457200" indent="-457200" algn="just">
+              <a:buFont typeface="Arial" panose="020B0604020202020204" pitchFamily="34" charset="0"/>
+              <a:buChar char="•"/>
+            </a:pPr>
+            <a:r>
+              <a:rPr lang="en-US" sz="2800" dirty="0">
+                <a:latin typeface="Titillium Web" panose="00000500000000000000" pitchFamily="2" charset="0"/>
+                <a:ea typeface="Open Sans" panose="020B0606030504020204" pitchFamily="34" charset="0"/>
+                <a:cs typeface="Open Sans" panose="020B0606030504020204" pitchFamily="34" charset="0"/>
+              </a:rPr>
+              <a:t>How do solar energy industries interact across world borders? In particular, what types of entities connect these communities directly and indirectly?</a:t>
+            </a:r>
+          </a:p>
+          <a:p>
+            <a:pPr marL="457200" indent="-457200" algn="just">
+              <a:buFont typeface="Arial" panose="020B0604020202020204" pitchFamily="34" charset="0"/>
+              <a:buChar char="•"/>
+            </a:pPr>
+            <a:r>
+              <a:rPr lang="en-US" sz="2800" dirty="0">
+                <a:latin typeface="Titillium Web" panose="00000500000000000000" pitchFamily="2" charset="0"/>
+                <a:ea typeface="Open Sans" panose="020B0606030504020204" pitchFamily="34" charset="0"/>
+                <a:cs typeface="Open Sans" panose="020B0606030504020204" pitchFamily="34" charset="0"/>
+              </a:rPr>
+              <a:t>How can information be extracted from a large corpus of articles to analyze communities and relationships in the solar energy industry?</a:t>
+            </a:r>
+          </a:p>
+        </p:txBody>
+      </p:sp>
     </p:spTree>
   </p:cSld>
   <p:clrMapOvr>

--- a/poster.pptx
+++ b/poster.pptx
@@ -4507,7 +4507,7 @@
         <p:spPr bwMode="auto">
           <a:xfrm>
             <a:off x="22318683" y="8154671"/>
-            <a:ext cx="10058400" cy="10033516"/>
+            <a:ext cx="10058400" cy="5293757"/>
           </a:xfrm>
           <a:prstGeom prst="rect">
             <a:avLst/>
@@ -4602,96 +4602,6 @@
             <a:r>
               <a:rPr lang="en-US" sz="2800" dirty="0"/>
               <a:t>CNM revealed that clusters formed primarily around geographic regions and areas of focus, including technology development, policy, manufacturing, and international collaborations.</a:t>
-            </a:r>
-          </a:p>
-          <a:p>
-            <a:pPr marL="342900" indent="-342900" algn="just">
-              <a:buFont typeface="Arial" panose="020B0604020202020204" pitchFamily="34" charset="0"/>
-              <a:buChar char="•"/>
-            </a:pPr>
-            <a:r>
-              <a:rPr lang="en-US" sz="2800" dirty="0"/>
-              <a:t>The community graph showed that most communities were not directly connected. Instead, information flowed through a small number of highly central communities that linked otherwise separate regions of the network.</a:t>
-            </a:r>
-          </a:p>
-          <a:p>
-            <a:pPr marL="342900" indent="-342900" algn="just">
-              <a:buFont typeface="Arial" panose="020B0604020202020204" pitchFamily="34" charset="0"/>
-              <a:buChar char="•"/>
-            </a:pPr>
-            <a:r>
-              <a:rPr lang="en-US" sz="2800" dirty="0"/>
-              <a:t>Prominent communities represented:</a:t>
-            </a:r>
-          </a:p>
-          <a:p>
-            <a:pPr marL="1085850" lvl="1" indent="-342900" algn="just">
-              <a:buFont typeface="Arial" panose="020B0604020202020204" pitchFamily="34" charset="0"/>
-              <a:buChar char="•"/>
-            </a:pPr>
-            <a:r>
-              <a:rPr lang="en-US" sz="2800" dirty="0">
-                <a:latin typeface="Titillium Web" panose="00000500000000000000" pitchFamily="2" charset="0"/>
-                <a:ea typeface="Open Sans" panose="020B0606030504020204" pitchFamily="34" charset="0"/>
-                <a:cs typeface="Open Sans" panose="020B0606030504020204" pitchFamily="34" charset="0"/>
-              </a:rPr>
-              <a:t>American residential solar markets</a:t>
-            </a:r>
-          </a:p>
-          <a:p>
-            <a:pPr marL="1085850" lvl="1" indent="-342900" algn="just">
-              <a:buFont typeface="Arial" panose="020B0604020202020204" pitchFamily="34" charset="0"/>
-              <a:buChar char="•"/>
-            </a:pPr>
-            <a:r>
-              <a:rPr lang="en-US" sz="2800" dirty="0">
-                <a:latin typeface="Titillium Web" panose="00000500000000000000" pitchFamily="2" charset="0"/>
-                <a:ea typeface="Open Sans" panose="020B0606030504020204" pitchFamily="34" charset="0"/>
-                <a:cs typeface="Open Sans" panose="020B0606030504020204" pitchFamily="34" charset="0"/>
-              </a:rPr>
-              <a:t>U.S.–China manufacturing and trade</a:t>
-            </a:r>
-          </a:p>
-          <a:p>
-            <a:pPr marL="1085850" lvl="1" indent="-342900" algn="just">
-              <a:buFont typeface="Arial" panose="020B0604020202020204" pitchFamily="34" charset="0"/>
-              <a:buChar char="•"/>
-            </a:pPr>
-            <a:r>
-              <a:rPr lang="en-US" sz="2800" dirty="0">
-                <a:latin typeface="Titillium Web" panose="00000500000000000000" pitchFamily="2" charset="0"/>
-                <a:ea typeface="Open Sans" panose="020B0606030504020204" pitchFamily="34" charset="0"/>
-                <a:cs typeface="Open Sans" panose="020B0606030504020204" pitchFamily="34" charset="0"/>
-              </a:rPr>
-              <a:t>U.S. solar policy</a:t>
-            </a:r>
-          </a:p>
-          <a:p>
-            <a:pPr marL="1085850" lvl="1" indent="-342900" algn="just">
-              <a:buFont typeface="Arial" panose="020B0604020202020204" pitchFamily="34" charset="0"/>
-              <a:buChar char="•"/>
-            </a:pPr>
-            <a:r>
-              <a:rPr lang="en-US" sz="2800" dirty="0">
-                <a:latin typeface="Titillium Web" panose="00000500000000000000" pitchFamily="2" charset="0"/>
-                <a:ea typeface="Open Sans" panose="020B0606030504020204" pitchFamily="34" charset="0"/>
-                <a:cs typeface="Open Sans" panose="020B0606030504020204" pitchFamily="34" charset="0"/>
-              </a:rPr>
-              <a:t>International solar technologies and cross-border projects</a:t>
-            </a:r>
-          </a:p>
-          <a:p>
-            <a:pPr marL="1085850" lvl="1" indent="-342900" algn="just">
-              <a:buFont typeface="Arial" panose="020B0604020202020204" pitchFamily="34" charset="0"/>
-              <a:buChar char="•"/>
-            </a:pPr>
-            <a:r>
-              <a:rPr lang="en-US" sz="2800" dirty="0">
-                <a:latin typeface="Titillium Web" panose="00000500000000000000" pitchFamily="2" charset="0"/>
-                <a:ea typeface="Open Sans" panose="020B0606030504020204" pitchFamily="34" charset="0"/>
-                <a:cs typeface="Open Sans" panose="020B0606030504020204" pitchFamily="34" charset="0"/>
-              </a:rPr>
-              <a:t>International organizations promoting solar energy</a:t>
             </a:r>
           </a:p>
         </p:txBody>
@@ -6285,36 +6195,6 @@
           </a:p>
         </p:txBody>
       </p:sp>
-      <p:pic>
-        <p:nvPicPr>
-          <p:cNvPr id="253" name="Picture 252">
-            <a:extLst>
-              <a:ext uri="{FF2B5EF4-FFF2-40B4-BE49-F238E27FC236}">
-                <a16:creationId xmlns:a16="http://schemas.microsoft.com/office/drawing/2014/main" id="{562B6D9C-DDD3-4929-5FDE-80BDB426CF81}"/>
-              </a:ext>
-            </a:extLst>
-          </p:cNvPr>
-          <p:cNvPicPr>
-            <a:picLocks noChangeAspect="1"/>
-          </p:cNvPicPr>
-          <p:nvPr/>
-        </p:nvPicPr>
-        <p:blipFill>
-          <a:blip r:embed="rId5"/>
-          <a:stretch>
-            <a:fillRect/>
-          </a:stretch>
-        </p:blipFill>
-        <p:spPr>
-          <a:xfrm>
-            <a:off x="22763502" y="18591513"/>
-            <a:ext cx="9139468" cy="7068807"/>
-          </a:xfrm>
-          <a:prstGeom prst="rect">
-            <a:avLst/>
-          </a:prstGeom>
-        </p:spPr>
-      </p:pic>
       <p:graphicFrame>
         <p:nvGraphicFramePr>
           <p:cNvPr id="254" name="Table 253">
@@ -8427,6 +8307,963 @@
           </a:p>
         </p:txBody>
       </p:sp>
+      <p:grpSp>
+        <p:nvGrpSpPr>
+          <p:cNvPr id="2095" name="Group 2094">
+            <a:extLst>
+              <a:ext uri="{FF2B5EF4-FFF2-40B4-BE49-F238E27FC236}">
+                <a16:creationId xmlns:a16="http://schemas.microsoft.com/office/drawing/2014/main" id="{BCA4D9D1-070E-8208-23FE-31F9342648F3}"/>
+              </a:ext>
+            </a:extLst>
+          </p:cNvPr>
+          <p:cNvGrpSpPr/>
+          <p:nvPr/>
+        </p:nvGrpSpPr>
+        <p:grpSpPr>
+          <a:xfrm>
+            <a:off x="22763502" y="18466877"/>
+            <a:ext cx="9139468" cy="7193443"/>
+            <a:chOff x="22763502" y="18466877"/>
+            <a:chExt cx="9139468" cy="7193443"/>
+          </a:xfrm>
+        </p:grpSpPr>
+        <p:pic>
+          <p:nvPicPr>
+            <p:cNvPr id="253" name="Picture 252">
+              <a:extLst>
+                <a:ext uri="{FF2B5EF4-FFF2-40B4-BE49-F238E27FC236}">
+                  <a16:creationId xmlns:a16="http://schemas.microsoft.com/office/drawing/2014/main" id="{562B6D9C-DDD3-4929-5FDE-80BDB426CF81}"/>
+                </a:ext>
+              </a:extLst>
+            </p:cNvPr>
+            <p:cNvPicPr>
+              <a:picLocks noChangeAspect="1"/>
+            </p:cNvPicPr>
+            <p:nvPr/>
+          </p:nvPicPr>
+          <p:blipFill>
+            <a:blip r:embed="rId5"/>
+            <a:stretch>
+              <a:fillRect/>
+            </a:stretch>
+          </p:blipFill>
+          <p:spPr>
+            <a:xfrm>
+              <a:off x="22763502" y="18591513"/>
+              <a:ext cx="9139468" cy="7068807"/>
+            </a:xfrm>
+            <a:prstGeom prst="rect">
+              <a:avLst/>
+            </a:prstGeom>
+          </p:spPr>
+        </p:pic>
+        <p:sp>
+          <p:nvSpPr>
+            <p:cNvPr id="2088" name="Text Box 6">
+              <a:extLst>
+                <a:ext uri="{FF2B5EF4-FFF2-40B4-BE49-F238E27FC236}">
+                  <a16:creationId xmlns:a16="http://schemas.microsoft.com/office/drawing/2014/main" id="{2E246390-2DE9-C1C7-AF64-40584FF81998}"/>
+                </a:ext>
+              </a:extLst>
+            </p:cNvPr>
+            <p:cNvSpPr txBox="1">
+              <a:spLocks noChangeArrowheads="1"/>
+            </p:cNvSpPr>
+            <p:nvPr/>
+          </p:nvSpPr>
+          <p:spPr bwMode="auto">
+            <a:xfrm>
+              <a:off x="23551626" y="18466877"/>
+              <a:ext cx="6830935" cy="923330"/>
+            </a:xfrm>
+            <a:prstGeom prst="rect">
+              <a:avLst/>
+            </a:prstGeom>
+            <a:noFill/>
+            <a:ln>
+              <a:noFill/>
+            </a:ln>
+            <a:effectLst>
+              <a:softEdge rad="0"/>
+            </a:effectLst>
+          </p:spPr>
+          <p:txBody>
+            <a:bodyPr wrap="square" lIns="274320" tIns="274320" rIns="274320" bIns="274320">
+              <a:spAutoFit/>
+            </a:bodyPr>
+            <a:lstStyle>
+              <a:defPPr>
+                <a:defRPr lang="en-US" kern="1200"/>
+              </a:defPPr>
+              <a:lvl1pPr defTabSz="4703763" eaLnBrk="0" hangingPunct="0">
+                <a:defRPr sz="2400">
+                  <a:latin typeface="Titillium Web" panose="00000500000000000000" pitchFamily="2" charset="0"/>
+                  <a:ea typeface="Open Sans" panose="020B0606030504020204" pitchFamily="34" charset="0"/>
+                  <a:cs typeface="Open Sans" panose="020B0606030504020204" pitchFamily="34" charset="0"/>
+                </a:defRPr>
+              </a:lvl1pPr>
+              <a:lvl2pPr marL="742950" indent="-285750" defTabSz="4703763" eaLnBrk="0" hangingPunct="0"/>
+              <a:lvl3pPr marL="1143000" indent="-228600" defTabSz="4703763" eaLnBrk="0" hangingPunct="0"/>
+              <a:lvl4pPr marL="1600200" indent="-228600" defTabSz="4703763" eaLnBrk="0" hangingPunct="0"/>
+              <a:lvl5pPr marL="2057400" indent="-228600" defTabSz="4703763" eaLnBrk="0" hangingPunct="0"/>
+              <a:lvl6pPr marL="2514600" indent="-228600" defTabSz="4703763" eaLnBrk="0" fontAlgn="base" hangingPunct="0">
+                <a:spcBef>
+                  <a:spcPct val="0"/>
+                </a:spcBef>
+                <a:spcAft>
+                  <a:spcPct val="0"/>
+                </a:spcAft>
+              </a:lvl6pPr>
+              <a:lvl7pPr marL="2971800" indent="-228600" defTabSz="4703763" eaLnBrk="0" fontAlgn="base" hangingPunct="0">
+                <a:spcBef>
+                  <a:spcPct val="0"/>
+                </a:spcBef>
+                <a:spcAft>
+                  <a:spcPct val="0"/>
+                </a:spcAft>
+              </a:lvl7pPr>
+              <a:lvl8pPr marL="3429000" indent="-228600" defTabSz="4703763" eaLnBrk="0" fontAlgn="base" hangingPunct="0">
+                <a:spcBef>
+                  <a:spcPct val="0"/>
+                </a:spcBef>
+                <a:spcAft>
+                  <a:spcPct val="0"/>
+                </a:spcAft>
+              </a:lvl8pPr>
+              <a:lvl9pPr marL="3886200" indent="-228600" defTabSz="4703763" eaLnBrk="0" fontAlgn="base" hangingPunct="0">
+                <a:spcBef>
+                  <a:spcPct val="0"/>
+                </a:spcBef>
+                <a:spcAft>
+                  <a:spcPct val="0"/>
+                </a:spcAft>
+              </a:lvl9pPr>
+            </a:lstStyle>
+            <a:p>
+              <a:r>
+                <a:rPr lang="en-US" dirty="0">
+                  <a:latin typeface="Titillium Web" panose="00000500000000000000" pitchFamily="2" charset="0"/>
+                  <a:ea typeface="Open Sans" panose="020B0606030504020204" pitchFamily="34" charset="0"/>
+                  <a:cs typeface="Open Sans" panose="020B0606030504020204" pitchFamily="34" charset="0"/>
+                </a:rPr>
+                <a:t>Network Graph of Communities with &gt;10 entities</a:t>
+              </a:r>
+            </a:p>
+          </p:txBody>
+        </p:sp>
+        <p:sp>
+          <p:nvSpPr>
+            <p:cNvPr id="2089" name="TextBox 2088">
+              <a:extLst>
+                <a:ext uri="{FF2B5EF4-FFF2-40B4-BE49-F238E27FC236}">
+                  <a16:creationId xmlns:a16="http://schemas.microsoft.com/office/drawing/2014/main" id="{3C903F9B-E2B3-FD85-CBDB-6371C932DF3F}"/>
+                </a:ext>
+              </a:extLst>
+            </p:cNvPr>
+            <p:cNvSpPr txBox="1"/>
+            <p:nvPr/>
+          </p:nvSpPr>
+          <p:spPr>
+            <a:xfrm>
+              <a:off x="27586338" y="19146297"/>
+              <a:ext cx="3556427" cy="1754326"/>
+            </a:xfrm>
+            <a:prstGeom prst="rect">
+              <a:avLst/>
+            </a:prstGeom>
+            <a:noFill/>
+          </p:spPr>
+          <p:txBody>
+            <a:bodyPr wrap="square" rtlCol="0">
+              <a:spAutoFit/>
+            </a:bodyPr>
+            <a:lstStyle/>
+            <a:p>
+              <a:pPr marL="342900" indent="-342900">
+                <a:buFont typeface="Arial" panose="020B0604020202020204" pitchFamily="34" charset="0"/>
+                <a:buChar char="•"/>
+              </a:pPr>
+              <a:r>
+                <a:rPr lang="en-US" sz="1800" dirty="0"/>
+                <a:t>most communities not directly connected</a:t>
+              </a:r>
+            </a:p>
+            <a:p>
+              <a:pPr marL="342900" indent="-342900">
+                <a:buFont typeface="Arial" panose="020B0604020202020204" pitchFamily="34" charset="0"/>
+                <a:buChar char="•"/>
+              </a:pPr>
+              <a:r>
+                <a:rPr lang="en-US" sz="1800" dirty="0"/>
+                <a:t>small number of highly central communities linked separate regions of the network</a:t>
+              </a:r>
+            </a:p>
+          </p:txBody>
+        </p:sp>
+      </p:grpSp>
+      <p:graphicFrame>
+        <p:nvGraphicFramePr>
+          <p:cNvPr id="2094" name="Table 2093">
+            <a:extLst>
+              <a:ext uri="{FF2B5EF4-FFF2-40B4-BE49-F238E27FC236}">
+                <a16:creationId xmlns:a16="http://schemas.microsoft.com/office/drawing/2014/main" id="{444E4AC0-836C-3FC7-C2D5-8D92BFA14FD2}"/>
+              </a:ext>
+            </a:extLst>
+          </p:cNvPr>
+          <p:cNvGraphicFramePr>
+            <a:graphicFrameLocks noGrp="1"/>
+          </p:cNvGraphicFramePr>
+          <p:nvPr>
+            <p:extLst>
+              <p:ext uri="{D42A27DB-BD31-4B8C-83A1-F6EECF244321}">
+                <p14:modId xmlns:p14="http://schemas.microsoft.com/office/powerpoint/2010/main" val="1284993318"/>
+              </p:ext>
+            </p:extLst>
+          </p:nvPr>
+        </p:nvGraphicFramePr>
+        <p:xfrm>
+          <a:off x="28311628" y="22492913"/>
+          <a:ext cx="2724811" cy="2926080"/>
+        </p:xfrm>
+        <a:graphic>
+          <a:graphicData uri="http://schemas.openxmlformats.org/drawingml/2006/table">
+            <a:tbl>
+              <a:tblPr firstRow="1" firstCol="1">
+                <a:tableStyleId>{2D5ABB26-0587-4C30-8999-92F81FD0307C}</a:tableStyleId>
+              </a:tblPr>
+              <a:tblGrid>
+                <a:gridCol w="278701">
+                  <a:extLst>
+                    <a:ext uri="{9D8B030D-6E8A-4147-A177-3AD203B41FA5}">
+                      <a16:colId xmlns:a16="http://schemas.microsoft.com/office/drawing/2014/main" val="1902017129"/>
+                    </a:ext>
+                  </a:extLst>
+                </a:gridCol>
+                <a:gridCol w="2446110">
+                  <a:extLst>
+                    <a:ext uri="{9D8B030D-6E8A-4147-A177-3AD203B41FA5}">
+                      <a16:colId xmlns:a16="http://schemas.microsoft.com/office/drawing/2014/main" val="2938504809"/>
+                    </a:ext>
+                  </a:extLst>
+                </a:gridCol>
+              </a:tblGrid>
+              <a:tr h="0">
+                <a:tc>
+                  <a:txBody>
+                    <a:bodyPr/>
+                    <a:lstStyle/>
+                    <a:p>
+                      <a:pPr algn="r">
+                        <a:buNone/>
+                      </a:pPr>
+                      <a:r>
+                        <a:rPr lang="en-US" sz="1800" dirty="0">
+                          <a:latin typeface="Titillium Web" panose="00000500000000000000" pitchFamily="2" charset="0"/>
+                        </a:rPr>
+                        <a:t>0</a:t>
+                      </a:r>
+                    </a:p>
+                  </a:txBody>
+                  <a:tcPr anchor="ctr">
+                    <a:lnL w="12700" cap="flat" cmpd="sng" algn="ctr">
+                      <a:solidFill>
+                        <a:schemeClr val="tx1"/>
+                      </a:solidFill>
+                      <a:prstDash val="solid"/>
+                      <a:round/>
+                      <a:headEnd type="none" w="med" len="med"/>
+                      <a:tailEnd type="none" w="med" len="med"/>
+                    </a:lnL>
+                    <a:lnR w="12700" cap="flat" cmpd="sng" algn="ctr">
+                      <a:noFill/>
+                      <a:prstDash val="solid"/>
+                      <a:round/>
+                      <a:headEnd type="none" w="med" len="med"/>
+                      <a:tailEnd type="none" w="med" len="med"/>
+                    </a:lnR>
+                    <a:lnT w="12700" cap="flat" cmpd="sng" algn="ctr">
+                      <a:solidFill>
+                        <a:schemeClr val="tx1"/>
+                      </a:solidFill>
+                      <a:prstDash val="solid"/>
+                      <a:round/>
+                      <a:headEnd type="none" w="med" len="med"/>
+                      <a:tailEnd type="none" w="med" len="med"/>
+                    </a:lnT>
+                    <a:lnB w="12700" cap="flat" cmpd="sng" algn="ctr">
+                      <a:noFill/>
+                      <a:prstDash val="solid"/>
+                      <a:round/>
+                      <a:headEnd type="none" w="med" len="med"/>
+                      <a:tailEnd type="none" w="med" len="med"/>
+                    </a:lnB>
+                    <a:lnTlToBr w="12700" cmpd="sng">
+                      <a:noFill/>
+                      <a:prstDash val="solid"/>
+                    </a:lnTlToBr>
+                    <a:lnBlToTr w="12700" cmpd="sng">
+                      <a:noFill/>
+                      <a:prstDash val="solid"/>
+                    </a:lnBlToTr>
+                    <a:solidFill>
+                      <a:srgbClr val="B9E042"/>
+                    </a:solidFill>
+                  </a:tcPr>
+                </a:tc>
+                <a:tc>
+                  <a:txBody>
+                    <a:bodyPr/>
+                    <a:lstStyle/>
+                    <a:p>
+                      <a:pPr marL="0" marR="0" lvl="0" indent="0" algn="l" defTabSz="914400" rtl="0" eaLnBrk="1" fontAlgn="auto" latinLnBrk="0" hangingPunct="1">
+                        <a:lnSpc>
+                          <a:spcPct val="100000"/>
+                        </a:lnSpc>
+                        <a:spcBef>
+                          <a:spcPts val="0"/>
+                        </a:spcBef>
+                        <a:spcAft>
+                          <a:spcPts val="0"/>
+                        </a:spcAft>
+                        <a:buClrTx/>
+                        <a:buSzTx/>
+                        <a:buFontTx/>
+                        <a:buNone/>
+                        <a:tabLst/>
+                        <a:defRPr/>
+                      </a:pPr>
+                      <a:r>
+                        <a:rPr lang="en-US" sz="1800" dirty="0">
+                          <a:latin typeface="Titillium Web" panose="00000500000000000000" pitchFamily="2" charset="0"/>
+                          <a:ea typeface="Open Sans" panose="020B0606030504020204" pitchFamily="34" charset="0"/>
+                          <a:cs typeface="Open Sans" panose="020B0606030504020204" pitchFamily="34" charset="0"/>
+                        </a:rPr>
+                        <a:t>American residential markets</a:t>
+                      </a:r>
+                    </a:p>
+                  </a:txBody>
+                  <a:tcPr anchor="ctr">
+                    <a:lnL w="12700" cap="flat" cmpd="sng" algn="ctr">
+                      <a:noFill/>
+                      <a:prstDash val="solid"/>
+                      <a:round/>
+                      <a:headEnd type="none" w="med" len="med"/>
+                      <a:tailEnd type="none" w="med" len="med"/>
+                    </a:lnL>
+                    <a:lnR w="12700" cap="flat" cmpd="sng" algn="ctr">
+                      <a:solidFill>
+                        <a:schemeClr val="tx1"/>
+                      </a:solidFill>
+                      <a:prstDash val="solid"/>
+                      <a:round/>
+                      <a:headEnd type="none" w="med" len="med"/>
+                      <a:tailEnd type="none" w="med" len="med"/>
+                    </a:lnR>
+                    <a:lnT w="12700" cap="flat" cmpd="sng" algn="ctr">
+                      <a:solidFill>
+                        <a:schemeClr val="tx1"/>
+                      </a:solidFill>
+                      <a:prstDash val="solid"/>
+                      <a:round/>
+                      <a:headEnd type="none" w="med" len="med"/>
+                      <a:tailEnd type="none" w="med" len="med"/>
+                    </a:lnT>
+                    <a:lnB w="12700" cap="flat" cmpd="sng" algn="ctr">
+                      <a:noFill/>
+                      <a:prstDash val="solid"/>
+                      <a:round/>
+                      <a:headEnd type="none" w="med" len="med"/>
+                      <a:tailEnd type="none" w="med" len="med"/>
+                    </a:lnB>
+                    <a:lnTlToBr w="12700" cmpd="sng">
+                      <a:noFill/>
+                      <a:prstDash val="solid"/>
+                    </a:lnTlToBr>
+                    <a:lnBlToTr w="12700" cmpd="sng">
+                      <a:noFill/>
+                      <a:prstDash val="solid"/>
+                    </a:lnBlToTr>
+                    <a:noFill/>
+                  </a:tcPr>
+                </a:tc>
+                <a:extLst>
+                  <a:ext uri="{0D108BD9-81ED-4DB2-BD59-A6C34878D82A}">
+                    <a16:rowId xmlns:a16="http://schemas.microsoft.com/office/drawing/2014/main" val="385092680"/>
+                  </a:ext>
+                </a:extLst>
+              </a:tr>
+              <a:tr h="0">
+                <a:tc>
+                  <a:txBody>
+                    <a:bodyPr/>
+                    <a:lstStyle/>
+                    <a:p>
+                      <a:pPr algn="r">
+                        <a:buNone/>
+                      </a:pPr>
+                      <a:r>
+                        <a:rPr lang="en-US" sz="1800" dirty="0">
+                          <a:latin typeface="Titillium Web" panose="00000500000000000000" pitchFamily="2" charset="0"/>
+                        </a:rPr>
+                        <a:t>1</a:t>
+                      </a:r>
+                    </a:p>
+                  </a:txBody>
+                  <a:tcPr anchor="ctr">
+                    <a:lnL w="12700" cap="flat" cmpd="sng" algn="ctr">
+                      <a:solidFill>
+                        <a:schemeClr val="tx1"/>
+                      </a:solidFill>
+                      <a:prstDash val="solid"/>
+                      <a:round/>
+                      <a:headEnd type="none" w="med" len="med"/>
+                      <a:tailEnd type="none" w="med" len="med"/>
+                    </a:lnL>
+                    <a:lnR w="12700" cap="flat" cmpd="sng" algn="ctr">
+                      <a:noFill/>
+                      <a:prstDash val="solid"/>
+                      <a:round/>
+                      <a:headEnd type="none" w="med" len="med"/>
+                      <a:tailEnd type="none" w="med" len="med"/>
+                    </a:lnR>
+                    <a:lnT w="12700" cap="flat" cmpd="sng" algn="ctr">
+                      <a:noFill/>
+                      <a:prstDash val="solid"/>
+                      <a:round/>
+                      <a:headEnd type="none" w="med" len="med"/>
+                      <a:tailEnd type="none" w="med" len="med"/>
+                    </a:lnT>
+                    <a:lnB w="12700" cap="flat" cmpd="sng" algn="ctr">
+                      <a:noFill/>
+                      <a:prstDash val="solid"/>
+                      <a:round/>
+                      <a:headEnd type="none" w="med" len="med"/>
+                      <a:tailEnd type="none" w="med" len="med"/>
+                    </a:lnB>
+                    <a:lnTlToBr w="12700" cmpd="sng">
+                      <a:noFill/>
+                      <a:prstDash val="solid"/>
+                    </a:lnTlToBr>
+                    <a:lnBlToTr w="12700" cmpd="sng">
+                      <a:noFill/>
+                      <a:prstDash val="solid"/>
+                    </a:lnBlToTr>
+                    <a:solidFill>
+                      <a:srgbClr val="B9E042"/>
+                    </a:solidFill>
+                  </a:tcPr>
+                </a:tc>
+                <a:tc>
+                  <a:txBody>
+                    <a:bodyPr/>
+                    <a:lstStyle/>
+                    <a:p>
+                      <a:pPr marL="0" marR="0" lvl="0" indent="0" algn="l" defTabSz="914400" rtl="0" eaLnBrk="1" fontAlgn="auto" latinLnBrk="0" hangingPunct="1">
+                        <a:lnSpc>
+                          <a:spcPct val="100000"/>
+                        </a:lnSpc>
+                        <a:spcBef>
+                          <a:spcPts val="0"/>
+                        </a:spcBef>
+                        <a:spcAft>
+                          <a:spcPts val="0"/>
+                        </a:spcAft>
+                        <a:buClrTx/>
+                        <a:buSzTx/>
+                        <a:buFontTx/>
+                        <a:buNone/>
+                        <a:tabLst/>
+                        <a:defRPr/>
+                      </a:pPr>
+                      <a:r>
+                        <a:rPr lang="en-US" sz="1800" dirty="0">
+                          <a:latin typeface="Titillium Web" panose="00000500000000000000" pitchFamily="2" charset="0"/>
+                          <a:ea typeface="Open Sans" panose="020B0606030504020204" pitchFamily="34" charset="0"/>
+                          <a:cs typeface="Open Sans" panose="020B0606030504020204" pitchFamily="34" charset="0"/>
+                        </a:rPr>
+                        <a:t>U.S.–China manufacturing/trade</a:t>
+                      </a:r>
+                    </a:p>
+                  </a:txBody>
+                  <a:tcPr anchor="ctr">
+                    <a:lnL w="12700" cap="flat" cmpd="sng" algn="ctr">
+                      <a:noFill/>
+                      <a:prstDash val="solid"/>
+                      <a:round/>
+                      <a:headEnd type="none" w="med" len="med"/>
+                      <a:tailEnd type="none" w="med" len="med"/>
+                    </a:lnL>
+                    <a:lnR w="12700" cap="flat" cmpd="sng" algn="ctr">
+                      <a:solidFill>
+                        <a:schemeClr val="tx1"/>
+                      </a:solidFill>
+                      <a:prstDash val="solid"/>
+                      <a:round/>
+                      <a:headEnd type="none" w="med" len="med"/>
+                      <a:tailEnd type="none" w="med" len="med"/>
+                    </a:lnR>
+                    <a:lnT w="12700" cap="flat" cmpd="sng" algn="ctr">
+                      <a:noFill/>
+                      <a:prstDash val="solid"/>
+                      <a:round/>
+                      <a:headEnd type="none" w="med" len="med"/>
+                      <a:tailEnd type="none" w="med" len="med"/>
+                    </a:lnT>
+                    <a:lnB w="12700" cap="flat" cmpd="sng" algn="ctr">
+                      <a:noFill/>
+                      <a:prstDash val="solid"/>
+                      <a:round/>
+                      <a:headEnd type="none" w="med" len="med"/>
+                      <a:tailEnd type="none" w="med" len="med"/>
+                    </a:lnB>
+                    <a:lnTlToBr w="12700" cmpd="sng">
+                      <a:noFill/>
+                      <a:prstDash val="solid"/>
+                    </a:lnTlToBr>
+                    <a:lnBlToTr w="12700" cmpd="sng">
+                      <a:noFill/>
+                      <a:prstDash val="solid"/>
+                    </a:lnBlToTr>
+                    <a:noFill/>
+                  </a:tcPr>
+                </a:tc>
+                <a:extLst>
+                  <a:ext uri="{0D108BD9-81ED-4DB2-BD59-A6C34878D82A}">
+                    <a16:rowId xmlns:a16="http://schemas.microsoft.com/office/drawing/2014/main" val="3255593464"/>
+                  </a:ext>
+                </a:extLst>
+              </a:tr>
+              <a:tr h="0">
+                <a:tc>
+                  <a:txBody>
+                    <a:bodyPr/>
+                    <a:lstStyle/>
+                    <a:p>
+                      <a:pPr algn="r">
+                        <a:buNone/>
+                      </a:pPr>
+                      <a:r>
+                        <a:rPr lang="en-US" sz="1800" dirty="0">
+                          <a:latin typeface="Titillium Web" panose="00000500000000000000" pitchFamily="2" charset="0"/>
+                        </a:rPr>
+                        <a:t>2</a:t>
+                      </a:r>
+                    </a:p>
+                  </a:txBody>
+                  <a:tcPr anchor="ctr">
+                    <a:lnL w="12700" cap="flat" cmpd="sng" algn="ctr">
+                      <a:solidFill>
+                        <a:schemeClr val="tx1"/>
+                      </a:solidFill>
+                      <a:prstDash val="solid"/>
+                      <a:round/>
+                      <a:headEnd type="none" w="med" len="med"/>
+                      <a:tailEnd type="none" w="med" len="med"/>
+                    </a:lnL>
+                    <a:lnR w="12700" cap="flat" cmpd="sng" algn="ctr">
+                      <a:noFill/>
+                      <a:prstDash val="solid"/>
+                      <a:round/>
+                      <a:headEnd type="none" w="med" len="med"/>
+                      <a:tailEnd type="none" w="med" len="med"/>
+                    </a:lnR>
+                    <a:lnT w="12700" cap="flat" cmpd="sng" algn="ctr">
+                      <a:noFill/>
+                      <a:prstDash val="solid"/>
+                      <a:round/>
+                      <a:headEnd type="none" w="med" len="med"/>
+                      <a:tailEnd type="none" w="med" len="med"/>
+                    </a:lnT>
+                    <a:lnB w="12700" cap="flat" cmpd="sng" algn="ctr">
+                      <a:noFill/>
+                      <a:prstDash val="solid"/>
+                      <a:round/>
+                      <a:headEnd type="none" w="med" len="med"/>
+                      <a:tailEnd type="none" w="med" len="med"/>
+                    </a:lnB>
+                    <a:lnTlToBr w="12700" cmpd="sng">
+                      <a:noFill/>
+                      <a:prstDash val="solid"/>
+                    </a:lnTlToBr>
+                    <a:lnBlToTr w="12700" cmpd="sng">
+                      <a:noFill/>
+                      <a:prstDash val="solid"/>
+                    </a:lnBlToTr>
+                    <a:solidFill>
+                      <a:srgbClr val="FDE93B"/>
+                    </a:solidFill>
+                  </a:tcPr>
+                </a:tc>
+                <a:tc>
+                  <a:txBody>
+                    <a:bodyPr/>
+                    <a:lstStyle/>
+                    <a:p>
+                      <a:pPr marL="0" marR="0" lvl="0" indent="0" algn="l" defTabSz="914400" rtl="0" eaLnBrk="1" fontAlgn="auto" latinLnBrk="0" hangingPunct="1">
+                        <a:lnSpc>
+                          <a:spcPct val="100000"/>
+                        </a:lnSpc>
+                        <a:spcBef>
+                          <a:spcPts val="0"/>
+                        </a:spcBef>
+                        <a:spcAft>
+                          <a:spcPts val="0"/>
+                        </a:spcAft>
+                        <a:buClrTx/>
+                        <a:buSzTx/>
+                        <a:buFontTx/>
+                        <a:buNone/>
+                        <a:tabLst/>
+                        <a:defRPr/>
+                      </a:pPr>
+                      <a:r>
+                        <a:rPr lang="en-US" sz="1800" dirty="0">
+                          <a:latin typeface="Titillium Web" panose="00000500000000000000" pitchFamily="2" charset="0"/>
+                          <a:ea typeface="Open Sans" panose="020B0606030504020204" pitchFamily="34" charset="0"/>
+                          <a:cs typeface="Open Sans" panose="020B0606030504020204" pitchFamily="34" charset="0"/>
+                        </a:rPr>
+                        <a:t>U.S. solar policy</a:t>
+                      </a:r>
+                    </a:p>
+                  </a:txBody>
+                  <a:tcPr anchor="ctr">
+                    <a:lnL w="12700" cap="flat" cmpd="sng" algn="ctr">
+                      <a:noFill/>
+                      <a:prstDash val="solid"/>
+                      <a:round/>
+                      <a:headEnd type="none" w="med" len="med"/>
+                      <a:tailEnd type="none" w="med" len="med"/>
+                    </a:lnL>
+                    <a:lnR w="12700" cap="flat" cmpd="sng" algn="ctr">
+                      <a:solidFill>
+                        <a:schemeClr val="tx1"/>
+                      </a:solidFill>
+                      <a:prstDash val="solid"/>
+                      <a:round/>
+                      <a:headEnd type="none" w="med" len="med"/>
+                      <a:tailEnd type="none" w="med" len="med"/>
+                    </a:lnR>
+                    <a:lnT w="12700" cap="flat" cmpd="sng" algn="ctr">
+                      <a:noFill/>
+                      <a:prstDash val="solid"/>
+                      <a:round/>
+                      <a:headEnd type="none" w="med" len="med"/>
+                      <a:tailEnd type="none" w="med" len="med"/>
+                    </a:lnT>
+                    <a:lnB w="12700" cap="flat" cmpd="sng" algn="ctr">
+                      <a:noFill/>
+                      <a:prstDash val="solid"/>
+                      <a:round/>
+                      <a:headEnd type="none" w="med" len="med"/>
+                      <a:tailEnd type="none" w="med" len="med"/>
+                    </a:lnB>
+                    <a:lnTlToBr w="12700" cmpd="sng">
+                      <a:noFill/>
+                      <a:prstDash val="solid"/>
+                    </a:lnTlToBr>
+                    <a:lnBlToTr w="12700" cmpd="sng">
+                      <a:noFill/>
+                      <a:prstDash val="solid"/>
+                    </a:lnBlToTr>
+                    <a:noFill/>
+                  </a:tcPr>
+                </a:tc>
+                <a:extLst>
+                  <a:ext uri="{0D108BD9-81ED-4DB2-BD59-A6C34878D82A}">
+                    <a16:rowId xmlns:a16="http://schemas.microsoft.com/office/drawing/2014/main" val="2177487150"/>
+                  </a:ext>
+                </a:extLst>
+              </a:tr>
+              <a:tr h="0">
+                <a:tc>
+                  <a:txBody>
+                    <a:bodyPr/>
+                    <a:lstStyle/>
+                    <a:p>
+                      <a:pPr algn="r">
+                        <a:buNone/>
+                      </a:pPr>
+                      <a:r>
+                        <a:rPr lang="en-US" sz="1800" dirty="0">
+                          <a:latin typeface="Titillium Web" panose="00000500000000000000" pitchFamily="2" charset="0"/>
+                        </a:rPr>
+                        <a:t>3</a:t>
+                      </a:r>
+                    </a:p>
+                  </a:txBody>
+                  <a:tcPr anchor="ctr">
+                    <a:lnL w="12700" cap="flat" cmpd="sng" algn="ctr">
+                      <a:solidFill>
+                        <a:schemeClr val="tx1"/>
+                      </a:solidFill>
+                      <a:prstDash val="solid"/>
+                      <a:round/>
+                      <a:headEnd type="none" w="med" len="med"/>
+                      <a:tailEnd type="none" w="med" len="med"/>
+                    </a:lnL>
+                    <a:lnR w="12700" cap="flat" cmpd="sng" algn="ctr">
+                      <a:noFill/>
+                      <a:prstDash val="solid"/>
+                      <a:round/>
+                      <a:headEnd type="none" w="med" len="med"/>
+                      <a:tailEnd type="none" w="med" len="med"/>
+                    </a:lnR>
+                    <a:lnT w="12700" cap="flat" cmpd="sng" algn="ctr">
+                      <a:noFill/>
+                      <a:prstDash val="solid"/>
+                      <a:round/>
+                      <a:headEnd type="none" w="med" len="med"/>
+                      <a:tailEnd type="none" w="med" len="med"/>
+                    </a:lnT>
+                    <a:lnB w="12700" cap="flat" cmpd="sng" algn="ctr">
+                      <a:noFill/>
+                      <a:prstDash val="solid"/>
+                      <a:round/>
+                      <a:headEnd type="none" w="med" len="med"/>
+                      <a:tailEnd type="none" w="med" len="med"/>
+                    </a:lnB>
+                    <a:lnTlToBr w="12700" cmpd="sng">
+                      <a:noFill/>
+                      <a:prstDash val="solid"/>
+                    </a:lnTlToBr>
+                    <a:lnBlToTr w="12700" cmpd="sng">
+                      <a:noFill/>
+                      <a:prstDash val="solid"/>
+                    </a:lnBlToTr>
+                    <a:solidFill>
+                      <a:srgbClr val="A2DB51"/>
+                    </a:solidFill>
+                  </a:tcPr>
+                </a:tc>
+                <a:tc>
+                  <a:txBody>
+                    <a:bodyPr/>
+                    <a:lstStyle/>
+                    <a:p>
+                      <a:pPr marL="0" marR="0" lvl="0" indent="0" algn="l" defTabSz="914400" rtl="0" eaLnBrk="1" fontAlgn="auto" latinLnBrk="0" hangingPunct="1">
+                        <a:lnSpc>
+                          <a:spcPct val="100000"/>
+                        </a:lnSpc>
+                        <a:spcBef>
+                          <a:spcPts val="0"/>
+                        </a:spcBef>
+                        <a:spcAft>
+                          <a:spcPts val="0"/>
+                        </a:spcAft>
+                        <a:buClrTx/>
+                        <a:buSzTx/>
+                        <a:buFontTx/>
+                        <a:buNone/>
+                        <a:tabLst/>
+                        <a:defRPr/>
+                      </a:pPr>
+                      <a:r>
+                        <a:rPr lang="en-US" sz="1800" dirty="0">
+                          <a:latin typeface="Titillium Web" panose="00000500000000000000" pitchFamily="2" charset="0"/>
+                          <a:ea typeface="Open Sans" panose="020B0606030504020204" pitchFamily="34" charset="0"/>
+                          <a:cs typeface="Open Sans" panose="020B0606030504020204" pitchFamily="34" charset="0"/>
+                        </a:rPr>
+                        <a:t>International solar tech/projects</a:t>
+                      </a:r>
+                    </a:p>
+                  </a:txBody>
+                  <a:tcPr anchor="ctr">
+                    <a:lnL w="12700" cap="flat" cmpd="sng" algn="ctr">
+                      <a:noFill/>
+                      <a:prstDash val="solid"/>
+                      <a:round/>
+                      <a:headEnd type="none" w="med" len="med"/>
+                      <a:tailEnd type="none" w="med" len="med"/>
+                    </a:lnL>
+                    <a:lnR w="12700" cap="flat" cmpd="sng" algn="ctr">
+                      <a:solidFill>
+                        <a:schemeClr val="tx1"/>
+                      </a:solidFill>
+                      <a:prstDash val="solid"/>
+                      <a:round/>
+                      <a:headEnd type="none" w="med" len="med"/>
+                      <a:tailEnd type="none" w="med" len="med"/>
+                    </a:lnR>
+                    <a:lnT w="12700" cap="flat" cmpd="sng" algn="ctr">
+                      <a:noFill/>
+                      <a:prstDash val="solid"/>
+                      <a:round/>
+                      <a:headEnd type="none" w="med" len="med"/>
+                      <a:tailEnd type="none" w="med" len="med"/>
+                    </a:lnT>
+                    <a:lnB w="12700" cap="flat" cmpd="sng" algn="ctr">
+                      <a:noFill/>
+                      <a:prstDash val="solid"/>
+                      <a:round/>
+                      <a:headEnd type="none" w="med" len="med"/>
+                      <a:tailEnd type="none" w="med" len="med"/>
+                    </a:lnB>
+                    <a:lnTlToBr w="12700" cmpd="sng">
+                      <a:noFill/>
+                      <a:prstDash val="solid"/>
+                    </a:lnTlToBr>
+                    <a:lnBlToTr w="12700" cmpd="sng">
+                      <a:noFill/>
+                      <a:prstDash val="solid"/>
+                    </a:lnBlToTr>
+                    <a:noFill/>
+                  </a:tcPr>
+                </a:tc>
+                <a:extLst>
+                  <a:ext uri="{0D108BD9-81ED-4DB2-BD59-A6C34878D82A}">
+                    <a16:rowId xmlns:a16="http://schemas.microsoft.com/office/drawing/2014/main" val="731956399"/>
+                  </a:ext>
+                </a:extLst>
+              </a:tr>
+              <a:tr h="0">
+                <a:tc>
+                  <a:txBody>
+                    <a:bodyPr/>
+                    <a:lstStyle/>
+                    <a:p>
+                      <a:pPr algn="r">
+                        <a:buNone/>
+                      </a:pPr>
+                      <a:r>
+                        <a:rPr lang="en-US" sz="1800" dirty="0">
+                          <a:latin typeface="Titillium Web" panose="00000500000000000000" pitchFamily="2" charset="0"/>
+                        </a:rPr>
+                        <a:t>4</a:t>
+                      </a:r>
+                    </a:p>
+                  </a:txBody>
+                  <a:tcPr anchor="ctr">
+                    <a:lnL w="12700" cap="flat" cmpd="sng" algn="ctr">
+                      <a:solidFill>
+                        <a:schemeClr val="tx1"/>
+                      </a:solidFill>
+                      <a:prstDash val="solid"/>
+                      <a:round/>
+                      <a:headEnd type="none" w="med" len="med"/>
+                      <a:tailEnd type="none" w="med" len="med"/>
+                    </a:lnL>
+                    <a:lnR w="12700" cap="flat" cmpd="sng" algn="ctr">
+                      <a:noFill/>
+                      <a:prstDash val="solid"/>
+                      <a:round/>
+                      <a:headEnd type="none" w="med" len="med"/>
+                      <a:tailEnd type="none" w="med" len="med"/>
+                    </a:lnR>
+                    <a:lnT w="12700" cap="flat" cmpd="sng" algn="ctr">
+                      <a:noFill/>
+                      <a:prstDash val="solid"/>
+                      <a:round/>
+                      <a:headEnd type="none" w="med" len="med"/>
+                      <a:tailEnd type="none" w="med" len="med"/>
+                    </a:lnT>
+                    <a:lnB w="12700" cap="flat" cmpd="sng" algn="ctr">
+                      <a:solidFill>
+                        <a:schemeClr val="tx1"/>
+                      </a:solidFill>
+                      <a:prstDash val="solid"/>
+                      <a:round/>
+                      <a:headEnd type="none" w="med" len="med"/>
+                      <a:tailEnd type="none" w="med" len="med"/>
+                    </a:lnB>
+                    <a:lnTlToBr w="12700" cmpd="sng">
+                      <a:noFill/>
+                      <a:prstDash val="solid"/>
+                    </a:lnTlToBr>
+                    <a:lnBlToTr w="12700" cmpd="sng">
+                      <a:noFill/>
+                      <a:prstDash val="solid"/>
+                    </a:lnBlToTr>
+                    <a:solidFill>
+                      <a:srgbClr val="45BC88"/>
+                    </a:solidFill>
+                  </a:tcPr>
+                </a:tc>
+                <a:tc>
+                  <a:txBody>
+                    <a:bodyPr/>
+                    <a:lstStyle/>
+                    <a:p>
+                      <a:pPr marL="0" marR="0" lvl="0" indent="0" algn="l" defTabSz="914400" rtl="0" eaLnBrk="1" fontAlgn="auto" latinLnBrk="0" hangingPunct="1">
+                        <a:lnSpc>
+                          <a:spcPct val="100000"/>
+                        </a:lnSpc>
+                        <a:spcBef>
+                          <a:spcPts val="0"/>
+                        </a:spcBef>
+                        <a:spcAft>
+                          <a:spcPts val="0"/>
+                        </a:spcAft>
+                        <a:buClrTx/>
+                        <a:buSzTx/>
+                        <a:buFontTx/>
+                        <a:buNone/>
+                        <a:tabLst/>
+                        <a:defRPr/>
+                      </a:pPr>
+                      <a:r>
+                        <a:rPr lang="en-US" sz="1800" dirty="0">
+                          <a:latin typeface="Titillium Web" panose="00000500000000000000" pitchFamily="2" charset="0"/>
+                          <a:ea typeface="Open Sans" panose="020B0606030504020204" pitchFamily="34" charset="0"/>
+                          <a:cs typeface="Open Sans" panose="020B0606030504020204" pitchFamily="34" charset="0"/>
+                        </a:rPr>
+                        <a:t>International pro-solar orgs</a:t>
+                      </a:r>
+                    </a:p>
+                  </a:txBody>
+                  <a:tcPr anchor="ctr">
+                    <a:lnL w="12700" cap="flat" cmpd="sng" algn="ctr">
+                      <a:noFill/>
+                      <a:prstDash val="solid"/>
+                      <a:round/>
+                      <a:headEnd type="none" w="med" len="med"/>
+                      <a:tailEnd type="none" w="med" len="med"/>
+                    </a:lnL>
+                    <a:lnR w="12700" cap="flat" cmpd="sng" algn="ctr">
+                      <a:solidFill>
+                        <a:schemeClr val="tx1"/>
+                      </a:solidFill>
+                      <a:prstDash val="solid"/>
+                      <a:round/>
+                      <a:headEnd type="none" w="med" len="med"/>
+                      <a:tailEnd type="none" w="med" len="med"/>
+                    </a:lnR>
+                    <a:lnT w="12700" cap="flat" cmpd="sng" algn="ctr">
+                      <a:noFill/>
+                      <a:prstDash val="solid"/>
+                      <a:round/>
+                      <a:headEnd type="none" w="med" len="med"/>
+                      <a:tailEnd type="none" w="med" len="med"/>
+                    </a:lnT>
+                    <a:lnB w="12700" cap="flat" cmpd="sng" algn="ctr">
+                      <a:solidFill>
+                        <a:schemeClr val="tx1"/>
+                      </a:solidFill>
+                      <a:prstDash val="solid"/>
+                      <a:round/>
+                      <a:headEnd type="none" w="med" len="med"/>
+                      <a:tailEnd type="none" w="med" len="med"/>
+                    </a:lnB>
+                    <a:lnTlToBr w="12700" cmpd="sng">
+                      <a:noFill/>
+                      <a:prstDash val="solid"/>
+                    </a:lnTlToBr>
+                    <a:lnBlToTr w="12700" cmpd="sng">
+                      <a:noFill/>
+                      <a:prstDash val="solid"/>
+                    </a:lnBlToTr>
+                    <a:noFill/>
+                  </a:tcPr>
+                </a:tc>
+                <a:extLst>
+                  <a:ext uri="{0D108BD9-81ED-4DB2-BD59-A6C34878D82A}">
+                    <a16:rowId xmlns:a16="http://schemas.microsoft.com/office/drawing/2014/main" val="3325067963"/>
+                  </a:ext>
+                </a:extLst>
+              </a:tr>
+            </a:tbl>
+          </a:graphicData>
+        </a:graphic>
+      </p:graphicFrame>
     </p:spTree>
   </p:cSld>
   <p:clrMapOvr>

--- a/poster.pptx
+++ b/poster.pptx
@@ -4,6 +4,9 @@
   <p:sldMasterIdLst>
     <p:sldMasterId id="2147483648" r:id="rId1"/>
   </p:sldMasterIdLst>
+  <p:notesMasterIdLst>
+    <p:notesMasterId r:id="rId3"/>
+  </p:notesMasterIdLst>
   <p:sldIdLst>
     <p:sldId id="256" r:id="rId2"/>
   </p:sldIdLst>
@@ -12,18 +15,18 @@
   <p:embeddedFontLst>
     <p:embeddedFont>
       <p:font typeface="Amaranth" panose="020B0604020202020204" charset="0"/>
-      <p:regular r:id="rId3"/>
+      <p:regular r:id="rId4"/>
     </p:embeddedFont>
     <p:embeddedFont>
       <p:font typeface="Titillium Web" panose="00000500000000000000" pitchFamily="2" charset="0"/>
-      <p:regular r:id="rId4"/>
-      <p:bold r:id="rId5"/>
-      <p:italic r:id="rId6"/>
-      <p:boldItalic r:id="rId7"/>
+      <p:regular r:id="rId5"/>
+      <p:bold r:id="rId6"/>
+      <p:italic r:id="rId7"/>
+      <p:boldItalic r:id="rId8"/>
     </p:embeddedFont>
   </p:embeddedFontLst>
   <p:custDataLst>
-    <p:tags r:id="rId8"/>
+    <p:tags r:id="rId9"/>
   </p:custDataLst>
   <p:defaultTextStyle>
     <a:defPPr>
@@ -170,6 +173,355 @@
     </p:ext>
   </p:extLst>
 </p:presentation>
+</file>
+
+<file path=ppt/notesMasters/notesMaster1.xml><?xml version="1.0" encoding="utf-8"?>
+<p:notesMaster xmlns:a="http://schemas.openxmlformats.org/drawingml/2006/main" xmlns:r="http://schemas.openxmlformats.org/officeDocument/2006/relationships" xmlns:p="http://schemas.openxmlformats.org/presentationml/2006/main">
+  <p:cSld>
+    <p:bg>
+      <p:bgRef idx="1001">
+        <a:schemeClr val="bg1"/>
+      </p:bgRef>
+    </p:bg>
+    <p:spTree>
+      <p:nvGrpSpPr>
+        <p:cNvPr id="1" name=""/>
+        <p:cNvGrpSpPr/>
+        <p:nvPr/>
+      </p:nvGrpSpPr>
+      <p:grpSpPr>
+        <a:xfrm>
+          <a:off x="0" y="0"/>
+          <a:ext cx="0" cy="0"/>
+          <a:chOff x="0" y="0"/>
+          <a:chExt cx="0" cy="0"/>
+        </a:xfrm>
+      </p:grpSpPr>
+      <p:sp>
+        <p:nvSpPr>
+          <p:cNvPr id="2" name="Header Placeholder 1"/>
+          <p:cNvSpPr>
+            <a:spLocks noGrp="1"/>
+          </p:cNvSpPr>
+          <p:nvPr>
+            <p:ph type="hdr" sz="quarter"/>
+          </p:nvPr>
+        </p:nvSpPr>
+        <p:spPr>
+          <a:xfrm>
+            <a:off x="0" y="0"/>
+            <a:ext cx="2513013" cy="455613"/>
+          </a:xfrm>
+          <a:prstGeom prst="rect">
+            <a:avLst/>
+          </a:prstGeom>
+        </p:spPr>
+        <p:txBody>
+          <a:bodyPr vert="horz" lIns="91440" tIns="45720" rIns="91440" bIns="45720" rtlCol="0"/>
+          <a:lstStyle>
+            <a:lvl1pPr algn="l">
+              <a:defRPr sz="1200"/>
+            </a:lvl1pPr>
+          </a:lstStyle>
+          <a:p>
+            <a:endParaRPr lang="en-US"/>
+          </a:p>
+        </p:txBody>
+      </p:sp>
+      <p:sp>
+        <p:nvSpPr>
+          <p:cNvPr id="3" name="Date Placeholder 2"/>
+          <p:cNvSpPr>
+            <a:spLocks noGrp="1"/>
+          </p:cNvSpPr>
+          <p:nvPr>
+            <p:ph type="dt" idx="1"/>
+          </p:nvPr>
+        </p:nvSpPr>
+        <p:spPr>
+          <a:xfrm>
+            <a:off x="3286125" y="0"/>
+            <a:ext cx="2513013" cy="455613"/>
+          </a:xfrm>
+          <a:prstGeom prst="rect">
+            <a:avLst/>
+          </a:prstGeom>
+        </p:spPr>
+        <p:txBody>
+          <a:bodyPr vert="horz" lIns="91440" tIns="45720" rIns="91440" bIns="45720" rtlCol="0"/>
+          <a:lstStyle>
+            <a:lvl1pPr algn="r">
+              <a:defRPr sz="1200"/>
+            </a:lvl1pPr>
+          </a:lstStyle>
+          <a:p>
+            <a:fld id="{3D9C46C7-1D6F-4D96-8AEB-AC9D96A24BEB}" type="datetimeFigureOut">
+              <a:rPr lang="en-US" smtClean="0"/>
+              <a:t>8/3/2026</a:t>
+            </a:fld>
+            <a:endParaRPr lang="en-US"/>
+          </a:p>
+        </p:txBody>
+      </p:sp>
+      <p:sp>
+        <p:nvSpPr>
+          <p:cNvPr id="4" name="Slide Image Placeholder 3"/>
+          <p:cNvSpPr>
+            <a:spLocks noGrp="1" noRot="1" noChangeAspect="1"/>
+          </p:cNvSpPr>
+          <p:nvPr>
+            <p:ph type="sldImg" idx="2"/>
+          </p:nvPr>
+        </p:nvSpPr>
+        <p:spPr>
+          <a:xfrm>
+            <a:off x="854075" y="1136650"/>
+            <a:ext cx="4092575" cy="3070225"/>
+          </a:xfrm>
+          <a:prstGeom prst="rect">
+            <a:avLst/>
+          </a:prstGeom>
+          <a:noFill/>
+          <a:ln w="12700">
+            <a:solidFill>
+              <a:prstClr val="black"/>
+            </a:solidFill>
+          </a:ln>
+        </p:spPr>
+        <p:txBody>
+          <a:bodyPr vert="horz" lIns="91440" tIns="45720" rIns="91440" bIns="45720" rtlCol="0" anchor="ctr"/>
+          <a:lstStyle/>
+          <a:p>
+            <a:endParaRPr lang="en-US"/>
+          </a:p>
+        </p:txBody>
+      </p:sp>
+      <p:sp>
+        <p:nvSpPr>
+          <p:cNvPr id="5" name="Notes Placeholder 4"/>
+          <p:cNvSpPr>
+            <a:spLocks noGrp="1"/>
+          </p:cNvSpPr>
+          <p:nvPr>
+            <p:ph type="body" sz="quarter" idx="3"/>
+          </p:nvPr>
+        </p:nvSpPr>
+        <p:spPr>
+          <a:xfrm>
+            <a:off x="579438" y="4376738"/>
+            <a:ext cx="4641850" cy="3581400"/>
+          </a:xfrm>
+          <a:prstGeom prst="rect">
+            <a:avLst/>
+          </a:prstGeom>
+        </p:spPr>
+        <p:txBody>
+          <a:bodyPr vert="horz" lIns="91440" tIns="45720" rIns="91440" bIns="45720" rtlCol="0"/>
+          <a:lstStyle/>
+          <a:p>
+            <a:pPr lvl="0"/>
+            <a:r>
+              <a:rPr lang="en-US"/>
+              <a:t>Click to edit Master text styles</a:t>
+            </a:r>
+          </a:p>
+          <a:p>
+            <a:pPr lvl="1"/>
+            <a:r>
+              <a:rPr lang="en-US"/>
+              <a:t>Second level</a:t>
+            </a:r>
+          </a:p>
+          <a:p>
+            <a:pPr lvl="2"/>
+            <a:r>
+              <a:rPr lang="en-US"/>
+              <a:t>Third level</a:t>
+            </a:r>
+          </a:p>
+          <a:p>
+            <a:pPr lvl="3"/>
+            <a:r>
+              <a:rPr lang="en-US"/>
+              <a:t>Fourth level</a:t>
+            </a:r>
+          </a:p>
+          <a:p>
+            <a:pPr lvl="4"/>
+            <a:r>
+              <a:rPr lang="en-US"/>
+              <a:t>Fifth level</a:t>
+            </a:r>
+          </a:p>
+        </p:txBody>
+      </p:sp>
+      <p:sp>
+        <p:nvSpPr>
+          <p:cNvPr id="6" name="Footer Placeholder 5"/>
+          <p:cNvSpPr>
+            <a:spLocks noGrp="1"/>
+          </p:cNvSpPr>
+          <p:nvPr>
+            <p:ph type="ftr" sz="quarter" idx="4"/>
+          </p:nvPr>
+        </p:nvSpPr>
+        <p:spPr>
+          <a:xfrm>
+            <a:off x="0" y="8639175"/>
+            <a:ext cx="2513013" cy="455613"/>
+          </a:xfrm>
+          <a:prstGeom prst="rect">
+            <a:avLst/>
+          </a:prstGeom>
+        </p:spPr>
+        <p:txBody>
+          <a:bodyPr vert="horz" lIns="91440" tIns="45720" rIns="91440" bIns="45720" rtlCol="0" anchor="b"/>
+          <a:lstStyle>
+            <a:lvl1pPr algn="l">
+              <a:defRPr sz="1200"/>
+            </a:lvl1pPr>
+          </a:lstStyle>
+          <a:p>
+            <a:endParaRPr lang="en-US"/>
+          </a:p>
+        </p:txBody>
+      </p:sp>
+      <p:sp>
+        <p:nvSpPr>
+          <p:cNvPr id="7" name="Slide Number Placeholder 6"/>
+          <p:cNvSpPr>
+            <a:spLocks noGrp="1"/>
+          </p:cNvSpPr>
+          <p:nvPr>
+            <p:ph type="sldNum" sz="quarter" idx="5"/>
+          </p:nvPr>
+        </p:nvSpPr>
+        <p:spPr>
+          <a:xfrm>
+            <a:off x="3286125" y="8639175"/>
+            <a:ext cx="2513013" cy="455613"/>
+          </a:xfrm>
+          <a:prstGeom prst="rect">
+            <a:avLst/>
+          </a:prstGeom>
+        </p:spPr>
+        <p:txBody>
+          <a:bodyPr vert="horz" lIns="91440" tIns="45720" rIns="91440" bIns="45720" rtlCol="0" anchor="b"/>
+          <a:lstStyle>
+            <a:lvl1pPr algn="r">
+              <a:defRPr sz="1200"/>
+            </a:lvl1pPr>
+          </a:lstStyle>
+          <a:p>
+            <a:fld id="{06F20416-0590-4FC5-9D38-DA5B39CB99EA}" type="slidenum">
+              <a:rPr lang="en-US" smtClean="0"/>
+              <a:t>‹#›</a:t>
+            </a:fld>
+            <a:endParaRPr lang="en-US"/>
+          </a:p>
+        </p:txBody>
+      </p:sp>
+    </p:spTree>
+    <p:extLst>
+      <p:ext uri="{BB962C8B-B14F-4D97-AF65-F5344CB8AC3E}">
+        <p14:creationId xmlns:p14="http://schemas.microsoft.com/office/powerpoint/2010/main" val="2866569970"/>
+      </p:ext>
+    </p:extLst>
+  </p:cSld>
+  <p:clrMap bg1="lt1" tx1="dk1" bg2="lt2" tx2="dk2" accent1="accent1" accent2="accent2" accent3="accent3" accent4="accent4" accent5="accent5" accent6="accent6" hlink="hlink" folHlink="folHlink"/>
+  <p:notesStyle>
+    <a:lvl1pPr marL="0" algn="l" defTabSz="914400" rtl="0" eaLnBrk="1" latinLnBrk="0" hangingPunct="1">
+      <a:defRPr sz="1200" kern="1200">
+        <a:solidFill>
+          <a:schemeClr val="tx1"/>
+        </a:solidFill>
+        <a:latin typeface="+mn-lt"/>
+        <a:ea typeface="+mn-ea"/>
+        <a:cs typeface="+mn-cs"/>
+      </a:defRPr>
+    </a:lvl1pPr>
+    <a:lvl2pPr marL="457200" algn="l" defTabSz="914400" rtl="0" eaLnBrk="1" latinLnBrk="0" hangingPunct="1">
+      <a:defRPr sz="1200" kern="1200">
+        <a:solidFill>
+          <a:schemeClr val="tx1"/>
+        </a:solidFill>
+        <a:latin typeface="+mn-lt"/>
+        <a:ea typeface="+mn-ea"/>
+        <a:cs typeface="+mn-cs"/>
+      </a:defRPr>
+    </a:lvl2pPr>
+    <a:lvl3pPr marL="914400" algn="l" defTabSz="914400" rtl="0" eaLnBrk="1" latinLnBrk="0" hangingPunct="1">
+      <a:defRPr sz="1200" kern="1200">
+        <a:solidFill>
+          <a:schemeClr val="tx1"/>
+        </a:solidFill>
+        <a:latin typeface="+mn-lt"/>
+        <a:ea typeface="+mn-ea"/>
+        <a:cs typeface="+mn-cs"/>
+      </a:defRPr>
+    </a:lvl3pPr>
+    <a:lvl4pPr marL="1371600" algn="l" defTabSz="914400" rtl="0" eaLnBrk="1" latinLnBrk="0" hangingPunct="1">
+      <a:defRPr sz="1200" kern="1200">
+        <a:solidFill>
+          <a:schemeClr val="tx1"/>
+        </a:solidFill>
+        <a:latin typeface="+mn-lt"/>
+        <a:ea typeface="+mn-ea"/>
+        <a:cs typeface="+mn-cs"/>
+      </a:defRPr>
+    </a:lvl4pPr>
+    <a:lvl5pPr marL="1828800" algn="l" defTabSz="914400" rtl="0" eaLnBrk="1" latinLnBrk="0" hangingPunct="1">
+      <a:defRPr sz="1200" kern="1200">
+        <a:solidFill>
+          <a:schemeClr val="tx1"/>
+        </a:solidFill>
+        <a:latin typeface="+mn-lt"/>
+        <a:ea typeface="+mn-ea"/>
+        <a:cs typeface="+mn-cs"/>
+      </a:defRPr>
+    </a:lvl5pPr>
+    <a:lvl6pPr marL="2286000" algn="l" defTabSz="914400" rtl="0" eaLnBrk="1" latinLnBrk="0" hangingPunct="1">
+      <a:defRPr sz="1200" kern="1200">
+        <a:solidFill>
+          <a:schemeClr val="tx1"/>
+        </a:solidFill>
+        <a:latin typeface="+mn-lt"/>
+        <a:ea typeface="+mn-ea"/>
+        <a:cs typeface="+mn-cs"/>
+      </a:defRPr>
+    </a:lvl6pPr>
+    <a:lvl7pPr marL="2743200" algn="l" defTabSz="914400" rtl="0" eaLnBrk="1" latinLnBrk="0" hangingPunct="1">
+      <a:defRPr sz="1200" kern="1200">
+        <a:solidFill>
+          <a:schemeClr val="tx1"/>
+        </a:solidFill>
+        <a:latin typeface="+mn-lt"/>
+        <a:ea typeface="+mn-ea"/>
+        <a:cs typeface="+mn-cs"/>
+      </a:defRPr>
+    </a:lvl7pPr>
+    <a:lvl8pPr marL="3200400" algn="l" defTabSz="914400" rtl="0" eaLnBrk="1" latinLnBrk="0" hangingPunct="1">
+      <a:defRPr sz="1200" kern="1200">
+        <a:solidFill>
+          <a:schemeClr val="tx1"/>
+        </a:solidFill>
+        <a:latin typeface="+mn-lt"/>
+        <a:ea typeface="+mn-ea"/>
+        <a:cs typeface="+mn-cs"/>
+      </a:defRPr>
+    </a:lvl8pPr>
+    <a:lvl9pPr marL="3657600" algn="l" defTabSz="914400" rtl="0" eaLnBrk="1" latinLnBrk="0" hangingPunct="1">
+      <a:defRPr sz="1200" kern="1200">
+        <a:solidFill>
+          <a:schemeClr val="tx1"/>
+        </a:solidFill>
+        <a:latin typeface="+mn-lt"/>
+        <a:ea typeface="+mn-ea"/>
+        <a:cs typeface="+mn-cs"/>
+      </a:defRPr>
+    </a:lvl9pPr>
+  </p:notesStyle>
+</p:notesMaster>
 </file>
 
 <file path=ppt/slideLayouts/slideLayout1.xml><?xml version="1.0" encoding="utf-8"?>
@@ -4229,385 +4581,6 @@
       </p:sp>
       <p:sp>
         <p:nvSpPr>
-          <p:cNvPr id="36" name="Rectangle 5">
-            <a:extLst>
-              <a:ext uri="{FF2B5EF4-FFF2-40B4-BE49-F238E27FC236}">
-                <a16:creationId xmlns:a16="http://schemas.microsoft.com/office/drawing/2014/main" id="{98FCC399-CA5D-4873-B45E-22BAE0F51D2E}"/>
-              </a:ext>
-            </a:extLst>
-          </p:cNvPr>
-          <p:cNvSpPr>
-            <a:spLocks noChangeArrowheads="1"/>
-          </p:cNvSpPr>
-          <p:nvPr/>
-        </p:nvSpPr>
-        <p:spPr bwMode="auto">
-          <a:xfrm>
-            <a:off x="11521440" y="7125252"/>
-            <a:ext cx="10058400" cy="784225"/>
-          </a:xfrm>
-          <a:prstGeom prst="rect">
-            <a:avLst/>
-          </a:prstGeom>
-          <a:solidFill>
-            <a:srgbClr val="1482A5"/>
-          </a:solidFill>
-          <a:ln>
-            <a:noFill/>
-          </a:ln>
-          <a:effectLst/>
-        </p:spPr>
-        <p:txBody>
-          <a:bodyPr wrap="none" lIns="274320" tIns="68580" rIns="274320" bIns="68580" anchor="ctr"/>
-          <a:lstStyle>
-            <a:defPPr>
-              <a:defRPr kern="1200"/>
-            </a:defPPr>
-          </a:lstStyle>
-          <a:p>
-            <a:pPr defTabSz="4703763"/>
-            <a:r>
-              <a:rPr lang="en-US" sz="3600" dirty="0">
-                <a:solidFill>
-                  <a:schemeClr val="bg1"/>
-                </a:solidFill>
-                <a:latin typeface="Amaranth" panose="02000503050000020004" pitchFamily="2" charset="0"/>
-              </a:rPr>
-              <a:t>Methodology</a:t>
-            </a:r>
-          </a:p>
-        </p:txBody>
-      </p:sp>
-      <p:sp>
-        <p:nvSpPr>
-          <p:cNvPr id="37" name="Text Box 6">
-            <a:extLst>
-              <a:ext uri="{FF2B5EF4-FFF2-40B4-BE49-F238E27FC236}">
-                <a16:creationId xmlns:a16="http://schemas.microsoft.com/office/drawing/2014/main" id="{BAB40251-2E35-4623-A6BE-28130F737F03}"/>
-              </a:ext>
-            </a:extLst>
-          </p:cNvPr>
-          <p:cNvSpPr txBox="1">
-            <a:spLocks noChangeArrowheads="1"/>
-          </p:cNvSpPr>
-          <p:nvPr/>
-        </p:nvSpPr>
-        <p:spPr bwMode="auto">
-          <a:xfrm>
-            <a:off x="709550" y="22599664"/>
-            <a:ext cx="10058400" cy="4001095"/>
-          </a:xfrm>
-          <a:prstGeom prst="rect">
-            <a:avLst/>
-          </a:prstGeom>
-          <a:solidFill>
-            <a:srgbClr val="B4D3E2"/>
-          </a:solidFill>
-          <a:ln>
-            <a:noFill/>
-          </a:ln>
-          <a:effectLst>
-            <a:softEdge rad="0"/>
-          </a:effectLst>
-        </p:spPr>
-        <p:txBody>
-          <a:bodyPr lIns="274320" tIns="274320" rIns="274320" bIns="274320">
-            <a:spAutoFit/>
-          </a:bodyPr>
-          <a:lstStyle>
-            <a:defPPr>
-              <a:defRPr kern="1200"/>
-            </a:defPPr>
-            <a:lvl1pPr defTabSz="4703763" eaLnBrk="0" hangingPunct="0">
-              <a:defRPr sz="9300">
-                <a:solidFill>
-                  <a:schemeClr val="tx1"/>
-                </a:solidFill>
-                <a:latin typeface="Arial"/>
-              </a:defRPr>
-            </a:lvl1pPr>
-            <a:lvl2pPr marL="742950" indent="-285750" defTabSz="4703763" eaLnBrk="0" hangingPunct="0">
-              <a:defRPr sz="9300">
-                <a:solidFill>
-                  <a:schemeClr val="tx1"/>
-                </a:solidFill>
-                <a:latin typeface="Arial"/>
-              </a:defRPr>
-            </a:lvl2pPr>
-            <a:lvl3pPr marL="1143000" indent="-228600" defTabSz="4703763" eaLnBrk="0" hangingPunct="0">
-              <a:defRPr sz="9300">
-                <a:solidFill>
-                  <a:schemeClr val="tx1"/>
-                </a:solidFill>
-                <a:latin typeface="Arial"/>
-              </a:defRPr>
-            </a:lvl3pPr>
-            <a:lvl4pPr marL="1600200" indent="-228600" defTabSz="4703763" eaLnBrk="0" hangingPunct="0">
-              <a:defRPr sz="9300">
-                <a:solidFill>
-                  <a:schemeClr val="tx1"/>
-                </a:solidFill>
-                <a:latin typeface="Arial"/>
-              </a:defRPr>
-            </a:lvl4pPr>
-            <a:lvl5pPr marL="2057400" indent="-228600" defTabSz="4703763" eaLnBrk="0" hangingPunct="0">
-              <a:defRPr sz="9300">
-                <a:solidFill>
-                  <a:schemeClr val="tx1"/>
-                </a:solidFill>
-                <a:latin typeface="Arial"/>
-              </a:defRPr>
-            </a:lvl5pPr>
-            <a:lvl6pPr marL="2514600" indent="-228600" defTabSz="4703763" eaLnBrk="0" fontAlgn="base" hangingPunct="0">
-              <a:spcBef>
-                <a:spcPct val="0"/>
-              </a:spcBef>
-              <a:spcAft>
-                <a:spcPct val="0"/>
-              </a:spcAft>
-              <a:defRPr sz="9300">
-                <a:solidFill>
-                  <a:schemeClr val="tx1"/>
-                </a:solidFill>
-                <a:latin typeface="Arial"/>
-              </a:defRPr>
-            </a:lvl6pPr>
-            <a:lvl7pPr marL="2971800" indent="-228600" defTabSz="4703763" eaLnBrk="0" fontAlgn="base" hangingPunct="0">
-              <a:spcBef>
-                <a:spcPct val="0"/>
-              </a:spcBef>
-              <a:spcAft>
-                <a:spcPct val="0"/>
-              </a:spcAft>
-              <a:defRPr sz="9300">
-                <a:solidFill>
-                  <a:schemeClr val="tx1"/>
-                </a:solidFill>
-                <a:latin typeface="Arial"/>
-              </a:defRPr>
-            </a:lvl7pPr>
-            <a:lvl8pPr marL="3429000" indent="-228600" defTabSz="4703763" eaLnBrk="0" fontAlgn="base" hangingPunct="0">
-              <a:spcBef>
-                <a:spcPct val="0"/>
-              </a:spcBef>
-              <a:spcAft>
-                <a:spcPct val="0"/>
-              </a:spcAft>
-              <a:defRPr sz="9300">
-                <a:solidFill>
-                  <a:schemeClr val="tx1"/>
-                </a:solidFill>
-                <a:latin typeface="Arial"/>
-              </a:defRPr>
-            </a:lvl8pPr>
-            <a:lvl9pPr marL="3886200" indent="-228600" defTabSz="4703763" eaLnBrk="0" fontAlgn="base" hangingPunct="0">
-              <a:spcBef>
-                <a:spcPct val="0"/>
-              </a:spcBef>
-              <a:spcAft>
-                <a:spcPct val="0"/>
-              </a:spcAft>
-              <a:defRPr sz="9300">
-                <a:solidFill>
-                  <a:schemeClr val="tx1"/>
-                </a:solidFill>
-                <a:latin typeface="Arial"/>
-              </a:defRPr>
-            </a:lvl9pPr>
-          </a:lstStyle>
-          <a:p>
-            <a:pPr algn="ctr"/>
-            <a:r>
-              <a:rPr lang="en-US" sz="2800" dirty="0">
-                <a:latin typeface="Titillium Web" panose="00000500000000000000" pitchFamily="2" charset="0"/>
-                <a:ea typeface="Open Sans" panose="020B0606030504020204" pitchFamily="34" charset="0"/>
-                <a:cs typeface="Open Sans" panose="020B0606030504020204" pitchFamily="34" charset="0"/>
-              </a:rPr>
-              <a:t>Data Collection</a:t>
-            </a:r>
-          </a:p>
-          <a:p>
-            <a:pPr algn="just"/>
-            <a:r>
-              <a:rPr lang="en-US" sz="2800" dirty="0">
-                <a:latin typeface="Titillium Web" panose="00000500000000000000" pitchFamily="2" charset="0"/>
-                <a:ea typeface="Open Sans" panose="020B0606030504020204" pitchFamily="34" charset="0"/>
-                <a:cs typeface="Open Sans" panose="020B0606030504020204" pitchFamily="34" charset="0"/>
-              </a:rPr>
-              <a:t>Cornell Newsroom articles were screened for solar energy content using domain-specific keywords. Candidate keywords were identified by extracting frequent bigrams containing solar from article summaries and supplementing them with additional terms from the solar energy literature (e.g., “photovoltaic cell”). Articles containing at least one keyword were scraped for full-text analysis.</a:t>
-            </a:r>
-          </a:p>
-        </p:txBody>
-      </p:sp>
-      <p:sp>
-        <p:nvSpPr>
-          <p:cNvPr id="38" name="Rectangle 5">
-            <a:extLst>
-              <a:ext uri="{FF2B5EF4-FFF2-40B4-BE49-F238E27FC236}">
-                <a16:creationId xmlns:a16="http://schemas.microsoft.com/office/drawing/2014/main" id="{991B9DF0-7DD4-4C17-94B6-6C493D1C390D}"/>
-              </a:ext>
-            </a:extLst>
-          </p:cNvPr>
-          <p:cNvSpPr>
-            <a:spLocks noChangeArrowheads="1"/>
-          </p:cNvSpPr>
-          <p:nvPr/>
-        </p:nvSpPr>
-        <p:spPr bwMode="auto">
-          <a:xfrm>
-            <a:off x="22311361" y="7125252"/>
-            <a:ext cx="10058400" cy="784225"/>
-          </a:xfrm>
-          <a:prstGeom prst="rect">
-            <a:avLst/>
-          </a:prstGeom>
-          <a:solidFill>
-            <a:srgbClr val="1482A5"/>
-          </a:solidFill>
-          <a:ln>
-            <a:noFill/>
-          </a:ln>
-          <a:effectLst/>
-        </p:spPr>
-        <p:txBody>
-          <a:bodyPr wrap="none" lIns="274320" tIns="68580" rIns="274320" bIns="68580" anchor="ctr"/>
-          <a:lstStyle>
-            <a:defPPr>
-              <a:defRPr kern="1200"/>
-            </a:defPPr>
-          </a:lstStyle>
-          <a:p>
-            <a:pPr defTabSz="4703763"/>
-            <a:r>
-              <a:rPr lang="en-US" sz="3600">
-                <a:solidFill>
-                  <a:schemeClr val="bg1"/>
-                </a:solidFill>
-                <a:latin typeface="Amaranth" panose="02000503050000020004" pitchFamily="2" charset="0"/>
-              </a:rPr>
-              <a:t>Results</a:t>
-            </a:r>
-          </a:p>
-        </p:txBody>
-      </p:sp>
-      <p:sp>
-        <p:nvSpPr>
-          <p:cNvPr id="39" name="Text Box 6">
-            <a:extLst>
-              <a:ext uri="{FF2B5EF4-FFF2-40B4-BE49-F238E27FC236}">
-                <a16:creationId xmlns:a16="http://schemas.microsoft.com/office/drawing/2014/main" id="{62D65E41-7BC1-4B4D-9C1B-6ED3152D12D0}"/>
-              </a:ext>
-            </a:extLst>
-          </p:cNvPr>
-          <p:cNvSpPr txBox="1">
-            <a:spLocks noChangeArrowheads="1"/>
-          </p:cNvSpPr>
-          <p:nvPr/>
-        </p:nvSpPr>
-        <p:spPr bwMode="auto">
-          <a:xfrm>
-            <a:off x="22318683" y="8154671"/>
-            <a:ext cx="10058400" cy="5293757"/>
-          </a:xfrm>
-          <a:prstGeom prst="rect">
-            <a:avLst/>
-          </a:prstGeom>
-          <a:solidFill>
-            <a:srgbClr val="B4D3E2"/>
-          </a:solidFill>
-          <a:ln>
-            <a:noFill/>
-          </a:ln>
-          <a:effectLst>
-            <a:softEdge rad="0"/>
-          </a:effectLst>
-        </p:spPr>
-        <p:txBody>
-          <a:bodyPr lIns="274320" tIns="274320" rIns="274320" bIns="274320">
-            <a:spAutoFit/>
-          </a:bodyPr>
-          <a:lstStyle>
-            <a:defPPr>
-              <a:defRPr lang="en-US" kern="1200"/>
-            </a:defPPr>
-            <a:lvl1pPr defTabSz="4703763" eaLnBrk="0" hangingPunct="0">
-              <a:defRPr sz="2400">
-                <a:latin typeface="Titillium Web" panose="00000500000000000000" pitchFamily="2" charset="0"/>
-                <a:ea typeface="Open Sans" panose="020B0606030504020204" pitchFamily="34" charset="0"/>
-                <a:cs typeface="Open Sans" panose="020B0606030504020204" pitchFamily="34" charset="0"/>
-              </a:defRPr>
-            </a:lvl1pPr>
-            <a:lvl2pPr marL="742950" indent="-285750" defTabSz="4703763" eaLnBrk="0" hangingPunct="0"/>
-            <a:lvl3pPr marL="1143000" indent="-228600" defTabSz="4703763" eaLnBrk="0" hangingPunct="0"/>
-            <a:lvl4pPr marL="1600200" indent="-228600" defTabSz="4703763" eaLnBrk="0" hangingPunct="0"/>
-            <a:lvl5pPr marL="2057400" indent="-228600" defTabSz="4703763" eaLnBrk="0" hangingPunct="0"/>
-            <a:lvl6pPr marL="2514600" indent="-228600" defTabSz="4703763" eaLnBrk="0" fontAlgn="base" hangingPunct="0">
-              <a:spcBef>
-                <a:spcPct val="0"/>
-              </a:spcBef>
-              <a:spcAft>
-                <a:spcPct val="0"/>
-              </a:spcAft>
-            </a:lvl6pPr>
-            <a:lvl7pPr marL="2971800" indent="-228600" defTabSz="4703763" eaLnBrk="0" fontAlgn="base" hangingPunct="0">
-              <a:spcBef>
-                <a:spcPct val="0"/>
-              </a:spcBef>
-              <a:spcAft>
-                <a:spcPct val="0"/>
-              </a:spcAft>
-            </a:lvl7pPr>
-            <a:lvl8pPr marL="3429000" indent="-228600" defTabSz="4703763" eaLnBrk="0" fontAlgn="base" hangingPunct="0">
-              <a:spcBef>
-                <a:spcPct val="0"/>
-              </a:spcBef>
-              <a:spcAft>
-                <a:spcPct val="0"/>
-              </a:spcAft>
-            </a:lvl8pPr>
-            <a:lvl9pPr marL="3886200" indent="-228600" defTabSz="4703763" eaLnBrk="0" fontAlgn="base" hangingPunct="0">
-              <a:spcBef>
-                <a:spcPct val="0"/>
-              </a:spcBef>
-              <a:spcAft>
-                <a:spcPct val="0"/>
-              </a:spcAft>
-            </a:lvl9pPr>
-          </a:lstStyle>
-          <a:p>
-            <a:pPr marL="342900" indent="-342900" algn="just">
-              <a:buFont typeface="Arial" panose="020B0604020202020204" pitchFamily="34" charset="0"/>
-              <a:buChar char="•"/>
-            </a:pPr>
-            <a:r>
-              <a:rPr lang="en-US" sz="2800" dirty="0"/>
-              <a:t>The filtering pipeline reduced the original dataset from 5,374 to 1,985 highly relevant solar energy articles, improving extraction quality while reducing computational cost.</a:t>
-            </a:r>
-          </a:p>
-          <a:p>
-            <a:pPr marL="342900" indent="-342900" algn="just">
-              <a:buFont typeface="Arial" panose="020B0604020202020204" pitchFamily="34" charset="0"/>
-              <a:buChar char="•"/>
-            </a:pPr>
-            <a:r>
-              <a:rPr lang="en-US" sz="2800" dirty="0"/>
-              <a:t>GPT-4o successfully transformed unstructured news articles into a structured knowledge graph containing entities and their relationships across technologies, organizations, policies, countries, and research initiatives.</a:t>
-            </a:r>
-          </a:p>
-          <a:p>
-            <a:pPr marL="342900" indent="-342900" algn="just">
-              <a:buFont typeface="Arial" panose="020B0604020202020204" pitchFamily="34" charset="0"/>
-              <a:buChar char="•"/>
-            </a:pPr>
-            <a:r>
-              <a:rPr lang="en-US" sz="2800" dirty="0"/>
-              <a:t>CNM revealed that clusters formed primarily around geographic regions and areas of focus, including technology development, policy, manufacturing, and international collaborations.</a:t>
-            </a:r>
-          </a:p>
-        </p:txBody>
-      </p:sp>
-      <p:sp>
-        <p:nvSpPr>
           <p:cNvPr id="42" name="Rectangle 5">
             <a:extLst>
               <a:ext uri="{FF2B5EF4-FFF2-40B4-BE49-F238E27FC236}">
@@ -4652,7 +4625,7 @@
                 </a:solidFill>
                 <a:latin typeface="Amaranth" panose="02000503050000020004" pitchFamily="2" charset="0"/>
               </a:rPr>
-              <a:t>Future Work</a:t>
+              <a:t>Limitations</a:t>
             </a:r>
           </a:p>
         </p:txBody>
@@ -4673,8 +4646,8 @@
         </p:nvSpPr>
         <p:spPr bwMode="auto">
           <a:xfrm>
-            <a:off x="33093960" y="25329663"/>
-            <a:ext cx="10058400" cy="784225"/>
+            <a:off x="33093959" y="26135146"/>
+            <a:ext cx="10102333" cy="784225"/>
           </a:xfrm>
           <a:prstGeom prst="rect">
             <a:avLst/>
@@ -4773,8 +4746,8 @@
         </p:nvSpPr>
         <p:spPr>
           <a:xfrm>
-            <a:off x="33086641" y="26325113"/>
-            <a:ext cx="9857035" cy="3139321"/>
+            <a:off x="33086641" y="27130596"/>
+            <a:ext cx="10073038" cy="2708434"/>
           </a:xfrm>
           <a:prstGeom prst="rect">
             <a:avLst/>
@@ -4790,7 +4763,7 @@
           </a:effectLst>
         </p:spPr>
         <p:txBody>
-          <a:bodyPr lIns="274320" tIns="274320" rIns="274320" bIns="274320">
+          <a:bodyPr wrap="square" lIns="274320" tIns="274320" rIns="274320" bIns="274320">
             <a:spAutoFit/>
           </a:bodyPr>
           <a:lstStyle>
@@ -4849,7 +4822,7 @@
             </a:pPr>
             <a:r>
               <a:rPr lang="en-US" dirty="0"/>
-              <a:t>Special thanks to Prof. Chris Dunham for his guidance and support throughout this project. We also thank the Cornell Newsroom project for providing access to the underlying dataset. This work was conducted as part of the Syracuse University REU in Text Analytics for Social Scientists, funded by the NSF ASSURE program.</a:t>
+              <a:t>Special thanks to Prof. Chris Dunham for his guidance and support throughout this project, and to the Cornell Newsroom project for providing access to the underlying dataset. This work was conducted as part of the Syracuse University REU in Text Analytics for Social Scientists, funded by NSF ASSURE.</a:t>
             </a:r>
           </a:p>
         </p:txBody>
@@ -4870,7 +4843,7 @@
         </p:nvSpPr>
         <p:spPr bwMode="auto">
           <a:xfrm>
-            <a:off x="33165657" y="19698929"/>
+            <a:off x="33115927" y="16180146"/>
             <a:ext cx="10058400" cy="784225"/>
           </a:xfrm>
           <a:prstGeom prst="rect">
@@ -4900,92 +4873,7 @@
                 </a:solidFill>
                 <a:latin typeface="Amaranth" panose="02000503050000020004" pitchFamily="2" charset="0"/>
               </a:rPr>
-              <a:t>Resources and Contact Information</a:t>
-            </a:r>
-          </a:p>
-        </p:txBody>
-      </p:sp>
-      <p:sp>
-        <p:nvSpPr>
-          <p:cNvPr id="13" name="Rectangle 12">
-            <a:extLst>
-              <a:ext uri="{FF2B5EF4-FFF2-40B4-BE49-F238E27FC236}">
-                <a16:creationId xmlns:a16="http://schemas.microsoft.com/office/drawing/2014/main" id="{E9835FDE-A306-B85D-791B-8C956ADB42BB}"/>
-              </a:ext>
-            </a:extLst>
-          </p:cNvPr>
-          <p:cNvSpPr/>
-          <p:nvPr/>
-        </p:nvSpPr>
-        <p:spPr bwMode="auto">
-          <a:xfrm>
-            <a:off x="34819769" y="21805719"/>
-            <a:ext cx="6750176" cy="1977180"/>
-          </a:xfrm>
-          <a:prstGeom prst="rect">
-            <a:avLst/>
-          </a:prstGeom>
-          <a:solidFill>
-            <a:schemeClr val="accent1"/>
-          </a:solidFill>
-          <a:ln w="9525" cap="flat" cmpd="sng" algn="ctr">
-            <a:solidFill>
-              <a:schemeClr val="tx1"/>
-            </a:solidFill>
-            <a:prstDash val="solid"/>
-            <a:round/>
-            <a:headEnd type="none" w="med" len="med"/>
-            <a:tailEnd type="none" w="med" len="med"/>
-          </a:ln>
-          <a:effectLst/>
-          <a:extLst>
-            <a:ext uri="{AF507438-7753-43E0-B8FC-AC1667EBCBE1}">
-              <a14:hiddenEffects xmlns:a14="http://schemas.microsoft.com/office/drawing/2010/main">
-                <a:effectLst>
-                  <a:outerShdw dist="35921" dir="2700000" algn="ctr" rotWithShape="0">
-                    <a:schemeClr val="bg2"/>
-                  </a:outerShdw>
-                </a:effectLst>
-              </a14:hiddenEffects>
-            </a:ext>
-          </a:extLst>
-        </p:spPr>
-        <p:txBody>
-          <a:bodyPr vert="horz" wrap="square" lIns="91440" tIns="45720" rIns="91440" bIns="45720" numCol="1" rtlCol="0" anchor="t" anchorCtr="0" compatLnSpc="1">
-            <a:prstTxWarp prst="textNoShape">
-              <a:avLst/>
-            </a:prstTxWarp>
-          </a:bodyPr>
-          <a:lstStyle/>
-          <a:p>
-            <a:pPr marL="0" marR="0" indent="0" algn="l" defTabSz="4702175" rtl="0" eaLnBrk="1" fontAlgn="base" latinLnBrk="0" hangingPunct="1">
-              <a:lnSpc>
-                <a:spcPct val="100000"/>
-              </a:lnSpc>
-              <a:spcBef>
-                <a:spcPct val="0"/>
-              </a:spcBef>
-              <a:spcAft>
-                <a:spcPct val="0"/>
-              </a:spcAft>
-              <a:buClrTx/>
-              <a:buSzTx/>
-              <a:buFontTx/>
-              <a:buNone/>
-              <a:tabLst/>
-            </a:pPr>
-            <a:r>
-              <a:rPr kumimoji="0" lang="en-US" sz="9300" b="0" i="0" u="none" strike="noStrike" cap="none" normalizeH="0" baseline="0" dirty="0">
-                <a:ln>
-                  <a:noFill/>
-                </a:ln>
-                <a:solidFill>
-                  <a:schemeClr val="tx1"/>
-                </a:solidFill>
-                <a:effectLst/>
-                <a:latin typeface="Arial" pitchFamily="34" charset="0"/>
-              </a:rPr>
-              <a:t>QR CODES</a:t>
+              <a:t>References</a:t>
             </a:r>
           </a:p>
         </p:txBody>
@@ -5085,682 +4973,6 @@
       </p:pic>
       <p:sp>
         <p:nvSpPr>
-          <p:cNvPr id="235" name="Text Box 6">
-            <a:extLst>
-              <a:ext uri="{FF2B5EF4-FFF2-40B4-BE49-F238E27FC236}">
-                <a16:creationId xmlns:a16="http://schemas.microsoft.com/office/drawing/2014/main" id="{DC771754-0602-7C35-AAA2-C4CF5FF723D5}"/>
-              </a:ext>
-            </a:extLst>
-          </p:cNvPr>
-          <p:cNvSpPr txBox="1">
-            <a:spLocks noChangeArrowheads="1"/>
-          </p:cNvSpPr>
-          <p:nvPr/>
-        </p:nvSpPr>
-        <p:spPr bwMode="auto">
-          <a:xfrm>
-            <a:off x="702227" y="27084261"/>
-            <a:ext cx="10058400" cy="4001095"/>
-          </a:xfrm>
-          <a:prstGeom prst="rect">
-            <a:avLst/>
-          </a:prstGeom>
-          <a:solidFill>
-            <a:srgbClr val="B4D3E2"/>
-          </a:solidFill>
-          <a:ln>
-            <a:noFill/>
-          </a:ln>
-          <a:effectLst>
-            <a:softEdge rad="0"/>
-          </a:effectLst>
-        </p:spPr>
-        <p:txBody>
-          <a:bodyPr lIns="274320" tIns="274320" rIns="274320" bIns="274320">
-            <a:spAutoFit/>
-          </a:bodyPr>
-          <a:lstStyle>
-            <a:defPPr>
-              <a:defRPr kern="1200"/>
-            </a:defPPr>
-            <a:lvl1pPr defTabSz="4703763" eaLnBrk="0" hangingPunct="0">
-              <a:defRPr sz="9300">
-                <a:solidFill>
-                  <a:schemeClr val="tx1"/>
-                </a:solidFill>
-                <a:latin typeface="Arial"/>
-              </a:defRPr>
-            </a:lvl1pPr>
-            <a:lvl2pPr marL="742950" indent="-285750" defTabSz="4703763" eaLnBrk="0" hangingPunct="0">
-              <a:defRPr sz="9300">
-                <a:solidFill>
-                  <a:schemeClr val="tx1"/>
-                </a:solidFill>
-                <a:latin typeface="Arial"/>
-              </a:defRPr>
-            </a:lvl2pPr>
-            <a:lvl3pPr marL="1143000" indent="-228600" defTabSz="4703763" eaLnBrk="0" hangingPunct="0">
-              <a:defRPr sz="9300">
-                <a:solidFill>
-                  <a:schemeClr val="tx1"/>
-                </a:solidFill>
-                <a:latin typeface="Arial"/>
-              </a:defRPr>
-            </a:lvl3pPr>
-            <a:lvl4pPr marL="1600200" indent="-228600" defTabSz="4703763" eaLnBrk="0" hangingPunct="0">
-              <a:defRPr sz="9300">
-                <a:solidFill>
-                  <a:schemeClr val="tx1"/>
-                </a:solidFill>
-                <a:latin typeface="Arial"/>
-              </a:defRPr>
-            </a:lvl4pPr>
-            <a:lvl5pPr marL="2057400" indent="-228600" defTabSz="4703763" eaLnBrk="0" hangingPunct="0">
-              <a:defRPr sz="9300">
-                <a:solidFill>
-                  <a:schemeClr val="tx1"/>
-                </a:solidFill>
-                <a:latin typeface="Arial"/>
-              </a:defRPr>
-            </a:lvl5pPr>
-            <a:lvl6pPr marL="2514600" indent="-228600" defTabSz="4703763" eaLnBrk="0" fontAlgn="base" hangingPunct="0">
-              <a:spcBef>
-                <a:spcPct val="0"/>
-              </a:spcBef>
-              <a:spcAft>
-                <a:spcPct val="0"/>
-              </a:spcAft>
-              <a:defRPr sz="9300">
-                <a:solidFill>
-                  <a:schemeClr val="tx1"/>
-                </a:solidFill>
-                <a:latin typeface="Arial"/>
-              </a:defRPr>
-            </a:lvl6pPr>
-            <a:lvl7pPr marL="2971800" indent="-228600" defTabSz="4703763" eaLnBrk="0" fontAlgn="base" hangingPunct="0">
-              <a:spcBef>
-                <a:spcPct val="0"/>
-              </a:spcBef>
-              <a:spcAft>
-                <a:spcPct val="0"/>
-              </a:spcAft>
-              <a:defRPr sz="9300">
-                <a:solidFill>
-                  <a:schemeClr val="tx1"/>
-                </a:solidFill>
-                <a:latin typeface="Arial"/>
-              </a:defRPr>
-            </a:lvl7pPr>
-            <a:lvl8pPr marL="3429000" indent="-228600" defTabSz="4703763" eaLnBrk="0" fontAlgn="base" hangingPunct="0">
-              <a:spcBef>
-                <a:spcPct val="0"/>
-              </a:spcBef>
-              <a:spcAft>
-                <a:spcPct val="0"/>
-              </a:spcAft>
-              <a:defRPr sz="9300">
-                <a:solidFill>
-                  <a:schemeClr val="tx1"/>
-                </a:solidFill>
-                <a:latin typeface="Arial"/>
-              </a:defRPr>
-            </a:lvl8pPr>
-            <a:lvl9pPr marL="3886200" indent="-228600" defTabSz="4703763" eaLnBrk="0" fontAlgn="base" hangingPunct="0">
-              <a:spcBef>
-                <a:spcPct val="0"/>
-              </a:spcBef>
-              <a:spcAft>
-                <a:spcPct val="0"/>
-              </a:spcAft>
-              <a:defRPr sz="9300">
-                <a:solidFill>
-                  <a:schemeClr val="tx1"/>
-                </a:solidFill>
-                <a:latin typeface="Arial"/>
-              </a:defRPr>
-            </a:lvl9pPr>
-          </a:lstStyle>
-          <a:p>
-            <a:pPr algn="ctr"/>
-            <a:r>
-              <a:rPr lang="en-US" sz="2800" dirty="0">
-                <a:latin typeface="Titillium Web" panose="00000500000000000000" pitchFamily="2" charset="0"/>
-                <a:ea typeface="Open Sans" panose="020B0606030504020204" pitchFamily="34" charset="0"/>
-                <a:cs typeface="Open Sans" panose="020B0606030504020204" pitchFamily="34" charset="0"/>
-              </a:rPr>
-              <a:t>Dataset Filtering</a:t>
-            </a:r>
-          </a:p>
-          <a:p>
-            <a:pPr algn="just"/>
-            <a:r>
-              <a:rPr lang="en-US" sz="2800" dirty="0">
-                <a:latin typeface="Titillium Web" panose="00000500000000000000" pitchFamily="2" charset="0"/>
-                <a:ea typeface="Open Sans" panose="020B0606030504020204" pitchFamily="34" charset="0"/>
-                <a:cs typeface="Open Sans" panose="020B0606030504020204" pitchFamily="34" charset="0"/>
-              </a:rPr>
-              <a:t>Each article was tokenized using </a:t>
-            </a:r>
-            <a:r>
-              <a:rPr lang="en-US" sz="2800" dirty="0" err="1">
-                <a:latin typeface="Titillium Web" panose="00000500000000000000" pitchFamily="2" charset="0"/>
-                <a:ea typeface="Open Sans" panose="020B0606030504020204" pitchFamily="34" charset="0"/>
-                <a:cs typeface="Open Sans" panose="020B0606030504020204" pitchFamily="34" charset="0"/>
-              </a:rPr>
-              <a:t>tiktoken</a:t>
-            </a:r>
-            <a:r>
-              <a:rPr lang="en-US" sz="2800" dirty="0">
-                <a:latin typeface="Titillium Web" panose="00000500000000000000" pitchFamily="2" charset="0"/>
-                <a:ea typeface="Open Sans" panose="020B0606030504020204" pitchFamily="34" charset="0"/>
-                <a:cs typeface="Open Sans" panose="020B0606030504020204" pitchFamily="34" charset="0"/>
-              </a:rPr>
-              <a:t> and processed with GPT-4o. During development, the extraction pipeline was tested on a subset of articles before applying additional filtering criteria. Articles containing fewer than two solar-related keyword mentions or only brief references to solar energy were excluded, reducing the dataset from 5,374 to 1,985 articles while substantially lowering inference cost.</a:t>
-            </a:r>
-          </a:p>
-        </p:txBody>
-      </p:sp>
-      <p:sp>
-        <p:nvSpPr>
-          <p:cNvPr id="237" name="Text Box 6">
-            <a:extLst>
-              <a:ext uri="{FF2B5EF4-FFF2-40B4-BE49-F238E27FC236}">
-                <a16:creationId xmlns:a16="http://schemas.microsoft.com/office/drawing/2014/main" id="{F8EAF608-3616-200D-13DA-E3D715DE2FCA}"/>
-              </a:ext>
-            </a:extLst>
-          </p:cNvPr>
-          <p:cNvSpPr txBox="1">
-            <a:spLocks noChangeArrowheads="1"/>
-          </p:cNvSpPr>
-          <p:nvPr/>
-        </p:nvSpPr>
-        <p:spPr bwMode="auto">
-          <a:xfrm>
-            <a:off x="11506794" y="12026173"/>
-            <a:ext cx="10058400" cy="3570208"/>
-          </a:xfrm>
-          <a:prstGeom prst="rect">
-            <a:avLst/>
-          </a:prstGeom>
-          <a:solidFill>
-            <a:srgbClr val="B4D3E2"/>
-          </a:solidFill>
-          <a:ln>
-            <a:noFill/>
-          </a:ln>
-          <a:effectLst>
-            <a:softEdge rad="0"/>
-          </a:effectLst>
-        </p:spPr>
-        <p:txBody>
-          <a:bodyPr lIns="274320" tIns="274320" rIns="274320" bIns="274320">
-            <a:spAutoFit/>
-          </a:bodyPr>
-          <a:lstStyle>
-            <a:defPPr>
-              <a:defRPr kern="1200"/>
-            </a:defPPr>
-            <a:lvl1pPr defTabSz="4703763" eaLnBrk="0" hangingPunct="0">
-              <a:defRPr sz="9300">
-                <a:solidFill>
-                  <a:schemeClr val="tx1"/>
-                </a:solidFill>
-                <a:latin typeface="Arial"/>
-              </a:defRPr>
-            </a:lvl1pPr>
-            <a:lvl2pPr marL="742950" indent="-285750" defTabSz="4703763" eaLnBrk="0" hangingPunct="0">
-              <a:defRPr sz="9300">
-                <a:solidFill>
-                  <a:schemeClr val="tx1"/>
-                </a:solidFill>
-                <a:latin typeface="Arial"/>
-              </a:defRPr>
-            </a:lvl2pPr>
-            <a:lvl3pPr marL="1143000" indent="-228600" defTabSz="4703763" eaLnBrk="0" hangingPunct="0">
-              <a:defRPr sz="9300">
-                <a:solidFill>
-                  <a:schemeClr val="tx1"/>
-                </a:solidFill>
-                <a:latin typeface="Arial"/>
-              </a:defRPr>
-            </a:lvl3pPr>
-            <a:lvl4pPr marL="1600200" indent="-228600" defTabSz="4703763" eaLnBrk="0" hangingPunct="0">
-              <a:defRPr sz="9300">
-                <a:solidFill>
-                  <a:schemeClr val="tx1"/>
-                </a:solidFill>
-                <a:latin typeface="Arial"/>
-              </a:defRPr>
-            </a:lvl4pPr>
-            <a:lvl5pPr marL="2057400" indent="-228600" defTabSz="4703763" eaLnBrk="0" hangingPunct="0">
-              <a:defRPr sz="9300">
-                <a:solidFill>
-                  <a:schemeClr val="tx1"/>
-                </a:solidFill>
-                <a:latin typeface="Arial"/>
-              </a:defRPr>
-            </a:lvl5pPr>
-            <a:lvl6pPr marL="2514600" indent="-228600" defTabSz="4703763" eaLnBrk="0" fontAlgn="base" hangingPunct="0">
-              <a:spcBef>
-                <a:spcPct val="0"/>
-              </a:spcBef>
-              <a:spcAft>
-                <a:spcPct val="0"/>
-              </a:spcAft>
-              <a:defRPr sz="9300">
-                <a:solidFill>
-                  <a:schemeClr val="tx1"/>
-                </a:solidFill>
-                <a:latin typeface="Arial"/>
-              </a:defRPr>
-            </a:lvl6pPr>
-            <a:lvl7pPr marL="2971800" indent="-228600" defTabSz="4703763" eaLnBrk="0" fontAlgn="base" hangingPunct="0">
-              <a:spcBef>
-                <a:spcPct val="0"/>
-              </a:spcBef>
-              <a:spcAft>
-                <a:spcPct val="0"/>
-              </a:spcAft>
-              <a:defRPr sz="9300">
-                <a:solidFill>
-                  <a:schemeClr val="tx1"/>
-                </a:solidFill>
-                <a:latin typeface="Arial"/>
-              </a:defRPr>
-            </a:lvl7pPr>
-            <a:lvl8pPr marL="3429000" indent="-228600" defTabSz="4703763" eaLnBrk="0" fontAlgn="base" hangingPunct="0">
-              <a:spcBef>
-                <a:spcPct val="0"/>
-              </a:spcBef>
-              <a:spcAft>
-                <a:spcPct val="0"/>
-              </a:spcAft>
-              <a:defRPr sz="9300">
-                <a:solidFill>
-                  <a:schemeClr val="tx1"/>
-                </a:solidFill>
-                <a:latin typeface="Arial"/>
-              </a:defRPr>
-            </a:lvl8pPr>
-            <a:lvl9pPr marL="3886200" indent="-228600" defTabSz="4703763" eaLnBrk="0" fontAlgn="base" hangingPunct="0">
-              <a:spcBef>
-                <a:spcPct val="0"/>
-              </a:spcBef>
-              <a:spcAft>
-                <a:spcPct val="0"/>
-              </a:spcAft>
-              <a:defRPr sz="9300">
-                <a:solidFill>
-                  <a:schemeClr val="tx1"/>
-                </a:solidFill>
-                <a:latin typeface="Arial"/>
-              </a:defRPr>
-            </a:lvl9pPr>
-          </a:lstStyle>
-          <a:p>
-            <a:pPr algn="ctr"/>
-            <a:r>
-              <a:rPr lang="en-US" sz="2800" dirty="0">
-                <a:latin typeface="Titillium Web" panose="00000500000000000000" pitchFamily="2" charset="0"/>
-                <a:ea typeface="Open Sans" panose="020B0606030504020204" pitchFamily="34" charset="0"/>
-                <a:cs typeface="Open Sans" panose="020B0606030504020204" pitchFamily="34" charset="0"/>
-              </a:rPr>
-              <a:t>Knowledge Graph Construction</a:t>
-            </a:r>
-          </a:p>
-          <a:p>
-            <a:pPr algn="just"/>
-            <a:r>
-              <a:rPr lang="en-US" sz="2800" dirty="0">
-                <a:latin typeface="Titillium Web" panose="00000500000000000000" pitchFamily="2" charset="0"/>
-                <a:ea typeface="Open Sans" panose="020B0606030504020204" pitchFamily="34" charset="0"/>
-                <a:cs typeface="Open Sans" panose="020B0606030504020204" pitchFamily="34" charset="0"/>
-              </a:rPr>
-              <a:t>The extracted JSON outputs were converted into node and edge tables to construct a knowledge graph. To improve graph quality, nodes with fewer than two connections were removed, semantically similar entities were merged using fuzzy matching and transformer-based similarity, node size was scaled by degree, and colors were assigned by entity type.</a:t>
-            </a:r>
-          </a:p>
-        </p:txBody>
-      </p:sp>
-      <p:sp>
-        <p:nvSpPr>
-          <p:cNvPr id="239" name="Text Box 6">
-            <a:extLst>
-              <a:ext uri="{FF2B5EF4-FFF2-40B4-BE49-F238E27FC236}">
-                <a16:creationId xmlns:a16="http://schemas.microsoft.com/office/drawing/2014/main" id="{5DAD8F8A-EF61-4280-03BC-FDEB19449874}"/>
-              </a:ext>
-            </a:extLst>
-          </p:cNvPr>
-          <p:cNvSpPr txBox="1">
-            <a:spLocks noChangeArrowheads="1"/>
-          </p:cNvSpPr>
-          <p:nvPr/>
-        </p:nvSpPr>
-        <p:spPr bwMode="auto">
-          <a:xfrm>
-            <a:off x="11525101" y="8154671"/>
-            <a:ext cx="10058400" cy="3570208"/>
-          </a:xfrm>
-          <a:prstGeom prst="rect">
-            <a:avLst/>
-          </a:prstGeom>
-          <a:solidFill>
-            <a:srgbClr val="B4D3E2"/>
-          </a:solidFill>
-          <a:ln>
-            <a:noFill/>
-          </a:ln>
-          <a:effectLst>
-            <a:softEdge rad="0"/>
-          </a:effectLst>
-        </p:spPr>
-        <p:txBody>
-          <a:bodyPr lIns="274320" tIns="274320" rIns="274320" bIns="274320">
-            <a:spAutoFit/>
-          </a:bodyPr>
-          <a:lstStyle>
-            <a:defPPr>
-              <a:defRPr kern="1200"/>
-            </a:defPPr>
-            <a:lvl1pPr defTabSz="4703763" eaLnBrk="0" hangingPunct="0">
-              <a:defRPr sz="9300">
-                <a:solidFill>
-                  <a:schemeClr val="tx1"/>
-                </a:solidFill>
-                <a:latin typeface="Arial"/>
-              </a:defRPr>
-            </a:lvl1pPr>
-            <a:lvl2pPr marL="742950" indent="-285750" defTabSz="4703763" eaLnBrk="0" hangingPunct="0">
-              <a:defRPr sz="9300">
-                <a:solidFill>
-                  <a:schemeClr val="tx1"/>
-                </a:solidFill>
-                <a:latin typeface="Arial"/>
-              </a:defRPr>
-            </a:lvl2pPr>
-            <a:lvl3pPr marL="1143000" indent="-228600" defTabSz="4703763" eaLnBrk="0" hangingPunct="0">
-              <a:defRPr sz="9300">
-                <a:solidFill>
-                  <a:schemeClr val="tx1"/>
-                </a:solidFill>
-                <a:latin typeface="Arial"/>
-              </a:defRPr>
-            </a:lvl3pPr>
-            <a:lvl4pPr marL="1600200" indent="-228600" defTabSz="4703763" eaLnBrk="0" hangingPunct="0">
-              <a:defRPr sz="9300">
-                <a:solidFill>
-                  <a:schemeClr val="tx1"/>
-                </a:solidFill>
-                <a:latin typeface="Arial"/>
-              </a:defRPr>
-            </a:lvl4pPr>
-            <a:lvl5pPr marL="2057400" indent="-228600" defTabSz="4703763" eaLnBrk="0" hangingPunct="0">
-              <a:defRPr sz="9300">
-                <a:solidFill>
-                  <a:schemeClr val="tx1"/>
-                </a:solidFill>
-                <a:latin typeface="Arial"/>
-              </a:defRPr>
-            </a:lvl5pPr>
-            <a:lvl6pPr marL="2514600" indent="-228600" defTabSz="4703763" eaLnBrk="0" fontAlgn="base" hangingPunct="0">
-              <a:spcBef>
-                <a:spcPct val="0"/>
-              </a:spcBef>
-              <a:spcAft>
-                <a:spcPct val="0"/>
-              </a:spcAft>
-              <a:defRPr sz="9300">
-                <a:solidFill>
-                  <a:schemeClr val="tx1"/>
-                </a:solidFill>
-                <a:latin typeface="Arial"/>
-              </a:defRPr>
-            </a:lvl6pPr>
-            <a:lvl7pPr marL="2971800" indent="-228600" defTabSz="4703763" eaLnBrk="0" fontAlgn="base" hangingPunct="0">
-              <a:spcBef>
-                <a:spcPct val="0"/>
-              </a:spcBef>
-              <a:spcAft>
-                <a:spcPct val="0"/>
-              </a:spcAft>
-              <a:defRPr sz="9300">
-                <a:solidFill>
-                  <a:schemeClr val="tx1"/>
-                </a:solidFill>
-                <a:latin typeface="Arial"/>
-              </a:defRPr>
-            </a:lvl7pPr>
-            <a:lvl8pPr marL="3429000" indent="-228600" defTabSz="4703763" eaLnBrk="0" fontAlgn="base" hangingPunct="0">
-              <a:spcBef>
-                <a:spcPct val="0"/>
-              </a:spcBef>
-              <a:spcAft>
-                <a:spcPct val="0"/>
-              </a:spcAft>
-              <a:defRPr sz="9300">
-                <a:solidFill>
-                  <a:schemeClr val="tx1"/>
-                </a:solidFill>
-                <a:latin typeface="Arial"/>
-              </a:defRPr>
-            </a:lvl8pPr>
-            <a:lvl9pPr marL="3886200" indent="-228600" defTabSz="4703763" eaLnBrk="0" fontAlgn="base" hangingPunct="0">
-              <a:spcBef>
-                <a:spcPct val="0"/>
-              </a:spcBef>
-              <a:spcAft>
-                <a:spcPct val="0"/>
-              </a:spcAft>
-              <a:defRPr sz="9300">
-                <a:solidFill>
-                  <a:schemeClr val="tx1"/>
-                </a:solidFill>
-                <a:latin typeface="Arial"/>
-              </a:defRPr>
-            </a:lvl9pPr>
-          </a:lstStyle>
-          <a:p>
-            <a:pPr algn="ctr"/>
-            <a:r>
-              <a:rPr lang="en-US" sz="2800" dirty="0">
-                <a:latin typeface="Titillium Web" panose="00000500000000000000" pitchFamily="2" charset="0"/>
-                <a:ea typeface="Open Sans" panose="020B0606030504020204" pitchFamily="34" charset="0"/>
-                <a:cs typeface="Open Sans" panose="020B0606030504020204" pitchFamily="34" charset="0"/>
-              </a:rPr>
-              <a:t>LLM-Based Information Extraction</a:t>
-            </a:r>
-          </a:p>
-          <a:p>
-            <a:pPr algn="just"/>
-            <a:r>
-              <a:rPr lang="en-US" sz="2800" dirty="0">
-                <a:latin typeface="Titillium Web" panose="00000500000000000000" pitchFamily="2" charset="0"/>
-                <a:ea typeface="Open Sans" panose="020B0606030504020204" pitchFamily="34" charset="0"/>
-                <a:cs typeface="Open Sans" panose="020B0606030504020204" pitchFamily="34" charset="0"/>
-              </a:rPr>
-              <a:t>A structured prompting framework consisting of a system prompt, user prompt, and JSON output schema was developed and iteratively optimized to reduce token usage. GPT-4o extracted entities (e.g., organizations, technologies, policies, countries) and semantic relationships while also determining whether each article was meaningfully related to solar energy.</a:t>
-            </a:r>
-          </a:p>
-        </p:txBody>
-      </p:sp>
-      <p:sp>
-        <p:nvSpPr>
-          <p:cNvPr id="241" name="Text Box 6">
-            <a:extLst>
-              <a:ext uri="{FF2B5EF4-FFF2-40B4-BE49-F238E27FC236}">
-                <a16:creationId xmlns:a16="http://schemas.microsoft.com/office/drawing/2014/main" id="{7FFDF291-C30B-7440-51D0-7CB74BA6F891}"/>
-              </a:ext>
-            </a:extLst>
-          </p:cNvPr>
-          <p:cNvSpPr txBox="1">
-            <a:spLocks noChangeArrowheads="1"/>
-          </p:cNvSpPr>
-          <p:nvPr/>
-        </p:nvSpPr>
-        <p:spPr bwMode="auto">
-          <a:xfrm>
-            <a:off x="11506794" y="24107540"/>
-            <a:ext cx="10058400" cy="3570208"/>
-          </a:xfrm>
-          <a:prstGeom prst="rect">
-            <a:avLst/>
-          </a:prstGeom>
-          <a:solidFill>
-            <a:srgbClr val="B4D3E2"/>
-          </a:solidFill>
-          <a:ln>
-            <a:noFill/>
-          </a:ln>
-          <a:effectLst>
-            <a:softEdge rad="0"/>
-          </a:effectLst>
-        </p:spPr>
-        <p:txBody>
-          <a:bodyPr lIns="274320" tIns="274320" rIns="274320" bIns="274320">
-            <a:spAutoFit/>
-          </a:bodyPr>
-          <a:lstStyle>
-            <a:defPPr>
-              <a:defRPr kern="1200"/>
-            </a:defPPr>
-            <a:lvl1pPr defTabSz="4703763" eaLnBrk="0" hangingPunct="0">
-              <a:defRPr sz="9300">
-                <a:solidFill>
-                  <a:schemeClr val="tx1"/>
-                </a:solidFill>
-                <a:latin typeface="Arial"/>
-              </a:defRPr>
-            </a:lvl1pPr>
-            <a:lvl2pPr marL="742950" indent="-285750" defTabSz="4703763" eaLnBrk="0" hangingPunct="0">
-              <a:defRPr sz="9300">
-                <a:solidFill>
-                  <a:schemeClr val="tx1"/>
-                </a:solidFill>
-                <a:latin typeface="Arial"/>
-              </a:defRPr>
-            </a:lvl2pPr>
-            <a:lvl3pPr marL="1143000" indent="-228600" defTabSz="4703763" eaLnBrk="0" hangingPunct="0">
-              <a:defRPr sz="9300">
-                <a:solidFill>
-                  <a:schemeClr val="tx1"/>
-                </a:solidFill>
-                <a:latin typeface="Arial"/>
-              </a:defRPr>
-            </a:lvl3pPr>
-            <a:lvl4pPr marL="1600200" indent="-228600" defTabSz="4703763" eaLnBrk="0" hangingPunct="0">
-              <a:defRPr sz="9300">
-                <a:solidFill>
-                  <a:schemeClr val="tx1"/>
-                </a:solidFill>
-                <a:latin typeface="Arial"/>
-              </a:defRPr>
-            </a:lvl4pPr>
-            <a:lvl5pPr marL="2057400" indent="-228600" defTabSz="4703763" eaLnBrk="0" hangingPunct="0">
-              <a:defRPr sz="9300">
-                <a:solidFill>
-                  <a:schemeClr val="tx1"/>
-                </a:solidFill>
-                <a:latin typeface="Arial"/>
-              </a:defRPr>
-            </a:lvl5pPr>
-            <a:lvl6pPr marL="2514600" indent="-228600" defTabSz="4703763" eaLnBrk="0" fontAlgn="base" hangingPunct="0">
-              <a:spcBef>
-                <a:spcPct val="0"/>
-              </a:spcBef>
-              <a:spcAft>
-                <a:spcPct val="0"/>
-              </a:spcAft>
-              <a:defRPr sz="9300">
-                <a:solidFill>
-                  <a:schemeClr val="tx1"/>
-                </a:solidFill>
-                <a:latin typeface="Arial"/>
-              </a:defRPr>
-            </a:lvl6pPr>
-            <a:lvl7pPr marL="2971800" indent="-228600" defTabSz="4703763" eaLnBrk="0" fontAlgn="base" hangingPunct="0">
-              <a:spcBef>
-                <a:spcPct val="0"/>
-              </a:spcBef>
-              <a:spcAft>
-                <a:spcPct val="0"/>
-              </a:spcAft>
-              <a:defRPr sz="9300">
-                <a:solidFill>
-                  <a:schemeClr val="tx1"/>
-                </a:solidFill>
-                <a:latin typeface="Arial"/>
-              </a:defRPr>
-            </a:lvl7pPr>
-            <a:lvl8pPr marL="3429000" indent="-228600" defTabSz="4703763" eaLnBrk="0" fontAlgn="base" hangingPunct="0">
-              <a:spcBef>
-                <a:spcPct val="0"/>
-              </a:spcBef>
-              <a:spcAft>
-                <a:spcPct val="0"/>
-              </a:spcAft>
-              <a:defRPr sz="9300">
-                <a:solidFill>
-                  <a:schemeClr val="tx1"/>
-                </a:solidFill>
-                <a:latin typeface="Arial"/>
-              </a:defRPr>
-            </a:lvl8pPr>
-            <a:lvl9pPr marL="3886200" indent="-228600" defTabSz="4703763" eaLnBrk="0" fontAlgn="base" hangingPunct="0">
-              <a:spcBef>
-                <a:spcPct val="0"/>
-              </a:spcBef>
-              <a:spcAft>
-                <a:spcPct val="0"/>
-              </a:spcAft>
-              <a:defRPr sz="9300">
-                <a:solidFill>
-                  <a:schemeClr val="tx1"/>
-                </a:solidFill>
-                <a:latin typeface="Arial"/>
-              </a:defRPr>
-            </a:lvl9pPr>
-          </a:lstStyle>
-          <a:p>
-            <a:pPr algn="ctr"/>
-            <a:r>
-              <a:rPr lang="en-US" sz="2800" dirty="0">
-                <a:latin typeface="Titillium Web" panose="00000500000000000000" pitchFamily="2" charset="0"/>
-                <a:ea typeface="Open Sans" panose="020B0606030504020204" pitchFamily="34" charset="0"/>
-                <a:cs typeface="Open Sans" panose="020B0606030504020204" pitchFamily="34" charset="0"/>
-              </a:rPr>
-              <a:t>Network Analysis</a:t>
-            </a:r>
-          </a:p>
-          <a:p>
-            <a:pPr algn="just"/>
-            <a:r>
-              <a:rPr lang="en-US" sz="2800" dirty="0">
-                <a:latin typeface="Titillium Web" panose="00000500000000000000" pitchFamily="2" charset="0"/>
-                <a:ea typeface="Open Sans" panose="020B0606030504020204" pitchFamily="34" charset="0"/>
-                <a:cs typeface="Open Sans" panose="020B0606030504020204" pitchFamily="34" charset="0"/>
-              </a:rPr>
-              <a:t>The greedy modularity maximization/</a:t>
-            </a:r>
-            <a:r>
-              <a:rPr lang="en-US" sz="2800" dirty="0" err="1">
-                <a:latin typeface="Titillium Web" panose="00000500000000000000" pitchFamily="2" charset="0"/>
-                <a:ea typeface="Open Sans" panose="020B0606030504020204" pitchFamily="34" charset="0"/>
-                <a:cs typeface="Open Sans" panose="020B0606030504020204" pitchFamily="34" charset="0"/>
-              </a:rPr>
-              <a:t>Clauset</a:t>
-            </a:r>
-            <a:r>
-              <a:rPr lang="en-US" sz="2800" dirty="0">
-                <a:latin typeface="Titillium Web" panose="00000500000000000000" pitchFamily="2" charset="0"/>
-                <a:ea typeface="Open Sans" panose="020B0606030504020204" pitchFamily="34" charset="0"/>
-                <a:cs typeface="Open Sans" panose="020B0606030504020204" pitchFamily="34" charset="0"/>
-              </a:rPr>
-              <a:t>-Newman-Moore (CNM) community detection algorithm was applied to identify groups of closely connected entities. Additional analysis examined interactions between communities and the relationship types that most strongly connected different sectors of the international solar energy ecosystem.</a:t>
-            </a:r>
-          </a:p>
-        </p:txBody>
-      </p:sp>
-      <p:sp>
-        <p:nvSpPr>
           <p:cNvPr id="244" name="Rectangle 5">
             <a:extLst>
               <a:ext uri="{FF2B5EF4-FFF2-40B4-BE49-F238E27FC236}">
@@ -5827,7 +5039,7 @@
         <p:spPr bwMode="auto">
           <a:xfrm>
             <a:off x="33115927" y="8154671"/>
-            <a:ext cx="10058400" cy="4862870"/>
+            <a:ext cx="10058400" cy="2708434"/>
           </a:xfrm>
           <a:prstGeom prst="rect">
             <a:avLst/>
@@ -5948,32 +5160,33 @@
             </a:lvl9pPr>
           </a:lstStyle>
           <a:p>
-            <a:pPr marL="457200" indent="-457200" algn="just">
+            <a:pPr marL="342900" indent="-342900" algn="just">
               <a:buFont typeface="Arial" panose="020B0604020202020204" pitchFamily="34" charset="0"/>
               <a:buChar char="•"/>
             </a:pPr>
             <a:r>
               <a:rPr lang="en-US" sz="2800" dirty="0">
                 <a:latin typeface="Titillium Web" panose="00000500000000000000" pitchFamily="2" charset="0"/>
-                <a:ea typeface="Open Sans" panose="020B0606030504020204" pitchFamily="34" charset="0"/>
-                <a:cs typeface="Open Sans" panose="020B0606030504020204" pitchFamily="34" charset="0"/>
               </a:rPr>
-              <a:t>Further analysis can be done with the dataset on the companies reporting on solar energy. Metrics such as common topics, geographical focus, and coverage percentage can provide an understanding of how news corporations in the dataset report on solar energy.</a:t>
-            </a:r>
-          </a:p>
-          <a:p>
-            <a:pPr marL="457200" indent="-457200" algn="just">
+              <a:t>Articles are limited to 1998–2017, preventing analysis of recent trends (e.g., artificial intelligence).</a:t>
+            </a:r>
+          </a:p>
+          <a:p>
+            <a:pPr marL="342900" indent="-342900" algn="just">
               <a:buFont typeface="Arial" panose="020B0604020202020204" pitchFamily="34" charset="0"/>
               <a:buChar char="•"/>
             </a:pPr>
             <a:r>
               <a:rPr lang="en-US" sz="2800" dirty="0">
                 <a:latin typeface="Titillium Web" panose="00000500000000000000" pitchFamily="2" charset="0"/>
-                <a:ea typeface="Open Sans" panose="020B0606030504020204" pitchFamily="34" charset="0"/>
-                <a:cs typeface="Open Sans" panose="020B0606030504020204" pitchFamily="34" charset="0"/>
               </a:rPr>
-              <a:t>A similar pipeline can be applied to other topics beyond solar energy. As the Cornell Newsroom dataset is not limited to solar energy, data filtering strategies with different topic-specific keywords can be applied to construct similar datasets for other topics and network analyses.</a:t>
-            </a:r>
+              <a:t>The dataset also includes only 38 major publications and excludes non-English sources, limiting coverage and diversity.</a:t>
+            </a:r>
+            <a:endParaRPr lang="en-US" sz="2800" dirty="0">
+              <a:latin typeface="Titillium Web" panose="00000500000000000000" pitchFamily="2" charset="0"/>
+              <a:ea typeface="Open Sans" panose="020B0606030504020204" pitchFamily="34" charset="0"/>
+              <a:cs typeface="Open Sans" panose="020B0606030504020204" pitchFamily="34" charset="0"/>
+            </a:endParaRPr>
           </a:p>
         </p:txBody>
       </p:sp>
@@ -5993,8 +5206,8 @@
         </p:nvSpPr>
         <p:spPr bwMode="auto">
           <a:xfrm>
-            <a:off x="33093960" y="13390988"/>
-            <a:ext cx="10058400" cy="784225"/>
+            <a:off x="33093959" y="11214056"/>
+            <a:ext cx="10080367" cy="784225"/>
           </a:xfrm>
           <a:prstGeom prst="rect">
             <a:avLst/>
@@ -6023,7 +5236,7 @@
                 </a:solidFill>
                 <a:latin typeface="Amaranth" panose="02000503050000020004" pitchFamily="2" charset="0"/>
               </a:rPr>
-              <a:t>Limitations</a:t>
+              <a:t>Future Work</a:t>
             </a:r>
           </a:p>
         </p:txBody>
@@ -6044,8 +5257,8 @@
         </p:nvSpPr>
         <p:spPr bwMode="auto">
           <a:xfrm>
-            <a:off x="33165657" y="14423653"/>
-            <a:ext cx="10058400" cy="4862870"/>
+            <a:off x="33093960" y="12244318"/>
+            <a:ext cx="10080366" cy="3570208"/>
           </a:xfrm>
           <a:prstGeom prst="rect">
             <a:avLst/>
@@ -6061,7 +5274,7 @@
           </a:effectLst>
         </p:spPr>
         <p:txBody>
-          <a:bodyPr lIns="274320" tIns="274320" rIns="274320" bIns="274320">
+          <a:bodyPr wrap="square" lIns="274320" tIns="274320" rIns="274320" bIns="274320">
             <a:spAutoFit/>
           </a:bodyPr>
           <a:lstStyle>
@@ -6166,7 +5379,7 @@
             </a:lvl9pPr>
           </a:lstStyle>
           <a:p>
-            <a:pPr marL="342900" indent="-342900" algn="just">
+            <a:pPr marL="457200" indent="-457200" algn="just">
               <a:buFont typeface="Arial" panose="020B0604020202020204" pitchFamily="34" charset="0"/>
               <a:buChar char="•"/>
             </a:pPr>
@@ -6176,11 +5389,11 @@
                 <a:ea typeface="Open Sans" panose="020B0606030504020204" pitchFamily="34" charset="0"/>
                 <a:cs typeface="Open Sans" panose="020B0606030504020204" pitchFamily="34" charset="0"/>
               </a:rPr>
-              <a:t>Articles are limited to 1998-2017, limiting analysis for current trends such as Artificial Intelligence. This creates a restricted analysis of solar energy, only allowing for a look into the past.</a:t>
-            </a:r>
-          </a:p>
-          <a:p>
-            <a:pPr marL="342900" indent="-342900" algn="just">
+              <a:t>Future work includes analyzing reporting patterns across news organizations (e.g., topics, geographic focus, and coverage).</a:t>
+            </a:r>
+          </a:p>
+          <a:p>
+            <a:pPr marL="457200" indent="-457200" algn="just">
               <a:buFont typeface="Arial" panose="020B0604020202020204" pitchFamily="34" charset="0"/>
               <a:buChar char="•"/>
             </a:pPr>
@@ -6190,1170 +5403,25 @@
                 <a:ea typeface="Open Sans" panose="020B0606030504020204" pitchFamily="34" charset="0"/>
                 <a:cs typeface="Open Sans" panose="020B0606030504020204" pitchFamily="34" charset="0"/>
               </a:rPr>
-              <a:t>Sources are limited to the 38 major publications originally found in the Cornell Newsroom dataset, limiting the diversity of information available. News publications outside the United States are likely to be missing, in particular those in other languages. Therefore, this project is likely to reveal highly Americanized views of solar energy.</a:t>
+              <a:t>The same pipeline can also be applied to other topics using topic-specific filtering and network analysis.</a:t>
+            </a:r>
+          </a:p>
+          <a:p>
+            <a:pPr marL="457200" indent="-457200" algn="just">
+              <a:buFont typeface="Arial" panose="020B0604020202020204" pitchFamily="34" charset="0"/>
+              <a:buChar char="•"/>
+            </a:pPr>
+            <a:r>
+              <a:rPr lang="en-US" sz="2800" dirty="0">
+                <a:latin typeface="Titillium Web" panose="00000500000000000000" pitchFamily="2" charset="0"/>
+                <a:ea typeface="Open Sans" panose="020B0606030504020204" pitchFamily="34" charset="0"/>
+                <a:cs typeface="Open Sans" panose="020B0606030504020204" pitchFamily="34" charset="0"/>
+              </a:rPr>
+              <a:t>The solar energy knowledge graph may be used to ground LLM outputs in a compound AI system [3].</a:t>
             </a:r>
           </a:p>
         </p:txBody>
       </p:sp>
-      <p:graphicFrame>
-        <p:nvGraphicFramePr>
-          <p:cNvPr id="254" name="Table 253">
-            <a:extLst>
-              <a:ext uri="{FF2B5EF4-FFF2-40B4-BE49-F238E27FC236}">
-                <a16:creationId xmlns:a16="http://schemas.microsoft.com/office/drawing/2014/main" id="{4948646E-1634-82C2-40D9-444CDAF07FF7}"/>
-              </a:ext>
-            </a:extLst>
-          </p:cNvPr>
-          <p:cNvGraphicFramePr>
-            <a:graphicFrameLocks noGrp="1"/>
-          </p:cNvGraphicFramePr>
-          <p:nvPr>
-            <p:extLst>
-              <p:ext uri="{D42A27DB-BD31-4B8C-83A1-F6EECF244321}">
-                <p14:modId xmlns:p14="http://schemas.microsoft.com/office/powerpoint/2010/main" val="1187851998"/>
-              </p:ext>
-            </p:extLst>
-          </p:nvPr>
-        </p:nvGraphicFramePr>
-        <p:xfrm>
-          <a:off x="12282998" y="27976396"/>
-          <a:ext cx="8535284" cy="3108960"/>
-        </p:xfrm>
-        <a:graphic>
-          <a:graphicData uri="http://schemas.openxmlformats.org/drawingml/2006/table">
-            <a:tbl>
-              <a:tblPr firstRow="1" firstCol="1">
-                <a:tableStyleId>{2D5ABB26-0587-4C30-8999-92F81FD0307C}</a:tableStyleId>
-              </a:tblPr>
-              <a:tblGrid>
-                <a:gridCol w="4158645">
-                  <a:extLst>
-                    <a:ext uri="{9D8B030D-6E8A-4147-A177-3AD203B41FA5}">
-                      <a16:colId xmlns:a16="http://schemas.microsoft.com/office/drawing/2014/main" val="3833514160"/>
-                    </a:ext>
-                  </a:extLst>
-                </a:gridCol>
-                <a:gridCol w="2293124">
-                  <a:extLst>
-                    <a:ext uri="{9D8B030D-6E8A-4147-A177-3AD203B41FA5}">
-                      <a16:colId xmlns:a16="http://schemas.microsoft.com/office/drawing/2014/main" val="1902017129"/>
-                    </a:ext>
-                  </a:extLst>
-                </a:gridCol>
-                <a:gridCol w="2083515">
-                  <a:extLst>
-                    <a:ext uri="{9D8B030D-6E8A-4147-A177-3AD203B41FA5}">
-                      <a16:colId xmlns:a16="http://schemas.microsoft.com/office/drawing/2014/main" val="2938504809"/>
-                    </a:ext>
-                  </a:extLst>
-                </a:gridCol>
-              </a:tblGrid>
-              <a:tr h="0">
-                <a:tc>
-                  <a:txBody>
-                    <a:bodyPr/>
-                    <a:lstStyle/>
-                    <a:p>
-                      <a:pPr>
-                        <a:buNone/>
-                      </a:pPr>
-                      <a:r>
-                        <a:rPr lang="en-US" sz="2800" b="1" dirty="0">
-                          <a:latin typeface="Titillium Web" panose="00000500000000000000" pitchFamily="2" charset="0"/>
-                        </a:rPr>
-                        <a:t>Item</a:t>
-                      </a:r>
-                    </a:p>
-                  </a:txBody>
-                  <a:tcPr anchor="ctr">
-                    <a:lnL w="12700" cap="flat" cmpd="sng" algn="ctr">
-                      <a:solidFill>
-                        <a:schemeClr val="tx1"/>
-                      </a:solidFill>
-                      <a:prstDash val="solid"/>
-                      <a:round/>
-                      <a:headEnd type="none" w="med" len="med"/>
-                      <a:tailEnd type="none" w="med" len="med"/>
-                    </a:lnL>
-                    <a:lnR w="12700" cap="flat" cmpd="sng" algn="ctr">
-                      <a:noFill/>
-                      <a:prstDash val="solid"/>
-                      <a:round/>
-                      <a:headEnd type="none" w="med" len="med"/>
-                      <a:tailEnd type="none" w="med" len="med"/>
-                    </a:lnR>
-                    <a:lnT w="12700" cap="flat" cmpd="sng" algn="ctr">
-                      <a:solidFill>
-                        <a:schemeClr val="tx1"/>
-                      </a:solidFill>
-                      <a:prstDash val="solid"/>
-                      <a:round/>
-                      <a:headEnd type="none" w="med" len="med"/>
-                      <a:tailEnd type="none" w="med" len="med"/>
-                    </a:lnT>
-                    <a:lnB w="12700" cap="flat" cmpd="sng" algn="ctr">
-                      <a:solidFill>
-                        <a:schemeClr val="tx1"/>
-                      </a:solidFill>
-                      <a:prstDash val="solid"/>
-                      <a:round/>
-                      <a:headEnd type="none" w="med" len="med"/>
-                      <a:tailEnd type="none" w="med" len="med"/>
-                    </a:lnB>
-                    <a:lnTlToBr w="12700" cmpd="sng">
-                      <a:noFill/>
-                      <a:prstDash val="solid"/>
-                    </a:lnTlToBr>
-                    <a:lnBlToTr w="12700" cmpd="sng">
-                      <a:noFill/>
-                      <a:prstDash val="solid"/>
-                    </a:lnBlToTr>
-                    <a:solidFill>
-                      <a:srgbClr val="569BBE"/>
-                    </a:solidFill>
-                  </a:tcPr>
-                </a:tc>
-                <a:tc>
-                  <a:txBody>
-                    <a:bodyPr/>
-                    <a:lstStyle/>
-                    <a:p>
-                      <a:pPr algn="r">
-                        <a:buNone/>
-                      </a:pPr>
-                      <a:r>
-                        <a:rPr lang="en-US" sz="2800" b="1" dirty="0">
-                          <a:latin typeface="Titillium Web" panose="00000500000000000000" pitchFamily="2" charset="0"/>
-                        </a:rPr>
-                        <a:t>Before</a:t>
-                      </a:r>
-                    </a:p>
-                  </a:txBody>
-                  <a:tcPr anchor="ctr">
-                    <a:lnL w="12700" cap="flat" cmpd="sng" algn="ctr">
-                      <a:noFill/>
-                      <a:prstDash val="solid"/>
-                      <a:round/>
-                      <a:headEnd type="none" w="med" len="med"/>
-                      <a:tailEnd type="none" w="med" len="med"/>
-                    </a:lnL>
-                    <a:lnR w="12700" cap="flat" cmpd="sng" algn="ctr">
-                      <a:noFill/>
-                      <a:prstDash val="solid"/>
-                      <a:round/>
-                      <a:headEnd type="none" w="med" len="med"/>
-                      <a:tailEnd type="none" w="med" len="med"/>
-                    </a:lnR>
-                    <a:lnT w="12700" cap="flat" cmpd="sng" algn="ctr">
-                      <a:solidFill>
-                        <a:schemeClr val="tx1"/>
-                      </a:solidFill>
-                      <a:prstDash val="solid"/>
-                      <a:round/>
-                      <a:headEnd type="none" w="med" len="med"/>
-                      <a:tailEnd type="none" w="med" len="med"/>
-                    </a:lnT>
-                    <a:lnB w="12700" cap="flat" cmpd="sng" algn="ctr">
-                      <a:solidFill>
-                        <a:schemeClr val="tx1"/>
-                      </a:solidFill>
-                      <a:prstDash val="solid"/>
-                      <a:round/>
-                      <a:headEnd type="none" w="med" len="med"/>
-                      <a:tailEnd type="none" w="med" len="med"/>
-                    </a:lnB>
-                    <a:lnTlToBr w="12700" cmpd="sng">
-                      <a:noFill/>
-                      <a:prstDash val="solid"/>
-                    </a:lnTlToBr>
-                    <a:lnBlToTr w="12700" cmpd="sng">
-                      <a:noFill/>
-                      <a:prstDash val="solid"/>
-                    </a:lnBlToTr>
-                    <a:solidFill>
-                      <a:srgbClr val="569BBE"/>
-                    </a:solidFill>
-                  </a:tcPr>
-                </a:tc>
-                <a:tc>
-                  <a:txBody>
-                    <a:bodyPr/>
-                    <a:lstStyle/>
-                    <a:p>
-                      <a:pPr algn="r">
-                        <a:buNone/>
-                      </a:pPr>
-                      <a:r>
-                        <a:rPr lang="en-US" sz="2800" b="1" dirty="0">
-                          <a:latin typeface="Titillium Web" panose="00000500000000000000" pitchFamily="2" charset="0"/>
-                        </a:rPr>
-                        <a:t>After</a:t>
-                      </a:r>
-                    </a:p>
-                  </a:txBody>
-                  <a:tcPr anchor="ctr">
-                    <a:lnL w="12700" cap="flat" cmpd="sng" algn="ctr">
-                      <a:noFill/>
-                      <a:prstDash val="solid"/>
-                      <a:round/>
-                      <a:headEnd type="none" w="med" len="med"/>
-                      <a:tailEnd type="none" w="med" len="med"/>
-                    </a:lnL>
-                    <a:lnR w="12700" cap="flat" cmpd="sng" algn="ctr">
-                      <a:solidFill>
-                        <a:schemeClr val="tx1"/>
-                      </a:solidFill>
-                      <a:prstDash val="solid"/>
-                      <a:round/>
-                      <a:headEnd type="none" w="med" len="med"/>
-                      <a:tailEnd type="none" w="med" len="med"/>
-                    </a:lnR>
-                    <a:lnT w="12700" cap="flat" cmpd="sng" algn="ctr">
-                      <a:solidFill>
-                        <a:schemeClr val="tx1"/>
-                      </a:solidFill>
-                      <a:prstDash val="solid"/>
-                      <a:round/>
-                      <a:headEnd type="none" w="med" len="med"/>
-                      <a:tailEnd type="none" w="med" len="med"/>
-                    </a:lnT>
-                    <a:lnB w="12700" cap="flat" cmpd="sng" algn="ctr">
-                      <a:solidFill>
-                        <a:schemeClr val="tx1"/>
-                      </a:solidFill>
-                      <a:prstDash val="solid"/>
-                      <a:round/>
-                      <a:headEnd type="none" w="med" len="med"/>
-                      <a:tailEnd type="none" w="med" len="med"/>
-                    </a:lnB>
-                    <a:lnTlToBr w="12700" cmpd="sng">
-                      <a:noFill/>
-                      <a:prstDash val="solid"/>
-                    </a:lnTlToBr>
-                    <a:lnBlToTr w="12700" cmpd="sng">
-                      <a:noFill/>
-                      <a:prstDash val="solid"/>
-                    </a:lnBlToTr>
-                    <a:solidFill>
-                      <a:srgbClr val="569BBE"/>
-                    </a:solidFill>
-                  </a:tcPr>
-                </a:tc>
-                <a:extLst>
-                  <a:ext uri="{0D108BD9-81ED-4DB2-BD59-A6C34878D82A}">
-                    <a16:rowId xmlns:a16="http://schemas.microsoft.com/office/drawing/2014/main" val="1046880155"/>
-                  </a:ext>
-                </a:extLst>
-              </a:tr>
-              <a:tr h="0">
-                <a:tc>
-                  <a:txBody>
-                    <a:bodyPr/>
-                    <a:lstStyle/>
-                    <a:p>
-                      <a:pPr>
-                        <a:buNone/>
-                      </a:pPr>
-                      <a:r>
-                        <a:rPr lang="en-US" sz="2800" b="1" dirty="0">
-                          <a:latin typeface="Titillium Web" panose="00000500000000000000" pitchFamily="2" charset="0"/>
-                        </a:rPr>
-                        <a:t>Number of articles</a:t>
-                      </a:r>
-                    </a:p>
-                  </a:txBody>
-                  <a:tcPr anchor="ctr">
-                    <a:lnL w="12700" cap="flat" cmpd="sng" algn="ctr">
-                      <a:solidFill>
-                        <a:schemeClr val="tx1"/>
-                      </a:solidFill>
-                      <a:prstDash val="solid"/>
-                      <a:round/>
-                      <a:headEnd type="none" w="med" len="med"/>
-                      <a:tailEnd type="none" w="med" len="med"/>
-                    </a:lnL>
-                    <a:lnR w="12700" cap="flat" cmpd="sng" algn="ctr">
-                      <a:solidFill>
-                        <a:schemeClr val="tx1"/>
-                      </a:solidFill>
-                      <a:prstDash val="solid"/>
-                      <a:round/>
-                      <a:headEnd type="none" w="med" len="med"/>
-                      <a:tailEnd type="none" w="med" len="med"/>
-                    </a:lnR>
-                    <a:lnT w="12700" cap="flat" cmpd="sng" algn="ctr">
-                      <a:solidFill>
-                        <a:schemeClr val="tx1"/>
-                      </a:solidFill>
-                      <a:prstDash val="solid"/>
-                      <a:round/>
-                      <a:headEnd type="none" w="med" len="med"/>
-                      <a:tailEnd type="none" w="med" len="med"/>
-                    </a:lnT>
-                    <a:lnB w="12700" cap="flat" cmpd="sng" algn="ctr">
-                      <a:solidFill>
-                        <a:schemeClr val="tx1"/>
-                      </a:solidFill>
-                      <a:prstDash val="solid"/>
-                      <a:round/>
-                      <a:headEnd type="none" w="med" len="med"/>
-                      <a:tailEnd type="none" w="med" len="med"/>
-                    </a:lnB>
-                    <a:solidFill>
-                      <a:srgbClr val="B4D3E2"/>
-                    </a:solidFill>
-                  </a:tcPr>
-                </a:tc>
-                <a:tc>
-                  <a:txBody>
-                    <a:bodyPr/>
-                    <a:lstStyle/>
-                    <a:p>
-                      <a:pPr algn="r">
-                        <a:buNone/>
-                      </a:pPr>
-                      <a:r>
-                        <a:rPr lang="en-US" sz="2800" dirty="0">
-                          <a:latin typeface="Titillium Web" panose="00000500000000000000" pitchFamily="2" charset="0"/>
-                        </a:rPr>
-                        <a:t>5,374</a:t>
-                      </a:r>
-                    </a:p>
-                  </a:txBody>
-                  <a:tcPr anchor="ctr">
-                    <a:lnL w="12700" cap="flat" cmpd="sng" algn="ctr">
-                      <a:solidFill>
-                        <a:schemeClr val="tx1"/>
-                      </a:solidFill>
-                      <a:prstDash val="solid"/>
-                      <a:round/>
-                      <a:headEnd type="none" w="med" len="med"/>
-                      <a:tailEnd type="none" w="med" len="med"/>
-                    </a:lnL>
-                    <a:lnR w="12700" cap="flat" cmpd="sng" algn="ctr">
-                      <a:solidFill>
-                        <a:schemeClr val="tx1"/>
-                      </a:solidFill>
-                      <a:prstDash val="solid"/>
-                      <a:round/>
-                      <a:headEnd type="none" w="med" len="med"/>
-                      <a:tailEnd type="none" w="med" len="med"/>
-                    </a:lnR>
-                    <a:lnT w="12700" cap="flat" cmpd="sng" algn="ctr">
-                      <a:solidFill>
-                        <a:schemeClr val="tx1"/>
-                      </a:solidFill>
-                      <a:prstDash val="solid"/>
-                      <a:round/>
-                      <a:headEnd type="none" w="med" len="med"/>
-                      <a:tailEnd type="none" w="med" len="med"/>
-                    </a:lnT>
-                    <a:lnB w="12700" cap="flat" cmpd="sng" algn="ctr">
-                      <a:solidFill>
-                        <a:schemeClr val="tx1"/>
-                      </a:solidFill>
-                      <a:prstDash val="solid"/>
-                      <a:round/>
-                      <a:headEnd type="none" w="med" len="med"/>
-                      <a:tailEnd type="none" w="med" len="med"/>
-                    </a:lnB>
-                    <a:solidFill>
-                      <a:srgbClr val="B4D3E2"/>
-                    </a:solidFill>
-                  </a:tcPr>
-                </a:tc>
-                <a:tc>
-                  <a:txBody>
-                    <a:bodyPr/>
-                    <a:lstStyle/>
-                    <a:p>
-                      <a:pPr algn="r">
-                        <a:buNone/>
-                      </a:pPr>
-                      <a:r>
-                        <a:rPr lang="en-US" sz="2800" dirty="0">
-                          <a:latin typeface="Titillium Web" panose="00000500000000000000" pitchFamily="2" charset="0"/>
-                        </a:rPr>
-                        <a:t>1,985</a:t>
-                      </a:r>
-                    </a:p>
-                  </a:txBody>
-                  <a:tcPr anchor="ctr">
-                    <a:lnL w="12700" cap="flat" cmpd="sng" algn="ctr">
-                      <a:solidFill>
-                        <a:schemeClr val="tx1"/>
-                      </a:solidFill>
-                      <a:prstDash val="solid"/>
-                      <a:round/>
-                      <a:headEnd type="none" w="med" len="med"/>
-                      <a:tailEnd type="none" w="med" len="med"/>
-                    </a:lnL>
-                    <a:lnR w="12700" cap="flat" cmpd="sng" algn="ctr">
-                      <a:solidFill>
-                        <a:schemeClr val="tx1"/>
-                      </a:solidFill>
-                      <a:prstDash val="solid"/>
-                      <a:round/>
-                      <a:headEnd type="none" w="med" len="med"/>
-                      <a:tailEnd type="none" w="med" len="med"/>
-                    </a:lnR>
-                    <a:lnT w="12700" cap="flat" cmpd="sng" algn="ctr">
-                      <a:solidFill>
-                        <a:schemeClr val="tx1"/>
-                      </a:solidFill>
-                      <a:prstDash val="solid"/>
-                      <a:round/>
-                      <a:headEnd type="none" w="med" len="med"/>
-                      <a:tailEnd type="none" w="med" len="med"/>
-                    </a:lnT>
-                    <a:lnB w="12700" cap="flat" cmpd="sng" algn="ctr">
-                      <a:solidFill>
-                        <a:schemeClr val="tx1"/>
-                      </a:solidFill>
-                      <a:prstDash val="solid"/>
-                      <a:round/>
-                      <a:headEnd type="none" w="med" len="med"/>
-                      <a:tailEnd type="none" w="med" len="med"/>
-                    </a:lnB>
-                    <a:solidFill>
-                      <a:srgbClr val="B4D3E2"/>
-                    </a:solidFill>
-                  </a:tcPr>
-                </a:tc>
-                <a:extLst>
-                  <a:ext uri="{0D108BD9-81ED-4DB2-BD59-A6C34878D82A}">
-                    <a16:rowId xmlns:a16="http://schemas.microsoft.com/office/drawing/2014/main" val="385092680"/>
-                  </a:ext>
-                </a:extLst>
-              </a:tr>
-              <a:tr h="0">
-                <a:tc>
-                  <a:txBody>
-                    <a:bodyPr/>
-                    <a:lstStyle/>
-                    <a:p>
-                      <a:pPr>
-                        <a:buNone/>
-                      </a:pPr>
-                      <a:r>
-                        <a:rPr lang="en-US" sz="2800" b="1" dirty="0">
-                          <a:latin typeface="Titillium Web" panose="00000500000000000000" pitchFamily="2" charset="0"/>
-                        </a:rPr>
-                        <a:t>System prompt tokens</a:t>
-                      </a:r>
-                    </a:p>
-                  </a:txBody>
-                  <a:tcPr anchor="ctr">
-                    <a:lnL w="12700" cap="flat" cmpd="sng" algn="ctr">
-                      <a:solidFill>
-                        <a:schemeClr val="tx1"/>
-                      </a:solidFill>
-                      <a:prstDash val="solid"/>
-                      <a:round/>
-                      <a:headEnd type="none" w="med" len="med"/>
-                      <a:tailEnd type="none" w="med" len="med"/>
-                    </a:lnL>
-                    <a:lnR w="12700" cap="flat" cmpd="sng" algn="ctr">
-                      <a:solidFill>
-                        <a:schemeClr val="tx1"/>
-                      </a:solidFill>
-                      <a:prstDash val="solid"/>
-                      <a:round/>
-                      <a:headEnd type="none" w="med" len="med"/>
-                      <a:tailEnd type="none" w="med" len="med"/>
-                    </a:lnR>
-                    <a:lnT w="12700" cap="flat" cmpd="sng" algn="ctr">
-                      <a:solidFill>
-                        <a:schemeClr val="tx1"/>
-                      </a:solidFill>
-                      <a:prstDash val="solid"/>
-                      <a:round/>
-                      <a:headEnd type="none" w="med" len="med"/>
-                      <a:tailEnd type="none" w="med" len="med"/>
-                    </a:lnT>
-                    <a:lnB w="12700" cap="flat" cmpd="sng" algn="ctr">
-                      <a:solidFill>
-                        <a:schemeClr val="tx1"/>
-                      </a:solidFill>
-                      <a:prstDash val="solid"/>
-                      <a:round/>
-                      <a:headEnd type="none" w="med" len="med"/>
-                      <a:tailEnd type="none" w="med" len="med"/>
-                    </a:lnB>
-                    <a:solidFill>
-                      <a:srgbClr val="B4D3E2"/>
-                    </a:solidFill>
-                  </a:tcPr>
-                </a:tc>
-                <a:tc>
-                  <a:txBody>
-                    <a:bodyPr/>
-                    <a:lstStyle/>
-                    <a:p>
-                      <a:pPr algn="r">
-                        <a:buNone/>
-                      </a:pPr>
-                      <a:r>
-                        <a:rPr lang="en-US" sz="2800" dirty="0">
-                          <a:latin typeface="Titillium Web" panose="00000500000000000000" pitchFamily="2" charset="0"/>
-                        </a:rPr>
-                        <a:t>1,773</a:t>
-                      </a:r>
-                    </a:p>
-                  </a:txBody>
-                  <a:tcPr anchor="ctr">
-                    <a:lnL w="12700" cap="flat" cmpd="sng" algn="ctr">
-                      <a:solidFill>
-                        <a:schemeClr val="tx1"/>
-                      </a:solidFill>
-                      <a:prstDash val="solid"/>
-                      <a:round/>
-                      <a:headEnd type="none" w="med" len="med"/>
-                      <a:tailEnd type="none" w="med" len="med"/>
-                    </a:lnL>
-                    <a:lnR w="12700" cap="flat" cmpd="sng" algn="ctr">
-                      <a:solidFill>
-                        <a:schemeClr val="tx1"/>
-                      </a:solidFill>
-                      <a:prstDash val="solid"/>
-                      <a:round/>
-                      <a:headEnd type="none" w="med" len="med"/>
-                      <a:tailEnd type="none" w="med" len="med"/>
-                    </a:lnR>
-                    <a:lnT w="12700" cap="flat" cmpd="sng" algn="ctr">
-                      <a:solidFill>
-                        <a:schemeClr val="tx1"/>
-                      </a:solidFill>
-                      <a:prstDash val="solid"/>
-                      <a:round/>
-                      <a:headEnd type="none" w="med" len="med"/>
-                      <a:tailEnd type="none" w="med" len="med"/>
-                    </a:lnT>
-                    <a:lnB w="12700" cap="flat" cmpd="sng" algn="ctr">
-                      <a:solidFill>
-                        <a:schemeClr val="tx1"/>
-                      </a:solidFill>
-                      <a:prstDash val="solid"/>
-                      <a:round/>
-                      <a:headEnd type="none" w="med" len="med"/>
-                      <a:tailEnd type="none" w="med" len="med"/>
-                    </a:lnB>
-                    <a:solidFill>
-                      <a:srgbClr val="B4D3E2"/>
-                    </a:solidFill>
-                  </a:tcPr>
-                </a:tc>
-                <a:tc>
-                  <a:txBody>
-                    <a:bodyPr/>
-                    <a:lstStyle/>
-                    <a:p>
-                      <a:pPr algn="r">
-                        <a:buNone/>
-                      </a:pPr>
-                      <a:r>
-                        <a:rPr lang="en-US" sz="2800">
-                          <a:latin typeface="Titillium Web" panose="00000500000000000000" pitchFamily="2" charset="0"/>
-                        </a:rPr>
-                        <a:t>775</a:t>
-                      </a:r>
-                    </a:p>
-                  </a:txBody>
-                  <a:tcPr anchor="ctr">
-                    <a:lnL w="12700" cap="flat" cmpd="sng" algn="ctr">
-                      <a:solidFill>
-                        <a:schemeClr val="tx1"/>
-                      </a:solidFill>
-                      <a:prstDash val="solid"/>
-                      <a:round/>
-                      <a:headEnd type="none" w="med" len="med"/>
-                      <a:tailEnd type="none" w="med" len="med"/>
-                    </a:lnL>
-                    <a:lnR w="12700" cap="flat" cmpd="sng" algn="ctr">
-                      <a:solidFill>
-                        <a:schemeClr val="tx1"/>
-                      </a:solidFill>
-                      <a:prstDash val="solid"/>
-                      <a:round/>
-                      <a:headEnd type="none" w="med" len="med"/>
-                      <a:tailEnd type="none" w="med" len="med"/>
-                    </a:lnR>
-                    <a:lnT w="12700" cap="flat" cmpd="sng" algn="ctr">
-                      <a:solidFill>
-                        <a:schemeClr val="tx1"/>
-                      </a:solidFill>
-                      <a:prstDash val="solid"/>
-                      <a:round/>
-                      <a:headEnd type="none" w="med" len="med"/>
-                      <a:tailEnd type="none" w="med" len="med"/>
-                    </a:lnT>
-                    <a:lnB w="12700" cap="flat" cmpd="sng" algn="ctr">
-                      <a:solidFill>
-                        <a:schemeClr val="tx1"/>
-                      </a:solidFill>
-                      <a:prstDash val="solid"/>
-                      <a:round/>
-                      <a:headEnd type="none" w="med" len="med"/>
-                      <a:tailEnd type="none" w="med" len="med"/>
-                    </a:lnB>
-                    <a:solidFill>
-                      <a:srgbClr val="B4D3E2"/>
-                    </a:solidFill>
-                  </a:tcPr>
-                </a:tc>
-                <a:extLst>
-                  <a:ext uri="{0D108BD9-81ED-4DB2-BD59-A6C34878D82A}">
-                    <a16:rowId xmlns:a16="http://schemas.microsoft.com/office/drawing/2014/main" val="3255593464"/>
-                  </a:ext>
-                </a:extLst>
-              </a:tr>
-              <a:tr h="0">
-                <a:tc>
-                  <a:txBody>
-                    <a:bodyPr/>
-                    <a:lstStyle/>
-                    <a:p>
-                      <a:pPr>
-                        <a:buNone/>
-                      </a:pPr>
-                      <a:r>
-                        <a:rPr lang="en-US" sz="2800" b="1" dirty="0">
-                          <a:latin typeface="Titillium Web" panose="00000500000000000000" pitchFamily="2" charset="0"/>
-                        </a:rPr>
-                        <a:t>Article corpus tokens</a:t>
-                      </a:r>
-                    </a:p>
-                  </a:txBody>
-                  <a:tcPr anchor="ctr">
-                    <a:lnL w="12700" cap="flat" cmpd="sng" algn="ctr">
-                      <a:solidFill>
-                        <a:schemeClr val="tx1"/>
-                      </a:solidFill>
-                      <a:prstDash val="solid"/>
-                      <a:round/>
-                      <a:headEnd type="none" w="med" len="med"/>
-                      <a:tailEnd type="none" w="med" len="med"/>
-                    </a:lnL>
-                    <a:lnR w="12700" cap="flat" cmpd="sng" algn="ctr">
-                      <a:solidFill>
-                        <a:schemeClr val="tx1"/>
-                      </a:solidFill>
-                      <a:prstDash val="solid"/>
-                      <a:round/>
-                      <a:headEnd type="none" w="med" len="med"/>
-                      <a:tailEnd type="none" w="med" len="med"/>
-                    </a:lnR>
-                    <a:lnT w="12700" cap="flat" cmpd="sng" algn="ctr">
-                      <a:solidFill>
-                        <a:schemeClr val="tx1"/>
-                      </a:solidFill>
-                      <a:prstDash val="solid"/>
-                      <a:round/>
-                      <a:headEnd type="none" w="med" len="med"/>
-                      <a:tailEnd type="none" w="med" len="med"/>
-                    </a:lnT>
-                    <a:lnB w="12700" cap="flat" cmpd="sng" algn="ctr">
-                      <a:solidFill>
-                        <a:schemeClr val="tx1"/>
-                      </a:solidFill>
-                      <a:prstDash val="solid"/>
-                      <a:round/>
-                      <a:headEnd type="none" w="med" len="med"/>
-                      <a:tailEnd type="none" w="med" len="med"/>
-                    </a:lnB>
-                    <a:solidFill>
-                      <a:srgbClr val="B4D3E2"/>
-                    </a:solidFill>
-                  </a:tcPr>
-                </a:tc>
-                <a:tc>
-                  <a:txBody>
-                    <a:bodyPr/>
-                    <a:lstStyle/>
-                    <a:p>
-                      <a:pPr algn="r">
-                        <a:buNone/>
-                      </a:pPr>
-                      <a:r>
-                        <a:rPr lang="en-US" sz="2800">
-                          <a:latin typeface="Titillium Web" panose="00000500000000000000" pitchFamily="2" charset="0"/>
-                        </a:rPr>
-                        <a:t>6,673,300</a:t>
-                      </a:r>
-                    </a:p>
-                  </a:txBody>
-                  <a:tcPr anchor="ctr">
-                    <a:lnL w="12700" cap="flat" cmpd="sng" algn="ctr">
-                      <a:solidFill>
-                        <a:schemeClr val="tx1"/>
-                      </a:solidFill>
-                      <a:prstDash val="solid"/>
-                      <a:round/>
-                      <a:headEnd type="none" w="med" len="med"/>
-                      <a:tailEnd type="none" w="med" len="med"/>
-                    </a:lnL>
-                    <a:lnR w="12700" cap="flat" cmpd="sng" algn="ctr">
-                      <a:solidFill>
-                        <a:schemeClr val="tx1"/>
-                      </a:solidFill>
-                      <a:prstDash val="solid"/>
-                      <a:round/>
-                      <a:headEnd type="none" w="med" len="med"/>
-                      <a:tailEnd type="none" w="med" len="med"/>
-                    </a:lnR>
-                    <a:lnT w="12700" cap="flat" cmpd="sng" algn="ctr">
-                      <a:solidFill>
-                        <a:schemeClr val="tx1"/>
-                      </a:solidFill>
-                      <a:prstDash val="solid"/>
-                      <a:round/>
-                      <a:headEnd type="none" w="med" len="med"/>
-                      <a:tailEnd type="none" w="med" len="med"/>
-                    </a:lnT>
-                    <a:lnB w="12700" cap="flat" cmpd="sng" algn="ctr">
-                      <a:solidFill>
-                        <a:schemeClr val="tx1"/>
-                      </a:solidFill>
-                      <a:prstDash val="solid"/>
-                      <a:round/>
-                      <a:headEnd type="none" w="med" len="med"/>
-                      <a:tailEnd type="none" w="med" len="med"/>
-                    </a:lnB>
-                    <a:solidFill>
-                      <a:srgbClr val="B4D3E2"/>
-                    </a:solidFill>
-                  </a:tcPr>
-                </a:tc>
-                <a:tc>
-                  <a:txBody>
-                    <a:bodyPr/>
-                    <a:lstStyle/>
-                    <a:p>
-                      <a:pPr algn="r">
-                        <a:buNone/>
-                      </a:pPr>
-                      <a:r>
-                        <a:rPr lang="en-US" sz="2800" dirty="0">
-                          <a:latin typeface="Titillium Web" panose="00000500000000000000" pitchFamily="2" charset="0"/>
-                        </a:rPr>
-                        <a:t>2,534,844</a:t>
-                      </a:r>
-                    </a:p>
-                  </a:txBody>
-                  <a:tcPr anchor="ctr">
-                    <a:lnL w="12700" cap="flat" cmpd="sng" algn="ctr">
-                      <a:solidFill>
-                        <a:schemeClr val="tx1"/>
-                      </a:solidFill>
-                      <a:prstDash val="solid"/>
-                      <a:round/>
-                      <a:headEnd type="none" w="med" len="med"/>
-                      <a:tailEnd type="none" w="med" len="med"/>
-                    </a:lnL>
-                    <a:lnR w="12700" cap="flat" cmpd="sng" algn="ctr">
-                      <a:solidFill>
-                        <a:schemeClr val="tx1"/>
-                      </a:solidFill>
-                      <a:prstDash val="solid"/>
-                      <a:round/>
-                      <a:headEnd type="none" w="med" len="med"/>
-                      <a:tailEnd type="none" w="med" len="med"/>
-                    </a:lnR>
-                    <a:lnT w="12700" cap="flat" cmpd="sng" algn="ctr">
-                      <a:solidFill>
-                        <a:schemeClr val="tx1"/>
-                      </a:solidFill>
-                      <a:prstDash val="solid"/>
-                      <a:round/>
-                      <a:headEnd type="none" w="med" len="med"/>
-                      <a:tailEnd type="none" w="med" len="med"/>
-                    </a:lnT>
-                    <a:lnB w="12700" cap="flat" cmpd="sng" algn="ctr">
-                      <a:solidFill>
-                        <a:schemeClr val="tx1"/>
-                      </a:solidFill>
-                      <a:prstDash val="solid"/>
-                      <a:round/>
-                      <a:headEnd type="none" w="med" len="med"/>
-                      <a:tailEnd type="none" w="med" len="med"/>
-                    </a:lnB>
-                    <a:solidFill>
-                      <a:srgbClr val="B4D3E2"/>
-                    </a:solidFill>
-                  </a:tcPr>
-                </a:tc>
-                <a:extLst>
-                  <a:ext uri="{0D108BD9-81ED-4DB2-BD59-A6C34878D82A}">
-                    <a16:rowId xmlns:a16="http://schemas.microsoft.com/office/drawing/2014/main" val="2177487150"/>
-                  </a:ext>
-                </a:extLst>
-              </a:tr>
-              <a:tr h="0">
-                <a:tc>
-                  <a:txBody>
-                    <a:bodyPr/>
-                    <a:lstStyle/>
-                    <a:p>
-                      <a:pPr>
-                        <a:buNone/>
-                      </a:pPr>
-                      <a:r>
-                        <a:rPr lang="en-US" sz="2800" b="1" dirty="0">
-                          <a:latin typeface="Titillium Web" panose="00000500000000000000" pitchFamily="2" charset="0"/>
-                        </a:rPr>
-                        <a:t>Total input tokens</a:t>
-                      </a:r>
-                    </a:p>
-                  </a:txBody>
-                  <a:tcPr anchor="ctr">
-                    <a:lnL w="12700" cap="flat" cmpd="sng" algn="ctr">
-                      <a:solidFill>
-                        <a:schemeClr val="tx1"/>
-                      </a:solidFill>
-                      <a:prstDash val="solid"/>
-                      <a:round/>
-                      <a:headEnd type="none" w="med" len="med"/>
-                      <a:tailEnd type="none" w="med" len="med"/>
-                    </a:lnL>
-                    <a:lnR w="12700" cap="flat" cmpd="sng" algn="ctr">
-                      <a:solidFill>
-                        <a:schemeClr val="tx1"/>
-                      </a:solidFill>
-                      <a:prstDash val="solid"/>
-                      <a:round/>
-                      <a:headEnd type="none" w="med" len="med"/>
-                      <a:tailEnd type="none" w="med" len="med"/>
-                    </a:lnR>
-                    <a:lnT w="12700" cap="flat" cmpd="sng" algn="ctr">
-                      <a:solidFill>
-                        <a:schemeClr val="tx1"/>
-                      </a:solidFill>
-                      <a:prstDash val="solid"/>
-                      <a:round/>
-                      <a:headEnd type="none" w="med" len="med"/>
-                      <a:tailEnd type="none" w="med" len="med"/>
-                    </a:lnT>
-                    <a:lnB w="12700" cap="flat" cmpd="sng" algn="ctr">
-                      <a:solidFill>
-                        <a:schemeClr val="tx1"/>
-                      </a:solidFill>
-                      <a:prstDash val="solid"/>
-                      <a:round/>
-                      <a:headEnd type="none" w="med" len="med"/>
-                      <a:tailEnd type="none" w="med" len="med"/>
-                    </a:lnB>
-                    <a:solidFill>
-                      <a:srgbClr val="B4D3E2"/>
-                    </a:solidFill>
-                  </a:tcPr>
-                </a:tc>
-                <a:tc>
-                  <a:txBody>
-                    <a:bodyPr/>
-                    <a:lstStyle/>
-                    <a:p>
-                      <a:pPr algn="r">
-                        <a:buNone/>
-                      </a:pPr>
-                      <a:r>
-                        <a:rPr lang="en-US" sz="2800" dirty="0">
-                          <a:latin typeface="Titillium Web" panose="00000500000000000000" pitchFamily="2" charset="0"/>
-                        </a:rPr>
-                        <a:t>16,201,402</a:t>
-                      </a:r>
-                    </a:p>
-                  </a:txBody>
-                  <a:tcPr anchor="ctr">
-                    <a:lnL w="12700" cap="flat" cmpd="sng" algn="ctr">
-                      <a:solidFill>
-                        <a:schemeClr val="tx1"/>
-                      </a:solidFill>
-                      <a:prstDash val="solid"/>
-                      <a:round/>
-                      <a:headEnd type="none" w="med" len="med"/>
-                      <a:tailEnd type="none" w="med" len="med"/>
-                    </a:lnL>
-                    <a:lnR w="12700" cap="flat" cmpd="sng" algn="ctr">
-                      <a:solidFill>
-                        <a:schemeClr val="tx1"/>
-                      </a:solidFill>
-                      <a:prstDash val="solid"/>
-                      <a:round/>
-                      <a:headEnd type="none" w="med" len="med"/>
-                      <a:tailEnd type="none" w="med" len="med"/>
-                    </a:lnR>
-                    <a:lnT w="12700" cap="flat" cmpd="sng" algn="ctr">
-                      <a:solidFill>
-                        <a:schemeClr val="tx1"/>
-                      </a:solidFill>
-                      <a:prstDash val="solid"/>
-                      <a:round/>
-                      <a:headEnd type="none" w="med" len="med"/>
-                      <a:tailEnd type="none" w="med" len="med"/>
-                    </a:lnT>
-                    <a:lnB w="12700" cap="flat" cmpd="sng" algn="ctr">
-                      <a:solidFill>
-                        <a:schemeClr val="tx1"/>
-                      </a:solidFill>
-                      <a:prstDash val="solid"/>
-                      <a:round/>
-                      <a:headEnd type="none" w="med" len="med"/>
-                      <a:tailEnd type="none" w="med" len="med"/>
-                    </a:lnB>
-                    <a:solidFill>
-                      <a:srgbClr val="B4D3E2"/>
-                    </a:solidFill>
-                  </a:tcPr>
-                </a:tc>
-                <a:tc>
-                  <a:txBody>
-                    <a:bodyPr/>
-                    <a:lstStyle/>
-                    <a:p>
-                      <a:pPr algn="r">
-                        <a:buNone/>
-                      </a:pPr>
-                      <a:r>
-                        <a:rPr lang="en-US" sz="2800" dirty="0">
-                          <a:latin typeface="Titillium Web" panose="00000500000000000000" pitchFamily="2" charset="0"/>
-                        </a:rPr>
-                        <a:t>4,073,219</a:t>
-                      </a:r>
-                    </a:p>
-                  </a:txBody>
-                  <a:tcPr anchor="ctr">
-                    <a:lnL w="12700" cap="flat" cmpd="sng" algn="ctr">
-                      <a:solidFill>
-                        <a:schemeClr val="tx1"/>
-                      </a:solidFill>
-                      <a:prstDash val="solid"/>
-                      <a:round/>
-                      <a:headEnd type="none" w="med" len="med"/>
-                      <a:tailEnd type="none" w="med" len="med"/>
-                    </a:lnL>
-                    <a:lnR w="12700" cap="flat" cmpd="sng" algn="ctr">
-                      <a:solidFill>
-                        <a:schemeClr val="tx1"/>
-                      </a:solidFill>
-                      <a:prstDash val="solid"/>
-                      <a:round/>
-                      <a:headEnd type="none" w="med" len="med"/>
-                      <a:tailEnd type="none" w="med" len="med"/>
-                    </a:lnR>
-                    <a:lnT w="12700" cap="flat" cmpd="sng" algn="ctr">
-                      <a:solidFill>
-                        <a:schemeClr val="tx1"/>
-                      </a:solidFill>
-                      <a:prstDash val="solid"/>
-                      <a:round/>
-                      <a:headEnd type="none" w="med" len="med"/>
-                      <a:tailEnd type="none" w="med" len="med"/>
-                    </a:lnT>
-                    <a:lnB w="12700" cap="flat" cmpd="sng" algn="ctr">
-                      <a:solidFill>
-                        <a:schemeClr val="tx1"/>
-                      </a:solidFill>
-                      <a:prstDash val="solid"/>
-                      <a:round/>
-                      <a:headEnd type="none" w="med" len="med"/>
-                      <a:tailEnd type="none" w="med" len="med"/>
-                    </a:lnB>
-                    <a:solidFill>
-                      <a:srgbClr val="B4D3E2"/>
-                    </a:solidFill>
-                  </a:tcPr>
-                </a:tc>
-                <a:extLst>
-                  <a:ext uri="{0D108BD9-81ED-4DB2-BD59-A6C34878D82A}">
-                    <a16:rowId xmlns:a16="http://schemas.microsoft.com/office/drawing/2014/main" val="731956399"/>
-                  </a:ext>
-                </a:extLst>
-              </a:tr>
-              <a:tr h="0">
-                <a:tc>
-                  <a:txBody>
-                    <a:bodyPr/>
-                    <a:lstStyle/>
-                    <a:p>
-                      <a:pPr>
-                        <a:buNone/>
-                      </a:pPr>
-                      <a:r>
-                        <a:rPr lang="en-US" sz="2800" b="1" dirty="0">
-                          <a:latin typeface="Titillium Web" panose="00000500000000000000" pitchFamily="2" charset="0"/>
-                        </a:rPr>
-                        <a:t>Estimated cost</a:t>
-                      </a:r>
-                    </a:p>
-                  </a:txBody>
-                  <a:tcPr anchor="ctr">
-                    <a:lnL w="12700" cap="flat" cmpd="sng" algn="ctr">
-                      <a:solidFill>
-                        <a:schemeClr val="tx1"/>
-                      </a:solidFill>
-                      <a:prstDash val="solid"/>
-                      <a:round/>
-                      <a:headEnd type="none" w="med" len="med"/>
-                      <a:tailEnd type="none" w="med" len="med"/>
-                    </a:lnL>
-                    <a:lnR w="12700" cap="flat" cmpd="sng" algn="ctr">
-                      <a:solidFill>
-                        <a:schemeClr val="tx1"/>
-                      </a:solidFill>
-                      <a:prstDash val="solid"/>
-                      <a:round/>
-                      <a:headEnd type="none" w="med" len="med"/>
-                      <a:tailEnd type="none" w="med" len="med"/>
-                    </a:lnR>
-                    <a:lnT w="12700" cap="flat" cmpd="sng" algn="ctr">
-                      <a:solidFill>
-                        <a:schemeClr val="tx1"/>
-                      </a:solidFill>
-                      <a:prstDash val="solid"/>
-                      <a:round/>
-                      <a:headEnd type="none" w="med" len="med"/>
-                      <a:tailEnd type="none" w="med" len="med"/>
-                    </a:lnT>
-                    <a:lnB w="12700" cap="flat" cmpd="sng" algn="ctr">
-                      <a:solidFill>
-                        <a:schemeClr val="tx1"/>
-                      </a:solidFill>
-                      <a:prstDash val="solid"/>
-                      <a:round/>
-                      <a:headEnd type="none" w="med" len="med"/>
-                      <a:tailEnd type="none" w="med" len="med"/>
-                    </a:lnB>
-                    <a:solidFill>
-                      <a:srgbClr val="B4D3E2"/>
-                    </a:solidFill>
-                  </a:tcPr>
-                </a:tc>
-                <a:tc>
-                  <a:txBody>
-                    <a:bodyPr/>
-                    <a:lstStyle/>
-                    <a:p>
-                      <a:pPr algn="r">
-                        <a:buNone/>
-                      </a:pPr>
-                      <a:r>
-                        <a:rPr lang="en-US" sz="2800" dirty="0">
-                          <a:latin typeface="Titillium Web" panose="00000500000000000000" pitchFamily="2" charset="0"/>
-                        </a:rPr>
-                        <a:t>$40.51</a:t>
-                      </a:r>
-                    </a:p>
-                  </a:txBody>
-                  <a:tcPr anchor="ctr">
-                    <a:lnL w="12700" cap="flat" cmpd="sng" algn="ctr">
-                      <a:solidFill>
-                        <a:schemeClr val="tx1"/>
-                      </a:solidFill>
-                      <a:prstDash val="solid"/>
-                      <a:round/>
-                      <a:headEnd type="none" w="med" len="med"/>
-                      <a:tailEnd type="none" w="med" len="med"/>
-                    </a:lnL>
-                    <a:lnR w="12700" cap="flat" cmpd="sng" algn="ctr">
-                      <a:solidFill>
-                        <a:schemeClr val="tx1"/>
-                      </a:solidFill>
-                      <a:prstDash val="solid"/>
-                      <a:round/>
-                      <a:headEnd type="none" w="med" len="med"/>
-                      <a:tailEnd type="none" w="med" len="med"/>
-                    </a:lnR>
-                    <a:lnT w="12700" cap="flat" cmpd="sng" algn="ctr">
-                      <a:solidFill>
-                        <a:schemeClr val="tx1"/>
-                      </a:solidFill>
-                      <a:prstDash val="solid"/>
-                      <a:round/>
-                      <a:headEnd type="none" w="med" len="med"/>
-                      <a:tailEnd type="none" w="med" len="med"/>
-                    </a:lnT>
-                    <a:lnB w="12700" cap="flat" cmpd="sng" algn="ctr">
-                      <a:solidFill>
-                        <a:schemeClr val="tx1"/>
-                      </a:solidFill>
-                      <a:prstDash val="solid"/>
-                      <a:round/>
-                      <a:headEnd type="none" w="med" len="med"/>
-                      <a:tailEnd type="none" w="med" len="med"/>
-                    </a:lnB>
-                    <a:solidFill>
-                      <a:srgbClr val="B4D3E2"/>
-                    </a:solidFill>
-                  </a:tcPr>
-                </a:tc>
-                <a:tc>
-                  <a:txBody>
-                    <a:bodyPr/>
-                    <a:lstStyle/>
-                    <a:p>
-                      <a:pPr algn="r">
-                        <a:buNone/>
-                      </a:pPr>
-                      <a:r>
-                        <a:rPr lang="en-US" sz="2800" dirty="0">
-                          <a:latin typeface="Titillium Web" panose="00000500000000000000" pitchFamily="2" charset="0"/>
-                        </a:rPr>
-                        <a:t>$10.19</a:t>
-                      </a:r>
-                    </a:p>
-                  </a:txBody>
-                  <a:tcPr anchor="ctr">
-                    <a:lnL w="12700" cap="flat" cmpd="sng" algn="ctr">
-                      <a:solidFill>
-                        <a:schemeClr val="tx1"/>
-                      </a:solidFill>
-                      <a:prstDash val="solid"/>
-                      <a:round/>
-                      <a:headEnd type="none" w="med" len="med"/>
-                      <a:tailEnd type="none" w="med" len="med"/>
-                    </a:lnL>
-                    <a:lnR w="12700" cap="flat" cmpd="sng" algn="ctr">
-                      <a:solidFill>
-                        <a:schemeClr val="tx1"/>
-                      </a:solidFill>
-                      <a:prstDash val="solid"/>
-                      <a:round/>
-                      <a:headEnd type="none" w="med" len="med"/>
-                      <a:tailEnd type="none" w="med" len="med"/>
-                    </a:lnR>
-                    <a:lnT w="12700" cap="flat" cmpd="sng" algn="ctr">
-                      <a:solidFill>
-                        <a:schemeClr val="tx1"/>
-                      </a:solidFill>
-                      <a:prstDash val="solid"/>
-                      <a:round/>
-                      <a:headEnd type="none" w="med" len="med"/>
-                      <a:tailEnd type="none" w="med" len="med"/>
-                    </a:lnT>
-                    <a:lnB w="12700" cap="flat" cmpd="sng" algn="ctr">
-                      <a:solidFill>
-                        <a:schemeClr val="tx1"/>
-                      </a:solidFill>
-                      <a:prstDash val="solid"/>
-                      <a:round/>
-                      <a:headEnd type="none" w="med" len="med"/>
-                      <a:tailEnd type="none" w="med" len="med"/>
-                    </a:lnB>
-                    <a:solidFill>
-                      <a:srgbClr val="B4D3E2"/>
-                    </a:solidFill>
-                  </a:tcPr>
-                </a:tc>
-                <a:extLst>
-                  <a:ext uri="{0D108BD9-81ED-4DB2-BD59-A6C34878D82A}">
-                    <a16:rowId xmlns:a16="http://schemas.microsoft.com/office/drawing/2014/main" val="3325067963"/>
-                  </a:ext>
-                </a:extLst>
-              </a:tr>
-            </a:tbl>
-          </a:graphicData>
-        </a:graphic>
-      </p:graphicFrame>
       <p:sp>
         <p:nvSpPr>
           <p:cNvPr id="2050" name="Text Box 6">
@@ -7499,596 +5567,11 @@
                 <a:ea typeface="Open Sans" panose="020B0606030504020204" pitchFamily="34" charset="0"/>
                 <a:cs typeface="Open Sans" panose="020B0606030504020204" pitchFamily="34" charset="0"/>
               </a:rPr>
-              <a:t>The global solar energy industry consists of interconnected organizations, technologies, policies, and markets that are difficult to analyze from unstructured information sources. This project uses OpenAI’s GPT-4o to extract entities and relationships from Cornell Newsroom articles and construct a solar energy knowledge graph. Graph analysis and community detection are then applied to identify major themes, influential entities, and connections within the international solar energy ecosystem.</a:t>
+              <a:t>The global solar energy industry consists of interconnected organizations, technologies, policies, and markets that are difficult to analyze from unstructured information sources. This project uses OpenAI’s GPT-4o to extract entities and relationships from Cornell Newsroom articles [1] and construct a solar energy knowledge graph. Graph analysis and community detection are then applied to identify major themes, influential entities, and connections within the international solar energy ecosystem. </a:t>
             </a:r>
           </a:p>
         </p:txBody>
       </p:sp>
-      <p:sp>
-        <p:nvSpPr>
-          <p:cNvPr id="2051" name="Rectangle: Rounded Corners 2050">
-            <a:extLst>
-              <a:ext uri="{FF2B5EF4-FFF2-40B4-BE49-F238E27FC236}">
-                <a16:creationId xmlns:a16="http://schemas.microsoft.com/office/drawing/2014/main" id="{4814BC19-28E3-6671-1C45-FEC7FB747A27}"/>
-              </a:ext>
-            </a:extLst>
-          </p:cNvPr>
-          <p:cNvSpPr/>
-          <p:nvPr/>
-        </p:nvSpPr>
-        <p:spPr bwMode="auto">
-          <a:xfrm>
-            <a:off x="1666969" y="18595094"/>
-            <a:ext cx="1712067" cy="1390020"/>
-          </a:xfrm>
-          <a:prstGeom prst="roundRect">
-            <a:avLst/>
-          </a:prstGeom>
-          <a:solidFill>
-            <a:srgbClr val="B4D3E2"/>
-          </a:solidFill>
-          <a:ln w="9525" cap="flat" cmpd="sng" algn="ctr">
-            <a:solidFill>
-              <a:schemeClr val="tx1"/>
-            </a:solidFill>
-            <a:prstDash val="solid"/>
-            <a:round/>
-            <a:headEnd type="none" w="med" len="med"/>
-            <a:tailEnd type="none" w="med" len="med"/>
-          </a:ln>
-          <a:effectLst/>
-        </p:spPr>
-        <p:txBody>
-          <a:bodyPr vert="horz" wrap="square" lIns="91440" tIns="45720" rIns="91440" bIns="45720" numCol="1" rtlCol="0" anchor="ctr" anchorCtr="1" compatLnSpc="1">
-            <a:prstTxWarp prst="textNoShape">
-              <a:avLst/>
-            </a:prstTxWarp>
-          </a:bodyPr>
-          <a:lstStyle/>
-          <a:p>
-            <a:pPr marL="0" marR="0" indent="0" algn="ctr" defTabSz="4702175" rtl="0" eaLnBrk="1" fontAlgn="base" latinLnBrk="0" hangingPunct="1">
-              <a:lnSpc>
-                <a:spcPct val="100000"/>
-              </a:lnSpc>
-              <a:spcBef>
-                <a:spcPct val="0"/>
-              </a:spcBef>
-              <a:spcAft>
-                <a:spcPct val="0"/>
-              </a:spcAft>
-              <a:buClrTx/>
-              <a:buSzTx/>
-              <a:buFontTx/>
-              <a:buNone/>
-              <a:tabLst/>
-            </a:pPr>
-            <a:r>
-              <a:rPr lang="en-US" sz="2400" dirty="0">
-                <a:latin typeface="Arial" pitchFamily="34" charset="0"/>
-              </a:rPr>
-              <a:t>Data Collection</a:t>
-            </a:r>
-            <a:endParaRPr kumimoji="0" lang="en-US" sz="2400" b="0" i="0" u="none" strike="noStrike" cap="none" normalizeH="0" baseline="0" dirty="0">
-              <a:ln>
-                <a:noFill/>
-              </a:ln>
-              <a:solidFill>
-                <a:schemeClr val="tx1"/>
-              </a:solidFill>
-              <a:effectLst/>
-              <a:latin typeface="Arial" pitchFamily="34" charset="0"/>
-            </a:endParaRPr>
-          </a:p>
-        </p:txBody>
-      </p:sp>
-      <p:sp>
-        <p:nvSpPr>
-          <p:cNvPr id="2054" name="Rectangle: Rounded Corners 2053">
-            <a:extLst>
-              <a:ext uri="{FF2B5EF4-FFF2-40B4-BE49-F238E27FC236}">
-                <a16:creationId xmlns:a16="http://schemas.microsoft.com/office/drawing/2014/main" id="{84AEB166-E2F1-1950-7A73-4BC05C034947}"/>
-              </a:ext>
-            </a:extLst>
-          </p:cNvPr>
-          <p:cNvSpPr/>
-          <p:nvPr/>
-        </p:nvSpPr>
-        <p:spPr bwMode="auto">
-          <a:xfrm>
-            <a:off x="4450065" y="18595094"/>
-            <a:ext cx="1712067" cy="1390020"/>
-          </a:xfrm>
-          <a:prstGeom prst="roundRect">
-            <a:avLst/>
-          </a:prstGeom>
-          <a:solidFill>
-            <a:srgbClr val="B4D3E2"/>
-          </a:solidFill>
-          <a:ln w="9525" cap="flat" cmpd="sng" algn="ctr">
-            <a:solidFill>
-              <a:schemeClr val="tx1"/>
-            </a:solidFill>
-            <a:prstDash val="solid"/>
-            <a:round/>
-            <a:headEnd type="none" w="med" len="med"/>
-            <a:tailEnd type="none" w="med" len="med"/>
-          </a:ln>
-          <a:effectLst/>
-        </p:spPr>
-        <p:txBody>
-          <a:bodyPr vert="horz" wrap="square" lIns="91440" tIns="45720" rIns="91440" bIns="45720" numCol="1" rtlCol="0" anchor="ctr" anchorCtr="1" compatLnSpc="1">
-            <a:prstTxWarp prst="textNoShape">
-              <a:avLst/>
-            </a:prstTxWarp>
-          </a:bodyPr>
-          <a:lstStyle/>
-          <a:p>
-            <a:pPr marL="0" marR="0" indent="0" algn="ctr" defTabSz="4702175" rtl="0" eaLnBrk="1" fontAlgn="base" latinLnBrk="0" hangingPunct="1">
-              <a:lnSpc>
-                <a:spcPct val="100000"/>
-              </a:lnSpc>
-              <a:spcBef>
-                <a:spcPct val="0"/>
-              </a:spcBef>
-              <a:spcAft>
-                <a:spcPct val="0"/>
-              </a:spcAft>
-              <a:buClrTx/>
-              <a:buSzTx/>
-              <a:buFontTx/>
-              <a:buNone/>
-              <a:tabLst/>
-            </a:pPr>
-            <a:r>
-              <a:rPr lang="en-US" sz="2400" dirty="0">
-                <a:latin typeface="Arial" pitchFamily="34" charset="0"/>
-              </a:rPr>
-              <a:t>Data Filtering</a:t>
-            </a:r>
-            <a:endParaRPr kumimoji="0" lang="en-US" sz="2400" b="0" i="0" u="none" strike="noStrike" cap="none" normalizeH="0" baseline="0" dirty="0">
-              <a:ln>
-                <a:noFill/>
-              </a:ln>
-              <a:solidFill>
-                <a:schemeClr val="tx1"/>
-              </a:solidFill>
-              <a:effectLst/>
-              <a:latin typeface="Arial" pitchFamily="34" charset="0"/>
-            </a:endParaRPr>
-          </a:p>
-        </p:txBody>
-      </p:sp>
-      <p:sp>
-        <p:nvSpPr>
-          <p:cNvPr id="2056" name="Rectangle: Rounded Corners 2055">
-            <a:extLst>
-              <a:ext uri="{FF2B5EF4-FFF2-40B4-BE49-F238E27FC236}">
-                <a16:creationId xmlns:a16="http://schemas.microsoft.com/office/drawing/2014/main" id="{F22D4792-2BA9-465A-A834-C3E507D03407}"/>
-              </a:ext>
-            </a:extLst>
-          </p:cNvPr>
-          <p:cNvSpPr/>
-          <p:nvPr/>
-        </p:nvSpPr>
-        <p:spPr bwMode="auto">
-          <a:xfrm>
-            <a:off x="7233161" y="18591513"/>
-            <a:ext cx="3075322" cy="1390020"/>
-          </a:xfrm>
-          <a:prstGeom prst="roundRect">
-            <a:avLst/>
-          </a:prstGeom>
-          <a:solidFill>
-            <a:srgbClr val="B4D3E2"/>
-          </a:solidFill>
-          <a:ln w="9525" cap="flat" cmpd="sng" algn="ctr">
-            <a:solidFill>
-              <a:schemeClr val="tx1"/>
-            </a:solidFill>
-            <a:prstDash val="solid"/>
-            <a:round/>
-            <a:headEnd type="none" w="med" len="med"/>
-            <a:tailEnd type="none" w="med" len="med"/>
-          </a:ln>
-          <a:effectLst/>
-        </p:spPr>
-        <p:txBody>
-          <a:bodyPr vert="horz" wrap="square" lIns="91440" tIns="45720" rIns="91440" bIns="45720" numCol="1" rtlCol="0" anchor="ctr" anchorCtr="1" compatLnSpc="1">
-            <a:prstTxWarp prst="textNoShape">
-              <a:avLst/>
-            </a:prstTxWarp>
-          </a:bodyPr>
-          <a:lstStyle/>
-          <a:p>
-            <a:pPr marL="0" marR="0" indent="0" algn="ctr" defTabSz="4702175" rtl="0" eaLnBrk="1" fontAlgn="base" latinLnBrk="0" hangingPunct="1">
-              <a:lnSpc>
-                <a:spcPct val="100000"/>
-              </a:lnSpc>
-              <a:spcBef>
-                <a:spcPct val="0"/>
-              </a:spcBef>
-              <a:spcAft>
-                <a:spcPct val="0"/>
-              </a:spcAft>
-              <a:buClrTx/>
-              <a:buSzTx/>
-              <a:buFontTx/>
-              <a:buNone/>
-              <a:tabLst/>
-            </a:pPr>
-            <a:r>
-              <a:rPr lang="en-US" sz="2400" dirty="0">
-                <a:latin typeface="Arial" pitchFamily="34" charset="0"/>
-              </a:rPr>
-              <a:t>LLM-Based Information Extraction</a:t>
-            </a:r>
-            <a:endParaRPr kumimoji="0" lang="en-US" sz="2400" b="0" i="0" u="none" strike="noStrike" cap="none" normalizeH="0" baseline="0" dirty="0">
-              <a:ln>
-                <a:noFill/>
-              </a:ln>
-              <a:solidFill>
-                <a:schemeClr val="tx1"/>
-              </a:solidFill>
-              <a:effectLst/>
-              <a:latin typeface="Arial" pitchFamily="34" charset="0"/>
-            </a:endParaRPr>
-          </a:p>
-        </p:txBody>
-      </p:sp>
-      <p:sp>
-        <p:nvSpPr>
-          <p:cNvPr id="2058" name="Rectangle: Rounded Corners 2057">
-            <a:extLst>
-              <a:ext uri="{FF2B5EF4-FFF2-40B4-BE49-F238E27FC236}">
-                <a16:creationId xmlns:a16="http://schemas.microsoft.com/office/drawing/2014/main" id="{FDA0C9EE-51C0-66D1-1994-293D6C012A87}"/>
-              </a:ext>
-            </a:extLst>
-          </p:cNvPr>
-          <p:cNvSpPr/>
-          <p:nvPr/>
-        </p:nvSpPr>
-        <p:spPr bwMode="auto">
-          <a:xfrm>
-            <a:off x="2976324" y="20748529"/>
-            <a:ext cx="2947481" cy="1390020"/>
-          </a:xfrm>
-          <a:prstGeom prst="roundRect">
-            <a:avLst/>
-          </a:prstGeom>
-          <a:solidFill>
-            <a:srgbClr val="B4D3E2"/>
-          </a:solidFill>
-          <a:ln w="9525" cap="flat" cmpd="sng" algn="ctr">
-            <a:solidFill>
-              <a:schemeClr val="tx1"/>
-            </a:solidFill>
-            <a:prstDash val="solid"/>
-            <a:round/>
-            <a:headEnd type="none" w="med" len="med"/>
-            <a:tailEnd type="none" w="med" len="med"/>
-          </a:ln>
-          <a:effectLst/>
-        </p:spPr>
-        <p:txBody>
-          <a:bodyPr vert="horz" wrap="square" lIns="91440" tIns="45720" rIns="91440" bIns="45720" numCol="1" rtlCol="0" anchor="ctr" anchorCtr="1" compatLnSpc="1">
-            <a:prstTxWarp prst="textNoShape">
-              <a:avLst/>
-            </a:prstTxWarp>
-          </a:bodyPr>
-          <a:lstStyle/>
-          <a:p>
-            <a:pPr marL="0" marR="0" indent="0" algn="ctr" defTabSz="4702175" rtl="0" eaLnBrk="1" fontAlgn="base" latinLnBrk="0" hangingPunct="1">
-              <a:lnSpc>
-                <a:spcPct val="100000"/>
-              </a:lnSpc>
-              <a:spcBef>
-                <a:spcPct val="0"/>
-              </a:spcBef>
-              <a:spcAft>
-                <a:spcPct val="0"/>
-              </a:spcAft>
-              <a:buClrTx/>
-              <a:buSzTx/>
-              <a:buFontTx/>
-              <a:buNone/>
-              <a:tabLst/>
-            </a:pPr>
-            <a:r>
-              <a:rPr lang="en-US" sz="2400" dirty="0">
-                <a:latin typeface="Arial" pitchFamily="34" charset="0"/>
-              </a:rPr>
-              <a:t>Knowledge Graph Construction</a:t>
-            </a:r>
-            <a:endParaRPr kumimoji="0" lang="en-US" sz="2400" b="0" i="0" u="none" strike="noStrike" cap="none" normalizeH="0" baseline="0" dirty="0">
-              <a:ln>
-                <a:noFill/>
-              </a:ln>
-              <a:solidFill>
-                <a:schemeClr val="tx1"/>
-              </a:solidFill>
-              <a:effectLst/>
-              <a:latin typeface="Arial" pitchFamily="34" charset="0"/>
-            </a:endParaRPr>
-          </a:p>
-        </p:txBody>
-      </p:sp>
-      <p:sp>
-        <p:nvSpPr>
-          <p:cNvPr id="2060" name="Rectangle: Rounded Corners 2059">
-            <a:extLst>
-              <a:ext uri="{FF2B5EF4-FFF2-40B4-BE49-F238E27FC236}">
-                <a16:creationId xmlns:a16="http://schemas.microsoft.com/office/drawing/2014/main" id="{6E848268-A6FD-662F-01C4-0C52CCA4BE82}"/>
-              </a:ext>
-            </a:extLst>
-          </p:cNvPr>
-          <p:cNvSpPr/>
-          <p:nvPr/>
-        </p:nvSpPr>
-        <p:spPr bwMode="auto">
-          <a:xfrm>
-            <a:off x="6735826" y="20748529"/>
-            <a:ext cx="1712067" cy="1390020"/>
-          </a:xfrm>
-          <a:prstGeom prst="roundRect">
-            <a:avLst/>
-          </a:prstGeom>
-          <a:solidFill>
-            <a:srgbClr val="B4D3E2"/>
-          </a:solidFill>
-          <a:ln w="9525" cap="flat" cmpd="sng" algn="ctr">
-            <a:solidFill>
-              <a:schemeClr val="tx1"/>
-            </a:solidFill>
-            <a:prstDash val="solid"/>
-            <a:round/>
-            <a:headEnd type="none" w="med" len="med"/>
-            <a:tailEnd type="none" w="med" len="med"/>
-          </a:ln>
-          <a:effectLst/>
-        </p:spPr>
-        <p:txBody>
-          <a:bodyPr vert="horz" wrap="square" lIns="91440" tIns="45720" rIns="91440" bIns="45720" numCol="1" rtlCol="0" anchor="ctr" anchorCtr="1" compatLnSpc="1">
-            <a:prstTxWarp prst="textNoShape">
-              <a:avLst/>
-            </a:prstTxWarp>
-          </a:bodyPr>
-          <a:lstStyle/>
-          <a:p>
-            <a:pPr marL="0" marR="0" indent="0" algn="ctr" defTabSz="4702175" rtl="0" eaLnBrk="1" fontAlgn="base" latinLnBrk="0" hangingPunct="1">
-              <a:lnSpc>
-                <a:spcPct val="100000"/>
-              </a:lnSpc>
-              <a:spcBef>
-                <a:spcPct val="0"/>
-              </a:spcBef>
-              <a:spcAft>
-                <a:spcPct val="0"/>
-              </a:spcAft>
-              <a:buClrTx/>
-              <a:buSzTx/>
-              <a:buFontTx/>
-              <a:buNone/>
-              <a:tabLst/>
-            </a:pPr>
-            <a:r>
-              <a:rPr lang="en-US" sz="2400" dirty="0">
-                <a:latin typeface="Arial" pitchFamily="34" charset="0"/>
-              </a:rPr>
-              <a:t>Network Analysis</a:t>
-            </a:r>
-            <a:endParaRPr kumimoji="0" lang="en-US" sz="2400" b="0" i="0" u="none" strike="noStrike" cap="none" normalizeH="0" baseline="0" dirty="0">
-              <a:ln>
-                <a:noFill/>
-              </a:ln>
-              <a:solidFill>
-                <a:schemeClr val="tx1"/>
-              </a:solidFill>
-              <a:effectLst/>
-              <a:latin typeface="Arial" pitchFamily="34" charset="0"/>
-            </a:endParaRPr>
-          </a:p>
-        </p:txBody>
-      </p:sp>
-      <p:cxnSp>
-        <p:nvCxnSpPr>
-          <p:cNvPr id="2062" name="Straight Arrow Connector 2061">
-            <a:extLst>
-              <a:ext uri="{FF2B5EF4-FFF2-40B4-BE49-F238E27FC236}">
-                <a16:creationId xmlns:a16="http://schemas.microsoft.com/office/drawing/2014/main" id="{AFBCFF72-AAFD-3EC2-D05C-2884D4AE3516}"/>
-              </a:ext>
-            </a:extLst>
-          </p:cNvPr>
-          <p:cNvCxnSpPr>
-            <a:stCxn id="2051" idx="3"/>
-            <a:endCxn id="2054" idx="1"/>
-          </p:cNvCxnSpPr>
-          <p:nvPr/>
-        </p:nvCxnSpPr>
-        <p:spPr bwMode="auto">
-          <a:xfrm>
-            <a:off x="3379036" y="19290104"/>
-            <a:ext cx="1071029" cy="0"/>
-          </a:xfrm>
-          <a:prstGeom prst="straightConnector1">
-            <a:avLst/>
-          </a:prstGeom>
-          <a:solidFill>
-            <a:schemeClr val="accent1"/>
-          </a:solidFill>
-          <a:ln w="9525" cap="flat" cmpd="sng" algn="ctr">
-            <a:solidFill>
-              <a:schemeClr val="tx1"/>
-            </a:solidFill>
-            <a:prstDash val="solid"/>
-            <a:round/>
-            <a:headEnd type="none" w="med" len="med"/>
-            <a:tailEnd type="triangle" w="lg" len="lg"/>
-          </a:ln>
-          <a:effectLst/>
-          <a:extLst>
-            <a:ext uri="{AF507438-7753-43E0-B8FC-AC1667EBCBE1}">
-              <a14:hiddenEffects xmlns:a14="http://schemas.microsoft.com/office/drawing/2010/main">
-                <a:effectLst>
-                  <a:outerShdw dist="35921" dir="2700000" algn="ctr" rotWithShape="0">
-                    <a:schemeClr val="bg2"/>
-                  </a:outerShdw>
-                </a:effectLst>
-              </a14:hiddenEffects>
-            </a:ext>
-          </a:extLst>
-        </p:spPr>
-      </p:cxnSp>
-      <p:cxnSp>
-        <p:nvCxnSpPr>
-          <p:cNvPr id="2063" name="Straight Arrow Connector 2062">
-            <a:extLst>
-              <a:ext uri="{FF2B5EF4-FFF2-40B4-BE49-F238E27FC236}">
-                <a16:creationId xmlns:a16="http://schemas.microsoft.com/office/drawing/2014/main" id="{92468783-B67E-B10D-2C2F-1533D3CB2A59}"/>
-              </a:ext>
-            </a:extLst>
-          </p:cNvPr>
-          <p:cNvCxnSpPr>
-            <a:stCxn id="2054" idx="3"/>
-            <a:endCxn id="2056" idx="1"/>
-          </p:cNvCxnSpPr>
-          <p:nvPr/>
-        </p:nvCxnSpPr>
-        <p:spPr bwMode="auto">
-          <a:xfrm flipV="1">
-            <a:off x="6162132" y="19286523"/>
-            <a:ext cx="1071029" cy="3581"/>
-          </a:xfrm>
-          <a:prstGeom prst="straightConnector1">
-            <a:avLst/>
-          </a:prstGeom>
-          <a:solidFill>
-            <a:schemeClr val="accent1"/>
-          </a:solidFill>
-          <a:ln w="9525" cap="flat" cmpd="sng" algn="ctr">
-            <a:solidFill>
-              <a:schemeClr val="tx1"/>
-            </a:solidFill>
-            <a:prstDash val="solid"/>
-            <a:round/>
-            <a:headEnd type="none" w="med" len="med"/>
-            <a:tailEnd type="triangle" w="lg" len="lg"/>
-          </a:ln>
-          <a:effectLst/>
-          <a:extLst>
-            <a:ext uri="{AF507438-7753-43E0-B8FC-AC1667EBCBE1}">
-              <a14:hiddenEffects xmlns:a14="http://schemas.microsoft.com/office/drawing/2010/main">
-                <a:effectLst>
-                  <a:outerShdw dist="35921" dir="2700000" algn="ctr" rotWithShape="0">
-                    <a:schemeClr val="bg2"/>
-                  </a:outerShdw>
-                </a:effectLst>
-              </a14:hiddenEffects>
-            </a:ext>
-          </a:extLst>
-        </p:spPr>
-      </p:cxnSp>
-      <p:cxnSp>
-        <p:nvCxnSpPr>
-          <p:cNvPr id="2067" name="Straight Arrow Connector 2066">
-            <a:extLst>
-              <a:ext uri="{FF2B5EF4-FFF2-40B4-BE49-F238E27FC236}">
-                <a16:creationId xmlns:a16="http://schemas.microsoft.com/office/drawing/2014/main" id="{29324F28-B740-8CCE-37B7-783481D15E06}"/>
-              </a:ext>
-            </a:extLst>
-          </p:cNvPr>
-          <p:cNvCxnSpPr>
-            <a:stCxn id="2058" idx="3"/>
-            <a:endCxn id="2060" idx="1"/>
-          </p:cNvCxnSpPr>
-          <p:nvPr/>
-        </p:nvCxnSpPr>
-        <p:spPr bwMode="auto">
-          <a:xfrm>
-            <a:off x="5923805" y="21443539"/>
-            <a:ext cx="812021" cy="0"/>
-          </a:xfrm>
-          <a:prstGeom prst="straightConnector1">
-            <a:avLst/>
-          </a:prstGeom>
-          <a:solidFill>
-            <a:schemeClr val="accent1"/>
-          </a:solidFill>
-          <a:ln w="9525" cap="flat" cmpd="sng" algn="ctr">
-            <a:solidFill>
-              <a:schemeClr val="tx1"/>
-            </a:solidFill>
-            <a:prstDash val="solid"/>
-            <a:round/>
-            <a:headEnd type="none" w="med" len="med"/>
-            <a:tailEnd type="triangle" w="lg" len="lg"/>
-          </a:ln>
-          <a:effectLst/>
-          <a:extLst>
-            <a:ext uri="{AF507438-7753-43E0-B8FC-AC1667EBCBE1}">
-              <a14:hiddenEffects xmlns:a14="http://schemas.microsoft.com/office/drawing/2010/main">
-                <a:effectLst>
-                  <a:outerShdw dist="35921" dir="2700000" algn="ctr" rotWithShape="0">
-                    <a:schemeClr val="bg2"/>
-                  </a:outerShdw>
-                </a:effectLst>
-              </a14:hiddenEffects>
-            </a:ext>
-          </a:extLst>
-        </p:spPr>
-      </p:cxnSp>
-      <p:cxnSp>
-        <p:nvCxnSpPr>
-          <p:cNvPr id="2074" name="Connector: Elbow 2073">
-            <a:extLst>
-              <a:ext uri="{FF2B5EF4-FFF2-40B4-BE49-F238E27FC236}">
-                <a16:creationId xmlns:a16="http://schemas.microsoft.com/office/drawing/2014/main" id="{D53C8133-2288-D327-CCB3-446B89C6410E}"/>
-              </a:ext>
-            </a:extLst>
-          </p:cNvPr>
-          <p:cNvCxnSpPr>
-            <a:stCxn id="2056" idx="3"/>
-            <a:endCxn id="2058" idx="1"/>
-          </p:cNvCxnSpPr>
-          <p:nvPr/>
-        </p:nvCxnSpPr>
-        <p:spPr bwMode="auto">
-          <a:xfrm flipH="1">
-            <a:off x="2976324" y="19286523"/>
-            <a:ext cx="7332159" cy="2157016"/>
-          </a:xfrm>
-          <a:prstGeom prst="bentConnector5">
-            <a:avLst>
-              <a:gd name="adj1" fmla="val -3118"/>
-              <a:gd name="adj2" fmla="val 50000"/>
-              <a:gd name="adj3" fmla="val 103118"/>
-            </a:avLst>
-          </a:prstGeom>
-          <a:solidFill>
-            <a:schemeClr val="accent1"/>
-          </a:solidFill>
-          <a:ln w="9525" cap="flat" cmpd="sng" algn="ctr">
-            <a:solidFill>
-              <a:schemeClr val="tx1"/>
-            </a:solidFill>
-            <a:prstDash val="solid"/>
-            <a:round/>
-            <a:headEnd type="none" w="med" len="med"/>
-            <a:tailEnd type="triangle" w="lg" len="lg"/>
-          </a:ln>
-          <a:effectLst/>
-          <a:extLst>
-            <a:ext uri="{AF507438-7753-43E0-B8FC-AC1667EBCBE1}">
-              <a14:hiddenEffects xmlns:a14="http://schemas.microsoft.com/office/drawing/2010/main">
-                <a:effectLst>
-                  <a:outerShdw dist="35921" dir="2700000" algn="ctr" rotWithShape="0">
-                    <a:schemeClr val="bg2"/>
-                  </a:outerShdw>
-                </a:effectLst>
-              </a14:hiddenEffects>
-            </a:ext>
-          </a:extLst>
-        </p:spPr>
-      </p:cxnSp>
       <p:sp>
         <p:nvSpPr>
           <p:cNvPr id="2082" name="Rectangle 5">
@@ -8309,7 +5792,2499 @@
       </p:sp>
       <p:grpSp>
         <p:nvGrpSpPr>
-          <p:cNvPr id="2095" name="Group 2094">
+          <p:cNvPr id="2110" name="Group 2109">
+            <a:extLst>
+              <a:ext uri="{FF2B5EF4-FFF2-40B4-BE49-F238E27FC236}">
+                <a16:creationId xmlns:a16="http://schemas.microsoft.com/office/drawing/2014/main" id="{BD8C874A-8BB3-D0E9-5A84-B873AA0B41C8}"/>
+              </a:ext>
+            </a:extLst>
+          </p:cNvPr>
+          <p:cNvGrpSpPr/>
+          <p:nvPr/>
+        </p:nvGrpSpPr>
+        <p:grpSpPr>
+          <a:xfrm>
+            <a:off x="812992" y="18990980"/>
+            <a:ext cx="2835600" cy="3237742"/>
+            <a:chOff x="11268654" y="17903864"/>
+            <a:chExt cx="2835600" cy="3237742"/>
+          </a:xfrm>
+        </p:grpSpPr>
+        <p:pic>
+          <p:nvPicPr>
+            <p:cNvPr id="2097" name="Picture 2096">
+              <a:extLst>
+                <a:ext uri="{FF2B5EF4-FFF2-40B4-BE49-F238E27FC236}">
+                  <a16:creationId xmlns:a16="http://schemas.microsoft.com/office/drawing/2014/main" id="{0EF28273-BCDE-65EB-502C-9AD3EB1E718F}"/>
+                </a:ext>
+              </a:extLst>
+            </p:cNvPr>
+            <p:cNvPicPr>
+              <a:picLocks noChangeAspect="1"/>
+            </p:cNvPicPr>
+            <p:nvPr/>
+          </p:nvPicPr>
+          <p:blipFill>
+            <a:blip r:embed="rId5">
+              <a:clrChange>
+                <a:clrFrom>
+                  <a:srgbClr val="FFFFFF"/>
+                </a:clrFrom>
+                <a:clrTo>
+                  <a:srgbClr val="FFFFFF">
+                    <a:alpha val="0"/>
+                  </a:srgbClr>
+                </a:clrTo>
+              </a:clrChange>
+              <a:duotone>
+                <a:prstClr val="black"/>
+                <a:schemeClr val="tx1">
+                  <a:tint val="45000"/>
+                  <a:satMod val="400000"/>
+                </a:schemeClr>
+              </a:duotone>
+              <a:extLst>
+                <a:ext uri="{BEBA8EAE-BF5A-486C-A8C5-ECC9F3942E4B}">
+                  <a14:imgProps xmlns:a14="http://schemas.microsoft.com/office/drawing/2010/main">
+                    <a14:imgLayer r:embed="rId6">
+                      <a14:imgEffect>
+                        <a14:saturation sat="0"/>
+                      </a14:imgEffect>
+                    </a14:imgLayer>
+                  </a14:imgProps>
+                </a:ext>
+              </a:extLst>
+            </a:blip>
+            <a:srcRect l="7605" t="11537" r="6054" b="3460"/>
+            <a:stretch>
+              <a:fillRect/>
+            </a:stretch>
+          </p:blipFill>
+          <p:spPr>
+            <a:xfrm>
+              <a:off x="11771387" y="17903864"/>
+              <a:ext cx="1830133" cy="1297904"/>
+            </a:xfrm>
+            <a:prstGeom prst="rect">
+              <a:avLst/>
+            </a:prstGeom>
+          </p:spPr>
+        </p:pic>
+        <p:sp>
+          <p:nvSpPr>
+            <p:cNvPr id="2100" name="TextBox 2099">
+              <a:extLst>
+                <a:ext uri="{FF2B5EF4-FFF2-40B4-BE49-F238E27FC236}">
+                  <a16:creationId xmlns:a16="http://schemas.microsoft.com/office/drawing/2014/main" id="{E38D05A2-59A1-0A50-9247-E56AA9DFC299}"/>
+                </a:ext>
+              </a:extLst>
+            </p:cNvPr>
+            <p:cNvSpPr txBox="1"/>
+            <p:nvPr/>
+          </p:nvSpPr>
+          <p:spPr>
+            <a:xfrm>
+              <a:off x="11268654" y="19571946"/>
+              <a:ext cx="2835600" cy="1569660"/>
+            </a:xfrm>
+            <a:prstGeom prst="rect">
+              <a:avLst/>
+            </a:prstGeom>
+            <a:noFill/>
+          </p:spPr>
+          <p:txBody>
+            <a:bodyPr wrap="square" rtlCol="0">
+              <a:spAutoFit/>
+            </a:bodyPr>
+            <a:lstStyle/>
+            <a:p>
+              <a:pPr algn="ctr"/>
+              <a:r>
+                <a:rPr lang="en-US" sz="2400" dirty="0">
+                  <a:latin typeface="Titillium Web" panose="00000500000000000000" pitchFamily="2" charset="0"/>
+                </a:rPr>
+                <a:t>Newsroom dataset for shortened summaries and article links</a:t>
+              </a:r>
+            </a:p>
+          </p:txBody>
+        </p:sp>
+      </p:grpSp>
+      <p:grpSp>
+        <p:nvGrpSpPr>
+          <p:cNvPr id="258" name="Group 257">
+            <a:extLst>
+              <a:ext uri="{FF2B5EF4-FFF2-40B4-BE49-F238E27FC236}">
+                <a16:creationId xmlns:a16="http://schemas.microsoft.com/office/drawing/2014/main" id="{812BCE9D-A7B5-0A6F-9B57-50AD6B541BE7}"/>
+              </a:ext>
+            </a:extLst>
+          </p:cNvPr>
+          <p:cNvGrpSpPr/>
+          <p:nvPr/>
+        </p:nvGrpSpPr>
+        <p:grpSpPr>
+          <a:xfrm>
+            <a:off x="3975886" y="18777776"/>
+            <a:ext cx="2897708" cy="2954550"/>
+            <a:chOff x="14320811" y="16455917"/>
+            <a:chExt cx="2897708" cy="2954550"/>
+          </a:xfrm>
+        </p:grpSpPr>
+        <p:pic>
+          <p:nvPicPr>
+            <p:cNvPr id="2106" name="Picture 2105" descr="Paper stack - Free industry icons">
+              <a:extLst>
+                <a:ext uri="{FF2B5EF4-FFF2-40B4-BE49-F238E27FC236}">
+                  <a16:creationId xmlns:a16="http://schemas.microsoft.com/office/drawing/2014/main" id="{27FABE1E-F52C-AFFA-F49B-1D8DD948AD42}"/>
+                </a:ext>
+              </a:extLst>
+            </p:cNvPr>
+            <p:cNvPicPr>
+              <a:picLocks noChangeAspect="1"/>
+            </p:cNvPicPr>
+            <p:nvPr/>
+          </p:nvPicPr>
+          <p:blipFill>
+            <a:blip r:embed="rId7"/>
+            <a:stretch>
+              <a:fillRect/>
+            </a:stretch>
+          </p:blipFill>
+          <p:spPr>
+            <a:xfrm>
+              <a:off x="14921545" y="16455917"/>
+              <a:ext cx="1734434" cy="1734434"/>
+            </a:xfrm>
+            <a:prstGeom prst="rect">
+              <a:avLst/>
+            </a:prstGeom>
+          </p:spPr>
+        </p:pic>
+        <p:sp>
+          <p:nvSpPr>
+            <p:cNvPr id="2108" name="TextBox 2107">
+              <a:extLst>
+                <a:ext uri="{FF2B5EF4-FFF2-40B4-BE49-F238E27FC236}">
+                  <a16:creationId xmlns:a16="http://schemas.microsoft.com/office/drawing/2014/main" id="{9DB26A26-6092-2340-3D1A-B6086E6B5D28}"/>
+                </a:ext>
+              </a:extLst>
+            </p:cNvPr>
+            <p:cNvSpPr txBox="1"/>
+            <p:nvPr/>
+          </p:nvSpPr>
+          <p:spPr>
+            <a:xfrm>
+              <a:off x="14320811" y="18210138"/>
+              <a:ext cx="2897708" cy="1200329"/>
+            </a:xfrm>
+            <a:prstGeom prst="rect">
+              <a:avLst/>
+            </a:prstGeom>
+            <a:noFill/>
+          </p:spPr>
+          <p:txBody>
+            <a:bodyPr wrap="square" rtlCol="0">
+              <a:spAutoFit/>
+            </a:bodyPr>
+            <a:lstStyle/>
+            <a:p>
+              <a:pPr algn="ctr"/>
+              <a:r>
+                <a:rPr lang="en-US" sz="2400" dirty="0">
+                  <a:latin typeface="Titillium Web" panose="00000500000000000000" pitchFamily="2" charset="0"/>
+                </a:rPr>
+                <a:t>Articles containing solar energy bigrams are extracted</a:t>
+              </a:r>
+            </a:p>
+          </p:txBody>
+        </p:sp>
+      </p:grpSp>
+      <p:grpSp>
+        <p:nvGrpSpPr>
+          <p:cNvPr id="257" name="Group 256">
+            <a:extLst>
+              <a:ext uri="{FF2B5EF4-FFF2-40B4-BE49-F238E27FC236}">
+                <a16:creationId xmlns:a16="http://schemas.microsoft.com/office/drawing/2014/main" id="{06F85A82-1435-258F-B881-2721190A1B08}"/>
+              </a:ext>
+            </a:extLst>
+          </p:cNvPr>
+          <p:cNvGrpSpPr/>
+          <p:nvPr/>
+        </p:nvGrpSpPr>
+        <p:grpSpPr>
+          <a:xfrm>
+            <a:off x="620639" y="23413236"/>
+            <a:ext cx="2835600" cy="3227613"/>
+            <a:chOff x="14172654" y="20844008"/>
+            <a:chExt cx="2835600" cy="3227613"/>
+          </a:xfrm>
+        </p:grpSpPr>
+        <p:pic>
+          <p:nvPicPr>
+            <p:cNvPr id="2109" name="Picture 2108" descr="Speech bubble - Free communications icons">
+              <a:extLst>
+                <a:ext uri="{FF2B5EF4-FFF2-40B4-BE49-F238E27FC236}">
+                  <a16:creationId xmlns:a16="http://schemas.microsoft.com/office/drawing/2014/main" id="{E3DB4E16-F913-D331-060F-3243A3F6A9E8}"/>
+                </a:ext>
+              </a:extLst>
+            </p:cNvPr>
+            <p:cNvPicPr>
+              <a:picLocks noChangeAspect="1"/>
+            </p:cNvPicPr>
+            <p:nvPr/>
+          </p:nvPicPr>
+          <p:blipFill>
+            <a:blip r:embed="rId8"/>
+            <a:stretch>
+              <a:fillRect/>
+            </a:stretch>
+          </p:blipFill>
+          <p:spPr>
+            <a:xfrm>
+              <a:off x="14972710" y="20844008"/>
+              <a:ext cx="1620194" cy="1620194"/>
+            </a:xfrm>
+            <a:prstGeom prst="rect">
+              <a:avLst/>
+            </a:prstGeom>
+          </p:spPr>
+        </p:pic>
+        <p:sp>
+          <p:nvSpPr>
+            <p:cNvPr id="256" name="TextBox 255">
+              <a:extLst>
+                <a:ext uri="{FF2B5EF4-FFF2-40B4-BE49-F238E27FC236}">
+                  <a16:creationId xmlns:a16="http://schemas.microsoft.com/office/drawing/2014/main" id="{9C135B69-FC67-5297-FB9A-CA7D7E65FA94}"/>
+                </a:ext>
+              </a:extLst>
+            </p:cNvPr>
+            <p:cNvSpPr txBox="1"/>
+            <p:nvPr/>
+          </p:nvSpPr>
+          <p:spPr>
+            <a:xfrm>
+              <a:off x="14172654" y="22501961"/>
+              <a:ext cx="2835600" cy="1569660"/>
+            </a:xfrm>
+            <a:prstGeom prst="rect">
+              <a:avLst/>
+            </a:prstGeom>
+            <a:noFill/>
+          </p:spPr>
+          <p:txBody>
+            <a:bodyPr wrap="square" rtlCol="0">
+              <a:spAutoFit/>
+            </a:bodyPr>
+            <a:lstStyle/>
+            <a:p>
+              <a:pPr algn="ctr"/>
+              <a:r>
+                <a:rPr lang="en-US" sz="2400" dirty="0">
+                  <a:latin typeface="Titillium Web" panose="00000500000000000000" pitchFamily="2" charset="0"/>
+                </a:rPr>
+                <a:t>Bigrams containing the word “solar” are extracted from article summaries</a:t>
+              </a:r>
+            </a:p>
+          </p:txBody>
+        </p:sp>
+      </p:grpSp>
+      <p:cxnSp>
+        <p:nvCxnSpPr>
+          <p:cNvPr id="260" name="Straight Arrow Connector 259">
+            <a:extLst>
+              <a:ext uri="{FF2B5EF4-FFF2-40B4-BE49-F238E27FC236}">
+                <a16:creationId xmlns:a16="http://schemas.microsoft.com/office/drawing/2014/main" id="{2B235113-9EA3-9818-9627-9289279F78F5}"/>
+              </a:ext>
+            </a:extLst>
+          </p:cNvPr>
+          <p:cNvCxnSpPr>
+            <a:cxnSpLocks/>
+            <a:stCxn id="2100" idx="2"/>
+            <a:endCxn id="2109" idx="0"/>
+          </p:cNvCxnSpPr>
+          <p:nvPr/>
+        </p:nvCxnSpPr>
+        <p:spPr bwMode="auto">
+          <a:xfrm>
+            <a:off x="2230792" y="22228722"/>
+            <a:ext cx="0" cy="1184514"/>
+          </a:xfrm>
+          <a:prstGeom prst="straightConnector1">
+            <a:avLst/>
+          </a:prstGeom>
+          <a:solidFill>
+            <a:schemeClr val="accent1"/>
+          </a:solidFill>
+          <a:ln w="25400" cap="flat" cmpd="sng" algn="ctr">
+            <a:solidFill>
+              <a:schemeClr val="tx1"/>
+            </a:solidFill>
+            <a:prstDash val="solid"/>
+            <a:round/>
+            <a:headEnd type="none" w="med" len="med"/>
+            <a:tailEnd type="triangle" w="lg" len="lg"/>
+          </a:ln>
+          <a:effectLst/>
+          <a:extLst>
+            <a:ext uri="{AF507438-7753-43E0-B8FC-AC1667EBCBE1}">
+              <a14:hiddenEffects xmlns:a14="http://schemas.microsoft.com/office/drawing/2010/main">
+                <a:effectLst>
+                  <a:outerShdw dist="35921" dir="2700000" algn="ctr" rotWithShape="0">
+                    <a:schemeClr val="bg2"/>
+                  </a:outerShdw>
+                </a:effectLst>
+              </a14:hiddenEffects>
+            </a:ext>
+          </a:extLst>
+        </p:spPr>
+      </p:cxnSp>
+      <p:cxnSp>
+        <p:nvCxnSpPr>
+          <p:cNvPr id="263" name="Straight Arrow Connector 262">
+            <a:extLst>
+              <a:ext uri="{FF2B5EF4-FFF2-40B4-BE49-F238E27FC236}">
+                <a16:creationId xmlns:a16="http://schemas.microsoft.com/office/drawing/2014/main" id="{B28FDD5C-FD63-0FD7-8CF4-934854B3D552}"/>
+              </a:ext>
+            </a:extLst>
+          </p:cNvPr>
+          <p:cNvCxnSpPr>
+            <a:cxnSpLocks/>
+            <a:stCxn id="2109" idx="0"/>
+            <a:endCxn id="2106" idx="1"/>
+          </p:cNvCxnSpPr>
+          <p:nvPr/>
+        </p:nvCxnSpPr>
+        <p:spPr bwMode="auto">
+          <a:xfrm flipV="1">
+            <a:off x="2230792" y="19644993"/>
+            <a:ext cx="2345828" cy="3768243"/>
+          </a:xfrm>
+          <a:prstGeom prst="straightConnector1">
+            <a:avLst/>
+          </a:prstGeom>
+          <a:solidFill>
+            <a:schemeClr val="accent1"/>
+          </a:solidFill>
+          <a:ln w="25400" cap="flat" cmpd="sng" algn="ctr">
+            <a:solidFill>
+              <a:schemeClr val="tx1"/>
+            </a:solidFill>
+            <a:prstDash val="solid"/>
+            <a:round/>
+            <a:headEnd type="none" w="med" len="med"/>
+            <a:tailEnd type="triangle" w="lg" len="lg"/>
+          </a:ln>
+          <a:effectLst/>
+          <a:extLst>
+            <a:ext uri="{AF507438-7753-43E0-B8FC-AC1667EBCBE1}">
+              <a14:hiddenEffects xmlns:a14="http://schemas.microsoft.com/office/drawing/2010/main">
+                <a:effectLst>
+                  <a:outerShdw dist="35921" dir="2700000" algn="ctr" rotWithShape="0">
+                    <a:schemeClr val="bg2"/>
+                  </a:outerShdw>
+                </a:effectLst>
+              </a14:hiddenEffects>
+            </a:ext>
+          </a:extLst>
+        </p:spPr>
+      </p:cxnSp>
+      <p:grpSp>
+        <p:nvGrpSpPr>
+          <p:cNvPr id="274" name="Group 273">
+            <a:extLst>
+              <a:ext uri="{FF2B5EF4-FFF2-40B4-BE49-F238E27FC236}">
+                <a16:creationId xmlns:a16="http://schemas.microsoft.com/office/drawing/2014/main" id="{A4566E2F-C6DE-A4F4-233E-659F50EBAF37}"/>
+              </a:ext>
+            </a:extLst>
+          </p:cNvPr>
+          <p:cNvGrpSpPr/>
+          <p:nvPr/>
+        </p:nvGrpSpPr>
+        <p:grpSpPr>
+          <a:xfrm>
+            <a:off x="7768834" y="18813122"/>
+            <a:ext cx="2450893" cy="3467354"/>
+            <a:chOff x="22927343" y="18842102"/>
+            <a:chExt cx="2450893" cy="3467354"/>
+          </a:xfrm>
+        </p:grpSpPr>
+        <p:pic>
+          <p:nvPicPr>
+            <p:cNvPr id="2105" name="Picture 2104" descr="Documents symbol - Free interface icons">
+              <a:extLst>
+                <a:ext uri="{FF2B5EF4-FFF2-40B4-BE49-F238E27FC236}">
+                  <a16:creationId xmlns:a16="http://schemas.microsoft.com/office/drawing/2014/main" id="{A5B51A1F-98F9-2176-627A-3E3D14C157E2}"/>
+                </a:ext>
+              </a:extLst>
+            </p:cNvPr>
+            <p:cNvPicPr>
+              <a:picLocks noChangeAspect="1"/>
+            </p:cNvPicPr>
+            <p:nvPr/>
+          </p:nvPicPr>
+          <p:blipFill>
+            <a:blip r:embed="rId9"/>
+            <a:stretch>
+              <a:fillRect/>
+            </a:stretch>
+          </p:blipFill>
+          <p:spPr>
+            <a:xfrm>
+              <a:off x="23151517" y="18842102"/>
+              <a:ext cx="1669948" cy="1669948"/>
+            </a:xfrm>
+            <a:prstGeom prst="rect">
+              <a:avLst/>
+            </a:prstGeom>
+          </p:spPr>
+        </p:pic>
+        <p:sp>
+          <p:nvSpPr>
+            <p:cNvPr id="273" name="TextBox 272">
+              <a:extLst>
+                <a:ext uri="{FF2B5EF4-FFF2-40B4-BE49-F238E27FC236}">
+                  <a16:creationId xmlns:a16="http://schemas.microsoft.com/office/drawing/2014/main" id="{BAB6EF2E-E6B5-C552-DC4F-D087AD8CD3B1}"/>
+                </a:ext>
+              </a:extLst>
+            </p:cNvPr>
+            <p:cNvSpPr txBox="1"/>
+            <p:nvPr/>
+          </p:nvSpPr>
+          <p:spPr>
+            <a:xfrm>
+              <a:off x="22927343" y="20739796"/>
+              <a:ext cx="2450893" cy="1569660"/>
+            </a:xfrm>
+            <a:prstGeom prst="rect">
+              <a:avLst/>
+            </a:prstGeom>
+            <a:noFill/>
+          </p:spPr>
+          <p:txBody>
+            <a:bodyPr wrap="square" rtlCol="0">
+              <a:spAutoFit/>
+            </a:bodyPr>
+            <a:lstStyle/>
+            <a:p>
+              <a:pPr algn="ctr"/>
+              <a:r>
+                <a:rPr lang="en-US" sz="2400" dirty="0">
+                  <a:latin typeface="Titillium Web" panose="00000500000000000000" pitchFamily="2" charset="0"/>
+                </a:rPr>
+                <a:t>Articles with &lt;2 solar keyword mentions are removed</a:t>
+              </a:r>
+            </a:p>
+          </p:txBody>
+        </p:sp>
+      </p:grpSp>
+      <p:cxnSp>
+        <p:nvCxnSpPr>
+          <p:cNvPr id="283" name="Straight Arrow Connector 282">
+            <a:extLst>
+              <a:ext uri="{FF2B5EF4-FFF2-40B4-BE49-F238E27FC236}">
+                <a16:creationId xmlns:a16="http://schemas.microsoft.com/office/drawing/2014/main" id="{A3996057-803F-B803-B727-6AB667E44114}"/>
+              </a:ext>
+            </a:extLst>
+          </p:cNvPr>
+          <p:cNvCxnSpPr>
+            <a:cxnSpLocks/>
+            <a:stCxn id="2106" idx="3"/>
+            <a:endCxn id="2105" idx="1"/>
+          </p:cNvCxnSpPr>
+          <p:nvPr/>
+        </p:nvCxnSpPr>
+        <p:spPr bwMode="auto">
+          <a:xfrm>
+            <a:off x="6311054" y="19644993"/>
+            <a:ext cx="1681954" cy="3103"/>
+          </a:xfrm>
+          <a:prstGeom prst="straightConnector1">
+            <a:avLst/>
+          </a:prstGeom>
+          <a:solidFill>
+            <a:schemeClr val="accent1"/>
+          </a:solidFill>
+          <a:ln w="25400" cap="flat" cmpd="sng" algn="ctr">
+            <a:solidFill>
+              <a:schemeClr val="tx1"/>
+            </a:solidFill>
+            <a:prstDash val="solid"/>
+            <a:round/>
+            <a:headEnd type="none" w="med" len="med"/>
+            <a:tailEnd type="triangle" w="lg" len="lg"/>
+          </a:ln>
+          <a:effectLst/>
+          <a:extLst>
+            <a:ext uri="{AF507438-7753-43E0-B8FC-AC1667EBCBE1}">
+              <a14:hiddenEffects xmlns:a14="http://schemas.microsoft.com/office/drawing/2010/main">
+                <a:effectLst>
+                  <a:outerShdw dist="35921" dir="2700000" algn="ctr" rotWithShape="0">
+                    <a:schemeClr val="bg2"/>
+                  </a:outerShdw>
+                </a:effectLst>
+              </a14:hiddenEffects>
+            </a:ext>
+          </a:extLst>
+        </p:spPr>
+      </p:cxnSp>
+      <p:grpSp>
+        <p:nvGrpSpPr>
+          <p:cNvPr id="304" name="Group 303">
+            <a:extLst>
+              <a:ext uri="{FF2B5EF4-FFF2-40B4-BE49-F238E27FC236}">
+                <a16:creationId xmlns:a16="http://schemas.microsoft.com/office/drawing/2014/main" id="{E13527E2-6FD1-D660-0653-10F05B23A89B}"/>
+              </a:ext>
+            </a:extLst>
+          </p:cNvPr>
+          <p:cNvGrpSpPr/>
+          <p:nvPr/>
+        </p:nvGrpSpPr>
+        <p:grpSpPr>
+          <a:xfrm>
+            <a:off x="7001145" y="23284031"/>
+            <a:ext cx="3634902" cy="3175218"/>
+            <a:chOff x="20254643" y="16730905"/>
+            <a:chExt cx="3634902" cy="3175218"/>
+          </a:xfrm>
+        </p:grpSpPr>
+        <p:pic>
+          <p:nvPicPr>
+            <p:cNvPr id="288" name="Picture 287" descr="Ai Prompt Icons - Free SVG &amp; PNG Ai Prompt Images - Noun Project">
+              <a:extLst>
+                <a:ext uri="{FF2B5EF4-FFF2-40B4-BE49-F238E27FC236}">
+                  <a16:creationId xmlns:a16="http://schemas.microsoft.com/office/drawing/2014/main" id="{40CCA662-27ED-015A-66DA-7B4286F69895}"/>
+                </a:ext>
+              </a:extLst>
+            </p:cNvPr>
+            <p:cNvPicPr>
+              <a:picLocks noChangeAspect="1"/>
+            </p:cNvPicPr>
+            <p:nvPr/>
+          </p:nvPicPr>
+          <p:blipFill>
+            <a:blip r:embed="rId10"/>
+            <a:srcRect l="23039" t="23415" r="17332" b="26510"/>
+            <a:stretch>
+              <a:fillRect/>
+            </a:stretch>
+          </p:blipFill>
+          <p:spPr>
+            <a:xfrm>
+              <a:off x="20832681" y="16730905"/>
+              <a:ext cx="2217111" cy="1861816"/>
+            </a:xfrm>
+            <a:prstGeom prst="rect">
+              <a:avLst/>
+            </a:prstGeom>
+          </p:spPr>
+        </p:pic>
+        <p:sp>
+          <p:nvSpPr>
+            <p:cNvPr id="290" name="TextBox 289">
+              <a:extLst>
+                <a:ext uri="{FF2B5EF4-FFF2-40B4-BE49-F238E27FC236}">
+                  <a16:creationId xmlns:a16="http://schemas.microsoft.com/office/drawing/2014/main" id="{72124155-A261-8E21-4C4F-E9B51A56936A}"/>
+                </a:ext>
+              </a:extLst>
+            </p:cNvPr>
+            <p:cNvSpPr txBox="1"/>
+            <p:nvPr/>
+          </p:nvSpPr>
+          <p:spPr>
+            <a:xfrm>
+              <a:off x="20254643" y="18705794"/>
+              <a:ext cx="3634902" cy="1200329"/>
+            </a:xfrm>
+            <a:prstGeom prst="rect">
+              <a:avLst/>
+            </a:prstGeom>
+            <a:noFill/>
+          </p:spPr>
+          <p:txBody>
+            <a:bodyPr wrap="square" rtlCol="0">
+              <a:spAutoFit/>
+            </a:bodyPr>
+            <a:lstStyle/>
+            <a:p>
+              <a:pPr algn="ctr"/>
+              <a:r>
+                <a:rPr lang="en-US" sz="2400" dirty="0">
+                  <a:latin typeface="Titillium Web" panose="00000500000000000000" pitchFamily="2" charset="0"/>
+                </a:rPr>
+                <a:t>System prompt, user prompt, and JSON structured output schema</a:t>
+              </a:r>
+            </a:p>
+          </p:txBody>
+        </p:sp>
+      </p:grpSp>
+      <p:cxnSp>
+        <p:nvCxnSpPr>
+          <p:cNvPr id="306" name="Straight Arrow Connector 305">
+            <a:extLst>
+              <a:ext uri="{FF2B5EF4-FFF2-40B4-BE49-F238E27FC236}">
+                <a16:creationId xmlns:a16="http://schemas.microsoft.com/office/drawing/2014/main" id="{5B28372D-E891-FEB2-E6A5-60EAC7C1C64F}"/>
+              </a:ext>
+            </a:extLst>
+          </p:cNvPr>
+          <p:cNvCxnSpPr>
+            <a:cxnSpLocks/>
+            <a:stCxn id="288" idx="1"/>
+            <a:endCxn id="309" idx="3"/>
+          </p:cNvCxnSpPr>
+          <p:nvPr/>
+        </p:nvCxnSpPr>
+        <p:spPr bwMode="auto">
+          <a:xfrm flipH="1">
+            <a:off x="6295006" y="24214939"/>
+            <a:ext cx="1284177" cy="4837"/>
+          </a:xfrm>
+          <a:prstGeom prst="straightConnector1">
+            <a:avLst/>
+          </a:prstGeom>
+          <a:solidFill>
+            <a:schemeClr val="accent1"/>
+          </a:solidFill>
+          <a:ln w="25400" cap="flat" cmpd="sng" algn="ctr">
+            <a:solidFill>
+              <a:schemeClr val="tx1"/>
+            </a:solidFill>
+            <a:prstDash val="solid"/>
+            <a:round/>
+            <a:headEnd type="none" w="med" len="med"/>
+            <a:tailEnd type="triangle" w="lg" len="lg"/>
+          </a:ln>
+          <a:effectLst/>
+          <a:extLst>
+            <a:ext uri="{AF507438-7753-43E0-B8FC-AC1667EBCBE1}">
+              <a14:hiddenEffects xmlns:a14="http://schemas.microsoft.com/office/drawing/2010/main">
+                <a:effectLst>
+                  <a:outerShdw dist="35921" dir="2700000" algn="ctr" rotWithShape="0">
+                    <a:schemeClr val="bg2"/>
+                  </a:outerShdw>
+                </a:effectLst>
+              </a14:hiddenEffects>
+            </a:ext>
+          </a:extLst>
+        </p:spPr>
+      </p:cxnSp>
+      <p:grpSp>
+        <p:nvGrpSpPr>
+          <p:cNvPr id="313" name="Group 312">
+            <a:extLst>
+              <a:ext uri="{FF2B5EF4-FFF2-40B4-BE49-F238E27FC236}">
+                <a16:creationId xmlns:a16="http://schemas.microsoft.com/office/drawing/2014/main" id="{8497C125-7D05-7140-0B37-FC745D9F0452}"/>
+              </a:ext>
+            </a:extLst>
+          </p:cNvPr>
+          <p:cNvGrpSpPr/>
+          <p:nvPr/>
+        </p:nvGrpSpPr>
+        <p:grpSpPr>
+          <a:xfrm>
+            <a:off x="4136097" y="23294689"/>
+            <a:ext cx="2895195" cy="3597027"/>
+            <a:chOff x="28463317" y="16916737"/>
+            <a:chExt cx="2895195" cy="3597027"/>
+          </a:xfrm>
+        </p:grpSpPr>
+        <p:sp>
+          <p:nvSpPr>
+            <p:cNvPr id="296" name="TextBox 295">
+              <a:extLst>
+                <a:ext uri="{FF2B5EF4-FFF2-40B4-BE49-F238E27FC236}">
+                  <a16:creationId xmlns:a16="http://schemas.microsoft.com/office/drawing/2014/main" id="{A930C0AB-DE67-14B3-9418-7A0DF987F7FD}"/>
+                </a:ext>
+              </a:extLst>
+            </p:cNvPr>
+            <p:cNvSpPr txBox="1"/>
+            <p:nvPr/>
+          </p:nvSpPr>
+          <p:spPr>
+            <a:xfrm>
+              <a:off x="28463317" y="18944104"/>
+              <a:ext cx="2895195" cy="1569660"/>
+            </a:xfrm>
+            <a:prstGeom prst="rect">
+              <a:avLst/>
+            </a:prstGeom>
+            <a:noFill/>
+          </p:spPr>
+          <p:txBody>
+            <a:bodyPr wrap="square" rtlCol="0">
+              <a:spAutoFit/>
+            </a:bodyPr>
+            <a:lstStyle/>
+            <a:p>
+              <a:pPr algn="ctr"/>
+              <a:r>
+                <a:rPr lang="en-US" sz="2400" dirty="0">
+                  <a:latin typeface="Titillium Web" panose="00000500000000000000" pitchFamily="2" charset="0"/>
+                </a:rPr>
+                <a:t>GPT-4o ingests prompts and articles to generate entities and relations</a:t>
+              </a:r>
+            </a:p>
+          </p:txBody>
+        </p:sp>
+        <p:pic>
+          <p:nvPicPr>
+            <p:cNvPr id="309" name="Picture 308" descr="OpenAI Icon SVG Vector &amp; PNG Free Download | UXWing">
+              <a:extLst>
+                <a:ext uri="{FF2B5EF4-FFF2-40B4-BE49-F238E27FC236}">
+                  <a16:creationId xmlns:a16="http://schemas.microsoft.com/office/drawing/2014/main" id="{1626FF61-59F5-E6EB-6B4B-E012DEEF0E7C}"/>
+                </a:ext>
+              </a:extLst>
+            </p:cNvPr>
+            <p:cNvPicPr>
+              <a:picLocks noChangeAspect="1"/>
+            </p:cNvPicPr>
+            <p:nvPr/>
+          </p:nvPicPr>
+          <p:blipFill>
+            <a:blip r:embed="rId11">
+              <a:clrChange>
+                <a:clrFrom>
+                  <a:srgbClr val="FFFFFF"/>
+                </a:clrFrom>
+                <a:clrTo>
+                  <a:srgbClr val="FFFFFF">
+                    <a:alpha val="0"/>
+                  </a:srgbClr>
+                </a:clrTo>
+              </a:clrChange>
+            </a:blip>
+            <a:stretch>
+              <a:fillRect/>
+            </a:stretch>
+          </p:blipFill>
+          <p:spPr>
+            <a:xfrm>
+              <a:off x="28772052" y="16916737"/>
+              <a:ext cx="1850174" cy="1850174"/>
+            </a:xfrm>
+            <a:prstGeom prst="rect">
+              <a:avLst/>
+            </a:prstGeom>
+          </p:spPr>
+        </p:pic>
+      </p:grpSp>
+      <p:grpSp>
+        <p:nvGrpSpPr>
+          <p:cNvPr id="2117" name="Group 2116">
+            <a:extLst>
+              <a:ext uri="{FF2B5EF4-FFF2-40B4-BE49-F238E27FC236}">
+                <a16:creationId xmlns:a16="http://schemas.microsoft.com/office/drawing/2014/main" id="{F75861A4-F34B-DA14-92D8-B47DF721B73F}"/>
+              </a:ext>
+            </a:extLst>
+          </p:cNvPr>
+          <p:cNvGrpSpPr/>
+          <p:nvPr/>
+        </p:nvGrpSpPr>
+        <p:grpSpPr>
+          <a:xfrm>
+            <a:off x="5890583" y="27355948"/>
+            <a:ext cx="4348599" cy="3203805"/>
+            <a:chOff x="26603918" y="20295085"/>
+            <a:chExt cx="4348599" cy="3203805"/>
+          </a:xfrm>
+        </p:grpSpPr>
+        <p:pic>
+          <p:nvPicPr>
+            <p:cNvPr id="318" name="Picture 317" descr="Network - Free social icons">
+              <a:extLst>
+                <a:ext uri="{FF2B5EF4-FFF2-40B4-BE49-F238E27FC236}">
+                  <a16:creationId xmlns:a16="http://schemas.microsoft.com/office/drawing/2014/main" id="{2B1944B9-83C2-FE5A-5122-51FA2D00C24C}"/>
+                </a:ext>
+              </a:extLst>
+            </p:cNvPr>
+            <p:cNvPicPr>
+              <a:picLocks noChangeAspect="1"/>
+            </p:cNvPicPr>
+            <p:nvPr/>
+          </p:nvPicPr>
+          <p:blipFill>
+            <a:blip r:embed="rId12"/>
+            <a:stretch>
+              <a:fillRect/>
+            </a:stretch>
+          </p:blipFill>
+          <p:spPr>
+            <a:xfrm>
+              <a:off x="27966143" y="20295085"/>
+              <a:ext cx="1911290" cy="1911290"/>
+            </a:xfrm>
+            <a:prstGeom prst="rect">
+              <a:avLst/>
+            </a:prstGeom>
+          </p:spPr>
+        </p:pic>
+        <p:sp>
+          <p:nvSpPr>
+            <p:cNvPr id="2116" name="TextBox 2115">
+              <a:extLst>
+                <a:ext uri="{FF2B5EF4-FFF2-40B4-BE49-F238E27FC236}">
+                  <a16:creationId xmlns:a16="http://schemas.microsoft.com/office/drawing/2014/main" id="{1236B173-6038-3219-8415-286584860D82}"/>
+                </a:ext>
+              </a:extLst>
+            </p:cNvPr>
+            <p:cNvSpPr txBox="1"/>
+            <p:nvPr/>
+          </p:nvSpPr>
+          <p:spPr>
+            <a:xfrm>
+              <a:off x="26603918" y="22298561"/>
+              <a:ext cx="4348599" cy="1200329"/>
+            </a:xfrm>
+            <a:prstGeom prst="rect">
+              <a:avLst/>
+            </a:prstGeom>
+            <a:noFill/>
+          </p:spPr>
+          <p:txBody>
+            <a:bodyPr wrap="square" rtlCol="0">
+              <a:spAutoFit/>
+            </a:bodyPr>
+            <a:lstStyle/>
+            <a:p>
+              <a:pPr algn="ctr"/>
+              <a:r>
+                <a:rPr lang="en-US" sz="2400" dirty="0">
+                  <a:latin typeface="Titillium Web" panose="00000500000000000000" pitchFamily="2" charset="0"/>
+                </a:rPr>
+                <a:t>Graphs generated using node and edge lists analyzed with CNM and connectivity</a:t>
+              </a:r>
+            </a:p>
+          </p:txBody>
+        </p:sp>
+      </p:grpSp>
+      <p:cxnSp>
+        <p:nvCxnSpPr>
+          <p:cNvPr id="2134" name="Straight Arrow Connector 2133">
+            <a:extLst>
+              <a:ext uri="{FF2B5EF4-FFF2-40B4-BE49-F238E27FC236}">
+                <a16:creationId xmlns:a16="http://schemas.microsoft.com/office/drawing/2014/main" id="{F27642C4-57C4-4FF8-F9CA-E2BD3EE75537}"/>
+              </a:ext>
+            </a:extLst>
+          </p:cNvPr>
+          <p:cNvCxnSpPr>
+            <a:cxnSpLocks/>
+            <a:stCxn id="2097" idx="3"/>
+            <a:endCxn id="2106" idx="1"/>
+          </p:cNvCxnSpPr>
+          <p:nvPr/>
+        </p:nvCxnSpPr>
+        <p:spPr bwMode="auto">
+          <a:xfrm>
+            <a:off x="3145858" y="19639932"/>
+            <a:ext cx="1430762" cy="5061"/>
+          </a:xfrm>
+          <a:prstGeom prst="straightConnector1">
+            <a:avLst/>
+          </a:prstGeom>
+          <a:solidFill>
+            <a:schemeClr val="accent1"/>
+          </a:solidFill>
+          <a:ln w="25400" cap="flat" cmpd="sng" algn="ctr">
+            <a:solidFill>
+              <a:schemeClr val="tx1"/>
+            </a:solidFill>
+            <a:prstDash val="solid"/>
+            <a:round/>
+            <a:headEnd type="none" w="med" len="med"/>
+            <a:tailEnd type="triangle" w="lg" len="lg"/>
+          </a:ln>
+          <a:effectLst/>
+          <a:extLst>
+            <a:ext uri="{AF507438-7753-43E0-B8FC-AC1667EBCBE1}">
+              <a14:hiddenEffects xmlns:a14="http://schemas.microsoft.com/office/drawing/2010/main">
+                <a:effectLst>
+                  <a:outerShdw dist="35921" dir="2700000" algn="ctr" rotWithShape="0">
+                    <a:schemeClr val="bg2"/>
+                  </a:outerShdw>
+                </a:effectLst>
+              </a14:hiddenEffects>
+            </a:ext>
+          </a:extLst>
+        </p:spPr>
+      </p:cxnSp>
+      <p:cxnSp>
+        <p:nvCxnSpPr>
+          <p:cNvPr id="2137" name="Straight Arrow Connector 2136">
+            <a:extLst>
+              <a:ext uri="{FF2B5EF4-FFF2-40B4-BE49-F238E27FC236}">
+                <a16:creationId xmlns:a16="http://schemas.microsoft.com/office/drawing/2014/main" id="{5D995445-8DA6-7AAB-F459-FF943F036564}"/>
+              </a:ext>
+            </a:extLst>
+          </p:cNvPr>
+          <p:cNvCxnSpPr>
+            <a:cxnSpLocks/>
+            <a:stCxn id="309" idx="1"/>
+            <a:endCxn id="2177" idx="0"/>
+          </p:cNvCxnSpPr>
+          <p:nvPr/>
+        </p:nvCxnSpPr>
+        <p:spPr bwMode="auto">
+          <a:xfrm flipH="1">
+            <a:off x="3206120" y="24219776"/>
+            <a:ext cx="1238712" cy="3397138"/>
+          </a:xfrm>
+          <a:prstGeom prst="straightConnector1">
+            <a:avLst/>
+          </a:prstGeom>
+          <a:solidFill>
+            <a:schemeClr val="accent1"/>
+          </a:solidFill>
+          <a:ln w="25400" cap="flat" cmpd="sng" algn="ctr">
+            <a:solidFill>
+              <a:schemeClr val="tx1"/>
+            </a:solidFill>
+            <a:prstDash val="solid"/>
+            <a:round/>
+            <a:headEnd type="none" w="med" len="med"/>
+            <a:tailEnd type="triangle" w="lg" len="lg"/>
+          </a:ln>
+          <a:effectLst/>
+          <a:extLst>
+            <a:ext uri="{AF507438-7753-43E0-B8FC-AC1667EBCBE1}">
+              <a14:hiddenEffects xmlns:a14="http://schemas.microsoft.com/office/drawing/2010/main">
+                <a:effectLst>
+                  <a:outerShdw dist="35921" dir="2700000" algn="ctr" rotWithShape="0">
+                    <a:schemeClr val="bg2"/>
+                  </a:outerShdw>
+                </a:effectLst>
+              </a14:hiddenEffects>
+            </a:ext>
+          </a:extLst>
+        </p:spPr>
+      </p:cxnSp>
+      <p:cxnSp>
+        <p:nvCxnSpPr>
+          <p:cNvPr id="2141" name="Straight Arrow Connector 2140">
+            <a:extLst>
+              <a:ext uri="{FF2B5EF4-FFF2-40B4-BE49-F238E27FC236}">
+                <a16:creationId xmlns:a16="http://schemas.microsoft.com/office/drawing/2014/main" id="{B9FCB9C7-3483-7227-35E3-B3511C0AEA3C}"/>
+              </a:ext>
+            </a:extLst>
+          </p:cNvPr>
+          <p:cNvCxnSpPr>
+            <a:cxnSpLocks/>
+            <a:stCxn id="2177" idx="3"/>
+            <a:endCxn id="318" idx="1"/>
+          </p:cNvCxnSpPr>
+          <p:nvPr/>
+        </p:nvCxnSpPr>
+        <p:spPr bwMode="auto">
+          <a:xfrm>
+            <a:off x="3900799" y="28311593"/>
+            <a:ext cx="3352009" cy="0"/>
+          </a:xfrm>
+          <a:prstGeom prst="straightConnector1">
+            <a:avLst/>
+          </a:prstGeom>
+          <a:solidFill>
+            <a:schemeClr val="accent1"/>
+          </a:solidFill>
+          <a:ln w="25400" cap="flat" cmpd="sng" algn="ctr">
+            <a:solidFill>
+              <a:schemeClr val="tx1"/>
+            </a:solidFill>
+            <a:prstDash val="solid"/>
+            <a:round/>
+            <a:headEnd type="none" w="med" len="med"/>
+            <a:tailEnd type="triangle" w="lg" len="lg"/>
+          </a:ln>
+          <a:effectLst/>
+          <a:extLst>
+            <a:ext uri="{AF507438-7753-43E0-B8FC-AC1667EBCBE1}">
+              <a14:hiddenEffects xmlns:a14="http://schemas.microsoft.com/office/drawing/2010/main">
+                <a:effectLst>
+                  <a:outerShdw dist="35921" dir="2700000" algn="ctr" rotWithShape="0">
+                    <a:schemeClr val="bg2"/>
+                  </a:outerShdw>
+                </a:effectLst>
+              </a14:hiddenEffects>
+            </a:ext>
+          </a:extLst>
+        </p:spPr>
+      </p:cxnSp>
+      <p:grpSp>
+        <p:nvGrpSpPr>
+          <p:cNvPr id="2220" name="Group 2219">
+            <a:extLst>
+              <a:ext uri="{FF2B5EF4-FFF2-40B4-BE49-F238E27FC236}">
+                <a16:creationId xmlns:a16="http://schemas.microsoft.com/office/drawing/2014/main" id="{1A378372-C31A-723F-7A66-E8622FBEF791}"/>
+              </a:ext>
+            </a:extLst>
+          </p:cNvPr>
+          <p:cNvGrpSpPr/>
+          <p:nvPr/>
+        </p:nvGrpSpPr>
+        <p:grpSpPr>
+          <a:xfrm>
+            <a:off x="1404724" y="27616914"/>
+            <a:ext cx="3629096" cy="2762037"/>
+            <a:chOff x="1404724" y="27616914"/>
+            <a:chExt cx="3629096" cy="2762037"/>
+          </a:xfrm>
+        </p:grpSpPr>
+        <p:sp>
+          <p:nvSpPr>
+            <p:cNvPr id="294" name="TextBox 293">
+              <a:extLst>
+                <a:ext uri="{FF2B5EF4-FFF2-40B4-BE49-F238E27FC236}">
+                  <a16:creationId xmlns:a16="http://schemas.microsoft.com/office/drawing/2014/main" id="{BD4CD622-3C1C-39A9-90A7-A39AE50DECD6}"/>
+                </a:ext>
+              </a:extLst>
+            </p:cNvPr>
+            <p:cNvSpPr txBox="1"/>
+            <p:nvPr/>
+          </p:nvSpPr>
+          <p:spPr>
+            <a:xfrm>
+              <a:off x="1404724" y="29178622"/>
+              <a:ext cx="3629096" cy="1200329"/>
+            </a:xfrm>
+            <a:prstGeom prst="rect">
+              <a:avLst/>
+            </a:prstGeom>
+            <a:noFill/>
+          </p:spPr>
+          <p:txBody>
+            <a:bodyPr wrap="square" rtlCol="0">
+              <a:spAutoFit/>
+            </a:bodyPr>
+            <a:lstStyle/>
+            <a:p>
+              <a:pPr algn="ctr"/>
+              <a:r>
+                <a:rPr lang="en-US" sz="2400" dirty="0">
+                  <a:latin typeface="Titillium Web" panose="00000500000000000000" pitchFamily="2" charset="0"/>
+                </a:rPr>
+                <a:t>Extracted JSON outputs are converted into node and edge tables</a:t>
+              </a:r>
+            </a:p>
+          </p:txBody>
+        </p:sp>
+        <p:pic>
+          <p:nvPicPr>
+            <p:cNvPr id="2177" name="Picture 2176" descr="Json file - Free interface icons">
+              <a:extLst>
+                <a:ext uri="{FF2B5EF4-FFF2-40B4-BE49-F238E27FC236}">
+                  <a16:creationId xmlns:a16="http://schemas.microsoft.com/office/drawing/2014/main" id="{1F1B718D-66CD-EE7D-B289-DBD9C033C0C6}"/>
+                </a:ext>
+              </a:extLst>
+            </p:cNvPr>
+            <p:cNvPicPr>
+              <a:picLocks noChangeAspect="1"/>
+            </p:cNvPicPr>
+            <p:nvPr/>
+          </p:nvPicPr>
+          <p:blipFill>
+            <a:blip r:embed="rId13"/>
+            <a:stretch>
+              <a:fillRect/>
+            </a:stretch>
+          </p:blipFill>
+          <p:spPr>
+            <a:xfrm>
+              <a:off x="2511441" y="27616914"/>
+              <a:ext cx="1389358" cy="1389358"/>
+            </a:xfrm>
+            <a:prstGeom prst="rect">
+              <a:avLst/>
+            </a:prstGeom>
+          </p:spPr>
+        </p:pic>
+      </p:grpSp>
+      <p:sp>
+        <p:nvSpPr>
+          <p:cNvPr id="2180" name="Rectangle 2179">
+            <a:extLst>
+              <a:ext uri="{FF2B5EF4-FFF2-40B4-BE49-F238E27FC236}">
+                <a16:creationId xmlns:a16="http://schemas.microsoft.com/office/drawing/2014/main" id="{98FCC399-CA5D-4873-B45E-22BAE0F51D2E}"/>
+              </a:ext>
+            </a:extLst>
+          </p:cNvPr>
+          <p:cNvSpPr>
+            <a:spLocks noChangeArrowheads="1"/>
+          </p:cNvSpPr>
+          <p:nvPr/>
+        </p:nvSpPr>
+        <p:spPr bwMode="auto">
+          <a:xfrm>
+            <a:off x="11512286" y="7125059"/>
+            <a:ext cx="10058400" cy="784225"/>
+          </a:xfrm>
+          <a:prstGeom prst="rect">
+            <a:avLst/>
+          </a:prstGeom>
+          <a:solidFill>
+            <a:srgbClr val="1482A5"/>
+          </a:solidFill>
+          <a:ln>
+            <a:noFill/>
+          </a:ln>
+          <a:effectLst/>
+        </p:spPr>
+        <p:txBody>
+          <a:bodyPr wrap="none" lIns="274320" tIns="68580" rIns="274320" bIns="68580" anchor="ctr"/>
+          <a:lstStyle>
+            <a:defPPr>
+              <a:defRPr lang="en-US" kern="1200"/>
+            </a:defPPr>
+            <a:lvl1pPr algn="l" rtl="0" fontAlgn="base">
+              <a:spcBef>
+                <a:spcPct val="0"/>
+              </a:spcBef>
+              <a:spcAft>
+                <a:spcPct val="0"/>
+              </a:spcAft>
+              <a:defRPr sz="9300" kern="1200">
+                <a:solidFill>
+                  <a:schemeClr val="tx1"/>
+                </a:solidFill>
+                <a:latin typeface="Arial"/>
+                <a:ea typeface="+mn-ea"/>
+                <a:cs typeface="+mn-cs"/>
+              </a:defRPr>
+            </a:lvl1pPr>
+            <a:lvl2pPr marL="457200" algn="l" rtl="0" fontAlgn="base">
+              <a:spcBef>
+                <a:spcPct val="0"/>
+              </a:spcBef>
+              <a:spcAft>
+                <a:spcPct val="0"/>
+              </a:spcAft>
+              <a:defRPr sz="9300" kern="1200">
+                <a:solidFill>
+                  <a:schemeClr val="tx1"/>
+                </a:solidFill>
+                <a:latin typeface="Arial"/>
+                <a:ea typeface="+mn-ea"/>
+                <a:cs typeface="+mn-cs"/>
+              </a:defRPr>
+            </a:lvl2pPr>
+            <a:lvl3pPr marL="914400" algn="l" rtl="0" fontAlgn="base">
+              <a:spcBef>
+                <a:spcPct val="0"/>
+              </a:spcBef>
+              <a:spcAft>
+                <a:spcPct val="0"/>
+              </a:spcAft>
+              <a:defRPr sz="9300" kern="1200">
+                <a:solidFill>
+                  <a:schemeClr val="tx1"/>
+                </a:solidFill>
+                <a:latin typeface="Arial"/>
+                <a:ea typeface="+mn-ea"/>
+                <a:cs typeface="+mn-cs"/>
+              </a:defRPr>
+            </a:lvl3pPr>
+            <a:lvl4pPr marL="1371600" algn="l" rtl="0" fontAlgn="base">
+              <a:spcBef>
+                <a:spcPct val="0"/>
+              </a:spcBef>
+              <a:spcAft>
+                <a:spcPct val="0"/>
+              </a:spcAft>
+              <a:defRPr sz="9300" kern="1200">
+                <a:solidFill>
+                  <a:schemeClr val="tx1"/>
+                </a:solidFill>
+                <a:latin typeface="Arial"/>
+                <a:ea typeface="+mn-ea"/>
+                <a:cs typeface="+mn-cs"/>
+              </a:defRPr>
+            </a:lvl4pPr>
+            <a:lvl5pPr marL="1828800" algn="l" rtl="0" fontAlgn="base">
+              <a:spcBef>
+                <a:spcPct val="0"/>
+              </a:spcBef>
+              <a:spcAft>
+                <a:spcPct val="0"/>
+              </a:spcAft>
+              <a:defRPr sz="9300" kern="1200">
+                <a:solidFill>
+                  <a:schemeClr val="tx1"/>
+                </a:solidFill>
+                <a:latin typeface="Arial"/>
+                <a:ea typeface="+mn-ea"/>
+                <a:cs typeface="+mn-cs"/>
+              </a:defRPr>
+            </a:lvl5pPr>
+            <a:lvl6pPr marL="2286000" algn="l" defTabSz="914400" rtl="0" eaLnBrk="1" latinLnBrk="0" hangingPunct="1">
+              <a:defRPr sz="9300" kern="1200">
+                <a:solidFill>
+                  <a:schemeClr val="tx1"/>
+                </a:solidFill>
+                <a:latin typeface="Arial"/>
+                <a:ea typeface="+mn-ea"/>
+                <a:cs typeface="+mn-cs"/>
+              </a:defRPr>
+            </a:lvl6pPr>
+            <a:lvl7pPr marL="2743200" algn="l" defTabSz="914400" rtl="0" eaLnBrk="1" latinLnBrk="0" hangingPunct="1">
+              <a:defRPr sz="9300" kern="1200">
+                <a:solidFill>
+                  <a:schemeClr val="tx1"/>
+                </a:solidFill>
+                <a:latin typeface="Arial"/>
+                <a:ea typeface="+mn-ea"/>
+                <a:cs typeface="+mn-cs"/>
+              </a:defRPr>
+            </a:lvl7pPr>
+            <a:lvl8pPr marL="3200400" algn="l" defTabSz="914400" rtl="0" eaLnBrk="1" latinLnBrk="0" hangingPunct="1">
+              <a:defRPr sz="9300" kern="1200">
+                <a:solidFill>
+                  <a:schemeClr val="tx1"/>
+                </a:solidFill>
+                <a:latin typeface="Arial"/>
+                <a:ea typeface="+mn-ea"/>
+                <a:cs typeface="+mn-cs"/>
+              </a:defRPr>
+            </a:lvl8pPr>
+            <a:lvl9pPr marL="3657600" algn="l" defTabSz="914400" rtl="0" eaLnBrk="1" latinLnBrk="0" hangingPunct="1">
+              <a:defRPr sz="9300" kern="1200">
+                <a:solidFill>
+                  <a:schemeClr val="tx1"/>
+                </a:solidFill>
+                <a:latin typeface="Arial"/>
+                <a:ea typeface="+mn-ea"/>
+                <a:cs typeface="+mn-cs"/>
+              </a:defRPr>
+            </a:lvl9pPr>
+          </a:lstStyle>
+          <a:p>
+            <a:pPr defTabSz="4703763"/>
+            <a:r>
+              <a:rPr lang="en-US" sz="3600" dirty="0">
+                <a:solidFill>
+                  <a:schemeClr val="bg1"/>
+                </a:solidFill>
+                <a:latin typeface="Amaranth" panose="02000503050000020004" pitchFamily="2" charset="0"/>
+              </a:rPr>
+              <a:t>Methodology</a:t>
+            </a:r>
+          </a:p>
+        </p:txBody>
+      </p:sp>
+      <p:sp>
+        <p:nvSpPr>
+          <p:cNvPr id="2181" name="Text Box 6">
+            <a:extLst>
+              <a:ext uri="{FF2B5EF4-FFF2-40B4-BE49-F238E27FC236}">
+                <a16:creationId xmlns:a16="http://schemas.microsoft.com/office/drawing/2014/main" id="{BAB40251-2E35-4623-A6BE-28130F737F03}"/>
+              </a:ext>
+            </a:extLst>
+          </p:cNvPr>
+          <p:cNvSpPr txBox="1">
+            <a:spLocks noChangeArrowheads="1"/>
+          </p:cNvSpPr>
+          <p:nvPr/>
+        </p:nvSpPr>
+        <p:spPr bwMode="auto">
+          <a:xfrm>
+            <a:off x="11496595" y="8152153"/>
+            <a:ext cx="10058400" cy="2708434"/>
+          </a:xfrm>
+          <a:prstGeom prst="rect">
+            <a:avLst/>
+          </a:prstGeom>
+          <a:solidFill>
+            <a:srgbClr val="B4D3E2"/>
+          </a:solidFill>
+          <a:ln>
+            <a:noFill/>
+          </a:ln>
+          <a:effectLst>
+            <a:softEdge rad="0"/>
+          </a:effectLst>
+        </p:spPr>
+        <p:txBody>
+          <a:bodyPr lIns="274320" tIns="274320" rIns="274320" bIns="274320">
+            <a:spAutoFit/>
+          </a:bodyPr>
+          <a:lstStyle>
+            <a:defPPr>
+              <a:defRPr lang="en-US" kern="1200"/>
+            </a:defPPr>
+            <a:lvl1pPr algn="l" defTabSz="4703763" rtl="0" eaLnBrk="0" fontAlgn="base" hangingPunct="0">
+              <a:spcBef>
+                <a:spcPct val="0"/>
+              </a:spcBef>
+              <a:spcAft>
+                <a:spcPct val="0"/>
+              </a:spcAft>
+              <a:defRPr sz="9300" kern="1200">
+                <a:solidFill>
+                  <a:schemeClr val="tx1"/>
+                </a:solidFill>
+                <a:latin typeface="Arial"/>
+                <a:ea typeface="+mn-ea"/>
+                <a:cs typeface="+mn-cs"/>
+              </a:defRPr>
+            </a:lvl1pPr>
+            <a:lvl2pPr marL="742950" indent="-285750" algn="l" defTabSz="4703763" rtl="0" eaLnBrk="0" fontAlgn="base" hangingPunct="0">
+              <a:spcBef>
+                <a:spcPct val="0"/>
+              </a:spcBef>
+              <a:spcAft>
+                <a:spcPct val="0"/>
+              </a:spcAft>
+              <a:defRPr sz="9300" kern="1200">
+                <a:solidFill>
+                  <a:schemeClr val="tx1"/>
+                </a:solidFill>
+                <a:latin typeface="Arial"/>
+                <a:ea typeface="+mn-ea"/>
+                <a:cs typeface="+mn-cs"/>
+              </a:defRPr>
+            </a:lvl2pPr>
+            <a:lvl3pPr marL="1143000" indent="-228600" algn="l" defTabSz="4703763" rtl="0" eaLnBrk="0" fontAlgn="base" hangingPunct="0">
+              <a:spcBef>
+                <a:spcPct val="0"/>
+              </a:spcBef>
+              <a:spcAft>
+                <a:spcPct val="0"/>
+              </a:spcAft>
+              <a:defRPr sz="9300" kern="1200">
+                <a:solidFill>
+                  <a:schemeClr val="tx1"/>
+                </a:solidFill>
+                <a:latin typeface="Arial"/>
+                <a:ea typeface="+mn-ea"/>
+                <a:cs typeface="+mn-cs"/>
+              </a:defRPr>
+            </a:lvl3pPr>
+            <a:lvl4pPr marL="1600200" indent="-228600" algn="l" defTabSz="4703763" rtl="0" eaLnBrk="0" fontAlgn="base" hangingPunct="0">
+              <a:spcBef>
+                <a:spcPct val="0"/>
+              </a:spcBef>
+              <a:spcAft>
+                <a:spcPct val="0"/>
+              </a:spcAft>
+              <a:defRPr sz="9300" kern="1200">
+                <a:solidFill>
+                  <a:schemeClr val="tx1"/>
+                </a:solidFill>
+                <a:latin typeface="Arial"/>
+                <a:ea typeface="+mn-ea"/>
+                <a:cs typeface="+mn-cs"/>
+              </a:defRPr>
+            </a:lvl4pPr>
+            <a:lvl5pPr marL="2057400" indent="-228600" algn="l" defTabSz="4703763" rtl="0" eaLnBrk="0" fontAlgn="base" hangingPunct="0">
+              <a:spcBef>
+                <a:spcPct val="0"/>
+              </a:spcBef>
+              <a:spcAft>
+                <a:spcPct val="0"/>
+              </a:spcAft>
+              <a:defRPr sz="9300" kern="1200">
+                <a:solidFill>
+                  <a:schemeClr val="tx1"/>
+                </a:solidFill>
+                <a:latin typeface="Arial"/>
+                <a:ea typeface="+mn-ea"/>
+                <a:cs typeface="+mn-cs"/>
+              </a:defRPr>
+            </a:lvl5pPr>
+            <a:lvl6pPr marL="2514600" indent="-228600" algn="l" defTabSz="4703763" rtl="0" eaLnBrk="0" fontAlgn="base" latinLnBrk="0" hangingPunct="0">
+              <a:spcBef>
+                <a:spcPct val="0"/>
+              </a:spcBef>
+              <a:spcAft>
+                <a:spcPct val="0"/>
+              </a:spcAft>
+              <a:defRPr sz="9300" kern="1200">
+                <a:solidFill>
+                  <a:schemeClr val="tx1"/>
+                </a:solidFill>
+                <a:latin typeface="Arial"/>
+                <a:ea typeface="+mn-ea"/>
+                <a:cs typeface="+mn-cs"/>
+              </a:defRPr>
+            </a:lvl6pPr>
+            <a:lvl7pPr marL="2971800" indent="-228600" algn="l" defTabSz="4703763" rtl="0" eaLnBrk="0" fontAlgn="base" latinLnBrk="0" hangingPunct="0">
+              <a:spcBef>
+                <a:spcPct val="0"/>
+              </a:spcBef>
+              <a:spcAft>
+                <a:spcPct val="0"/>
+              </a:spcAft>
+              <a:defRPr sz="9300" kern="1200">
+                <a:solidFill>
+                  <a:schemeClr val="tx1"/>
+                </a:solidFill>
+                <a:latin typeface="Arial"/>
+                <a:ea typeface="+mn-ea"/>
+                <a:cs typeface="+mn-cs"/>
+              </a:defRPr>
+            </a:lvl7pPr>
+            <a:lvl8pPr marL="3429000" indent="-228600" algn="l" defTabSz="4703763" rtl="0" eaLnBrk="0" fontAlgn="base" latinLnBrk="0" hangingPunct="0">
+              <a:spcBef>
+                <a:spcPct val="0"/>
+              </a:spcBef>
+              <a:spcAft>
+                <a:spcPct val="0"/>
+              </a:spcAft>
+              <a:defRPr sz="9300" kern="1200">
+                <a:solidFill>
+                  <a:schemeClr val="tx1"/>
+                </a:solidFill>
+                <a:latin typeface="Arial"/>
+                <a:ea typeface="+mn-ea"/>
+                <a:cs typeface="+mn-cs"/>
+              </a:defRPr>
+            </a:lvl8pPr>
+            <a:lvl9pPr marL="3886200" indent="-228600" algn="l" defTabSz="4703763" rtl="0" eaLnBrk="0" fontAlgn="base" latinLnBrk="0" hangingPunct="0">
+              <a:spcBef>
+                <a:spcPct val="0"/>
+              </a:spcBef>
+              <a:spcAft>
+                <a:spcPct val="0"/>
+              </a:spcAft>
+              <a:defRPr sz="9300" kern="1200">
+                <a:solidFill>
+                  <a:schemeClr val="tx1"/>
+                </a:solidFill>
+                <a:latin typeface="Arial"/>
+                <a:ea typeface="+mn-ea"/>
+                <a:cs typeface="+mn-cs"/>
+              </a:defRPr>
+            </a:lvl9pPr>
+          </a:lstStyle>
+          <a:p>
+            <a:pPr algn="ctr"/>
+            <a:r>
+              <a:rPr lang="en-US" sz="2800" dirty="0">
+                <a:latin typeface="Titillium Web" panose="00000500000000000000" pitchFamily="2" charset="0"/>
+                <a:ea typeface="Open Sans" panose="020B0606030504020204" pitchFamily="34" charset="0"/>
+                <a:cs typeface="Open Sans" panose="020B0606030504020204" pitchFamily="34" charset="0"/>
+              </a:rPr>
+              <a:t>Data Collection/Filtering</a:t>
+            </a:r>
+          </a:p>
+          <a:p>
+            <a:pPr algn="just"/>
+            <a:r>
+              <a:rPr lang="en-US" sz="2800" dirty="0">
+                <a:latin typeface="Titillium Web" panose="00000500000000000000" pitchFamily="2" charset="0"/>
+                <a:ea typeface="Open Sans" panose="020B0606030504020204" pitchFamily="34" charset="0"/>
+                <a:cs typeface="Open Sans" panose="020B0606030504020204" pitchFamily="34" charset="0"/>
+              </a:rPr>
+              <a:t>Cornell Newsroom articles were screened using domain-specific solar energy keywords and scraped for full-text analysis. Articles with fewer than two solar keyword mentions were excluded, reducing GPT-4o token costs (Figure 1).</a:t>
+            </a:r>
+          </a:p>
+        </p:txBody>
+      </p:sp>
+      <p:sp>
+        <p:nvSpPr>
+          <p:cNvPr id="2182" name="Rectangle 2181">
+            <a:extLst>
+              <a:ext uri="{FF2B5EF4-FFF2-40B4-BE49-F238E27FC236}">
+                <a16:creationId xmlns:a16="http://schemas.microsoft.com/office/drawing/2014/main" id="{991B9DF0-7DD4-4C17-94B6-6C493D1C390D}"/>
+              </a:ext>
+            </a:extLst>
+          </p:cNvPr>
+          <p:cNvSpPr>
+            <a:spLocks noChangeArrowheads="1"/>
+          </p:cNvSpPr>
+          <p:nvPr/>
+        </p:nvSpPr>
+        <p:spPr bwMode="auto">
+          <a:xfrm>
+            <a:off x="22302207" y="7125059"/>
+            <a:ext cx="10058400" cy="784225"/>
+          </a:xfrm>
+          <a:prstGeom prst="rect">
+            <a:avLst/>
+          </a:prstGeom>
+          <a:solidFill>
+            <a:srgbClr val="1482A5"/>
+          </a:solidFill>
+          <a:ln>
+            <a:noFill/>
+          </a:ln>
+          <a:effectLst/>
+        </p:spPr>
+        <p:txBody>
+          <a:bodyPr wrap="none" lIns="274320" tIns="68580" rIns="274320" bIns="68580" anchor="ctr"/>
+          <a:lstStyle>
+            <a:defPPr>
+              <a:defRPr lang="en-US" kern="1200"/>
+            </a:defPPr>
+            <a:lvl1pPr algn="l" rtl="0" fontAlgn="base">
+              <a:spcBef>
+                <a:spcPct val="0"/>
+              </a:spcBef>
+              <a:spcAft>
+                <a:spcPct val="0"/>
+              </a:spcAft>
+              <a:defRPr sz="9300" kern="1200">
+                <a:solidFill>
+                  <a:schemeClr val="tx1"/>
+                </a:solidFill>
+                <a:latin typeface="Arial"/>
+                <a:ea typeface="+mn-ea"/>
+                <a:cs typeface="+mn-cs"/>
+              </a:defRPr>
+            </a:lvl1pPr>
+            <a:lvl2pPr marL="457200" algn="l" rtl="0" fontAlgn="base">
+              <a:spcBef>
+                <a:spcPct val="0"/>
+              </a:spcBef>
+              <a:spcAft>
+                <a:spcPct val="0"/>
+              </a:spcAft>
+              <a:defRPr sz="9300" kern="1200">
+                <a:solidFill>
+                  <a:schemeClr val="tx1"/>
+                </a:solidFill>
+                <a:latin typeface="Arial"/>
+                <a:ea typeface="+mn-ea"/>
+                <a:cs typeface="+mn-cs"/>
+              </a:defRPr>
+            </a:lvl2pPr>
+            <a:lvl3pPr marL="914400" algn="l" rtl="0" fontAlgn="base">
+              <a:spcBef>
+                <a:spcPct val="0"/>
+              </a:spcBef>
+              <a:spcAft>
+                <a:spcPct val="0"/>
+              </a:spcAft>
+              <a:defRPr sz="9300" kern="1200">
+                <a:solidFill>
+                  <a:schemeClr val="tx1"/>
+                </a:solidFill>
+                <a:latin typeface="Arial"/>
+                <a:ea typeface="+mn-ea"/>
+                <a:cs typeface="+mn-cs"/>
+              </a:defRPr>
+            </a:lvl3pPr>
+            <a:lvl4pPr marL="1371600" algn="l" rtl="0" fontAlgn="base">
+              <a:spcBef>
+                <a:spcPct val="0"/>
+              </a:spcBef>
+              <a:spcAft>
+                <a:spcPct val="0"/>
+              </a:spcAft>
+              <a:defRPr sz="9300" kern="1200">
+                <a:solidFill>
+                  <a:schemeClr val="tx1"/>
+                </a:solidFill>
+                <a:latin typeface="Arial"/>
+                <a:ea typeface="+mn-ea"/>
+                <a:cs typeface="+mn-cs"/>
+              </a:defRPr>
+            </a:lvl4pPr>
+            <a:lvl5pPr marL="1828800" algn="l" rtl="0" fontAlgn="base">
+              <a:spcBef>
+                <a:spcPct val="0"/>
+              </a:spcBef>
+              <a:spcAft>
+                <a:spcPct val="0"/>
+              </a:spcAft>
+              <a:defRPr sz="9300" kern="1200">
+                <a:solidFill>
+                  <a:schemeClr val="tx1"/>
+                </a:solidFill>
+                <a:latin typeface="Arial"/>
+                <a:ea typeface="+mn-ea"/>
+                <a:cs typeface="+mn-cs"/>
+              </a:defRPr>
+            </a:lvl5pPr>
+            <a:lvl6pPr marL="2286000" algn="l" defTabSz="914400" rtl="0" eaLnBrk="1" latinLnBrk="0" hangingPunct="1">
+              <a:defRPr sz="9300" kern="1200">
+                <a:solidFill>
+                  <a:schemeClr val="tx1"/>
+                </a:solidFill>
+                <a:latin typeface="Arial"/>
+                <a:ea typeface="+mn-ea"/>
+                <a:cs typeface="+mn-cs"/>
+              </a:defRPr>
+            </a:lvl6pPr>
+            <a:lvl7pPr marL="2743200" algn="l" defTabSz="914400" rtl="0" eaLnBrk="1" latinLnBrk="0" hangingPunct="1">
+              <a:defRPr sz="9300" kern="1200">
+                <a:solidFill>
+                  <a:schemeClr val="tx1"/>
+                </a:solidFill>
+                <a:latin typeface="Arial"/>
+                <a:ea typeface="+mn-ea"/>
+                <a:cs typeface="+mn-cs"/>
+              </a:defRPr>
+            </a:lvl7pPr>
+            <a:lvl8pPr marL="3200400" algn="l" defTabSz="914400" rtl="0" eaLnBrk="1" latinLnBrk="0" hangingPunct="1">
+              <a:defRPr sz="9300" kern="1200">
+                <a:solidFill>
+                  <a:schemeClr val="tx1"/>
+                </a:solidFill>
+                <a:latin typeface="Arial"/>
+                <a:ea typeface="+mn-ea"/>
+                <a:cs typeface="+mn-cs"/>
+              </a:defRPr>
+            </a:lvl8pPr>
+            <a:lvl9pPr marL="3657600" algn="l" defTabSz="914400" rtl="0" eaLnBrk="1" latinLnBrk="0" hangingPunct="1">
+              <a:defRPr sz="9300" kern="1200">
+                <a:solidFill>
+                  <a:schemeClr val="tx1"/>
+                </a:solidFill>
+                <a:latin typeface="Arial"/>
+                <a:ea typeface="+mn-ea"/>
+                <a:cs typeface="+mn-cs"/>
+              </a:defRPr>
+            </a:lvl9pPr>
+          </a:lstStyle>
+          <a:p>
+            <a:pPr defTabSz="4703763"/>
+            <a:r>
+              <a:rPr lang="en-US" sz="3600">
+                <a:solidFill>
+                  <a:schemeClr val="bg1"/>
+                </a:solidFill>
+                <a:latin typeface="Amaranth" panose="02000503050000020004" pitchFamily="2" charset="0"/>
+              </a:rPr>
+              <a:t>Results</a:t>
+            </a:r>
+          </a:p>
+        </p:txBody>
+      </p:sp>
+      <p:sp>
+        <p:nvSpPr>
+          <p:cNvPr id="2183" name="Text Box 6">
+            <a:extLst>
+              <a:ext uri="{FF2B5EF4-FFF2-40B4-BE49-F238E27FC236}">
+                <a16:creationId xmlns:a16="http://schemas.microsoft.com/office/drawing/2014/main" id="{62D65E41-7BC1-4B4D-9C1B-6ED3152D12D0}"/>
+              </a:ext>
+            </a:extLst>
+          </p:cNvPr>
+          <p:cNvSpPr txBox="1">
+            <a:spLocks noChangeArrowheads="1"/>
+          </p:cNvSpPr>
+          <p:nvPr/>
+        </p:nvSpPr>
+        <p:spPr bwMode="auto">
+          <a:xfrm>
+            <a:off x="22298937" y="19940437"/>
+            <a:ext cx="10058400" cy="1846659"/>
+          </a:xfrm>
+          <a:prstGeom prst="rect">
+            <a:avLst/>
+          </a:prstGeom>
+          <a:solidFill>
+            <a:srgbClr val="B4D3E2"/>
+          </a:solidFill>
+          <a:ln>
+            <a:noFill/>
+          </a:ln>
+          <a:effectLst>
+            <a:softEdge rad="0"/>
+          </a:effectLst>
+        </p:spPr>
+        <p:txBody>
+          <a:bodyPr lIns="274320" tIns="274320" rIns="274320" bIns="274320">
+            <a:spAutoFit/>
+          </a:bodyPr>
+          <a:lstStyle>
+            <a:defPPr>
+              <a:defRPr lang="en-US" kern="1200"/>
+            </a:defPPr>
+            <a:lvl1pPr algn="l" defTabSz="4703763" rtl="0" eaLnBrk="0" fontAlgn="base" hangingPunct="0">
+              <a:spcBef>
+                <a:spcPct val="0"/>
+              </a:spcBef>
+              <a:spcAft>
+                <a:spcPct val="0"/>
+              </a:spcAft>
+              <a:defRPr sz="2400" kern="1200">
+                <a:solidFill>
+                  <a:schemeClr val="tx1"/>
+                </a:solidFill>
+                <a:latin typeface="Titillium Web" panose="00000500000000000000" pitchFamily="2" charset="0"/>
+                <a:ea typeface="Open Sans" panose="020B0606030504020204" pitchFamily="34" charset="0"/>
+                <a:cs typeface="Open Sans" panose="020B0606030504020204" pitchFamily="34" charset="0"/>
+              </a:defRPr>
+            </a:lvl1pPr>
+            <a:lvl2pPr marL="742950" indent="-285750" algn="l" defTabSz="4703763" rtl="0" eaLnBrk="0" fontAlgn="base" hangingPunct="0">
+              <a:spcBef>
+                <a:spcPct val="0"/>
+              </a:spcBef>
+              <a:spcAft>
+                <a:spcPct val="0"/>
+              </a:spcAft>
+              <a:defRPr sz="9300" kern="1200">
+                <a:solidFill>
+                  <a:schemeClr val="tx1"/>
+                </a:solidFill>
+                <a:latin typeface="Arial"/>
+                <a:ea typeface="+mn-ea"/>
+                <a:cs typeface="+mn-cs"/>
+              </a:defRPr>
+            </a:lvl2pPr>
+            <a:lvl3pPr marL="1143000" indent="-228600" algn="l" defTabSz="4703763" rtl="0" eaLnBrk="0" fontAlgn="base" hangingPunct="0">
+              <a:spcBef>
+                <a:spcPct val="0"/>
+              </a:spcBef>
+              <a:spcAft>
+                <a:spcPct val="0"/>
+              </a:spcAft>
+              <a:defRPr sz="9300" kern="1200">
+                <a:solidFill>
+                  <a:schemeClr val="tx1"/>
+                </a:solidFill>
+                <a:latin typeface="Arial"/>
+                <a:ea typeface="+mn-ea"/>
+                <a:cs typeface="+mn-cs"/>
+              </a:defRPr>
+            </a:lvl3pPr>
+            <a:lvl4pPr marL="1600200" indent="-228600" algn="l" defTabSz="4703763" rtl="0" eaLnBrk="0" fontAlgn="base" hangingPunct="0">
+              <a:spcBef>
+                <a:spcPct val="0"/>
+              </a:spcBef>
+              <a:spcAft>
+                <a:spcPct val="0"/>
+              </a:spcAft>
+              <a:defRPr sz="9300" kern="1200">
+                <a:solidFill>
+                  <a:schemeClr val="tx1"/>
+                </a:solidFill>
+                <a:latin typeface="Arial"/>
+                <a:ea typeface="+mn-ea"/>
+                <a:cs typeface="+mn-cs"/>
+              </a:defRPr>
+            </a:lvl4pPr>
+            <a:lvl5pPr marL="2057400" indent="-228600" algn="l" defTabSz="4703763" rtl="0" eaLnBrk="0" fontAlgn="base" hangingPunct="0">
+              <a:spcBef>
+                <a:spcPct val="0"/>
+              </a:spcBef>
+              <a:spcAft>
+                <a:spcPct val="0"/>
+              </a:spcAft>
+              <a:defRPr sz="9300" kern="1200">
+                <a:solidFill>
+                  <a:schemeClr val="tx1"/>
+                </a:solidFill>
+                <a:latin typeface="Arial"/>
+                <a:ea typeface="+mn-ea"/>
+                <a:cs typeface="+mn-cs"/>
+              </a:defRPr>
+            </a:lvl5pPr>
+            <a:lvl6pPr marL="2514600" indent="-228600" algn="l" defTabSz="4703763" rtl="0" eaLnBrk="0" fontAlgn="base" latinLnBrk="0" hangingPunct="0">
+              <a:spcBef>
+                <a:spcPct val="0"/>
+              </a:spcBef>
+              <a:spcAft>
+                <a:spcPct val="0"/>
+              </a:spcAft>
+              <a:defRPr sz="9300" kern="1200">
+                <a:solidFill>
+                  <a:schemeClr val="tx1"/>
+                </a:solidFill>
+                <a:latin typeface="Arial"/>
+                <a:ea typeface="+mn-ea"/>
+                <a:cs typeface="+mn-cs"/>
+              </a:defRPr>
+            </a:lvl6pPr>
+            <a:lvl7pPr marL="2971800" indent="-228600" algn="l" defTabSz="4703763" rtl="0" eaLnBrk="0" fontAlgn="base" latinLnBrk="0" hangingPunct="0">
+              <a:spcBef>
+                <a:spcPct val="0"/>
+              </a:spcBef>
+              <a:spcAft>
+                <a:spcPct val="0"/>
+              </a:spcAft>
+              <a:defRPr sz="9300" kern="1200">
+                <a:solidFill>
+                  <a:schemeClr val="tx1"/>
+                </a:solidFill>
+                <a:latin typeface="Arial"/>
+                <a:ea typeface="+mn-ea"/>
+                <a:cs typeface="+mn-cs"/>
+              </a:defRPr>
+            </a:lvl7pPr>
+            <a:lvl8pPr marL="3429000" indent="-228600" algn="l" defTabSz="4703763" rtl="0" eaLnBrk="0" fontAlgn="base" latinLnBrk="0" hangingPunct="0">
+              <a:spcBef>
+                <a:spcPct val="0"/>
+              </a:spcBef>
+              <a:spcAft>
+                <a:spcPct val="0"/>
+              </a:spcAft>
+              <a:defRPr sz="9300" kern="1200">
+                <a:solidFill>
+                  <a:schemeClr val="tx1"/>
+                </a:solidFill>
+                <a:latin typeface="Arial"/>
+                <a:ea typeface="+mn-ea"/>
+                <a:cs typeface="+mn-cs"/>
+              </a:defRPr>
+            </a:lvl8pPr>
+            <a:lvl9pPr marL="3886200" indent="-228600" algn="l" defTabSz="4703763" rtl="0" eaLnBrk="0" fontAlgn="base" latinLnBrk="0" hangingPunct="0">
+              <a:spcBef>
+                <a:spcPct val="0"/>
+              </a:spcBef>
+              <a:spcAft>
+                <a:spcPct val="0"/>
+              </a:spcAft>
+              <a:defRPr sz="9300" kern="1200">
+                <a:solidFill>
+                  <a:schemeClr val="tx1"/>
+                </a:solidFill>
+                <a:latin typeface="Arial"/>
+                <a:ea typeface="+mn-ea"/>
+                <a:cs typeface="+mn-cs"/>
+              </a:defRPr>
+            </a:lvl9pPr>
+          </a:lstStyle>
+          <a:p>
+            <a:pPr algn="just"/>
+            <a:r>
+              <a:rPr lang="en-US" sz="2800" dirty="0"/>
+              <a:t>CNM revealed that clusters formed primarily around geographic regions and areas of focus (e.g. technology development, policy, manufacturing, and international collaborations).</a:t>
+            </a:r>
+          </a:p>
+        </p:txBody>
+      </p:sp>
+      <p:sp>
+        <p:nvSpPr>
+          <p:cNvPr id="2186" name="Text Box 6">
+            <a:extLst>
+              <a:ext uri="{FF2B5EF4-FFF2-40B4-BE49-F238E27FC236}">
+                <a16:creationId xmlns:a16="http://schemas.microsoft.com/office/drawing/2014/main" id="{F8EAF608-3616-200D-13DA-E3D715DE2FCA}"/>
+              </a:ext>
+            </a:extLst>
+          </p:cNvPr>
+          <p:cNvSpPr txBox="1">
+            <a:spLocks noChangeArrowheads="1"/>
+          </p:cNvSpPr>
+          <p:nvPr/>
+        </p:nvSpPr>
+        <p:spPr bwMode="auto">
+          <a:xfrm>
+            <a:off x="11497640" y="19042325"/>
+            <a:ext cx="10058400" cy="2708434"/>
+          </a:xfrm>
+          <a:prstGeom prst="rect">
+            <a:avLst/>
+          </a:prstGeom>
+          <a:solidFill>
+            <a:srgbClr val="B4D3E2"/>
+          </a:solidFill>
+          <a:ln>
+            <a:noFill/>
+          </a:ln>
+          <a:effectLst>
+            <a:softEdge rad="0"/>
+          </a:effectLst>
+        </p:spPr>
+        <p:txBody>
+          <a:bodyPr lIns="274320" tIns="274320" rIns="274320" bIns="274320">
+            <a:spAutoFit/>
+          </a:bodyPr>
+          <a:lstStyle>
+            <a:defPPr>
+              <a:defRPr lang="en-US" kern="1200"/>
+            </a:defPPr>
+            <a:lvl1pPr algn="l" defTabSz="4703763" rtl="0" eaLnBrk="0" fontAlgn="base" hangingPunct="0">
+              <a:spcBef>
+                <a:spcPct val="0"/>
+              </a:spcBef>
+              <a:spcAft>
+                <a:spcPct val="0"/>
+              </a:spcAft>
+              <a:defRPr sz="9300" kern="1200">
+                <a:solidFill>
+                  <a:schemeClr val="tx1"/>
+                </a:solidFill>
+                <a:latin typeface="Arial"/>
+                <a:ea typeface="+mn-ea"/>
+                <a:cs typeface="+mn-cs"/>
+              </a:defRPr>
+            </a:lvl1pPr>
+            <a:lvl2pPr marL="742950" indent="-285750" algn="l" defTabSz="4703763" rtl="0" eaLnBrk="0" fontAlgn="base" hangingPunct="0">
+              <a:spcBef>
+                <a:spcPct val="0"/>
+              </a:spcBef>
+              <a:spcAft>
+                <a:spcPct val="0"/>
+              </a:spcAft>
+              <a:defRPr sz="9300" kern="1200">
+                <a:solidFill>
+                  <a:schemeClr val="tx1"/>
+                </a:solidFill>
+                <a:latin typeface="Arial"/>
+                <a:ea typeface="+mn-ea"/>
+                <a:cs typeface="+mn-cs"/>
+              </a:defRPr>
+            </a:lvl2pPr>
+            <a:lvl3pPr marL="1143000" indent="-228600" algn="l" defTabSz="4703763" rtl="0" eaLnBrk="0" fontAlgn="base" hangingPunct="0">
+              <a:spcBef>
+                <a:spcPct val="0"/>
+              </a:spcBef>
+              <a:spcAft>
+                <a:spcPct val="0"/>
+              </a:spcAft>
+              <a:defRPr sz="9300" kern="1200">
+                <a:solidFill>
+                  <a:schemeClr val="tx1"/>
+                </a:solidFill>
+                <a:latin typeface="Arial"/>
+                <a:ea typeface="+mn-ea"/>
+                <a:cs typeface="+mn-cs"/>
+              </a:defRPr>
+            </a:lvl3pPr>
+            <a:lvl4pPr marL="1600200" indent="-228600" algn="l" defTabSz="4703763" rtl="0" eaLnBrk="0" fontAlgn="base" hangingPunct="0">
+              <a:spcBef>
+                <a:spcPct val="0"/>
+              </a:spcBef>
+              <a:spcAft>
+                <a:spcPct val="0"/>
+              </a:spcAft>
+              <a:defRPr sz="9300" kern="1200">
+                <a:solidFill>
+                  <a:schemeClr val="tx1"/>
+                </a:solidFill>
+                <a:latin typeface="Arial"/>
+                <a:ea typeface="+mn-ea"/>
+                <a:cs typeface="+mn-cs"/>
+              </a:defRPr>
+            </a:lvl4pPr>
+            <a:lvl5pPr marL="2057400" indent="-228600" algn="l" defTabSz="4703763" rtl="0" eaLnBrk="0" fontAlgn="base" hangingPunct="0">
+              <a:spcBef>
+                <a:spcPct val="0"/>
+              </a:spcBef>
+              <a:spcAft>
+                <a:spcPct val="0"/>
+              </a:spcAft>
+              <a:defRPr sz="9300" kern="1200">
+                <a:solidFill>
+                  <a:schemeClr val="tx1"/>
+                </a:solidFill>
+                <a:latin typeface="Arial"/>
+                <a:ea typeface="+mn-ea"/>
+                <a:cs typeface="+mn-cs"/>
+              </a:defRPr>
+            </a:lvl5pPr>
+            <a:lvl6pPr marL="2514600" indent="-228600" algn="l" defTabSz="4703763" rtl="0" eaLnBrk="0" fontAlgn="base" latinLnBrk="0" hangingPunct="0">
+              <a:spcBef>
+                <a:spcPct val="0"/>
+              </a:spcBef>
+              <a:spcAft>
+                <a:spcPct val="0"/>
+              </a:spcAft>
+              <a:defRPr sz="9300" kern="1200">
+                <a:solidFill>
+                  <a:schemeClr val="tx1"/>
+                </a:solidFill>
+                <a:latin typeface="Arial"/>
+                <a:ea typeface="+mn-ea"/>
+                <a:cs typeface="+mn-cs"/>
+              </a:defRPr>
+            </a:lvl6pPr>
+            <a:lvl7pPr marL="2971800" indent="-228600" algn="l" defTabSz="4703763" rtl="0" eaLnBrk="0" fontAlgn="base" latinLnBrk="0" hangingPunct="0">
+              <a:spcBef>
+                <a:spcPct val="0"/>
+              </a:spcBef>
+              <a:spcAft>
+                <a:spcPct val="0"/>
+              </a:spcAft>
+              <a:defRPr sz="9300" kern="1200">
+                <a:solidFill>
+                  <a:schemeClr val="tx1"/>
+                </a:solidFill>
+                <a:latin typeface="Arial"/>
+                <a:ea typeface="+mn-ea"/>
+                <a:cs typeface="+mn-cs"/>
+              </a:defRPr>
+            </a:lvl7pPr>
+            <a:lvl8pPr marL="3429000" indent="-228600" algn="l" defTabSz="4703763" rtl="0" eaLnBrk="0" fontAlgn="base" latinLnBrk="0" hangingPunct="0">
+              <a:spcBef>
+                <a:spcPct val="0"/>
+              </a:spcBef>
+              <a:spcAft>
+                <a:spcPct val="0"/>
+              </a:spcAft>
+              <a:defRPr sz="9300" kern="1200">
+                <a:solidFill>
+                  <a:schemeClr val="tx1"/>
+                </a:solidFill>
+                <a:latin typeface="Arial"/>
+                <a:ea typeface="+mn-ea"/>
+                <a:cs typeface="+mn-cs"/>
+              </a:defRPr>
+            </a:lvl8pPr>
+            <a:lvl9pPr marL="3886200" indent="-228600" algn="l" defTabSz="4703763" rtl="0" eaLnBrk="0" fontAlgn="base" latinLnBrk="0" hangingPunct="0">
+              <a:spcBef>
+                <a:spcPct val="0"/>
+              </a:spcBef>
+              <a:spcAft>
+                <a:spcPct val="0"/>
+              </a:spcAft>
+              <a:defRPr sz="9300" kern="1200">
+                <a:solidFill>
+                  <a:schemeClr val="tx1"/>
+                </a:solidFill>
+                <a:latin typeface="Arial"/>
+                <a:ea typeface="+mn-ea"/>
+                <a:cs typeface="+mn-cs"/>
+              </a:defRPr>
+            </a:lvl9pPr>
+          </a:lstStyle>
+          <a:p>
+            <a:pPr algn="ctr"/>
+            <a:r>
+              <a:rPr lang="en-US" sz="2800" dirty="0">
+                <a:latin typeface="Titillium Web" panose="00000500000000000000" pitchFamily="2" charset="0"/>
+                <a:ea typeface="Open Sans" panose="020B0606030504020204" pitchFamily="34" charset="0"/>
+                <a:cs typeface="Open Sans" panose="020B0606030504020204" pitchFamily="34" charset="0"/>
+              </a:rPr>
+              <a:t>Knowledge Graph Construction</a:t>
+            </a:r>
+          </a:p>
+          <a:p>
+            <a:pPr algn="just"/>
+            <a:r>
+              <a:rPr lang="en-US" sz="2800" dirty="0">
+                <a:latin typeface="Titillium Web" panose="00000500000000000000" pitchFamily="2" charset="0"/>
+                <a:ea typeface="Open Sans" panose="020B0606030504020204" pitchFamily="34" charset="0"/>
+                <a:cs typeface="Open Sans" panose="020B0606030504020204" pitchFamily="34" charset="0"/>
+              </a:rPr>
+              <a:t>Extracted JSON outputs were converted into a knowledge graph with 4,002 nodes and 5,127 edges. Low-degree nodes were removed, similar entities merged with fuzzy matching and transformer-based similarity, and node size scaled by degree.</a:t>
+            </a:r>
+          </a:p>
+        </p:txBody>
+      </p:sp>
+      <p:sp>
+        <p:nvSpPr>
+          <p:cNvPr id="2187" name="Text Box 6">
+            <a:extLst>
+              <a:ext uri="{FF2B5EF4-FFF2-40B4-BE49-F238E27FC236}">
+                <a16:creationId xmlns:a16="http://schemas.microsoft.com/office/drawing/2014/main" id="{5DAD8F8A-EF61-4280-03BC-FDEB19449874}"/>
+              </a:ext>
+            </a:extLst>
+          </p:cNvPr>
+          <p:cNvSpPr txBox="1">
+            <a:spLocks noChangeArrowheads="1"/>
+          </p:cNvSpPr>
+          <p:nvPr/>
+        </p:nvSpPr>
+        <p:spPr bwMode="auto">
+          <a:xfrm>
+            <a:off x="11515947" y="15137057"/>
+            <a:ext cx="10058400" cy="3570208"/>
+          </a:xfrm>
+          <a:prstGeom prst="rect">
+            <a:avLst/>
+          </a:prstGeom>
+          <a:solidFill>
+            <a:srgbClr val="B4D3E2"/>
+          </a:solidFill>
+          <a:ln>
+            <a:noFill/>
+          </a:ln>
+          <a:effectLst>
+            <a:softEdge rad="0"/>
+          </a:effectLst>
+        </p:spPr>
+        <p:txBody>
+          <a:bodyPr lIns="274320" tIns="274320" rIns="274320" bIns="274320">
+            <a:spAutoFit/>
+          </a:bodyPr>
+          <a:lstStyle>
+            <a:defPPr>
+              <a:defRPr lang="en-US" kern="1200"/>
+            </a:defPPr>
+            <a:lvl1pPr algn="l" defTabSz="4703763" rtl="0" eaLnBrk="0" fontAlgn="base" hangingPunct="0">
+              <a:spcBef>
+                <a:spcPct val="0"/>
+              </a:spcBef>
+              <a:spcAft>
+                <a:spcPct val="0"/>
+              </a:spcAft>
+              <a:defRPr sz="9300" kern="1200">
+                <a:solidFill>
+                  <a:schemeClr val="tx1"/>
+                </a:solidFill>
+                <a:latin typeface="Arial"/>
+                <a:ea typeface="+mn-ea"/>
+                <a:cs typeface="+mn-cs"/>
+              </a:defRPr>
+            </a:lvl1pPr>
+            <a:lvl2pPr marL="742950" indent="-285750" algn="l" defTabSz="4703763" rtl="0" eaLnBrk="0" fontAlgn="base" hangingPunct="0">
+              <a:spcBef>
+                <a:spcPct val="0"/>
+              </a:spcBef>
+              <a:spcAft>
+                <a:spcPct val="0"/>
+              </a:spcAft>
+              <a:defRPr sz="9300" kern="1200">
+                <a:solidFill>
+                  <a:schemeClr val="tx1"/>
+                </a:solidFill>
+                <a:latin typeface="Arial"/>
+                <a:ea typeface="+mn-ea"/>
+                <a:cs typeface="+mn-cs"/>
+              </a:defRPr>
+            </a:lvl2pPr>
+            <a:lvl3pPr marL="1143000" indent="-228600" algn="l" defTabSz="4703763" rtl="0" eaLnBrk="0" fontAlgn="base" hangingPunct="0">
+              <a:spcBef>
+                <a:spcPct val="0"/>
+              </a:spcBef>
+              <a:spcAft>
+                <a:spcPct val="0"/>
+              </a:spcAft>
+              <a:defRPr sz="9300" kern="1200">
+                <a:solidFill>
+                  <a:schemeClr val="tx1"/>
+                </a:solidFill>
+                <a:latin typeface="Arial"/>
+                <a:ea typeface="+mn-ea"/>
+                <a:cs typeface="+mn-cs"/>
+              </a:defRPr>
+            </a:lvl3pPr>
+            <a:lvl4pPr marL="1600200" indent="-228600" algn="l" defTabSz="4703763" rtl="0" eaLnBrk="0" fontAlgn="base" hangingPunct="0">
+              <a:spcBef>
+                <a:spcPct val="0"/>
+              </a:spcBef>
+              <a:spcAft>
+                <a:spcPct val="0"/>
+              </a:spcAft>
+              <a:defRPr sz="9300" kern="1200">
+                <a:solidFill>
+                  <a:schemeClr val="tx1"/>
+                </a:solidFill>
+                <a:latin typeface="Arial"/>
+                <a:ea typeface="+mn-ea"/>
+                <a:cs typeface="+mn-cs"/>
+              </a:defRPr>
+            </a:lvl4pPr>
+            <a:lvl5pPr marL="2057400" indent="-228600" algn="l" defTabSz="4703763" rtl="0" eaLnBrk="0" fontAlgn="base" hangingPunct="0">
+              <a:spcBef>
+                <a:spcPct val="0"/>
+              </a:spcBef>
+              <a:spcAft>
+                <a:spcPct val="0"/>
+              </a:spcAft>
+              <a:defRPr sz="9300" kern="1200">
+                <a:solidFill>
+                  <a:schemeClr val="tx1"/>
+                </a:solidFill>
+                <a:latin typeface="Arial"/>
+                <a:ea typeface="+mn-ea"/>
+                <a:cs typeface="+mn-cs"/>
+              </a:defRPr>
+            </a:lvl5pPr>
+            <a:lvl6pPr marL="2514600" indent="-228600" algn="l" defTabSz="4703763" rtl="0" eaLnBrk="0" fontAlgn="base" latinLnBrk="0" hangingPunct="0">
+              <a:spcBef>
+                <a:spcPct val="0"/>
+              </a:spcBef>
+              <a:spcAft>
+                <a:spcPct val="0"/>
+              </a:spcAft>
+              <a:defRPr sz="9300" kern="1200">
+                <a:solidFill>
+                  <a:schemeClr val="tx1"/>
+                </a:solidFill>
+                <a:latin typeface="Arial"/>
+                <a:ea typeface="+mn-ea"/>
+                <a:cs typeface="+mn-cs"/>
+              </a:defRPr>
+            </a:lvl6pPr>
+            <a:lvl7pPr marL="2971800" indent="-228600" algn="l" defTabSz="4703763" rtl="0" eaLnBrk="0" fontAlgn="base" latinLnBrk="0" hangingPunct="0">
+              <a:spcBef>
+                <a:spcPct val="0"/>
+              </a:spcBef>
+              <a:spcAft>
+                <a:spcPct val="0"/>
+              </a:spcAft>
+              <a:defRPr sz="9300" kern="1200">
+                <a:solidFill>
+                  <a:schemeClr val="tx1"/>
+                </a:solidFill>
+                <a:latin typeface="Arial"/>
+                <a:ea typeface="+mn-ea"/>
+                <a:cs typeface="+mn-cs"/>
+              </a:defRPr>
+            </a:lvl7pPr>
+            <a:lvl8pPr marL="3429000" indent="-228600" algn="l" defTabSz="4703763" rtl="0" eaLnBrk="0" fontAlgn="base" latinLnBrk="0" hangingPunct="0">
+              <a:spcBef>
+                <a:spcPct val="0"/>
+              </a:spcBef>
+              <a:spcAft>
+                <a:spcPct val="0"/>
+              </a:spcAft>
+              <a:defRPr sz="9300" kern="1200">
+                <a:solidFill>
+                  <a:schemeClr val="tx1"/>
+                </a:solidFill>
+                <a:latin typeface="Arial"/>
+                <a:ea typeface="+mn-ea"/>
+                <a:cs typeface="+mn-cs"/>
+              </a:defRPr>
+            </a:lvl8pPr>
+            <a:lvl9pPr marL="3886200" indent="-228600" algn="l" defTabSz="4703763" rtl="0" eaLnBrk="0" fontAlgn="base" latinLnBrk="0" hangingPunct="0">
+              <a:spcBef>
+                <a:spcPct val="0"/>
+              </a:spcBef>
+              <a:spcAft>
+                <a:spcPct val="0"/>
+              </a:spcAft>
+              <a:defRPr sz="9300" kern="1200">
+                <a:solidFill>
+                  <a:schemeClr val="tx1"/>
+                </a:solidFill>
+                <a:latin typeface="Arial"/>
+                <a:ea typeface="+mn-ea"/>
+                <a:cs typeface="+mn-cs"/>
+              </a:defRPr>
+            </a:lvl9pPr>
+          </a:lstStyle>
+          <a:p>
+            <a:pPr algn="ctr"/>
+            <a:r>
+              <a:rPr lang="en-US" sz="2800" dirty="0">
+                <a:latin typeface="Titillium Web" panose="00000500000000000000" pitchFamily="2" charset="0"/>
+                <a:ea typeface="Open Sans" panose="020B0606030504020204" pitchFamily="34" charset="0"/>
+                <a:cs typeface="Open Sans" panose="020B0606030504020204" pitchFamily="34" charset="0"/>
+              </a:rPr>
+              <a:t>LLM-Based Information Extraction</a:t>
+            </a:r>
+          </a:p>
+          <a:p>
+            <a:pPr algn="just"/>
+            <a:r>
+              <a:rPr lang="en-US" sz="2800" dirty="0">
+                <a:latin typeface="Titillium Web" panose="00000500000000000000" pitchFamily="2" charset="0"/>
+                <a:ea typeface="Open Sans" panose="020B0606030504020204" pitchFamily="34" charset="0"/>
+                <a:cs typeface="Open Sans" panose="020B0606030504020204" pitchFamily="34" charset="0"/>
+              </a:rPr>
+              <a:t>GPT-4o was used to extract entities and semantic relationships from solar energy articles, as LLMs outperform traditional methods on network extraction tasks [2]. A structured prompting framework (system prompt, user prompt, and JSON schema) defined 8 node types and 19 edge types while optimizing token usage.</a:t>
+            </a:r>
+          </a:p>
+        </p:txBody>
+      </p:sp>
+      <p:sp>
+        <p:nvSpPr>
+          <p:cNvPr id="2188" name="Text Box 6">
+            <a:extLst>
+              <a:ext uri="{FF2B5EF4-FFF2-40B4-BE49-F238E27FC236}">
+                <a16:creationId xmlns:a16="http://schemas.microsoft.com/office/drawing/2014/main" id="{7FFDF291-C30B-7440-51D0-7CB74BA6F891}"/>
+              </a:ext>
+            </a:extLst>
+          </p:cNvPr>
+          <p:cNvSpPr txBox="1">
+            <a:spLocks noChangeArrowheads="1"/>
+          </p:cNvSpPr>
+          <p:nvPr/>
+        </p:nvSpPr>
+        <p:spPr bwMode="auto">
+          <a:xfrm>
+            <a:off x="11497640" y="22106692"/>
+            <a:ext cx="10058400" cy="2708434"/>
+          </a:xfrm>
+          <a:prstGeom prst="rect">
+            <a:avLst/>
+          </a:prstGeom>
+          <a:solidFill>
+            <a:srgbClr val="B4D3E2"/>
+          </a:solidFill>
+          <a:ln>
+            <a:noFill/>
+          </a:ln>
+          <a:effectLst>
+            <a:softEdge rad="0"/>
+          </a:effectLst>
+        </p:spPr>
+        <p:txBody>
+          <a:bodyPr lIns="274320" tIns="274320" rIns="274320" bIns="274320">
+            <a:spAutoFit/>
+          </a:bodyPr>
+          <a:lstStyle>
+            <a:defPPr>
+              <a:defRPr lang="en-US" kern="1200"/>
+            </a:defPPr>
+            <a:lvl1pPr algn="l" defTabSz="4703763" rtl="0" eaLnBrk="0" fontAlgn="base" hangingPunct="0">
+              <a:spcBef>
+                <a:spcPct val="0"/>
+              </a:spcBef>
+              <a:spcAft>
+                <a:spcPct val="0"/>
+              </a:spcAft>
+              <a:defRPr sz="9300" kern="1200">
+                <a:solidFill>
+                  <a:schemeClr val="tx1"/>
+                </a:solidFill>
+                <a:latin typeface="Arial"/>
+                <a:ea typeface="+mn-ea"/>
+                <a:cs typeface="+mn-cs"/>
+              </a:defRPr>
+            </a:lvl1pPr>
+            <a:lvl2pPr marL="742950" indent="-285750" algn="l" defTabSz="4703763" rtl="0" eaLnBrk="0" fontAlgn="base" hangingPunct="0">
+              <a:spcBef>
+                <a:spcPct val="0"/>
+              </a:spcBef>
+              <a:spcAft>
+                <a:spcPct val="0"/>
+              </a:spcAft>
+              <a:defRPr sz="9300" kern="1200">
+                <a:solidFill>
+                  <a:schemeClr val="tx1"/>
+                </a:solidFill>
+                <a:latin typeface="Arial"/>
+                <a:ea typeface="+mn-ea"/>
+                <a:cs typeface="+mn-cs"/>
+              </a:defRPr>
+            </a:lvl2pPr>
+            <a:lvl3pPr marL="1143000" indent="-228600" algn="l" defTabSz="4703763" rtl="0" eaLnBrk="0" fontAlgn="base" hangingPunct="0">
+              <a:spcBef>
+                <a:spcPct val="0"/>
+              </a:spcBef>
+              <a:spcAft>
+                <a:spcPct val="0"/>
+              </a:spcAft>
+              <a:defRPr sz="9300" kern="1200">
+                <a:solidFill>
+                  <a:schemeClr val="tx1"/>
+                </a:solidFill>
+                <a:latin typeface="Arial"/>
+                <a:ea typeface="+mn-ea"/>
+                <a:cs typeface="+mn-cs"/>
+              </a:defRPr>
+            </a:lvl3pPr>
+            <a:lvl4pPr marL="1600200" indent="-228600" algn="l" defTabSz="4703763" rtl="0" eaLnBrk="0" fontAlgn="base" hangingPunct="0">
+              <a:spcBef>
+                <a:spcPct val="0"/>
+              </a:spcBef>
+              <a:spcAft>
+                <a:spcPct val="0"/>
+              </a:spcAft>
+              <a:defRPr sz="9300" kern="1200">
+                <a:solidFill>
+                  <a:schemeClr val="tx1"/>
+                </a:solidFill>
+                <a:latin typeface="Arial"/>
+                <a:ea typeface="+mn-ea"/>
+                <a:cs typeface="+mn-cs"/>
+              </a:defRPr>
+            </a:lvl4pPr>
+            <a:lvl5pPr marL="2057400" indent="-228600" algn="l" defTabSz="4703763" rtl="0" eaLnBrk="0" fontAlgn="base" hangingPunct="0">
+              <a:spcBef>
+                <a:spcPct val="0"/>
+              </a:spcBef>
+              <a:spcAft>
+                <a:spcPct val="0"/>
+              </a:spcAft>
+              <a:defRPr sz="9300" kern="1200">
+                <a:solidFill>
+                  <a:schemeClr val="tx1"/>
+                </a:solidFill>
+                <a:latin typeface="Arial"/>
+                <a:ea typeface="+mn-ea"/>
+                <a:cs typeface="+mn-cs"/>
+              </a:defRPr>
+            </a:lvl5pPr>
+            <a:lvl6pPr marL="2514600" indent="-228600" algn="l" defTabSz="4703763" rtl="0" eaLnBrk="0" fontAlgn="base" latinLnBrk="0" hangingPunct="0">
+              <a:spcBef>
+                <a:spcPct val="0"/>
+              </a:spcBef>
+              <a:spcAft>
+                <a:spcPct val="0"/>
+              </a:spcAft>
+              <a:defRPr sz="9300" kern="1200">
+                <a:solidFill>
+                  <a:schemeClr val="tx1"/>
+                </a:solidFill>
+                <a:latin typeface="Arial"/>
+                <a:ea typeface="+mn-ea"/>
+                <a:cs typeface="+mn-cs"/>
+              </a:defRPr>
+            </a:lvl6pPr>
+            <a:lvl7pPr marL="2971800" indent="-228600" algn="l" defTabSz="4703763" rtl="0" eaLnBrk="0" fontAlgn="base" latinLnBrk="0" hangingPunct="0">
+              <a:spcBef>
+                <a:spcPct val="0"/>
+              </a:spcBef>
+              <a:spcAft>
+                <a:spcPct val="0"/>
+              </a:spcAft>
+              <a:defRPr sz="9300" kern="1200">
+                <a:solidFill>
+                  <a:schemeClr val="tx1"/>
+                </a:solidFill>
+                <a:latin typeface="Arial"/>
+                <a:ea typeface="+mn-ea"/>
+                <a:cs typeface="+mn-cs"/>
+              </a:defRPr>
+            </a:lvl7pPr>
+            <a:lvl8pPr marL="3429000" indent="-228600" algn="l" defTabSz="4703763" rtl="0" eaLnBrk="0" fontAlgn="base" latinLnBrk="0" hangingPunct="0">
+              <a:spcBef>
+                <a:spcPct val="0"/>
+              </a:spcBef>
+              <a:spcAft>
+                <a:spcPct val="0"/>
+              </a:spcAft>
+              <a:defRPr sz="9300" kern="1200">
+                <a:solidFill>
+                  <a:schemeClr val="tx1"/>
+                </a:solidFill>
+                <a:latin typeface="Arial"/>
+                <a:ea typeface="+mn-ea"/>
+                <a:cs typeface="+mn-cs"/>
+              </a:defRPr>
+            </a:lvl8pPr>
+            <a:lvl9pPr marL="3886200" indent="-228600" algn="l" defTabSz="4703763" rtl="0" eaLnBrk="0" fontAlgn="base" latinLnBrk="0" hangingPunct="0">
+              <a:spcBef>
+                <a:spcPct val="0"/>
+              </a:spcBef>
+              <a:spcAft>
+                <a:spcPct val="0"/>
+              </a:spcAft>
+              <a:defRPr sz="9300" kern="1200">
+                <a:solidFill>
+                  <a:schemeClr val="tx1"/>
+                </a:solidFill>
+                <a:latin typeface="Arial"/>
+                <a:ea typeface="+mn-ea"/>
+                <a:cs typeface="+mn-cs"/>
+              </a:defRPr>
+            </a:lvl9pPr>
+          </a:lstStyle>
+          <a:p>
+            <a:pPr algn="ctr"/>
+            <a:r>
+              <a:rPr lang="en-US" sz="2800" dirty="0">
+                <a:latin typeface="Titillium Web" panose="00000500000000000000" pitchFamily="2" charset="0"/>
+                <a:ea typeface="Open Sans" panose="020B0606030504020204" pitchFamily="34" charset="0"/>
+                <a:cs typeface="Open Sans" panose="020B0606030504020204" pitchFamily="34" charset="0"/>
+              </a:rPr>
+              <a:t>Network Analysis</a:t>
+            </a:r>
+          </a:p>
+          <a:p>
+            <a:pPr algn="just"/>
+            <a:r>
+              <a:rPr lang="en-US" sz="2800" dirty="0">
+                <a:latin typeface="Titillium Web" panose="00000500000000000000" pitchFamily="2" charset="0"/>
+                <a:ea typeface="Open Sans" panose="020B0606030504020204" pitchFamily="34" charset="0"/>
+                <a:cs typeface="Open Sans" panose="020B0606030504020204" pitchFamily="34" charset="0"/>
+              </a:rPr>
+              <a:t>The greedy modularity maximization/</a:t>
+            </a:r>
+            <a:r>
+              <a:rPr lang="en-US" sz="2800" dirty="0" err="1">
+                <a:latin typeface="Titillium Web" panose="00000500000000000000" pitchFamily="2" charset="0"/>
+                <a:ea typeface="Open Sans" panose="020B0606030504020204" pitchFamily="34" charset="0"/>
+                <a:cs typeface="Open Sans" panose="020B0606030504020204" pitchFamily="34" charset="0"/>
+              </a:rPr>
+              <a:t>Clauset</a:t>
+            </a:r>
+            <a:r>
+              <a:rPr lang="en-US" sz="2800" dirty="0">
+                <a:latin typeface="Titillium Web" panose="00000500000000000000" pitchFamily="2" charset="0"/>
+                <a:ea typeface="Open Sans" panose="020B0606030504020204" pitchFamily="34" charset="0"/>
+                <a:cs typeface="Open Sans" panose="020B0606030504020204" pitchFamily="34" charset="0"/>
+              </a:rPr>
+              <a:t>-Newman-Moore (CNM) community detection algorithm was applied to identify groups of closely connected entities. 408 communities were found, of which 31 had over 10 member entities. </a:t>
+            </a:r>
+          </a:p>
+        </p:txBody>
+      </p:sp>
+      <p:grpSp>
+        <p:nvGrpSpPr>
+          <p:cNvPr id="2203" name="Group 2202">
             <a:extLst>
               <a:ext uri="{FF2B5EF4-FFF2-40B4-BE49-F238E27FC236}">
                 <a16:creationId xmlns:a16="http://schemas.microsoft.com/office/drawing/2014/main" id="{BCA4D9D1-070E-8208-23FE-31F9342648F3}"/>
@@ -8321,15 +8296,15 @@
         </p:nvGrpSpPr>
         <p:grpSpPr>
           <a:xfrm>
-            <a:off x="22763502" y="18466877"/>
-            <a:ext cx="9139468" cy="7193443"/>
-            <a:chOff x="22763502" y="18466877"/>
-            <a:chExt cx="9139468" cy="7193443"/>
+            <a:off x="22309382" y="8152149"/>
+            <a:ext cx="10037510" cy="10549984"/>
+            <a:chOff x="22227262" y="18466877"/>
+            <a:chExt cx="9139468" cy="9958563"/>
           </a:xfrm>
         </p:grpSpPr>
         <p:pic>
           <p:nvPicPr>
-            <p:cNvPr id="253" name="Picture 252">
+            <p:cNvPr id="2205" name="Picture 2204">
               <a:extLst>
                 <a:ext uri="{FF2B5EF4-FFF2-40B4-BE49-F238E27FC236}">
                   <a16:creationId xmlns:a16="http://schemas.microsoft.com/office/drawing/2014/main" id="{562B6D9C-DDD3-4929-5FDE-80BDB426CF81}"/>
@@ -8342,14 +8317,25 @@
             <p:nvPr/>
           </p:nvPicPr>
           <p:blipFill>
-            <a:blip r:embed="rId5"/>
+            <a:blip r:embed="rId14">
+              <a:clrChange>
+                <a:clrFrom>
+                  <a:srgbClr val="FFFFFF"/>
+                </a:clrFrom>
+                <a:clrTo>
+                  <a:srgbClr val="FFFFFF">
+                    <a:alpha val="0"/>
+                  </a:srgbClr>
+                </a:clrTo>
+              </a:clrChange>
+            </a:blip>
             <a:stretch>
               <a:fillRect/>
             </a:stretch>
           </p:blipFill>
           <p:spPr>
             <a:xfrm>
-              <a:off x="22763502" y="18591513"/>
+              <a:off x="22227262" y="18541398"/>
               <a:ext cx="9139468" cy="7068807"/>
             </a:xfrm>
             <a:prstGeom prst="rect">
@@ -8359,7 +8345,7 @@
         </p:pic>
         <p:sp>
           <p:nvSpPr>
-            <p:cNvPr id="2088" name="Text Box 6">
+            <p:cNvPr id="2206" name="Text Box 6">
               <a:extLst>
                 <a:ext uri="{FF2B5EF4-FFF2-40B4-BE49-F238E27FC236}">
                   <a16:creationId xmlns:a16="http://schemas.microsoft.com/office/drawing/2014/main" id="{2E246390-2DE9-C1C7-AF64-40584FF81998}"/>
@@ -8374,7 +8360,7 @@
           <p:spPr bwMode="auto">
             <a:xfrm>
               <a:off x="23551626" y="18466877"/>
-              <a:ext cx="6830935" cy="923330"/>
+              <a:ext cx="7258109" cy="900052"/>
             </a:xfrm>
             <a:prstGeom prst="rect">
               <a:avLst/>
@@ -8395,53 +8381,154 @@
               <a:defPPr>
                 <a:defRPr lang="en-US" kern="1200"/>
               </a:defPPr>
-              <a:lvl1pPr defTabSz="4703763" eaLnBrk="0" hangingPunct="0">
-                <a:defRPr sz="2400">
-                  <a:latin typeface="Titillium Web" panose="00000500000000000000" pitchFamily="2" charset="0"/>
-                  <a:ea typeface="Open Sans" panose="020B0606030504020204" pitchFamily="34" charset="0"/>
-                  <a:cs typeface="Open Sans" panose="020B0606030504020204" pitchFamily="34" charset="0"/>
-                </a:defRPr>
-              </a:lvl1pPr>
-              <a:lvl2pPr marL="742950" indent="-285750" defTabSz="4703763" eaLnBrk="0" hangingPunct="0"/>
-              <a:lvl3pPr marL="1143000" indent="-228600" defTabSz="4703763" eaLnBrk="0" hangingPunct="0"/>
-              <a:lvl4pPr marL="1600200" indent="-228600" defTabSz="4703763" eaLnBrk="0" hangingPunct="0"/>
-              <a:lvl5pPr marL="2057400" indent="-228600" defTabSz="4703763" eaLnBrk="0" hangingPunct="0"/>
-              <a:lvl6pPr marL="2514600" indent="-228600" defTabSz="4703763" eaLnBrk="0" fontAlgn="base" hangingPunct="0">
+              <a:lvl1pPr algn="l" defTabSz="4703763" rtl="0" eaLnBrk="0" fontAlgn="base" hangingPunct="0">
                 <a:spcBef>
                   <a:spcPct val="0"/>
                 </a:spcBef>
                 <a:spcAft>
                   <a:spcPct val="0"/>
                 </a:spcAft>
-              </a:lvl6pPr>
-              <a:lvl7pPr marL="2971800" indent="-228600" defTabSz="4703763" eaLnBrk="0" fontAlgn="base" hangingPunct="0">
+                <a:defRPr sz="2400" kern="1200">
+                  <a:solidFill>
+                    <a:schemeClr val="tx1"/>
+                  </a:solidFill>
+                  <a:latin typeface="Titillium Web" panose="00000500000000000000" pitchFamily="2" charset="0"/>
+                  <a:ea typeface="Open Sans" panose="020B0606030504020204" pitchFamily="34" charset="0"/>
+                  <a:cs typeface="Open Sans" panose="020B0606030504020204" pitchFamily="34" charset="0"/>
+                </a:defRPr>
+              </a:lvl1pPr>
+              <a:lvl2pPr marL="742950" indent="-285750" algn="l" defTabSz="4703763" rtl="0" eaLnBrk="0" fontAlgn="base" hangingPunct="0">
                 <a:spcBef>
                   <a:spcPct val="0"/>
                 </a:spcBef>
                 <a:spcAft>
                   <a:spcPct val="0"/>
                 </a:spcAft>
-              </a:lvl7pPr>
-              <a:lvl8pPr marL="3429000" indent="-228600" defTabSz="4703763" eaLnBrk="0" fontAlgn="base" hangingPunct="0">
+                <a:defRPr sz="9300" kern="1200">
+                  <a:solidFill>
+                    <a:schemeClr val="tx1"/>
+                  </a:solidFill>
+                  <a:latin typeface="Arial"/>
+                  <a:ea typeface="+mn-ea"/>
+                  <a:cs typeface="+mn-cs"/>
+                </a:defRPr>
+              </a:lvl2pPr>
+              <a:lvl3pPr marL="1143000" indent="-228600" algn="l" defTabSz="4703763" rtl="0" eaLnBrk="0" fontAlgn="base" hangingPunct="0">
                 <a:spcBef>
                   <a:spcPct val="0"/>
                 </a:spcBef>
                 <a:spcAft>
                   <a:spcPct val="0"/>
                 </a:spcAft>
-              </a:lvl8pPr>
-              <a:lvl9pPr marL="3886200" indent="-228600" defTabSz="4703763" eaLnBrk="0" fontAlgn="base" hangingPunct="0">
+                <a:defRPr sz="9300" kern="1200">
+                  <a:solidFill>
+                    <a:schemeClr val="tx1"/>
+                  </a:solidFill>
+                  <a:latin typeface="Arial"/>
+                  <a:ea typeface="+mn-ea"/>
+                  <a:cs typeface="+mn-cs"/>
+                </a:defRPr>
+              </a:lvl3pPr>
+              <a:lvl4pPr marL="1600200" indent="-228600" algn="l" defTabSz="4703763" rtl="0" eaLnBrk="0" fontAlgn="base" hangingPunct="0">
                 <a:spcBef>
                   <a:spcPct val="0"/>
                 </a:spcBef>
                 <a:spcAft>
                   <a:spcPct val="0"/>
                 </a:spcAft>
+                <a:defRPr sz="9300" kern="1200">
+                  <a:solidFill>
+                    <a:schemeClr val="tx1"/>
+                  </a:solidFill>
+                  <a:latin typeface="Arial"/>
+                  <a:ea typeface="+mn-ea"/>
+                  <a:cs typeface="+mn-cs"/>
+                </a:defRPr>
+              </a:lvl4pPr>
+              <a:lvl5pPr marL="2057400" indent="-228600" algn="l" defTabSz="4703763" rtl="0" eaLnBrk="0" fontAlgn="base" hangingPunct="0">
+                <a:spcBef>
+                  <a:spcPct val="0"/>
+                </a:spcBef>
+                <a:spcAft>
+                  <a:spcPct val="0"/>
+                </a:spcAft>
+                <a:defRPr sz="9300" kern="1200">
+                  <a:solidFill>
+                    <a:schemeClr val="tx1"/>
+                  </a:solidFill>
+                  <a:latin typeface="Arial"/>
+                  <a:ea typeface="+mn-ea"/>
+                  <a:cs typeface="+mn-cs"/>
+                </a:defRPr>
+              </a:lvl5pPr>
+              <a:lvl6pPr marL="2514600" indent="-228600" algn="l" defTabSz="4703763" rtl="0" eaLnBrk="0" fontAlgn="base" latinLnBrk="0" hangingPunct="0">
+                <a:spcBef>
+                  <a:spcPct val="0"/>
+                </a:spcBef>
+                <a:spcAft>
+                  <a:spcPct val="0"/>
+                </a:spcAft>
+                <a:defRPr sz="9300" kern="1200">
+                  <a:solidFill>
+                    <a:schemeClr val="tx1"/>
+                  </a:solidFill>
+                  <a:latin typeface="Arial"/>
+                  <a:ea typeface="+mn-ea"/>
+                  <a:cs typeface="+mn-cs"/>
+                </a:defRPr>
+              </a:lvl6pPr>
+              <a:lvl7pPr marL="2971800" indent="-228600" algn="l" defTabSz="4703763" rtl="0" eaLnBrk="0" fontAlgn="base" latinLnBrk="0" hangingPunct="0">
+                <a:spcBef>
+                  <a:spcPct val="0"/>
+                </a:spcBef>
+                <a:spcAft>
+                  <a:spcPct val="0"/>
+                </a:spcAft>
+                <a:defRPr sz="9300" kern="1200">
+                  <a:solidFill>
+                    <a:schemeClr val="tx1"/>
+                  </a:solidFill>
+                  <a:latin typeface="Arial"/>
+                  <a:ea typeface="+mn-ea"/>
+                  <a:cs typeface="+mn-cs"/>
+                </a:defRPr>
+              </a:lvl7pPr>
+              <a:lvl8pPr marL="3429000" indent="-228600" algn="l" defTabSz="4703763" rtl="0" eaLnBrk="0" fontAlgn="base" latinLnBrk="0" hangingPunct="0">
+                <a:spcBef>
+                  <a:spcPct val="0"/>
+                </a:spcBef>
+                <a:spcAft>
+                  <a:spcPct val="0"/>
+                </a:spcAft>
+                <a:defRPr sz="9300" kern="1200">
+                  <a:solidFill>
+                    <a:schemeClr val="tx1"/>
+                  </a:solidFill>
+                  <a:latin typeface="Arial"/>
+                  <a:ea typeface="+mn-ea"/>
+                  <a:cs typeface="+mn-cs"/>
+                </a:defRPr>
+              </a:lvl8pPr>
+              <a:lvl9pPr marL="3886200" indent="-228600" algn="l" defTabSz="4703763" rtl="0" eaLnBrk="0" fontAlgn="base" latinLnBrk="0" hangingPunct="0">
+                <a:spcBef>
+                  <a:spcPct val="0"/>
+                </a:spcBef>
+                <a:spcAft>
+                  <a:spcPct val="0"/>
+                </a:spcAft>
+                <a:defRPr sz="9300" kern="1200">
+                  <a:solidFill>
+                    <a:schemeClr val="tx1"/>
+                  </a:solidFill>
+                  <a:latin typeface="Arial"/>
+                  <a:ea typeface="+mn-ea"/>
+                  <a:cs typeface="+mn-cs"/>
+                </a:defRPr>
               </a:lvl9pPr>
             </a:lstStyle>
             <a:p>
               <a:r>
-                <a:rPr lang="en-US" dirty="0">
+                <a:rPr lang="en-US" sz="2800" dirty="0">
                   <a:latin typeface="Titillium Web" panose="00000500000000000000" pitchFamily="2" charset="0"/>
                   <a:ea typeface="Open Sans" panose="020B0606030504020204" pitchFamily="34" charset="0"/>
                   <a:cs typeface="Open Sans" panose="020B0606030504020204" pitchFamily="34" charset="0"/>
@@ -8453,7 +8540,7 @@
         </p:sp>
         <p:sp>
           <p:nvSpPr>
-            <p:cNvPr id="2089" name="TextBox 2088">
+            <p:cNvPr id="2207" name="TextBox 2088">
               <a:extLst>
                 <a:ext uri="{FF2B5EF4-FFF2-40B4-BE49-F238E27FC236}">
                   <a16:creationId xmlns:a16="http://schemas.microsoft.com/office/drawing/2014/main" id="{3C903F9B-E2B3-FD85-CBDB-6371C932DF3F}"/>
@@ -8465,8 +8552,8 @@
           </p:nvSpPr>
           <p:spPr>
             <a:xfrm>
-              <a:off x="27586338" y="19146297"/>
-              <a:ext cx="3556427" cy="1754326"/>
+              <a:off x="27810303" y="26246519"/>
+              <a:ext cx="3556427" cy="2178921"/>
             </a:xfrm>
             <a:prstGeom prst="rect">
               <a:avLst/>
@@ -8477,14 +8564,140 @@
             <a:bodyPr wrap="square" rtlCol="0">
               <a:spAutoFit/>
             </a:bodyPr>
-            <a:lstStyle/>
+            <a:lstStyle>
+              <a:defPPr>
+                <a:defRPr lang="en-US"/>
+              </a:defPPr>
+              <a:lvl1pPr algn="l" rtl="0" fontAlgn="base">
+                <a:spcBef>
+                  <a:spcPct val="0"/>
+                </a:spcBef>
+                <a:spcAft>
+                  <a:spcPct val="0"/>
+                </a:spcAft>
+                <a:defRPr sz="9300" kern="1200">
+                  <a:solidFill>
+                    <a:schemeClr val="tx1"/>
+                  </a:solidFill>
+                  <a:latin typeface="Arial"/>
+                  <a:ea typeface="+mn-ea"/>
+                  <a:cs typeface="+mn-cs"/>
+                </a:defRPr>
+              </a:lvl1pPr>
+              <a:lvl2pPr marL="457200" algn="l" rtl="0" fontAlgn="base">
+                <a:spcBef>
+                  <a:spcPct val="0"/>
+                </a:spcBef>
+                <a:spcAft>
+                  <a:spcPct val="0"/>
+                </a:spcAft>
+                <a:defRPr sz="9300" kern="1200">
+                  <a:solidFill>
+                    <a:schemeClr val="tx1"/>
+                  </a:solidFill>
+                  <a:latin typeface="Arial"/>
+                  <a:ea typeface="+mn-ea"/>
+                  <a:cs typeface="+mn-cs"/>
+                </a:defRPr>
+              </a:lvl2pPr>
+              <a:lvl3pPr marL="914400" algn="l" rtl="0" fontAlgn="base">
+                <a:spcBef>
+                  <a:spcPct val="0"/>
+                </a:spcBef>
+                <a:spcAft>
+                  <a:spcPct val="0"/>
+                </a:spcAft>
+                <a:defRPr sz="9300" kern="1200">
+                  <a:solidFill>
+                    <a:schemeClr val="tx1"/>
+                  </a:solidFill>
+                  <a:latin typeface="Arial"/>
+                  <a:ea typeface="+mn-ea"/>
+                  <a:cs typeface="+mn-cs"/>
+                </a:defRPr>
+              </a:lvl3pPr>
+              <a:lvl4pPr marL="1371600" algn="l" rtl="0" fontAlgn="base">
+                <a:spcBef>
+                  <a:spcPct val="0"/>
+                </a:spcBef>
+                <a:spcAft>
+                  <a:spcPct val="0"/>
+                </a:spcAft>
+                <a:defRPr sz="9300" kern="1200">
+                  <a:solidFill>
+                    <a:schemeClr val="tx1"/>
+                  </a:solidFill>
+                  <a:latin typeface="Arial"/>
+                  <a:ea typeface="+mn-ea"/>
+                  <a:cs typeface="+mn-cs"/>
+                </a:defRPr>
+              </a:lvl4pPr>
+              <a:lvl5pPr marL="1828800" algn="l" rtl="0" fontAlgn="base">
+                <a:spcBef>
+                  <a:spcPct val="0"/>
+                </a:spcBef>
+                <a:spcAft>
+                  <a:spcPct val="0"/>
+                </a:spcAft>
+                <a:defRPr sz="9300" kern="1200">
+                  <a:solidFill>
+                    <a:schemeClr val="tx1"/>
+                  </a:solidFill>
+                  <a:latin typeface="Arial"/>
+                  <a:ea typeface="+mn-ea"/>
+                  <a:cs typeface="+mn-cs"/>
+                </a:defRPr>
+              </a:lvl5pPr>
+              <a:lvl6pPr marL="2286000" algn="l" defTabSz="914400" rtl="0" eaLnBrk="1" latinLnBrk="0" hangingPunct="1">
+                <a:defRPr sz="9300" kern="1200">
+                  <a:solidFill>
+                    <a:schemeClr val="tx1"/>
+                  </a:solidFill>
+                  <a:latin typeface="Arial"/>
+                  <a:ea typeface="+mn-ea"/>
+                  <a:cs typeface="+mn-cs"/>
+                </a:defRPr>
+              </a:lvl6pPr>
+              <a:lvl7pPr marL="2743200" algn="l" defTabSz="914400" rtl="0" eaLnBrk="1" latinLnBrk="0" hangingPunct="1">
+                <a:defRPr sz="9300" kern="1200">
+                  <a:solidFill>
+                    <a:schemeClr val="tx1"/>
+                  </a:solidFill>
+                  <a:latin typeface="Arial"/>
+                  <a:ea typeface="+mn-ea"/>
+                  <a:cs typeface="+mn-cs"/>
+                </a:defRPr>
+              </a:lvl7pPr>
+              <a:lvl8pPr marL="3200400" algn="l" defTabSz="914400" rtl="0" eaLnBrk="1" latinLnBrk="0" hangingPunct="1">
+                <a:defRPr sz="9300" kern="1200">
+                  <a:solidFill>
+                    <a:schemeClr val="tx1"/>
+                  </a:solidFill>
+                  <a:latin typeface="Arial"/>
+                  <a:ea typeface="+mn-ea"/>
+                  <a:cs typeface="+mn-cs"/>
+                </a:defRPr>
+              </a:lvl8pPr>
+              <a:lvl9pPr marL="3657600" algn="l" defTabSz="914400" rtl="0" eaLnBrk="1" latinLnBrk="0" hangingPunct="1">
+                <a:defRPr sz="9300" kern="1200">
+                  <a:solidFill>
+                    <a:schemeClr val="tx1"/>
+                  </a:solidFill>
+                  <a:latin typeface="Arial"/>
+                  <a:ea typeface="+mn-ea"/>
+                  <a:cs typeface="+mn-cs"/>
+                </a:defRPr>
+              </a:lvl9pPr>
+            </a:lstStyle>
             <a:p>
               <a:pPr marL="342900" indent="-342900">
                 <a:buFont typeface="Arial" panose="020B0604020202020204" pitchFamily="34" charset="0"/>
                 <a:buChar char="•"/>
               </a:pPr>
               <a:r>
-                <a:rPr lang="en-US" sz="1800" dirty="0"/>
+                <a:rPr lang="en-US" sz="2400" dirty="0">
+                  <a:latin typeface="Titillium Web" panose="00000500000000000000" pitchFamily="2" charset="0"/>
+                </a:rPr>
                 <a:t>most communities not directly connected</a:t>
               </a:r>
             </a:p>
@@ -8494,19 +8707,281 @@
                 <a:buChar char="•"/>
               </a:pPr>
               <a:r>
-                <a:rPr lang="en-US" sz="1800" dirty="0"/>
+                <a:rPr lang="en-US" sz="2400" dirty="0">
+                  <a:latin typeface="Titillium Web" panose="00000500000000000000" pitchFamily="2" charset="0"/>
+                </a:rPr>
                 <a:t>small number of highly central communities linked separate regions of the network</a:t>
               </a:r>
             </a:p>
           </p:txBody>
         </p:sp>
       </p:grpSp>
+      <p:sp>
+        <p:nvSpPr>
+          <p:cNvPr id="2222" name="TextBox 2221">
+            <a:extLst>
+              <a:ext uri="{FF2B5EF4-FFF2-40B4-BE49-F238E27FC236}">
+                <a16:creationId xmlns:a16="http://schemas.microsoft.com/office/drawing/2014/main" id="{9D0B35AE-75E4-B1D0-5B78-7FE50ABE0CB4}"/>
+              </a:ext>
+            </a:extLst>
+          </p:cNvPr>
+          <p:cNvSpPr txBox="1"/>
+          <p:nvPr/>
+        </p:nvSpPr>
+        <p:spPr>
+          <a:xfrm>
+            <a:off x="33101279" y="17193661"/>
+            <a:ext cx="10080366" cy="7017306"/>
+          </a:xfrm>
+          <a:prstGeom prst="rect">
+            <a:avLst/>
+          </a:prstGeom>
+          <a:solidFill>
+            <a:srgbClr val="B4D3E2"/>
+          </a:solidFill>
+          <a:ln>
+            <a:noFill/>
+          </a:ln>
+          <a:effectLst>
+            <a:softEdge rad="0"/>
+          </a:effectLst>
+        </p:spPr>
+        <p:txBody>
+          <a:bodyPr wrap="square" lIns="274320" tIns="274320" rIns="274320" bIns="274320">
+            <a:spAutoFit/>
+          </a:bodyPr>
+          <a:lstStyle>
+            <a:defPPr>
+              <a:defRPr lang="en-US" kern="1200"/>
+            </a:defPPr>
+            <a:lvl1pPr marL="342900" indent="-342900" algn="just" defTabSz="4703763" eaLnBrk="0" hangingPunct="0">
+              <a:buFont typeface="Arial" panose="020B0604020202020204" pitchFamily="34" charset="0"/>
+              <a:buChar char="•"/>
+              <a:defRPr sz="2800">
+                <a:latin typeface="Titillium Web" panose="00000500000000000000" pitchFamily="2" charset="0"/>
+                <a:ea typeface="Open Sans" panose="020B0606030504020204" pitchFamily="34" charset="0"/>
+                <a:cs typeface="Open Sans" panose="020B0606030504020204" pitchFamily="34" charset="0"/>
+              </a:defRPr>
+            </a:lvl1pPr>
+            <a:lvl2pPr marL="742950" indent="-285750" defTabSz="4703763" eaLnBrk="0" hangingPunct="0"/>
+            <a:lvl3pPr marL="1143000" indent="-228600" defTabSz="4703763" eaLnBrk="0" hangingPunct="0"/>
+            <a:lvl4pPr marL="1600200" indent="-228600" defTabSz="4703763" eaLnBrk="0" hangingPunct="0"/>
+            <a:lvl5pPr marL="2057400" indent="-228600" defTabSz="4703763" eaLnBrk="0" hangingPunct="0"/>
+            <a:lvl6pPr marL="2514600" indent="-228600" defTabSz="4703763" eaLnBrk="0" fontAlgn="base" hangingPunct="0">
+              <a:spcBef>
+                <a:spcPct val="0"/>
+              </a:spcBef>
+              <a:spcAft>
+                <a:spcPct val="0"/>
+              </a:spcAft>
+            </a:lvl6pPr>
+            <a:lvl7pPr marL="2971800" indent="-228600" defTabSz="4703763" eaLnBrk="0" fontAlgn="base" hangingPunct="0">
+              <a:spcBef>
+                <a:spcPct val="0"/>
+              </a:spcBef>
+              <a:spcAft>
+                <a:spcPct val="0"/>
+              </a:spcAft>
+            </a:lvl7pPr>
+            <a:lvl8pPr marL="3429000" indent="-228600" defTabSz="4703763" eaLnBrk="0" fontAlgn="base" hangingPunct="0">
+              <a:spcBef>
+                <a:spcPct val="0"/>
+              </a:spcBef>
+              <a:spcAft>
+                <a:spcPct val="0"/>
+              </a:spcAft>
+            </a:lvl8pPr>
+            <a:lvl9pPr marL="3886200" indent="-228600" defTabSz="4703763" eaLnBrk="0" fontAlgn="base" hangingPunct="0">
+              <a:spcBef>
+                <a:spcPct val="0"/>
+              </a:spcBef>
+              <a:spcAft>
+                <a:spcPct val="0"/>
+              </a:spcAft>
+            </a:lvl9pPr>
+          </a:lstStyle>
+          <a:p>
+            <a:pPr marL="0" indent="0">
+              <a:buNone/>
+            </a:pPr>
+            <a:r>
+              <a:rPr lang="en-US" dirty="0"/>
+              <a:t>[1] M. </a:t>
+            </a:r>
+            <a:r>
+              <a:rPr lang="en-US" dirty="0" err="1"/>
+              <a:t>Grusky</a:t>
+            </a:r>
+            <a:r>
+              <a:rPr lang="en-US" dirty="0"/>
+              <a:t>, M. Naaman, and Y. Artzi, “NEWSROOM: A Dataset of 1.3 Million Summaries with Diverse Extractive Strategies,” 2018. Accessed: Aug. 04, 2026. [Online]. Available: </a:t>
+            </a:r>
+            <a:r>
+              <a:rPr lang="en-US" u="sng" dirty="0"/>
+              <a:t>https://aclanthology.org/N18-1065.pdf</a:t>
+            </a:r>
+          </a:p>
+          <a:p>
+            <a:pPr marL="0" indent="0">
+              <a:buNone/>
+            </a:pPr>
+            <a:r>
+              <a:rPr lang="en-US" dirty="0"/>
+              <a:t>[2] J. Hoppa, “How to Convert Unstructured Text to Knowledge Graphs Using LLMs,” Neo4j Graph Intelligence Platform. Accessed: Aug. 04, 2026. [Online]. Available: </a:t>
+            </a:r>
+            <a:r>
+              <a:rPr lang="en-US" u="sng" dirty="0"/>
+              <a:t>https://neo4j.com/blog/developer/unstructured-text-to-knowledge-graph/</a:t>
+            </a:r>
+          </a:p>
+          <a:p>
+            <a:pPr marL="0" indent="0">
+              <a:buNone/>
+            </a:pPr>
+            <a:r>
+              <a:rPr lang="en-US" dirty="0"/>
+              <a:t>[3] T. Ma, B. Liu, and S. Yang, “Constructing New Power System Stock Indices via a Compound AI System: A Hierarchical RAG and Knowledge Graph Approach,” </a:t>
+            </a:r>
+            <a:r>
+              <a:rPr lang="en-US" i="1" dirty="0"/>
+              <a:t>Proceedings of the 2025 6th International Conference on Computer Science and Management Technology</a:t>
+            </a:r>
+            <a:r>
+              <a:rPr lang="en-US" dirty="0"/>
+              <a:t>, pp. 1007–1012, Dec. 2025, </a:t>
+            </a:r>
+            <a:r>
+              <a:rPr lang="en-US" dirty="0" err="1"/>
+              <a:t>doi</a:t>
+            </a:r>
+            <a:r>
+              <a:rPr lang="en-US" dirty="0"/>
+              <a:t>: </a:t>
+            </a:r>
+            <a:r>
+              <a:rPr lang="en-US" u="sng" dirty="0"/>
+              <a:t>10.1145/3795154.3795318</a:t>
+            </a:r>
+            <a:r>
+              <a:rPr lang="en-US" dirty="0"/>
+              <a:t>.</a:t>
+            </a:r>
+          </a:p>
+        </p:txBody>
+      </p:sp>
+      <p:sp>
+        <p:nvSpPr>
+          <p:cNvPr id="2226" name="TextBox 2225">
+            <a:extLst>
+              <a:ext uri="{FF2B5EF4-FFF2-40B4-BE49-F238E27FC236}">
+                <a16:creationId xmlns:a16="http://schemas.microsoft.com/office/drawing/2014/main" id="{D8154DD2-9A0D-04E2-E831-02BD4B65A178}"/>
+              </a:ext>
+            </a:extLst>
+          </p:cNvPr>
+          <p:cNvSpPr txBox="1"/>
+          <p:nvPr/>
+        </p:nvSpPr>
+        <p:spPr>
+          <a:xfrm>
+            <a:off x="33115927" y="24392840"/>
+            <a:ext cx="10080366" cy="1415772"/>
+          </a:xfrm>
+          <a:prstGeom prst="rect">
+            <a:avLst/>
+          </a:prstGeom>
+          <a:solidFill>
+            <a:srgbClr val="B4D3E2"/>
+          </a:solidFill>
+          <a:ln>
+            <a:noFill/>
+          </a:ln>
+          <a:effectLst>
+            <a:softEdge rad="0"/>
+          </a:effectLst>
+        </p:spPr>
+        <p:txBody>
+          <a:bodyPr wrap="square" lIns="274320" tIns="274320" rIns="274320" bIns="274320">
+            <a:spAutoFit/>
+          </a:bodyPr>
+          <a:lstStyle>
+            <a:defPPr>
+              <a:defRPr lang="en-US" kern="1200"/>
+            </a:defPPr>
+            <a:lvl1pPr marL="342900" indent="-342900" algn="just" defTabSz="4703763" eaLnBrk="0" hangingPunct="0">
+              <a:buFont typeface="Arial" panose="020B0604020202020204" pitchFamily="34" charset="0"/>
+              <a:buChar char="•"/>
+              <a:defRPr sz="2800">
+                <a:latin typeface="Titillium Web" panose="00000500000000000000" pitchFamily="2" charset="0"/>
+                <a:ea typeface="Open Sans" panose="020B0606030504020204" pitchFamily="34" charset="0"/>
+                <a:cs typeface="Open Sans" panose="020B0606030504020204" pitchFamily="34" charset="0"/>
+              </a:defRPr>
+            </a:lvl1pPr>
+            <a:lvl2pPr marL="742950" indent="-285750" defTabSz="4703763" eaLnBrk="0" hangingPunct="0"/>
+            <a:lvl3pPr marL="1143000" indent="-228600" defTabSz="4703763" eaLnBrk="0" hangingPunct="0"/>
+            <a:lvl4pPr marL="1600200" indent="-228600" defTabSz="4703763" eaLnBrk="0" hangingPunct="0"/>
+            <a:lvl5pPr marL="2057400" indent="-228600" defTabSz="4703763" eaLnBrk="0" hangingPunct="0"/>
+            <a:lvl6pPr marL="2514600" indent="-228600" defTabSz="4703763" eaLnBrk="0" fontAlgn="base" hangingPunct="0">
+              <a:spcBef>
+                <a:spcPct val="0"/>
+              </a:spcBef>
+              <a:spcAft>
+                <a:spcPct val="0"/>
+              </a:spcAft>
+            </a:lvl6pPr>
+            <a:lvl7pPr marL="2971800" indent="-228600" defTabSz="4703763" eaLnBrk="0" fontAlgn="base" hangingPunct="0">
+              <a:spcBef>
+                <a:spcPct val="0"/>
+              </a:spcBef>
+              <a:spcAft>
+                <a:spcPct val="0"/>
+              </a:spcAft>
+            </a:lvl7pPr>
+            <a:lvl8pPr marL="3429000" indent="-228600" defTabSz="4703763" eaLnBrk="0" fontAlgn="base" hangingPunct="0">
+              <a:spcBef>
+                <a:spcPct val="0"/>
+              </a:spcBef>
+              <a:spcAft>
+                <a:spcPct val="0"/>
+              </a:spcAft>
+            </a:lvl8pPr>
+            <a:lvl9pPr marL="3886200" indent="-228600" defTabSz="4703763" eaLnBrk="0" fontAlgn="base" hangingPunct="0">
+              <a:spcBef>
+                <a:spcPct val="0"/>
+              </a:spcBef>
+              <a:spcAft>
+                <a:spcPct val="0"/>
+              </a:spcAft>
+            </a:lvl9pPr>
+          </a:lstStyle>
+          <a:p>
+            <a:pPr marL="0" indent="0">
+              <a:buNone/>
+            </a:pPr>
+            <a:r>
+              <a:rPr lang="en-US" dirty="0"/>
+              <a:t>For more technical details, please see the project’s </a:t>
+            </a:r>
+            <a:r>
+              <a:rPr lang="en-US" dirty="0" err="1"/>
+              <a:t>Github</a:t>
+            </a:r>
+            <a:r>
+              <a:rPr lang="en-US" dirty="0"/>
+              <a:t>: </a:t>
+            </a:r>
+            <a:r>
+              <a:rPr lang="en-US" u="sng" dirty="0"/>
+              <a:t>https://github.com/rckan/syracuse-su26-project</a:t>
+            </a:r>
+          </a:p>
+        </p:txBody>
+      </p:sp>
       <p:graphicFrame>
         <p:nvGraphicFramePr>
-          <p:cNvPr id="2094" name="Table 2093">
+          <p:cNvPr id="2228" name="Table 2227">
             <a:extLst>
               <a:ext uri="{FF2B5EF4-FFF2-40B4-BE49-F238E27FC236}">
-                <a16:creationId xmlns:a16="http://schemas.microsoft.com/office/drawing/2014/main" id="{444E4AC0-836C-3FC7-C2D5-8D92BFA14FD2}"/>
+                <a16:creationId xmlns:a16="http://schemas.microsoft.com/office/drawing/2014/main" id="{7B73A042-7C27-1A15-5776-B2F6A80B5857}"/>
               </a:ext>
             </a:extLst>
           </p:cNvPr>
@@ -8516,14 +8991,14 @@
           <p:nvPr>
             <p:extLst>
               <p:ext uri="{D42A27DB-BD31-4B8C-83A1-F6EECF244321}">
-                <p14:modId xmlns:p14="http://schemas.microsoft.com/office/powerpoint/2010/main" val="1284993318"/>
+                <p14:modId xmlns:p14="http://schemas.microsoft.com/office/powerpoint/2010/main" val="1715240491"/>
               </p:ext>
             </p:extLst>
           </p:nvPr>
         </p:nvGraphicFramePr>
         <p:xfrm>
-          <a:off x="28311628" y="22492913"/>
-          <a:ext cx="2724811" cy="2926080"/>
+          <a:off x="22776510" y="15706279"/>
+          <a:ext cx="5384561" cy="3749040"/>
         </p:xfrm>
         <a:graphic>
           <a:graphicData uri="http://schemas.openxmlformats.org/drawingml/2006/table">
@@ -8532,14 +9007,14 @@
                 <a:tableStyleId>{2D5ABB26-0587-4C30-8999-92F81FD0307C}</a:tableStyleId>
               </a:tblPr>
               <a:tblGrid>
-                <a:gridCol w="278701">
+                <a:gridCol w="533830">
                   <a:extLst>
                     <a:ext uri="{9D8B030D-6E8A-4147-A177-3AD203B41FA5}">
                       <a16:colId xmlns:a16="http://schemas.microsoft.com/office/drawing/2014/main" val="1902017129"/>
                     </a:ext>
                   </a:extLst>
                 </a:gridCol>
-                <a:gridCol w="2446110">
+                <a:gridCol w="4850731">
                   <a:extLst>
                     <a:ext uri="{9D8B030D-6E8A-4147-A177-3AD203B41FA5}">
                       <a16:colId xmlns:a16="http://schemas.microsoft.com/office/drawing/2014/main" val="2938504809"/>
@@ -8557,7 +9032,7 @@
                         <a:buNone/>
                       </a:pPr>
                       <a:r>
-                        <a:rPr lang="en-US" sz="1800" dirty="0">
+                        <a:rPr lang="en-US" sz="2400" dirty="0">
                           <a:latin typeface="Titillium Web" panose="00000500000000000000" pitchFamily="2" charset="0"/>
                         </a:rPr>
                         <a:t>0</a:t>
@@ -8633,12 +9108,12 @@
                         <a:defRPr/>
                       </a:pPr>
                       <a:r>
-                        <a:rPr lang="en-US" sz="1800" dirty="0">
+                        <a:rPr lang="en-US" sz="2400" dirty="0">
                           <a:latin typeface="Titillium Web" panose="00000500000000000000" pitchFamily="2" charset="0"/>
                           <a:ea typeface="Open Sans" panose="020B0606030504020204" pitchFamily="34" charset="0"/>
                           <a:cs typeface="Open Sans" panose="020B0606030504020204" pitchFamily="34" charset="0"/>
                         </a:rPr>
-                        <a:t>American residential markets</a:t>
+                        <a:t>American residential markets (495 nodes)</a:t>
                       </a:r>
                     </a:p>
                   </a:txBody>
@@ -8702,7 +9177,7 @@
                         <a:buNone/>
                       </a:pPr>
                       <a:r>
-                        <a:rPr lang="en-US" sz="1800" dirty="0">
+                        <a:rPr lang="en-US" sz="2400" dirty="0">
                           <a:latin typeface="Titillium Web" panose="00000500000000000000" pitchFamily="2" charset="0"/>
                         </a:rPr>
                         <a:t>1</a:t>
@@ -8776,12 +9251,12 @@
                         <a:defRPr/>
                       </a:pPr>
                       <a:r>
-                        <a:rPr lang="en-US" sz="1800" dirty="0">
+                        <a:rPr lang="en-US" sz="2400" dirty="0">
                           <a:latin typeface="Titillium Web" panose="00000500000000000000" pitchFamily="2" charset="0"/>
                           <a:ea typeface="Open Sans" panose="020B0606030504020204" pitchFamily="34" charset="0"/>
                           <a:cs typeface="Open Sans" panose="020B0606030504020204" pitchFamily="34" charset="0"/>
                         </a:rPr>
-                        <a:t>U.S.–China manufacturing/trade</a:t>
+                        <a:t>U.S.–China manufacturing and trade (437 nodes)</a:t>
                       </a:r>
                     </a:p>
                   </a:txBody>
@@ -8843,7 +9318,7 @@
                         <a:buNone/>
                       </a:pPr>
                       <a:r>
-                        <a:rPr lang="en-US" sz="1800" dirty="0">
+                        <a:rPr lang="en-US" sz="2400" dirty="0">
                           <a:latin typeface="Titillium Web" panose="00000500000000000000" pitchFamily="2" charset="0"/>
                         </a:rPr>
                         <a:t>2</a:t>
@@ -8917,12 +9392,12 @@
                         <a:defRPr/>
                       </a:pPr>
                       <a:r>
-                        <a:rPr lang="en-US" sz="1800" dirty="0">
+                        <a:rPr lang="en-US" sz="2400" dirty="0">
                           <a:latin typeface="Titillium Web" panose="00000500000000000000" pitchFamily="2" charset="0"/>
                           <a:ea typeface="Open Sans" panose="020B0606030504020204" pitchFamily="34" charset="0"/>
                           <a:cs typeface="Open Sans" panose="020B0606030504020204" pitchFamily="34" charset="0"/>
                         </a:rPr>
-                        <a:t>U.S. solar policy</a:t>
+                        <a:t>U.S. solar policy (403)</a:t>
                       </a:r>
                     </a:p>
                   </a:txBody>
@@ -8984,7 +9459,7 @@
                         <a:buNone/>
                       </a:pPr>
                       <a:r>
-                        <a:rPr lang="en-US" sz="1800" dirty="0">
+                        <a:rPr lang="en-US" sz="2400" dirty="0">
                           <a:latin typeface="Titillium Web" panose="00000500000000000000" pitchFamily="2" charset="0"/>
                         </a:rPr>
                         <a:t>3</a:t>
@@ -9058,12 +9533,12 @@
                         <a:defRPr/>
                       </a:pPr>
                       <a:r>
-                        <a:rPr lang="en-US" sz="1800" dirty="0">
+                        <a:rPr lang="en-US" sz="2400" dirty="0">
                           <a:latin typeface="Titillium Web" panose="00000500000000000000" pitchFamily="2" charset="0"/>
                           <a:ea typeface="Open Sans" panose="020B0606030504020204" pitchFamily="34" charset="0"/>
                           <a:cs typeface="Open Sans" panose="020B0606030504020204" pitchFamily="34" charset="0"/>
                         </a:rPr>
-                        <a:t>International solar tech/projects</a:t>
+                        <a:t>International solar tech/projects (345 nodes)</a:t>
                       </a:r>
                     </a:p>
                   </a:txBody>
@@ -9125,7 +9600,7 @@
                         <a:buNone/>
                       </a:pPr>
                       <a:r>
-                        <a:rPr lang="en-US" sz="1800" dirty="0">
+                        <a:rPr lang="en-US" sz="2400" dirty="0">
                           <a:latin typeface="Titillium Web" panose="00000500000000000000" pitchFamily="2" charset="0"/>
                         </a:rPr>
                         <a:t>4</a:t>
@@ -9201,12 +9676,12 @@
                         <a:defRPr/>
                       </a:pPr>
                       <a:r>
-                        <a:rPr lang="en-US" sz="1800" dirty="0">
+                        <a:rPr lang="en-US" sz="2400" dirty="0">
                           <a:latin typeface="Titillium Web" panose="00000500000000000000" pitchFamily="2" charset="0"/>
                           <a:ea typeface="Open Sans" panose="020B0606030504020204" pitchFamily="34" charset="0"/>
                           <a:cs typeface="Open Sans" panose="020B0606030504020204" pitchFamily="34" charset="0"/>
                         </a:rPr>
-                        <a:t>International pro-solar orgs</a:t>
+                        <a:t>International pro-solar orgs (201 nodes)</a:t>
                       </a:r>
                     </a:p>
                   </a:txBody>
@@ -9264,6 +9739,519 @@
           </a:graphicData>
         </a:graphic>
       </p:graphicFrame>
+      <p:sp>
+        <p:nvSpPr>
+          <p:cNvPr id="2232" name="TextBox 2231">
+            <a:extLst>
+              <a:ext uri="{FF2B5EF4-FFF2-40B4-BE49-F238E27FC236}">
+                <a16:creationId xmlns:a16="http://schemas.microsoft.com/office/drawing/2014/main" id="{ED053E2C-0720-E04C-6041-5CA2BBE9BBE6}"/>
+              </a:ext>
+            </a:extLst>
+          </p:cNvPr>
+          <p:cNvSpPr txBox="1"/>
+          <p:nvPr/>
+        </p:nvSpPr>
+        <p:spPr>
+          <a:xfrm>
+            <a:off x="12153444" y="14409251"/>
+            <a:ext cx="8744702" cy="461665"/>
+          </a:xfrm>
+          <a:prstGeom prst="rect">
+            <a:avLst/>
+          </a:prstGeom>
+          <a:noFill/>
+        </p:spPr>
+        <p:txBody>
+          <a:bodyPr wrap="none" rtlCol="0">
+            <a:spAutoFit/>
+          </a:bodyPr>
+          <a:lstStyle/>
+          <a:p>
+            <a:pPr algn="ctr"/>
+            <a:r>
+              <a:rPr lang="en-US" sz="2400" dirty="0"/>
+              <a:t>Fig. 1: Reductions in dataset size and cost with filtering pipeline</a:t>
+            </a:r>
+          </a:p>
+        </p:txBody>
+      </p:sp>
+      <p:sp>
+        <p:nvSpPr>
+          <p:cNvPr id="2234" name="TextBox 2233">
+            <a:extLst>
+              <a:ext uri="{FF2B5EF4-FFF2-40B4-BE49-F238E27FC236}">
+                <a16:creationId xmlns:a16="http://schemas.microsoft.com/office/drawing/2014/main" id="{CA34C90F-BFC4-C884-B2FF-C74E9D1BCAFE}"/>
+              </a:ext>
+            </a:extLst>
+          </p:cNvPr>
+          <p:cNvSpPr txBox="1"/>
+          <p:nvPr/>
+        </p:nvSpPr>
+        <p:spPr>
+          <a:xfrm>
+            <a:off x="12815415" y="30559416"/>
+            <a:ext cx="7167347" cy="461665"/>
+          </a:xfrm>
+          <a:prstGeom prst="rect">
+            <a:avLst/>
+          </a:prstGeom>
+          <a:noFill/>
+        </p:spPr>
+        <p:txBody>
+          <a:bodyPr wrap="none" rtlCol="0">
+            <a:spAutoFit/>
+          </a:bodyPr>
+          <a:lstStyle/>
+          <a:p>
+            <a:pPr algn="ctr"/>
+            <a:r>
+              <a:rPr lang="en-US" sz="2400" dirty="0">
+                <a:latin typeface="Titillium Web" panose="00000500000000000000" pitchFamily="2" charset="0"/>
+              </a:rPr>
+              <a:t>Fig. 2: Counts of most common edge connection types</a:t>
+            </a:r>
+          </a:p>
+        </p:txBody>
+      </p:sp>
+      <p:sp>
+        <p:nvSpPr>
+          <p:cNvPr id="2236" name="Text Box 6">
+            <a:extLst>
+              <a:ext uri="{FF2B5EF4-FFF2-40B4-BE49-F238E27FC236}">
+                <a16:creationId xmlns:a16="http://schemas.microsoft.com/office/drawing/2014/main" id="{989AE5B1-F8A2-9FCC-7897-BB445887765D}"/>
+              </a:ext>
+            </a:extLst>
+          </p:cNvPr>
+          <p:cNvSpPr txBox="1">
+            <a:spLocks noChangeArrowheads="1"/>
+          </p:cNvSpPr>
+          <p:nvPr/>
+        </p:nvSpPr>
+        <p:spPr bwMode="auto">
+          <a:xfrm>
+            <a:off x="17542528" y="25327246"/>
+            <a:ext cx="3892168" cy="4985980"/>
+          </a:xfrm>
+          <a:prstGeom prst="rect">
+            <a:avLst/>
+          </a:prstGeom>
+          <a:noFill/>
+          <a:ln>
+            <a:noFill/>
+          </a:ln>
+          <a:effectLst>
+            <a:softEdge rad="0"/>
+          </a:effectLst>
+        </p:spPr>
+        <p:txBody>
+          <a:bodyPr wrap="square" lIns="274320" tIns="274320" rIns="274320" bIns="274320">
+            <a:spAutoFit/>
+          </a:bodyPr>
+          <a:lstStyle>
+            <a:defPPr>
+              <a:defRPr lang="en-US" kern="1200"/>
+            </a:defPPr>
+            <a:lvl1pPr algn="l" defTabSz="4703763" rtl="0" eaLnBrk="0" fontAlgn="base" hangingPunct="0">
+              <a:spcBef>
+                <a:spcPct val="0"/>
+              </a:spcBef>
+              <a:spcAft>
+                <a:spcPct val="0"/>
+              </a:spcAft>
+              <a:defRPr sz="2400" kern="1200">
+                <a:solidFill>
+                  <a:schemeClr val="tx1"/>
+                </a:solidFill>
+                <a:latin typeface="Titillium Web" panose="00000500000000000000" pitchFamily="2" charset="0"/>
+                <a:ea typeface="Open Sans" panose="020B0606030504020204" pitchFamily="34" charset="0"/>
+                <a:cs typeface="Open Sans" panose="020B0606030504020204" pitchFamily="34" charset="0"/>
+              </a:defRPr>
+            </a:lvl1pPr>
+            <a:lvl2pPr marL="742950" indent="-285750" algn="l" defTabSz="4703763" rtl="0" eaLnBrk="0" fontAlgn="base" hangingPunct="0">
+              <a:spcBef>
+                <a:spcPct val="0"/>
+              </a:spcBef>
+              <a:spcAft>
+                <a:spcPct val="0"/>
+              </a:spcAft>
+              <a:defRPr sz="9300" kern="1200">
+                <a:solidFill>
+                  <a:schemeClr val="tx1"/>
+                </a:solidFill>
+                <a:latin typeface="Arial"/>
+                <a:ea typeface="+mn-ea"/>
+                <a:cs typeface="+mn-cs"/>
+              </a:defRPr>
+            </a:lvl2pPr>
+            <a:lvl3pPr marL="1143000" indent="-228600" algn="l" defTabSz="4703763" rtl="0" eaLnBrk="0" fontAlgn="base" hangingPunct="0">
+              <a:spcBef>
+                <a:spcPct val="0"/>
+              </a:spcBef>
+              <a:spcAft>
+                <a:spcPct val="0"/>
+              </a:spcAft>
+              <a:defRPr sz="9300" kern="1200">
+                <a:solidFill>
+                  <a:schemeClr val="tx1"/>
+                </a:solidFill>
+                <a:latin typeface="Arial"/>
+                <a:ea typeface="+mn-ea"/>
+                <a:cs typeface="+mn-cs"/>
+              </a:defRPr>
+            </a:lvl3pPr>
+            <a:lvl4pPr marL="1600200" indent="-228600" algn="l" defTabSz="4703763" rtl="0" eaLnBrk="0" fontAlgn="base" hangingPunct="0">
+              <a:spcBef>
+                <a:spcPct val="0"/>
+              </a:spcBef>
+              <a:spcAft>
+                <a:spcPct val="0"/>
+              </a:spcAft>
+              <a:defRPr sz="9300" kern="1200">
+                <a:solidFill>
+                  <a:schemeClr val="tx1"/>
+                </a:solidFill>
+                <a:latin typeface="Arial"/>
+                <a:ea typeface="+mn-ea"/>
+                <a:cs typeface="+mn-cs"/>
+              </a:defRPr>
+            </a:lvl4pPr>
+            <a:lvl5pPr marL="2057400" indent="-228600" algn="l" defTabSz="4703763" rtl="0" eaLnBrk="0" fontAlgn="base" hangingPunct="0">
+              <a:spcBef>
+                <a:spcPct val="0"/>
+              </a:spcBef>
+              <a:spcAft>
+                <a:spcPct val="0"/>
+              </a:spcAft>
+              <a:defRPr sz="9300" kern="1200">
+                <a:solidFill>
+                  <a:schemeClr val="tx1"/>
+                </a:solidFill>
+                <a:latin typeface="Arial"/>
+                <a:ea typeface="+mn-ea"/>
+                <a:cs typeface="+mn-cs"/>
+              </a:defRPr>
+            </a:lvl5pPr>
+            <a:lvl6pPr marL="2514600" indent="-228600" algn="l" defTabSz="4703763" rtl="0" eaLnBrk="0" fontAlgn="base" latinLnBrk="0" hangingPunct="0">
+              <a:spcBef>
+                <a:spcPct val="0"/>
+              </a:spcBef>
+              <a:spcAft>
+                <a:spcPct val="0"/>
+              </a:spcAft>
+              <a:defRPr sz="9300" kern="1200">
+                <a:solidFill>
+                  <a:schemeClr val="tx1"/>
+                </a:solidFill>
+                <a:latin typeface="Arial"/>
+                <a:ea typeface="+mn-ea"/>
+                <a:cs typeface="+mn-cs"/>
+              </a:defRPr>
+            </a:lvl6pPr>
+            <a:lvl7pPr marL="2971800" indent="-228600" algn="l" defTabSz="4703763" rtl="0" eaLnBrk="0" fontAlgn="base" latinLnBrk="0" hangingPunct="0">
+              <a:spcBef>
+                <a:spcPct val="0"/>
+              </a:spcBef>
+              <a:spcAft>
+                <a:spcPct val="0"/>
+              </a:spcAft>
+              <a:defRPr sz="9300" kern="1200">
+                <a:solidFill>
+                  <a:schemeClr val="tx1"/>
+                </a:solidFill>
+                <a:latin typeface="Arial"/>
+                <a:ea typeface="+mn-ea"/>
+                <a:cs typeface="+mn-cs"/>
+              </a:defRPr>
+            </a:lvl7pPr>
+            <a:lvl8pPr marL="3429000" indent="-228600" algn="l" defTabSz="4703763" rtl="0" eaLnBrk="0" fontAlgn="base" latinLnBrk="0" hangingPunct="0">
+              <a:spcBef>
+                <a:spcPct val="0"/>
+              </a:spcBef>
+              <a:spcAft>
+                <a:spcPct val="0"/>
+              </a:spcAft>
+              <a:defRPr sz="9300" kern="1200">
+                <a:solidFill>
+                  <a:schemeClr val="tx1"/>
+                </a:solidFill>
+                <a:latin typeface="Arial"/>
+                <a:ea typeface="+mn-ea"/>
+                <a:cs typeface="+mn-cs"/>
+              </a:defRPr>
+            </a:lvl8pPr>
+            <a:lvl9pPr marL="3886200" indent="-228600" algn="l" defTabSz="4703763" rtl="0" eaLnBrk="0" fontAlgn="base" latinLnBrk="0" hangingPunct="0">
+              <a:spcBef>
+                <a:spcPct val="0"/>
+              </a:spcBef>
+              <a:spcAft>
+                <a:spcPct val="0"/>
+              </a:spcAft>
+              <a:defRPr sz="9300" kern="1200">
+                <a:solidFill>
+                  <a:schemeClr val="tx1"/>
+                </a:solidFill>
+                <a:latin typeface="Arial"/>
+                <a:ea typeface="+mn-ea"/>
+                <a:cs typeface="+mn-cs"/>
+              </a:defRPr>
+            </a:lvl9pPr>
+          </a:lstStyle>
+          <a:p>
+            <a:pPr algn="just"/>
+            <a:r>
+              <a:rPr lang="en-US" dirty="0"/>
+              <a:t>Company, technology, and project nodes appear most frequently in common edges, while government, policy, people, and article nodes are less common, suggesting news coverage emphasizes technological and economic developments over politics.</a:t>
+            </a:r>
+          </a:p>
+        </p:txBody>
+      </p:sp>
+      <p:sp>
+        <p:nvSpPr>
+          <p:cNvPr id="2242" name="TextBox 2241">
+            <a:extLst>
+              <a:ext uri="{FF2B5EF4-FFF2-40B4-BE49-F238E27FC236}">
+                <a16:creationId xmlns:a16="http://schemas.microsoft.com/office/drawing/2014/main" id="{B1E022EC-E448-09A1-CFAD-60440471449F}"/>
+              </a:ext>
+            </a:extLst>
+          </p:cNvPr>
+          <p:cNvSpPr txBox="1"/>
+          <p:nvPr/>
+        </p:nvSpPr>
+        <p:spPr>
+          <a:xfrm>
+            <a:off x="23153588" y="29097253"/>
+            <a:ext cx="8722396" cy="1938992"/>
+          </a:xfrm>
+          <a:prstGeom prst="rect">
+            <a:avLst/>
+          </a:prstGeom>
+          <a:noFill/>
+        </p:spPr>
+        <p:txBody>
+          <a:bodyPr wrap="square" rtlCol="0">
+            <a:spAutoFit/>
+          </a:bodyPr>
+          <a:lstStyle/>
+          <a:p>
+            <a:pPr algn="ctr"/>
+            <a:r>
+              <a:rPr lang="en-US" sz="2400" dirty="0">
+                <a:latin typeface="Titillium Web" panose="00000500000000000000" pitchFamily="2" charset="0"/>
+              </a:rPr>
+              <a:t>Fig. 3: Nodes with highest connectivity to other communities</a:t>
+            </a:r>
+          </a:p>
+          <a:p>
+            <a:pPr algn="ctr"/>
+            <a:endParaRPr lang="en-US" sz="2400" dirty="0">
+              <a:latin typeface="Titillium Web" panose="00000500000000000000" pitchFamily="2" charset="0"/>
+            </a:endParaRPr>
+          </a:p>
+          <a:p>
+            <a:pPr algn="ctr"/>
+            <a:r>
+              <a:rPr lang="en-US" sz="2400" dirty="0">
+                <a:latin typeface="Titillium Web" panose="00000500000000000000" pitchFamily="2" charset="0"/>
+              </a:rPr>
+              <a:t>Though company, technology, and project nodes are most often found in common edges, location nodes play a large role in the connections between communities.</a:t>
+            </a:r>
+          </a:p>
+        </p:txBody>
+      </p:sp>
+      <p:pic>
+        <p:nvPicPr>
+          <p:cNvPr id="2255" name="Picture 2254">
+            <a:extLst>
+              <a:ext uri="{FF2B5EF4-FFF2-40B4-BE49-F238E27FC236}">
+                <a16:creationId xmlns:a16="http://schemas.microsoft.com/office/drawing/2014/main" id="{F1CF9E9E-8057-94AD-A813-F22F7E06B79A}"/>
+              </a:ext>
+            </a:extLst>
+          </p:cNvPr>
+          <p:cNvPicPr>
+            <a:picLocks noChangeAspect="1"/>
+          </p:cNvPicPr>
+          <p:nvPr/>
+        </p:nvPicPr>
+        <p:blipFill>
+          <a:blip r:embed="rId15" cstate="print">
+            <a:extLst>
+              <a:ext uri="{28A0092B-C50C-407E-A947-70E740481C1C}">
+                <a14:useLocalDpi xmlns:a14="http://schemas.microsoft.com/office/drawing/2010/main" val="0"/>
+              </a:ext>
+            </a:extLst>
+          </a:blip>
+          <a:stretch>
+            <a:fillRect/>
+          </a:stretch>
+        </p:blipFill>
+        <p:spPr>
+          <a:xfrm>
+            <a:off x="33101279" y="30203305"/>
+            <a:ext cx="4760986" cy="771146"/>
+          </a:xfrm>
+          <a:prstGeom prst="rect">
+            <a:avLst/>
+          </a:prstGeom>
+        </p:spPr>
+      </p:pic>
+      <p:cxnSp>
+        <p:nvCxnSpPr>
+          <p:cNvPr id="2257" name="Straight Arrow Connector 2256">
+            <a:extLst>
+              <a:ext uri="{FF2B5EF4-FFF2-40B4-BE49-F238E27FC236}">
+                <a16:creationId xmlns:a16="http://schemas.microsoft.com/office/drawing/2014/main" id="{B6CAE498-55F9-AEA2-C9B3-15B86FC2CE6C}"/>
+              </a:ext>
+            </a:extLst>
+          </p:cNvPr>
+          <p:cNvCxnSpPr>
+            <a:cxnSpLocks/>
+            <a:stCxn id="2105" idx="1"/>
+            <a:endCxn id="309" idx="0"/>
+          </p:cNvCxnSpPr>
+          <p:nvPr/>
+        </p:nvCxnSpPr>
+        <p:spPr bwMode="auto">
+          <a:xfrm flipH="1">
+            <a:off x="5369919" y="19648096"/>
+            <a:ext cx="2623089" cy="3646593"/>
+          </a:xfrm>
+          <a:prstGeom prst="straightConnector1">
+            <a:avLst/>
+          </a:prstGeom>
+          <a:solidFill>
+            <a:schemeClr val="accent1"/>
+          </a:solidFill>
+          <a:ln w="25400" cap="flat" cmpd="sng" algn="ctr">
+            <a:solidFill>
+              <a:schemeClr val="tx1"/>
+            </a:solidFill>
+            <a:prstDash val="solid"/>
+            <a:round/>
+            <a:headEnd type="none" w="med" len="med"/>
+            <a:tailEnd type="triangle" w="lg" len="lg"/>
+          </a:ln>
+          <a:effectLst/>
+          <a:extLst>
+            <a:ext uri="{AF507438-7753-43E0-B8FC-AC1667EBCBE1}">
+              <a14:hiddenEffects xmlns:a14="http://schemas.microsoft.com/office/drawing/2010/main">
+                <a:effectLst>
+                  <a:outerShdw dist="35921" dir="2700000" algn="ctr" rotWithShape="0">
+                    <a:schemeClr val="bg2"/>
+                  </a:outerShdw>
+                </a:effectLst>
+              </a14:hiddenEffects>
+            </a:ext>
+          </a:extLst>
+        </p:spPr>
+      </p:cxnSp>
+      <p:pic>
+        <p:nvPicPr>
+          <p:cNvPr id="2264" name="Picture 2263">
+            <a:extLst>
+              <a:ext uri="{FF2B5EF4-FFF2-40B4-BE49-F238E27FC236}">
+                <a16:creationId xmlns:a16="http://schemas.microsoft.com/office/drawing/2014/main" id="{58652777-100E-0529-E54B-67DD3E914CD0}"/>
+              </a:ext>
+            </a:extLst>
+          </p:cNvPr>
+          <p:cNvPicPr>
+            <a:picLocks noChangeAspect="1"/>
+          </p:cNvPicPr>
+          <p:nvPr/>
+        </p:nvPicPr>
+        <p:blipFill>
+          <a:blip r:embed="rId16" cstate="print">
+            <a:extLst>
+              <a:ext uri="{28A0092B-C50C-407E-A947-70E740481C1C}">
+                <a14:useLocalDpi xmlns:a14="http://schemas.microsoft.com/office/drawing/2010/main" val="0"/>
+              </a:ext>
+            </a:extLst>
+          </a:blip>
+          <a:stretch>
+            <a:fillRect/>
+          </a:stretch>
+        </p:blipFill>
+        <p:spPr>
+          <a:xfrm>
+            <a:off x="11523359" y="25061316"/>
+            <a:ext cx="6043411" cy="5414409"/>
+          </a:xfrm>
+          <a:prstGeom prst="rect">
+            <a:avLst/>
+          </a:prstGeom>
+        </p:spPr>
+      </p:pic>
+      <p:pic>
+        <p:nvPicPr>
+          <p:cNvPr id="2266" name="Picture 2265">
+            <a:extLst>
+              <a:ext uri="{FF2B5EF4-FFF2-40B4-BE49-F238E27FC236}">
+                <a16:creationId xmlns:a16="http://schemas.microsoft.com/office/drawing/2014/main" id="{81A495C9-67F0-F9DC-0725-BDE44FA24102}"/>
+              </a:ext>
+            </a:extLst>
+          </p:cNvPr>
+          <p:cNvPicPr>
+            <a:picLocks noChangeAspect="1"/>
+          </p:cNvPicPr>
+          <p:nvPr/>
+        </p:nvPicPr>
+        <p:blipFill>
+          <a:blip r:embed="rId17" cstate="print">
+            <a:extLst>
+              <a:ext uri="{28A0092B-C50C-407E-A947-70E740481C1C}">
+                <a14:useLocalDpi xmlns:a14="http://schemas.microsoft.com/office/drawing/2010/main" val="0"/>
+              </a:ext>
+            </a:extLst>
+          </a:blip>
+          <a:stretch>
+            <a:fillRect/>
+          </a:stretch>
+        </p:blipFill>
+        <p:spPr>
+          <a:xfrm>
+            <a:off x="22435583" y="22209497"/>
+            <a:ext cx="9800801" cy="6783251"/>
+          </a:xfrm>
+          <a:prstGeom prst="rect">
+            <a:avLst/>
+          </a:prstGeom>
+        </p:spPr>
+      </p:pic>
+      <p:pic>
+        <p:nvPicPr>
+          <p:cNvPr id="2268" name="Picture 2267">
+            <a:extLst>
+              <a:ext uri="{FF2B5EF4-FFF2-40B4-BE49-F238E27FC236}">
+                <a16:creationId xmlns:a16="http://schemas.microsoft.com/office/drawing/2014/main" id="{7CC73C80-6B31-9A9F-3234-2838D4F79A13}"/>
+              </a:ext>
+            </a:extLst>
+          </p:cNvPr>
+          <p:cNvPicPr>
+            <a:picLocks noChangeAspect="1"/>
+          </p:cNvPicPr>
+          <p:nvPr/>
+        </p:nvPicPr>
+        <p:blipFill>
+          <a:blip r:embed="rId18" cstate="print">
+            <a:extLst>
+              <a:ext uri="{28A0092B-C50C-407E-A947-70E740481C1C}">
+                <a14:useLocalDpi xmlns:a14="http://schemas.microsoft.com/office/drawing/2010/main" val="0"/>
+              </a:ext>
+            </a:extLst>
+          </a:blip>
+          <a:stretch>
+            <a:fillRect/>
+          </a:stretch>
+        </p:blipFill>
+        <p:spPr>
+          <a:xfrm>
+            <a:off x="12267660" y="11162521"/>
+            <a:ext cx="8556650" cy="3341749"/>
+          </a:xfrm>
+          <a:prstGeom prst="rect">
+            <a:avLst/>
+          </a:prstGeom>
+        </p:spPr>
+      </p:pic>
     </p:spTree>
   </p:cSld>
   <p:clrMapOvr>
@@ -10147,4 +11135,299 @@
     </a:extraClrScheme>
   </a:extraClrSchemeLst>
 </a:theme>
+</file>
+
+<file path=ppt/theme/theme2.xml><?xml version="1.0" encoding="utf-8"?>
+<a:theme xmlns:a="http://schemas.openxmlformats.org/drawingml/2006/main" name="Office Theme">
+  <a:themeElements>
+    <a:clrScheme name="Office">
+      <a:dk1>
+        <a:sysClr val="windowText" lastClr="000000"/>
+      </a:dk1>
+      <a:lt1>
+        <a:sysClr val="window" lastClr="FFFFFF"/>
+      </a:lt1>
+      <a:dk2>
+        <a:srgbClr val="44546A"/>
+      </a:dk2>
+      <a:lt2>
+        <a:srgbClr val="E7E6E6"/>
+      </a:lt2>
+      <a:accent1>
+        <a:srgbClr val="4472C4"/>
+      </a:accent1>
+      <a:accent2>
+        <a:srgbClr val="ED7D31"/>
+      </a:accent2>
+      <a:accent3>
+        <a:srgbClr val="A5A5A5"/>
+      </a:accent3>
+      <a:accent4>
+        <a:srgbClr val="FFC000"/>
+      </a:accent4>
+      <a:accent5>
+        <a:srgbClr val="5B9BD5"/>
+      </a:accent5>
+      <a:accent6>
+        <a:srgbClr val="70AD47"/>
+      </a:accent6>
+      <a:hlink>
+        <a:srgbClr val="0563C1"/>
+      </a:hlink>
+      <a:folHlink>
+        <a:srgbClr val="954F72"/>
+      </a:folHlink>
+    </a:clrScheme>
+    <a:fontScheme name="Office">
+      <a:majorFont>
+        <a:latin typeface="Calibri Light" panose="020F0302020204030204"/>
+        <a:ea typeface=""/>
+        <a:cs typeface=""/>
+        <a:font script="Jpan" typeface="游ゴシック Light"/>
+        <a:font script="Hang" typeface="맑은 고딕"/>
+        <a:font script="Hans" typeface="等线 Light"/>
+        <a:font script="Hant" typeface="新細明體"/>
+        <a:font script="Arab" typeface="Times New Roman"/>
+        <a:font script="Hebr" typeface="Times New Roman"/>
+        <a:font script="Thai" typeface="Angsana New"/>
+        <a:font script="Ethi" typeface="Nyala"/>
+        <a:font script="Beng" typeface="Vrinda"/>
+        <a:font script="Gujr" typeface="Shruti"/>
+        <a:font script="Khmr" typeface="MoolBoran"/>
+        <a:font script="Knda" typeface="Tunga"/>
+        <a:font script="Guru" typeface="Raavi"/>
+        <a:font script="Cans" typeface="Euphemia"/>
+        <a:font script="Cher" typeface="Plantagenet Cherokee"/>
+        <a:font script="Yiii" typeface="Microsoft Yi Baiti"/>
+        <a:font script="Tibt" typeface="Microsoft Himalaya"/>
+        <a:font script="Thaa" typeface="MV Boli"/>
+        <a:font script="Deva" typeface="Mangal"/>
+        <a:font script="Telu" typeface="Gautami"/>
+        <a:font script="Taml" typeface="Latha"/>
+        <a:font script="Syrc" typeface="Estrangelo Edessa"/>
+        <a:font script="Orya" typeface="Kalinga"/>
+        <a:font script="Mlym" typeface="Kartika"/>
+        <a:font script="Laoo" typeface="DokChampa"/>
+        <a:font script="Sinh" typeface="Iskoola Pota"/>
+        <a:font script="Mong" typeface="Mongolian Baiti"/>
+        <a:font script="Viet" typeface="Times New Roman"/>
+        <a:font script="Uigh" typeface="Microsoft Uighur"/>
+        <a:font script="Geor" typeface="Sylfaen"/>
+        <a:font script="Armn" typeface="Arial"/>
+        <a:font script="Bugi" typeface="Leelawadee UI"/>
+        <a:font script="Bopo" typeface="Microsoft JhengHei"/>
+        <a:font script="Java" typeface="Javanese Text"/>
+        <a:font script="Lisu" typeface="Segoe UI"/>
+        <a:font script="Mymr" typeface="Myanmar Text"/>
+        <a:font script="Nkoo" typeface="Ebrima"/>
+        <a:font script="Olck" typeface="Nirmala UI"/>
+        <a:font script="Osma" typeface="Ebrima"/>
+        <a:font script="Phag" typeface="Phagspa"/>
+        <a:font script="Syrn" typeface="Estrangelo Edessa"/>
+        <a:font script="Syrj" typeface="Estrangelo Edessa"/>
+        <a:font script="Syre" typeface="Estrangelo Edessa"/>
+        <a:font script="Sora" typeface="Nirmala UI"/>
+        <a:font script="Tale" typeface="Microsoft Tai Le"/>
+        <a:font script="Talu" typeface="Microsoft New Tai Lue"/>
+        <a:font script="Tfng" typeface="Ebrima"/>
+      </a:majorFont>
+      <a:minorFont>
+        <a:latin typeface="Calibri" panose="020F0502020204030204"/>
+        <a:ea typeface=""/>
+        <a:cs typeface=""/>
+        <a:font script="Jpan" typeface="游ゴシック"/>
+        <a:font script="Hang" typeface="맑은 고딕"/>
+        <a:font script="Hans" typeface="等线"/>
+        <a:font script="Hant" typeface="新細明體"/>
+        <a:font script="Arab" typeface="Arial"/>
+        <a:font script="Hebr" typeface="Arial"/>
+        <a:font script="Thai" typeface="Cordia New"/>
+        <a:font script="Ethi" typeface="Nyala"/>
+        <a:font script="Beng" typeface="Vrinda"/>
+        <a:font script="Gujr" typeface="Shruti"/>
+        <a:font script="Khmr" typeface="DaunPenh"/>
+        <a:font script="Knda" typeface="Tunga"/>
+        <a:font script="Guru" typeface="Raavi"/>
+        <a:font script="Cans" typeface="Euphemia"/>
+        <a:font script="Cher" typeface="Plantagenet Cherokee"/>
+        <a:font script="Yiii" typeface="Microsoft Yi Baiti"/>
+        <a:font script="Tibt" typeface="Microsoft Himalaya"/>
+        <a:font script="Thaa" typeface="MV Boli"/>
+        <a:font script="Deva" typeface="Mangal"/>
+        <a:font script="Telu" typeface="Gautami"/>
+        <a:font script="Taml" typeface="Latha"/>
+        <a:font script="Syrc" typeface="Estrangelo Edessa"/>
+        <a:font script="Orya" typeface="Kalinga"/>
+        <a:font script="Mlym" typeface="Kartika"/>
+        <a:font script="Laoo" typeface="DokChampa"/>
+        <a:font script="Sinh" typeface="Iskoola Pota"/>
+        <a:font script="Mong" typeface="Mongolian Baiti"/>
+        <a:font script="Viet" typeface="Arial"/>
+        <a:font script="Uigh" typeface="Microsoft Uighur"/>
+        <a:font script="Geor" typeface="Sylfaen"/>
+        <a:font script="Armn" typeface="Arial"/>
+        <a:font script="Bugi" typeface="Leelawadee UI"/>
+        <a:font script="Bopo" typeface="Microsoft JhengHei"/>
+        <a:font script="Java" typeface="Javanese Text"/>
+        <a:font script="Lisu" typeface="Segoe UI"/>
+        <a:font script="Mymr" typeface="Myanmar Text"/>
+        <a:font script="Nkoo" typeface="Ebrima"/>
+        <a:font script="Olck" typeface="Nirmala UI"/>
+        <a:font script="Osma" typeface="Ebrima"/>
+        <a:font script="Phag" typeface="Phagspa"/>
+        <a:font script="Syrn" typeface="Estrangelo Edessa"/>
+        <a:font script="Syrj" typeface="Estrangelo Edessa"/>
+        <a:font script="Syre" typeface="Estrangelo Edessa"/>
+        <a:font script="Sora" typeface="Nirmala UI"/>
+        <a:font script="Tale" typeface="Microsoft Tai Le"/>
+        <a:font script="Talu" typeface="Microsoft New Tai Lue"/>
+        <a:font script="Tfng" typeface="Ebrima"/>
+      </a:minorFont>
+    </a:fontScheme>
+    <a:fmtScheme name="Office">
+      <a:fillStyleLst>
+        <a:solidFill>
+          <a:schemeClr val="phClr"/>
+        </a:solidFill>
+        <a:gradFill rotWithShape="1">
+          <a:gsLst>
+            <a:gs pos="0">
+              <a:schemeClr val="phClr">
+                <a:lumMod val="110000"/>
+                <a:satMod val="105000"/>
+                <a:tint val="67000"/>
+              </a:schemeClr>
+            </a:gs>
+            <a:gs pos="50000">
+              <a:schemeClr val="phClr">
+                <a:lumMod val="105000"/>
+                <a:satMod val="103000"/>
+                <a:tint val="73000"/>
+              </a:schemeClr>
+            </a:gs>
+            <a:gs pos="100000">
+              <a:schemeClr val="phClr">
+                <a:lumMod val="105000"/>
+                <a:satMod val="109000"/>
+                <a:tint val="81000"/>
+              </a:schemeClr>
+            </a:gs>
+          </a:gsLst>
+          <a:lin ang="5400000" scaled="0"/>
+        </a:gradFill>
+        <a:gradFill rotWithShape="1">
+          <a:gsLst>
+            <a:gs pos="0">
+              <a:schemeClr val="phClr">
+                <a:satMod val="103000"/>
+                <a:lumMod val="102000"/>
+                <a:tint val="94000"/>
+              </a:schemeClr>
+            </a:gs>
+            <a:gs pos="50000">
+              <a:schemeClr val="phClr">
+                <a:satMod val="110000"/>
+                <a:lumMod val="100000"/>
+                <a:shade val="100000"/>
+              </a:schemeClr>
+            </a:gs>
+            <a:gs pos="100000">
+              <a:schemeClr val="phClr">
+                <a:lumMod val="99000"/>
+                <a:satMod val="120000"/>
+                <a:shade val="78000"/>
+              </a:schemeClr>
+            </a:gs>
+          </a:gsLst>
+          <a:lin ang="5400000" scaled="0"/>
+        </a:gradFill>
+      </a:fillStyleLst>
+      <a:lnStyleLst>
+        <a:ln w="6350" cap="flat" cmpd="sng" algn="ctr">
+          <a:solidFill>
+            <a:schemeClr val="phClr"/>
+          </a:solidFill>
+          <a:prstDash val="solid"/>
+          <a:miter lim="800000"/>
+        </a:ln>
+        <a:ln w="12700" cap="flat" cmpd="sng" algn="ctr">
+          <a:solidFill>
+            <a:schemeClr val="phClr"/>
+          </a:solidFill>
+          <a:prstDash val="solid"/>
+          <a:miter lim="800000"/>
+        </a:ln>
+        <a:ln w="19050" cap="flat" cmpd="sng" algn="ctr">
+          <a:solidFill>
+            <a:schemeClr val="phClr"/>
+          </a:solidFill>
+          <a:prstDash val="solid"/>
+          <a:miter lim="800000"/>
+        </a:ln>
+      </a:lnStyleLst>
+      <a:effectStyleLst>
+        <a:effectStyle>
+          <a:effectLst/>
+        </a:effectStyle>
+        <a:effectStyle>
+          <a:effectLst/>
+        </a:effectStyle>
+        <a:effectStyle>
+          <a:effectLst>
+            <a:outerShdw blurRad="57150" dist="19050" dir="5400000" algn="ctr" rotWithShape="0">
+              <a:srgbClr val="000000">
+                <a:alpha val="63000"/>
+              </a:srgbClr>
+            </a:outerShdw>
+          </a:effectLst>
+        </a:effectStyle>
+      </a:effectStyleLst>
+      <a:bgFillStyleLst>
+        <a:solidFill>
+          <a:schemeClr val="phClr"/>
+        </a:solidFill>
+        <a:solidFill>
+          <a:schemeClr val="phClr">
+            <a:tint val="95000"/>
+            <a:satMod val="170000"/>
+          </a:schemeClr>
+        </a:solidFill>
+        <a:gradFill rotWithShape="1">
+          <a:gsLst>
+            <a:gs pos="0">
+              <a:schemeClr val="phClr">
+                <a:tint val="93000"/>
+                <a:satMod val="150000"/>
+                <a:shade val="98000"/>
+                <a:lumMod val="102000"/>
+              </a:schemeClr>
+            </a:gs>
+            <a:gs pos="50000">
+              <a:schemeClr val="phClr">
+                <a:tint val="98000"/>
+                <a:satMod val="130000"/>
+                <a:shade val="90000"/>
+                <a:lumMod val="103000"/>
+              </a:schemeClr>
+            </a:gs>
+            <a:gs pos="100000">
+              <a:schemeClr val="phClr">
+                <a:shade val="63000"/>
+                <a:satMod val="120000"/>
+              </a:schemeClr>
+            </a:gs>
+          </a:gsLst>
+          <a:lin ang="5400000" scaled="0"/>
+        </a:gradFill>
+      </a:bgFillStyleLst>
+    </a:fmtScheme>
+  </a:themeElements>
+  <a:objectDefaults/>
+  <a:extraClrSchemeLst/>
+  <a:extLst>
+    <a:ext uri="{05A4C25C-085E-4340-85A3-A5531E510DB2}">
+      <thm15:themeFamily xmlns:thm15="http://schemas.microsoft.com/office/thememl/2012/main" name="Office Theme" id="{62F939B6-93AF-4DB8-9C6B-D6C7DFDC589F}" vid="{4A3C46E8-61CC-4603-A589-7422A47A8E4A}"/>
+    </a:ext>
+  </a:extLst>
+</a:theme>
 </file>